--- a/Data-ingest/data-ingestion-OVERVIEW.pptx
+++ b/Data-ingest/data-ingestion-OVERVIEW.pptx
@@ -4,6 +4,9 @@
   <p:sldMasterIdLst>
     <p:sldMasterId id="2147483648" r:id="rId1"/>
   </p:sldMasterIdLst>
+  <p:notesMasterIdLst>
+    <p:notesMasterId r:id="rId23"/>
+  </p:notesMasterIdLst>
   <p:sldIdLst>
     <p:sldId id="256" r:id="rId2"/>
     <p:sldId id="257" r:id="rId3"/>
@@ -11,19 +14,21 @@
     <p:sldId id="266" r:id="rId5"/>
     <p:sldId id="259" r:id="rId6"/>
     <p:sldId id="260" r:id="rId7"/>
-    <p:sldId id="261" r:id="rId8"/>
-    <p:sldId id="262" r:id="rId9"/>
-    <p:sldId id="264" r:id="rId10"/>
-    <p:sldId id="265" r:id="rId11"/>
-    <p:sldId id="267" r:id="rId12"/>
-    <p:sldId id="263" r:id="rId13"/>
-    <p:sldId id="268" r:id="rId14"/>
-    <p:sldId id="269" r:id="rId15"/>
-    <p:sldId id="270" r:id="rId16"/>
-    <p:sldId id="271" r:id="rId17"/>
-    <p:sldId id="272" r:id="rId18"/>
-    <p:sldId id="273" r:id="rId19"/>
+    <p:sldId id="275" r:id="rId8"/>
+    <p:sldId id="261" r:id="rId9"/>
+    <p:sldId id="262" r:id="rId10"/>
+    <p:sldId id="264" r:id="rId11"/>
+    <p:sldId id="265" r:id="rId12"/>
+    <p:sldId id="267" r:id="rId13"/>
+    <p:sldId id="263" r:id="rId14"/>
+    <p:sldId id="268" r:id="rId15"/>
+    <p:sldId id="269" r:id="rId16"/>
+    <p:sldId id="270" r:id="rId17"/>
+    <p:sldId id="271" r:id="rId18"/>
+    <p:sldId id="272" r:id="rId19"/>
     <p:sldId id="274" r:id="rId20"/>
+    <p:sldId id="273" r:id="rId21"/>
+    <p:sldId id="276" r:id="rId22"/>
   </p:sldIdLst>
   <p:sldSz cx="12192000" cy="6858000"/>
   <p:notesSz cx="6858000" cy="9144000"/>
@@ -122,6 +127,11 @@
       </a:defRPr>
     </a:lvl9pPr>
   </p:defaultTextStyle>
+  <p:extLst>
+    <p:ext uri="{EFAFB233-063F-42B5-8137-9DF3F51BA10A}">
+      <p15:sldGuideLst xmlns:p15="http://schemas.microsoft.com/office/powerpoint/2012/main"/>
+    </p:ext>
+  </p:extLst>
 </p:presentation>
 </file>
 
@@ -1620,753 +1630,6 @@
 </file>
 
 <file path=ppt/diagrams/colors3.xml><?xml version="1.0" encoding="utf-8"?>
-<dgm:colorsDef xmlns:dgm="http://schemas.openxmlformats.org/drawingml/2006/diagram" xmlns:a="http://schemas.openxmlformats.org/drawingml/2006/main" uniqueId="urn:microsoft.com/office/officeart/2005/8/colors/accent1_2">
-  <dgm:title val=""/>
-  <dgm:desc val=""/>
-  <dgm:catLst>
-    <dgm:cat type="accent1" pri="11200"/>
-  </dgm:catLst>
-  <dgm:styleLbl name="node0">
-    <dgm:fillClrLst meth="repeat">
-      <a:schemeClr val="accent1"/>
-    </dgm:fillClrLst>
-    <dgm:linClrLst meth="repeat">
-      <a:schemeClr val="lt1"/>
-    </dgm:linClrLst>
-    <dgm:effectClrLst/>
-    <dgm:txLinClrLst/>
-    <dgm:txFillClrLst/>
-    <dgm:txEffectClrLst/>
-  </dgm:styleLbl>
-  <dgm:styleLbl name="alignNode1">
-    <dgm:fillClrLst meth="repeat">
-      <a:schemeClr val="accent1"/>
-    </dgm:fillClrLst>
-    <dgm:linClrLst meth="repeat">
-      <a:schemeClr val="accent1"/>
-    </dgm:linClrLst>
-    <dgm:effectClrLst/>
-    <dgm:txLinClrLst/>
-    <dgm:txFillClrLst/>
-    <dgm:txEffectClrLst/>
-  </dgm:styleLbl>
-  <dgm:styleLbl name="node1">
-    <dgm:fillClrLst meth="repeat">
-      <a:schemeClr val="accent1"/>
-    </dgm:fillClrLst>
-    <dgm:linClrLst meth="repeat">
-      <a:schemeClr val="lt1"/>
-    </dgm:linClrLst>
-    <dgm:effectClrLst/>
-    <dgm:txLinClrLst/>
-    <dgm:txFillClrLst/>
-    <dgm:txEffectClrLst/>
-  </dgm:styleLbl>
-  <dgm:styleLbl name="lnNode1">
-    <dgm:fillClrLst meth="repeat">
-      <a:schemeClr val="accent1"/>
-    </dgm:fillClrLst>
-    <dgm:linClrLst meth="repeat">
-      <a:schemeClr val="lt1"/>
-    </dgm:linClrLst>
-    <dgm:effectClrLst/>
-    <dgm:txLinClrLst/>
-    <dgm:txFillClrLst/>
-    <dgm:txEffectClrLst/>
-  </dgm:styleLbl>
-  <dgm:styleLbl name="vennNode1">
-    <dgm:fillClrLst meth="repeat">
-      <a:schemeClr val="accent1">
-        <a:alpha val="50000"/>
-      </a:schemeClr>
-    </dgm:fillClrLst>
-    <dgm:linClrLst meth="repeat">
-      <a:schemeClr val="lt1"/>
-    </dgm:linClrLst>
-    <dgm:effectClrLst/>
-    <dgm:txLinClrLst/>
-    <dgm:txFillClrLst/>
-    <dgm:txEffectClrLst/>
-  </dgm:styleLbl>
-  <dgm:styleLbl name="node2">
-    <dgm:fillClrLst meth="repeat">
-      <a:schemeClr val="accent1"/>
-    </dgm:fillClrLst>
-    <dgm:linClrLst meth="repeat">
-      <a:schemeClr val="lt1"/>
-    </dgm:linClrLst>
-    <dgm:effectClrLst/>
-    <dgm:txLinClrLst/>
-    <dgm:txFillClrLst/>
-    <dgm:txEffectClrLst/>
-  </dgm:styleLbl>
-  <dgm:styleLbl name="node3">
-    <dgm:fillClrLst meth="repeat">
-      <a:schemeClr val="accent1"/>
-    </dgm:fillClrLst>
-    <dgm:linClrLst meth="repeat">
-      <a:schemeClr val="lt1"/>
-    </dgm:linClrLst>
-    <dgm:effectClrLst/>
-    <dgm:txLinClrLst/>
-    <dgm:txFillClrLst/>
-    <dgm:txEffectClrLst/>
-  </dgm:styleLbl>
-  <dgm:styleLbl name="node4">
-    <dgm:fillClrLst meth="repeat">
-      <a:schemeClr val="accent1"/>
-    </dgm:fillClrLst>
-    <dgm:linClrLst meth="repeat">
-      <a:schemeClr val="lt1"/>
-    </dgm:linClrLst>
-    <dgm:effectClrLst/>
-    <dgm:txLinClrLst/>
-    <dgm:txFillClrLst/>
-    <dgm:txEffectClrLst/>
-  </dgm:styleLbl>
-  <dgm:styleLbl name="fgImgPlace1">
-    <dgm:fillClrLst meth="repeat">
-      <a:schemeClr val="accent1">
-        <a:tint val="50000"/>
-      </a:schemeClr>
-    </dgm:fillClrLst>
-    <dgm:linClrLst meth="repeat">
-      <a:schemeClr val="lt1"/>
-    </dgm:linClrLst>
-    <dgm:effectClrLst/>
-    <dgm:txLinClrLst/>
-    <dgm:txFillClrLst meth="repeat">
-      <a:schemeClr val="lt1"/>
-    </dgm:txFillClrLst>
-    <dgm:txEffectClrLst/>
-  </dgm:styleLbl>
-  <dgm:styleLbl name="alignImgPlace1">
-    <dgm:fillClrLst meth="repeat">
-      <a:schemeClr val="accent1">
-        <a:tint val="50000"/>
-      </a:schemeClr>
-    </dgm:fillClrLst>
-    <dgm:linClrLst meth="repeat">
-      <a:schemeClr val="lt1"/>
-    </dgm:linClrLst>
-    <dgm:effectClrLst/>
-    <dgm:txLinClrLst/>
-    <dgm:txFillClrLst meth="repeat">
-      <a:schemeClr val="lt1"/>
-    </dgm:txFillClrLst>
-    <dgm:txEffectClrLst/>
-  </dgm:styleLbl>
-  <dgm:styleLbl name="bgImgPlace1">
-    <dgm:fillClrLst meth="repeat">
-      <a:schemeClr val="accent1">
-        <a:tint val="50000"/>
-      </a:schemeClr>
-    </dgm:fillClrLst>
-    <dgm:linClrLst meth="repeat">
-      <a:schemeClr val="lt1"/>
-    </dgm:linClrLst>
-    <dgm:effectClrLst/>
-    <dgm:txLinClrLst/>
-    <dgm:txFillClrLst meth="repeat">
-      <a:schemeClr val="lt1"/>
-    </dgm:txFillClrLst>
-    <dgm:txEffectClrLst/>
-  </dgm:styleLbl>
-  <dgm:styleLbl name="sibTrans2D1">
-    <dgm:fillClrLst meth="repeat">
-      <a:schemeClr val="accent1">
-        <a:tint val="60000"/>
-      </a:schemeClr>
-    </dgm:fillClrLst>
-    <dgm:linClrLst meth="repeat">
-      <a:schemeClr val="accent1">
-        <a:tint val="60000"/>
-      </a:schemeClr>
-    </dgm:linClrLst>
-    <dgm:effectClrLst/>
-    <dgm:txLinClrLst/>
-    <dgm:txFillClrLst/>
-    <dgm:txEffectClrLst/>
-  </dgm:styleLbl>
-  <dgm:styleLbl name="fgSibTrans2D1">
-    <dgm:fillClrLst meth="repeat">
-      <a:schemeClr val="accent1">
-        <a:tint val="60000"/>
-      </a:schemeClr>
-    </dgm:fillClrLst>
-    <dgm:linClrLst meth="repeat">
-      <a:schemeClr val="accent1">
-        <a:tint val="60000"/>
-      </a:schemeClr>
-    </dgm:linClrLst>
-    <dgm:effectClrLst/>
-    <dgm:txLinClrLst/>
-    <dgm:txFillClrLst/>
-    <dgm:txEffectClrLst/>
-  </dgm:styleLbl>
-  <dgm:styleLbl name="bgSibTrans2D1">
-    <dgm:fillClrLst meth="repeat">
-      <a:schemeClr val="accent1">
-        <a:tint val="60000"/>
-      </a:schemeClr>
-    </dgm:fillClrLst>
-    <dgm:linClrLst meth="repeat">
-      <a:schemeClr val="accent1">
-        <a:tint val="60000"/>
-      </a:schemeClr>
-    </dgm:linClrLst>
-    <dgm:effectClrLst/>
-    <dgm:txLinClrLst/>
-    <dgm:txFillClrLst/>
-    <dgm:txEffectClrLst/>
-  </dgm:styleLbl>
-  <dgm:styleLbl name="sibTrans1D1">
-    <dgm:fillClrLst meth="repeat">
-      <a:schemeClr val="accent1"/>
-    </dgm:fillClrLst>
-    <dgm:linClrLst meth="repeat">
-      <a:schemeClr val="accent1"/>
-    </dgm:linClrLst>
-    <dgm:effectClrLst/>
-    <dgm:txLinClrLst/>
-    <dgm:txFillClrLst meth="repeat">
-      <a:schemeClr val="tx1"/>
-    </dgm:txFillClrLst>
-    <dgm:txEffectClrLst/>
-  </dgm:styleLbl>
-  <dgm:styleLbl name="callout">
-    <dgm:fillClrLst meth="repeat">
-      <a:schemeClr val="accent1"/>
-    </dgm:fillClrLst>
-    <dgm:linClrLst meth="repeat">
-      <a:schemeClr val="accent1">
-        <a:tint val="50000"/>
-      </a:schemeClr>
-    </dgm:linClrLst>
-    <dgm:effectClrLst/>
-    <dgm:txLinClrLst/>
-    <dgm:txFillClrLst meth="repeat">
-      <a:schemeClr val="tx1"/>
-    </dgm:txFillClrLst>
-    <dgm:txEffectClrLst/>
-  </dgm:styleLbl>
-  <dgm:styleLbl name="asst0">
-    <dgm:fillClrLst meth="repeat">
-      <a:schemeClr val="accent1"/>
-    </dgm:fillClrLst>
-    <dgm:linClrLst meth="repeat">
-      <a:schemeClr val="lt1"/>
-    </dgm:linClrLst>
-    <dgm:effectClrLst/>
-    <dgm:txLinClrLst/>
-    <dgm:txFillClrLst/>
-    <dgm:txEffectClrLst/>
-  </dgm:styleLbl>
-  <dgm:styleLbl name="asst1">
-    <dgm:fillClrLst meth="repeat">
-      <a:schemeClr val="accent1"/>
-    </dgm:fillClrLst>
-    <dgm:linClrLst meth="repeat">
-      <a:schemeClr val="lt1"/>
-    </dgm:linClrLst>
-    <dgm:effectClrLst/>
-    <dgm:txLinClrLst/>
-    <dgm:txFillClrLst/>
-    <dgm:txEffectClrLst/>
-  </dgm:styleLbl>
-  <dgm:styleLbl name="asst2">
-    <dgm:fillClrLst meth="repeat">
-      <a:schemeClr val="accent1"/>
-    </dgm:fillClrLst>
-    <dgm:linClrLst meth="repeat">
-      <a:schemeClr val="lt1"/>
-    </dgm:linClrLst>
-    <dgm:effectClrLst/>
-    <dgm:txLinClrLst/>
-    <dgm:txFillClrLst/>
-    <dgm:txEffectClrLst/>
-  </dgm:styleLbl>
-  <dgm:styleLbl name="asst3">
-    <dgm:fillClrLst meth="repeat">
-      <a:schemeClr val="accent1"/>
-    </dgm:fillClrLst>
-    <dgm:linClrLst meth="repeat">
-      <a:schemeClr val="lt1"/>
-    </dgm:linClrLst>
-    <dgm:effectClrLst/>
-    <dgm:txLinClrLst/>
-    <dgm:txFillClrLst/>
-    <dgm:txEffectClrLst/>
-  </dgm:styleLbl>
-  <dgm:styleLbl name="asst4">
-    <dgm:fillClrLst meth="repeat">
-      <a:schemeClr val="accent1"/>
-    </dgm:fillClrLst>
-    <dgm:linClrLst meth="repeat">
-      <a:schemeClr val="lt1"/>
-    </dgm:linClrLst>
-    <dgm:effectClrLst/>
-    <dgm:txLinClrLst/>
-    <dgm:txFillClrLst/>
-    <dgm:txEffectClrLst/>
-  </dgm:styleLbl>
-  <dgm:styleLbl name="parChTrans2D1">
-    <dgm:fillClrLst meth="repeat">
-      <a:schemeClr val="accent1">
-        <a:tint val="60000"/>
-      </a:schemeClr>
-    </dgm:fillClrLst>
-    <dgm:linClrLst meth="repeat">
-      <a:schemeClr val="accent1">
-        <a:tint val="60000"/>
-      </a:schemeClr>
-    </dgm:linClrLst>
-    <dgm:effectClrLst/>
-    <dgm:txLinClrLst/>
-    <dgm:txFillClrLst meth="repeat">
-      <a:schemeClr val="lt1"/>
-    </dgm:txFillClrLst>
-    <dgm:txEffectClrLst/>
-  </dgm:styleLbl>
-  <dgm:styleLbl name="parChTrans2D2">
-    <dgm:fillClrLst meth="repeat">
-      <a:schemeClr val="accent1"/>
-    </dgm:fillClrLst>
-    <dgm:linClrLst meth="repeat">
-      <a:schemeClr val="accent1"/>
-    </dgm:linClrLst>
-    <dgm:effectClrLst/>
-    <dgm:txLinClrLst/>
-    <dgm:txFillClrLst meth="repeat">
-      <a:schemeClr val="lt1"/>
-    </dgm:txFillClrLst>
-    <dgm:txEffectClrLst/>
-  </dgm:styleLbl>
-  <dgm:styleLbl name="parChTrans2D3">
-    <dgm:fillClrLst meth="repeat">
-      <a:schemeClr val="accent1"/>
-    </dgm:fillClrLst>
-    <dgm:linClrLst meth="repeat">
-      <a:schemeClr val="accent1"/>
-    </dgm:linClrLst>
-    <dgm:effectClrLst/>
-    <dgm:txLinClrLst/>
-    <dgm:txFillClrLst meth="repeat">
-      <a:schemeClr val="lt1"/>
-    </dgm:txFillClrLst>
-    <dgm:txEffectClrLst/>
-  </dgm:styleLbl>
-  <dgm:styleLbl name="parChTrans2D4">
-    <dgm:fillClrLst meth="repeat">
-      <a:schemeClr val="accent1"/>
-    </dgm:fillClrLst>
-    <dgm:linClrLst meth="repeat">
-      <a:schemeClr val="accent1"/>
-    </dgm:linClrLst>
-    <dgm:effectClrLst/>
-    <dgm:txLinClrLst/>
-    <dgm:txFillClrLst meth="repeat">
-      <a:schemeClr val="lt1"/>
-    </dgm:txFillClrLst>
-    <dgm:txEffectClrLst/>
-  </dgm:styleLbl>
-  <dgm:styleLbl name="parChTrans1D1">
-    <dgm:fillClrLst meth="repeat">
-      <a:schemeClr val="accent1"/>
-    </dgm:fillClrLst>
-    <dgm:linClrLst meth="repeat">
-      <a:schemeClr val="accent1">
-        <a:shade val="60000"/>
-      </a:schemeClr>
-    </dgm:linClrLst>
-    <dgm:effectClrLst/>
-    <dgm:txLinClrLst/>
-    <dgm:txFillClrLst meth="repeat">
-      <a:schemeClr val="tx1"/>
-    </dgm:txFillClrLst>
-    <dgm:txEffectClrLst/>
-  </dgm:styleLbl>
-  <dgm:styleLbl name="parChTrans1D2">
-    <dgm:fillClrLst meth="repeat">
-      <a:schemeClr val="accent1"/>
-    </dgm:fillClrLst>
-    <dgm:linClrLst meth="repeat">
-      <a:schemeClr val="accent1">
-        <a:shade val="60000"/>
-      </a:schemeClr>
-    </dgm:linClrLst>
-    <dgm:effectClrLst/>
-    <dgm:txLinClrLst/>
-    <dgm:txFillClrLst meth="repeat">
-      <a:schemeClr val="tx1"/>
-    </dgm:txFillClrLst>
-    <dgm:txEffectClrLst/>
-  </dgm:styleLbl>
-  <dgm:styleLbl name="parChTrans1D3">
-    <dgm:fillClrLst meth="repeat">
-      <a:schemeClr val="accent1"/>
-    </dgm:fillClrLst>
-    <dgm:linClrLst meth="repeat">
-      <a:schemeClr val="accent1">
-        <a:shade val="80000"/>
-      </a:schemeClr>
-    </dgm:linClrLst>
-    <dgm:effectClrLst/>
-    <dgm:txLinClrLst/>
-    <dgm:txFillClrLst meth="repeat">
-      <a:schemeClr val="tx1"/>
-    </dgm:txFillClrLst>
-    <dgm:txEffectClrLst/>
-  </dgm:styleLbl>
-  <dgm:styleLbl name="parChTrans1D4">
-    <dgm:fillClrLst meth="repeat">
-      <a:schemeClr val="accent1"/>
-    </dgm:fillClrLst>
-    <dgm:linClrLst meth="repeat">
-      <a:schemeClr val="accent1">
-        <a:shade val="80000"/>
-      </a:schemeClr>
-    </dgm:linClrLst>
-    <dgm:effectClrLst/>
-    <dgm:txLinClrLst/>
-    <dgm:txFillClrLst meth="repeat">
-      <a:schemeClr val="tx1"/>
-    </dgm:txFillClrLst>
-    <dgm:txEffectClrLst/>
-  </dgm:styleLbl>
-  <dgm:styleLbl name="fgAcc1">
-    <dgm:fillClrLst meth="repeat">
-      <a:schemeClr val="lt1">
-        <a:alpha val="90000"/>
-      </a:schemeClr>
-    </dgm:fillClrLst>
-    <dgm:linClrLst meth="repeat">
-      <a:schemeClr val="accent1"/>
-    </dgm:linClrLst>
-    <dgm:effectClrLst/>
-    <dgm:txLinClrLst/>
-    <dgm:txFillClrLst meth="repeat">
-      <a:schemeClr val="dk1"/>
-    </dgm:txFillClrLst>
-    <dgm:txEffectClrLst/>
-  </dgm:styleLbl>
-  <dgm:styleLbl name="conFgAcc1">
-    <dgm:fillClrLst meth="repeat">
-      <a:schemeClr val="lt1">
-        <a:alpha val="90000"/>
-      </a:schemeClr>
-    </dgm:fillClrLst>
-    <dgm:linClrLst meth="repeat">
-      <a:schemeClr val="accent1"/>
-    </dgm:linClrLst>
-    <dgm:effectClrLst/>
-    <dgm:txLinClrLst/>
-    <dgm:txFillClrLst meth="repeat">
-      <a:schemeClr val="dk1"/>
-    </dgm:txFillClrLst>
-    <dgm:txEffectClrLst/>
-  </dgm:styleLbl>
-  <dgm:styleLbl name="alignAcc1">
-    <dgm:fillClrLst meth="repeat">
-      <a:schemeClr val="lt1">
-        <a:alpha val="90000"/>
-      </a:schemeClr>
-    </dgm:fillClrLst>
-    <dgm:linClrLst meth="repeat">
-      <a:schemeClr val="accent1"/>
-    </dgm:linClrLst>
-    <dgm:effectClrLst/>
-    <dgm:txLinClrLst/>
-    <dgm:txFillClrLst meth="repeat">
-      <a:schemeClr val="dk1"/>
-    </dgm:txFillClrLst>
-    <dgm:txEffectClrLst/>
-  </dgm:styleLbl>
-  <dgm:styleLbl name="trAlignAcc1">
-    <dgm:fillClrLst meth="repeat">
-      <a:schemeClr val="lt1">
-        <a:alpha val="40000"/>
-      </a:schemeClr>
-    </dgm:fillClrLst>
-    <dgm:linClrLst meth="repeat">
-      <a:schemeClr val="accent1"/>
-    </dgm:linClrLst>
-    <dgm:effectClrLst/>
-    <dgm:txLinClrLst/>
-    <dgm:txFillClrLst meth="repeat">
-      <a:schemeClr val="dk1"/>
-    </dgm:txFillClrLst>
-    <dgm:txEffectClrLst/>
-  </dgm:styleLbl>
-  <dgm:styleLbl name="bgAcc1">
-    <dgm:fillClrLst meth="repeat">
-      <a:schemeClr val="lt1">
-        <a:alpha val="90000"/>
-      </a:schemeClr>
-    </dgm:fillClrLst>
-    <dgm:linClrLst meth="repeat">
-      <a:schemeClr val="accent1"/>
-    </dgm:linClrLst>
-    <dgm:effectClrLst/>
-    <dgm:txLinClrLst/>
-    <dgm:txFillClrLst meth="repeat">
-      <a:schemeClr val="dk1"/>
-    </dgm:txFillClrLst>
-    <dgm:txEffectClrLst/>
-  </dgm:styleLbl>
-  <dgm:styleLbl name="solidFgAcc1">
-    <dgm:fillClrLst meth="repeat">
-      <a:schemeClr val="lt1"/>
-    </dgm:fillClrLst>
-    <dgm:linClrLst meth="repeat">
-      <a:schemeClr val="accent1"/>
-    </dgm:linClrLst>
-    <dgm:effectClrLst/>
-    <dgm:txLinClrLst/>
-    <dgm:txFillClrLst meth="repeat">
-      <a:schemeClr val="dk1"/>
-    </dgm:txFillClrLst>
-    <dgm:txEffectClrLst/>
-  </dgm:styleLbl>
-  <dgm:styleLbl name="solidAlignAcc1">
-    <dgm:fillClrLst meth="repeat">
-      <a:schemeClr val="lt1"/>
-    </dgm:fillClrLst>
-    <dgm:linClrLst meth="repeat">
-      <a:schemeClr val="accent1"/>
-    </dgm:linClrLst>
-    <dgm:effectClrLst/>
-    <dgm:txLinClrLst/>
-    <dgm:txFillClrLst meth="repeat">
-      <a:schemeClr val="dk1"/>
-    </dgm:txFillClrLst>
-    <dgm:txEffectClrLst/>
-  </dgm:styleLbl>
-  <dgm:styleLbl name="solidBgAcc1">
-    <dgm:fillClrLst meth="repeat">
-      <a:schemeClr val="lt1"/>
-    </dgm:fillClrLst>
-    <dgm:linClrLst meth="repeat">
-      <a:schemeClr val="accent1"/>
-    </dgm:linClrLst>
-    <dgm:effectClrLst/>
-    <dgm:txLinClrLst/>
-    <dgm:txFillClrLst meth="repeat">
-      <a:schemeClr val="dk1"/>
-    </dgm:txFillClrLst>
-    <dgm:txEffectClrLst/>
-  </dgm:styleLbl>
-  <dgm:styleLbl name="fgAccFollowNode1">
-    <dgm:fillClrLst meth="repeat">
-      <a:schemeClr val="accent1">
-        <a:alpha val="90000"/>
-        <a:tint val="40000"/>
-      </a:schemeClr>
-    </dgm:fillClrLst>
-    <dgm:linClrLst meth="repeat">
-      <a:schemeClr val="accent1">
-        <a:alpha val="90000"/>
-        <a:tint val="40000"/>
-      </a:schemeClr>
-    </dgm:linClrLst>
-    <dgm:effectClrLst/>
-    <dgm:txLinClrLst/>
-    <dgm:txFillClrLst meth="repeat">
-      <a:schemeClr val="dk1"/>
-    </dgm:txFillClrLst>
-    <dgm:txEffectClrLst/>
-  </dgm:styleLbl>
-  <dgm:styleLbl name="alignAccFollowNode1">
-    <dgm:fillClrLst meth="repeat">
-      <a:schemeClr val="accent1">
-        <a:alpha val="90000"/>
-        <a:tint val="40000"/>
-      </a:schemeClr>
-    </dgm:fillClrLst>
-    <dgm:linClrLst meth="repeat">
-      <a:schemeClr val="accent1">
-        <a:alpha val="90000"/>
-        <a:tint val="40000"/>
-      </a:schemeClr>
-    </dgm:linClrLst>
-    <dgm:effectClrLst/>
-    <dgm:txLinClrLst/>
-    <dgm:txFillClrLst meth="repeat">
-      <a:schemeClr val="dk1"/>
-    </dgm:txFillClrLst>
-    <dgm:txEffectClrLst/>
-  </dgm:styleLbl>
-  <dgm:styleLbl name="bgAccFollowNode1">
-    <dgm:fillClrLst meth="repeat">
-      <a:schemeClr val="accent1">
-        <a:alpha val="90000"/>
-        <a:tint val="40000"/>
-      </a:schemeClr>
-    </dgm:fillClrLst>
-    <dgm:linClrLst meth="repeat">
-      <a:schemeClr val="accent1">
-        <a:alpha val="90000"/>
-        <a:tint val="40000"/>
-      </a:schemeClr>
-    </dgm:linClrLst>
-    <dgm:effectClrLst/>
-    <dgm:txLinClrLst/>
-    <dgm:txFillClrLst meth="repeat">
-      <a:schemeClr val="dk1"/>
-    </dgm:txFillClrLst>
-    <dgm:txEffectClrLst/>
-  </dgm:styleLbl>
-  <dgm:styleLbl name="fgAcc0">
-    <dgm:fillClrLst meth="repeat">
-      <a:schemeClr val="lt1">
-        <a:alpha val="90000"/>
-      </a:schemeClr>
-    </dgm:fillClrLst>
-    <dgm:linClrLst meth="repeat">
-      <a:schemeClr val="accent1"/>
-    </dgm:linClrLst>
-    <dgm:effectClrLst/>
-    <dgm:txLinClrLst/>
-    <dgm:txFillClrLst meth="repeat">
-      <a:schemeClr val="dk1"/>
-    </dgm:txFillClrLst>
-    <dgm:txEffectClrLst/>
-  </dgm:styleLbl>
-  <dgm:styleLbl name="fgAcc2">
-    <dgm:fillClrLst meth="repeat">
-      <a:schemeClr val="lt1">
-        <a:alpha val="90000"/>
-      </a:schemeClr>
-    </dgm:fillClrLst>
-    <dgm:linClrLst meth="repeat">
-      <a:schemeClr val="accent1"/>
-    </dgm:linClrLst>
-    <dgm:effectClrLst/>
-    <dgm:txLinClrLst/>
-    <dgm:txFillClrLst meth="repeat">
-      <a:schemeClr val="dk1"/>
-    </dgm:txFillClrLst>
-    <dgm:txEffectClrLst/>
-  </dgm:styleLbl>
-  <dgm:styleLbl name="fgAcc3">
-    <dgm:fillClrLst meth="repeat">
-      <a:schemeClr val="lt1">
-        <a:alpha val="90000"/>
-      </a:schemeClr>
-    </dgm:fillClrLst>
-    <dgm:linClrLst meth="repeat">
-      <a:schemeClr val="accent1"/>
-    </dgm:linClrLst>
-    <dgm:effectClrLst/>
-    <dgm:txLinClrLst/>
-    <dgm:txFillClrLst meth="repeat">
-      <a:schemeClr val="dk1"/>
-    </dgm:txFillClrLst>
-    <dgm:txEffectClrLst/>
-  </dgm:styleLbl>
-  <dgm:styleLbl name="fgAcc4">
-    <dgm:fillClrLst meth="repeat">
-      <a:schemeClr val="lt1">
-        <a:alpha val="90000"/>
-      </a:schemeClr>
-    </dgm:fillClrLst>
-    <dgm:linClrLst meth="repeat">
-      <a:schemeClr val="accent1"/>
-    </dgm:linClrLst>
-    <dgm:effectClrLst/>
-    <dgm:txLinClrLst/>
-    <dgm:txFillClrLst meth="repeat">
-      <a:schemeClr val="dk1"/>
-    </dgm:txFillClrLst>
-    <dgm:txEffectClrLst/>
-  </dgm:styleLbl>
-  <dgm:styleLbl name="bgShp">
-    <dgm:fillClrLst meth="repeat">
-      <a:schemeClr val="accent1">
-        <a:tint val="40000"/>
-      </a:schemeClr>
-    </dgm:fillClrLst>
-    <dgm:linClrLst meth="repeat">
-      <a:schemeClr val="accent1"/>
-    </dgm:linClrLst>
-    <dgm:effectClrLst/>
-    <dgm:txLinClrLst/>
-    <dgm:txFillClrLst meth="repeat">
-      <a:schemeClr val="dk1"/>
-    </dgm:txFillClrLst>
-    <dgm:txEffectClrLst/>
-  </dgm:styleLbl>
-  <dgm:styleLbl name="dkBgShp">
-    <dgm:fillClrLst meth="repeat">
-      <a:schemeClr val="accent1">
-        <a:shade val="80000"/>
-      </a:schemeClr>
-    </dgm:fillClrLst>
-    <dgm:linClrLst meth="repeat">
-      <a:schemeClr val="accent1"/>
-    </dgm:linClrLst>
-    <dgm:effectClrLst/>
-    <dgm:txLinClrLst/>
-    <dgm:txFillClrLst meth="repeat">
-      <a:schemeClr val="lt1"/>
-    </dgm:txFillClrLst>
-    <dgm:txEffectClrLst/>
-  </dgm:styleLbl>
-  <dgm:styleLbl name="trBgShp">
-    <dgm:fillClrLst meth="repeat">
-      <a:schemeClr val="accent1">
-        <a:tint val="50000"/>
-        <a:alpha val="40000"/>
-      </a:schemeClr>
-    </dgm:fillClrLst>
-    <dgm:linClrLst meth="repeat">
-      <a:schemeClr val="accent1"/>
-    </dgm:linClrLst>
-    <dgm:effectClrLst/>
-    <dgm:txLinClrLst/>
-    <dgm:txFillClrLst meth="repeat">
-      <a:schemeClr val="lt1"/>
-    </dgm:txFillClrLst>
-    <dgm:txEffectClrLst/>
-  </dgm:styleLbl>
-  <dgm:styleLbl name="fgShp">
-    <dgm:fillClrLst meth="repeat">
-      <a:schemeClr val="accent1">
-        <a:tint val="60000"/>
-      </a:schemeClr>
-    </dgm:fillClrLst>
-    <dgm:linClrLst meth="repeat">
-      <a:schemeClr val="lt1"/>
-    </dgm:linClrLst>
-    <dgm:effectClrLst/>
-    <dgm:txLinClrLst/>
-    <dgm:txFillClrLst meth="repeat">
-      <a:schemeClr val="dk1"/>
-    </dgm:txFillClrLst>
-    <dgm:txEffectClrLst/>
-  </dgm:styleLbl>
-  <dgm:styleLbl name="revTx">
-    <dgm:fillClrLst meth="repeat">
-      <a:schemeClr val="lt1">
-        <a:alpha val="0"/>
-      </a:schemeClr>
-    </dgm:fillClrLst>
-    <dgm:linClrLst meth="repeat">
-      <a:schemeClr val="dk1">
-        <a:alpha val="0"/>
-      </a:schemeClr>
-    </dgm:linClrLst>
-    <dgm:effectClrLst/>
-    <dgm:txLinClrLst/>
-    <dgm:txFillClrLst meth="repeat">
-      <a:schemeClr val="tx1"/>
-    </dgm:txFillClrLst>
-    <dgm:txEffectClrLst/>
-  </dgm:styleLbl>
-</dgm:colorsDef>
-</file>
-
-<file path=ppt/diagrams/colors4.xml><?xml version="1.0" encoding="utf-8"?>
 <dgm:colorsDef xmlns:dgm="http://schemas.openxmlformats.org/drawingml/2006/diagram" xmlns:a="http://schemas.openxmlformats.org/drawingml/2006/main" uniqueId="urn:microsoft.com/office/officeart/2005/8/colors/colorful5">
   <dgm:title val=""/>
   <dgm:desc val=""/>
@@ -3115,6 +2378,753 @@
     <dgm:fillClrLst meth="repeat">
       <a:schemeClr val="accent5">
         <a:tint val="40000"/>
+      </a:schemeClr>
+    </dgm:fillClrLst>
+    <dgm:linClrLst meth="repeat">
+      <a:schemeClr val="lt1"/>
+    </dgm:linClrLst>
+    <dgm:effectClrLst/>
+    <dgm:txLinClrLst/>
+    <dgm:txFillClrLst meth="repeat">
+      <a:schemeClr val="dk1"/>
+    </dgm:txFillClrLst>
+    <dgm:txEffectClrLst/>
+  </dgm:styleLbl>
+  <dgm:styleLbl name="revTx">
+    <dgm:fillClrLst meth="repeat">
+      <a:schemeClr val="lt1">
+        <a:alpha val="0"/>
+      </a:schemeClr>
+    </dgm:fillClrLst>
+    <dgm:linClrLst meth="repeat">
+      <a:schemeClr val="dk1">
+        <a:alpha val="0"/>
+      </a:schemeClr>
+    </dgm:linClrLst>
+    <dgm:effectClrLst/>
+    <dgm:txLinClrLst/>
+    <dgm:txFillClrLst meth="repeat">
+      <a:schemeClr val="tx1"/>
+    </dgm:txFillClrLst>
+    <dgm:txEffectClrLst/>
+  </dgm:styleLbl>
+</dgm:colorsDef>
+</file>
+
+<file path=ppt/diagrams/colors4.xml><?xml version="1.0" encoding="utf-8"?>
+<dgm:colorsDef xmlns:dgm="http://schemas.openxmlformats.org/drawingml/2006/diagram" xmlns:a="http://schemas.openxmlformats.org/drawingml/2006/main" uniqueId="urn:microsoft.com/office/officeart/2005/8/colors/accent1_2">
+  <dgm:title val=""/>
+  <dgm:desc val=""/>
+  <dgm:catLst>
+    <dgm:cat type="accent1" pri="11200"/>
+  </dgm:catLst>
+  <dgm:styleLbl name="node0">
+    <dgm:fillClrLst meth="repeat">
+      <a:schemeClr val="accent1"/>
+    </dgm:fillClrLst>
+    <dgm:linClrLst meth="repeat">
+      <a:schemeClr val="lt1"/>
+    </dgm:linClrLst>
+    <dgm:effectClrLst/>
+    <dgm:txLinClrLst/>
+    <dgm:txFillClrLst/>
+    <dgm:txEffectClrLst/>
+  </dgm:styleLbl>
+  <dgm:styleLbl name="alignNode1">
+    <dgm:fillClrLst meth="repeat">
+      <a:schemeClr val="accent1"/>
+    </dgm:fillClrLst>
+    <dgm:linClrLst meth="repeat">
+      <a:schemeClr val="accent1"/>
+    </dgm:linClrLst>
+    <dgm:effectClrLst/>
+    <dgm:txLinClrLst/>
+    <dgm:txFillClrLst/>
+    <dgm:txEffectClrLst/>
+  </dgm:styleLbl>
+  <dgm:styleLbl name="node1">
+    <dgm:fillClrLst meth="repeat">
+      <a:schemeClr val="accent1"/>
+    </dgm:fillClrLst>
+    <dgm:linClrLst meth="repeat">
+      <a:schemeClr val="lt1"/>
+    </dgm:linClrLst>
+    <dgm:effectClrLst/>
+    <dgm:txLinClrLst/>
+    <dgm:txFillClrLst/>
+    <dgm:txEffectClrLst/>
+  </dgm:styleLbl>
+  <dgm:styleLbl name="lnNode1">
+    <dgm:fillClrLst meth="repeat">
+      <a:schemeClr val="accent1"/>
+    </dgm:fillClrLst>
+    <dgm:linClrLst meth="repeat">
+      <a:schemeClr val="lt1"/>
+    </dgm:linClrLst>
+    <dgm:effectClrLst/>
+    <dgm:txLinClrLst/>
+    <dgm:txFillClrLst/>
+    <dgm:txEffectClrLst/>
+  </dgm:styleLbl>
+  <dgm:styleLbl name="vennNode1">
+    <dgm:fillClrLst meth="repeat">
+      <a:schemeClr val="accent1">
+        <a:alpha val="50000"/>
+      </a:schemeClr>
+    </dgm:fillClrLst>
+    <dgm:linClrLst meth="repeat">
+      <a:schemeClr val="lt1"/>
+    </dgm:linClrLst>
+    <dgm:effectClrLst/>
+    <dgm:txLinClrLst/>
+    <dgm:txFillClrLst/>
+    <dgm:txEffectClrLst/>
+  </dgm:styleLbl>
+  <dgm:styleLbl name="node2">
+    <dgm:fillClrLst meth="repeat">
+      <a:schemeClr val="accent1"/>
+    </dgm:fillClrLst>
+    <dgm:linClrLst meth="repeat">
+      <a:schemeClr val="lt1"/>
+    </dgm:linClrLst>
+    <dgm:effectClrLst/>
+    <dgm:txLinClrLst/>
+    <dgm:txFillClrLst/>
+    <dgm:txEffectClrLst/>
+  </dgm:styleLbl>
+  <dgm:styleLbl name="node3">
+    <dgm:fillClrLst meth="repeat">
+      <a:schemeClr val="accent1"/>
+    </dgm:fillClrLst>
+    <dgm:linClrLst meth="repeat">
+      <a:schemeClr val="lt1"/>
+    </dgm:linClrLst>
+    <dgm:effectClrLst/>
+    <dgm:txLinClrLst/>
+    <dgm:txFillClrLst/>
+    <dgm:txEffectClrLst/>
+  </dgm:styleLbl>
+  <dgm:styleLbl name="node4">
+    <dgm:fillClrLst meth="repeat">
+      <a:schemeClr val="accent1"/>
+    </dgm:fillClrLst>
+    <dgm:linClrLst meth="repeat">
+      <a:schemeClr val="lt1"/>
+    </dgm:linClrLst>
+    <dgm:effectClrLst/>
+    <dgm:txLinClrLst/>
+    <dgm:txFillClrLst/>
+    <dgm:txEffectClrLst/>
+  </dgm:styleLbl>
+  <dgm:styleLbl name="fgImgPlace1">
+    <dgm:fillClrLst meth="repeat">
+      <a:schemeClr val="accent1">
+        <a:tint val="50000"/>
+      </a:schemeClr>
+    </dgm:fillClrLst>
+    <dgm:linClrLst meth="repeat">
+      <a:schemeClr val="lt1"/>
+    </dgm:linClrLst>
+    <dgm:effectClrLst/>
+    <dgm:txLinClrLst/>
+    <dgm:txFillClrLst meth="repeat">
+      <a:schemeClr val="lt1"/>
+    </dgm:txFillClrLst>
+    <dgm:txEffectClrLst/>
+  </dgm:styleLbl>
+  <dgm:styleLbl name="alignImgPlace1">
+    <dgm:fillClrLst meth="repeat">
+      <a:schemeClr val="accent1">
+        <a:tint val="50000"/>
+      </a:schemeClr>
+    </dgm:fillClrLst>
+    <dgm:linClrLst meth="repeat">
+      <a:schemeClr val="lt1"/>
+    </dgm:linClrLst>
+    <dgm:effectClrLst/>
+    <dgm:txLinClrLst/>
+    <dgm:txFillClrLst meth="repeat">
+      <a:schemeClr val="lt1"/>
+    </dgm:txFillClrLst>
+    <dgm:txEffectClrLst/>
+  </dgm:styleLbl>
+  <dgm:styleLbl name="bgImgPlace1">
+    <dgm:fillClrLst meth="repeat">
+      <a:schemeClr val="accent1">
+        <a:tint val="50000"/>
+      </a:schemeClr>
+    </dgm:fillClrLst>
+    <dgm:linClrLst meth="repeat">
+      <a:schemeClr val="lt1"/>
+    </dgm:linClrLst>
+    <dgm:effectClrLst/>
+    <dgm:txLinClrLst/>
+    <dgm:txFillClrLst meth="repeat">
+      <a:schemeClr val="lt1"/>
+    </dgm:txFillClrLst>
+    <dgm:txEffectClrLst/>
+  </dgm:styleLbl>
+  <dgm:styleLbl name="sibTrans2D1">
+    <dgm:fillClrLst meth="repeat">
+      <a:schemeClr val="accent1">
+        <a:tint val="60000"/>
+      </a:schemeClr>
+    </dgm:fillClrLst>
+    <dgm:linClrLst meth="repeat">
+      <a:schemeClr val="accent1">
+        <a:tint val="60000"/>
+      </a:schemeClr>
+    </dgm:linClrLst>
+    <dgm:effectClrLst/>
+    <dgm:txLinClrLst/>
+    <dgm:txFillClrLst/>
+    <dgm:txEffectClrLst/>
+  </dgm:styleLbl>
+  <dgm:styleLbl name="fgSibTrans2D1">
+    <dgm:fillClrLst meth="repeat">
+      <a:schemeClr val="accent1">
+        <a:tint val="60000"/>
+      </a:schemeClr>
+    </dgm:fillClrLst>
+    <dgm:linClrLst meth="repeat">
+      <a:schemeClr val="accent1">
+        <a:tint val="60000"/>
+      </a:schemeClr>
+    </dgm:linClrLst>
+    <dgm:effectClrLst/>
+    <dgm:txLinClrLst/>
+    <dgm:txFillClrLst/>
+    <dgm:txEffectClrLst/>
+  </dgm:styleLbl>
+  <dgm:styleLbl name="bgSibTrans2D1">
+    <dgm:fillClrLst meth="repeat">
+      <a:schemeClr val="accent1">
+        <a:tint val="60000"/>
+      </a:schemeClr>
+    </dgm:fillClrLst>
+    <dgm:linClrLst meth="repeat">
+      <a:schemeClr val="accent1">
+        <a:tint val="60000"/>
+      </a:schemeClr>
+    </dgm:linClrLst>
+    <dgm:effectClrLst/>
+    <dgm:txLinClrLst/>
+    <dgm:txFillClrLst/>
+    <dgm:txEffectClrLst/>
+  </dgm:styleLbl>
+  <dgm:styleLbl name="sibTrans1D1">
+    <dgm:fillClrLst meth="repeat">
+      <a:schemeClr val="accent1"/>
+    </dgm:fillClrLst>
+    <dgm:linClrLst meth="repeat">
+      <a:schemeClr val="accent1"/>
+    </dgm:linClrLst>
+    <dgm:effectClrLst/>
+    <dgm:txLinClrLst/>
+    <dgm:txFillClrLst meth="repeat">
+      <a:schemeClr val="tx1"/>
+    </dgm:txFillClrLst>
+    <dgm:txEffectClrLst/>
+  </dgm:styleLbl>
+  <dgm:styleLbl name="callout">
+    <dgm:fillClrLst meth="repeat">
+      <a:schemeClr val="accent1"/>
+    </dgm:fillClrLst>
+    <dgm:linClrLst meth="repeat">
+      <a:schemeClr val="accent1">
+        <a:tint val="50000"/>
+      </a:schemeClr>
+    </dgm:linClrLst>
+    <dgm:effectClrLst/>
+    <dgm:txLinClrLst/>
+    <dgm:txFillClrLst meth="repeat">
+      <a:schemeClr val="tx1"/>
+    </dgm:txFillClrLst>
+    <dgm:txEffectClrLst/>
+  </dgm:styleLbl>
+  <dgm:styleLbl name="asst0">
+    <dgm:fillClrLst meth="repeat">
+      <a:schemeClr val="accent1"/>
+    </dgm:fillClrLst>
+    <dgm:linClrLst meth="repeat">
+      <a:schemeClr val="lt1"/>
+    </dgm:linClrLst>
+    <dgm:effectClrLst/>
+    <dgm:txLinClrLst/>
+    <dgm:txFillClrLst/>
+    <dgm:txEffectClrLst/>
+  </dgm:styleLbl>
+  <dgm:styleLbl name="asst1">
+    <dgm:fillClrLst meth="repeat">
+      <a:schemeClr val="accent1"/>
+    </dgm:fillClrLst>
+    <dgm:linClrLst meth="repeat">
+      <a:schemeClr val="lt1"/>
+    </dgm:linClrLst>
+    <dgm:effectClrLst/>
+    <dgm:txLinClrLst/>
+    <dgm:txFillClrLst/>
+    <dgm:txEffectClrLst/>
+  </dgm:styleLbl>
+  <dgm:styleLbl name="asst2">
+    <dgm:fillClrLst meth="repeat">
+      <a:schemeClr val="accent1"/>
+    </dgm:fillClrLst>
+    <dgm:linClrLst meth="repeat">
+      <a:schemeClr val="lt1"/>
+    </dgm:linClrLst>
+    <dgm:effectClrLst/>
+    <dgm:txLinClrLst/>
+    <dgm:txFillClrLst/>
+    <dgm:txEffectClrLst/>
+  </dgm:styleLbl>
+  <dgm:styleLbl name="asst3">
+    <dgm:fillClrLst meth="repeat">
+      <a:schemeClr val="accent1"/>
+    </dgm:fillClrLst>
+    <dgm:linClrLst meth="repeat">
+      <a:schemeClr val="lt1"/>
+    </dgm:linClrLst>
+    <dgm:effectClrLst/>
+    <dgm:txLinClrLst/>
+    <dgm:txFillClrLst/>
+    <dgm:txEffectClrLst/>
+  </dgm:styleLbl>
+  <dgm:styleLbl name="asst4">
+    <dgm:fillClrLst meth="repeat">
+      <a:schemeClr val="accent1"/>
+    </dgm:fillClrLst>
+    <dgm:linClrLst meth="repeat">
+      <a:schemeClr val="lt1"/>
+    </dgm:linClrLst>
+    <dgm:effectClrLst/>
+    <dgm:txLinClrLst/>
+    <dgm:txFillClrLst/>
+    <dgm:txEffectClrLst/>
+  </dgm:styleLbl>
+  <dgm:styleLbl name="parChTrans2D1">
+    <dgm:fillClrLst meth="repeat">
+      <a:schemeClr val="accent1">
+        <a:tint val="60000"/>
+      </a:schemeClr>
+    </dgm:fillClrLst>
+    <dgm:linClrLst meth="repeat">
+      <a:schemeClr val="accent1">
+        <a:tint val="60000"/>
+      </a:schemeClr>
+    </dgm:linClrLst>
+    <dgm:effectClrLst/>
+    <dgm:txLinClrLst/>
+    <dgm:txFillClrLst meth="repeat">
+      <a:schemeClr val="lt1"/>
+    </dgm:txFillClrLst>
+    <dgm:txEffectClrLst/>
+  </dgm:styleLbl>
+  <dgm:styleLbl name="parChTrans2D2">
+    <dgm:fillClrLst meth="repeat">
+      <a:schemeClr val="accent1"/>
+    </dgm:fillClrLst>
+    <dgm:linClrLst meth="repeat">
+      <a:schemeClr val="accent1"/>
+    </dgm:linClrLst>
+    <dgm:effectClrLst/>
+    <dgm:txLinClrLst/>
+    <dgm:txFillClrLst meth="repeat">
+      <a:schemeClr val="lt1"/>
+    </dgm:txFillClrLst>
+    <dgm:txEffectClrLst/>
+  </dgm:styleLbl>
+  <dgm:styleLbl name="parChTrans2D3">
+    <dgm:fillClrLst meth="repeat">
+      <a:schemeClr val="accent1"/>
+    </dgm:fillClrLst>
+    <dgm:linClrLst meth="repeat">
+      <a:schemeClr val="accent1"/>
+    </dgm:linClrLst>
+    <dgm:effectClrLst/>
+    <dgm:txLinClrLst/>
+    <dgm:txFillClrLst meth="repeat">
+      <a:schemeClr val="lt1"/>
+    </dgm:txFillClrLst>
+    <dgm:txEffectClrLst/>
+  </dgm:styleLbl>
+  <dgm:styleLbl name="parChTrans2D4">
+    <dgm:fillClrLst meth="repeat">
+      <a:schemeClr val="accent1"/>
+    </dgm:fillClrLst>
+    <dgm:linClrLst meth="repeat">
+      <a:schemeClr val="accent1"/>
+    </dgm:linClrLst>
+    <dgm:effectClrLst/>
+    <dgm:txLinClrLst/>
+    <dgm:txFillClrLst meth="repeat">
+      <a:schemeClr val="lt1"/>
+    </dgm:txFillClrLst>
+    <dgm:txEffectClrLst/>
+  </dgm:styleLbl>
+  <dgm:styleLbl name="parChTrans1D1">
+    <dgm:fillClrLst meth="repeat">
+      <a:schemeClr val="accent1"/>
+    </dgm:fillClrLst>
+    <dgm:linClrLst meth="repeat">
+      <a:schemeClr val="accent1">
+        <a:shade val="60000"/>
+      </a:schemeClr>
+    </dgm:linClrLst>
+    <dgm:effectClrLst/>
+    <dgm:txLinClrLst/>
+    <dgm:txFillClrLst meth="repeat">
+      <a:schemeClr val="tx1"/>
+    </dgm:txFillClrLst>
+    <dgm:txEffectClrLst/>
+  </dgm:styleLbl>
+  <dgm:styleLbl name="parChTrans1D2">
+    <dgm:fillClrLst meth="repeat">
+      <a:schemeClr val="accent1"/>
+    </dgm:fillClrLst>
+    <dgm:linClrLst meth="repeat">
+      <a:schemeClr val="accent1">
+        <a:shade val="60000"/>
+      </a:schemeClr>
+    </dgm:linClrLst>
+    <dgm:effectClrLst/>
+    <dgm:txLinClrLst/>
+    <dgm:txFillClrLst meth="repeat">
+      <a:schemeClr val="tx1"/>
+    </dgm:txFillClrLst>
+    <dgm:txEffectClrLst/>
+  </dgm:styleLbl>
+  <dgm:styleLbl name="parChTrans1D3">
+    <dgm:fillClrLst meth="repeat">
+      <a:schemeClr val="accent1"/>
+    </dgm:fillClrLst>
+    <dgm:linClrLst meth="repeat">
+      <a:schemeClr val="accent1">
+        <a:shade val="80000"/>
+      </a:schemeClr>
+    </dgm:linClrLst>
+    <dgm:effectClrLst/>
+    <dgm:txLinClrLst/>
+    <dgm:txFillClrLst meth="repeat">
+      <a:schemeClr val="tx1"/>
+    </dgm:txFillClrLst>
+    <dgm:txEffectClrLst/>
+  </dgm:styleLbl>
+  <dgm:styleLbl name="parChTrans1D4">
+    <dgm:fillClrLst meth="repeat">
+      <a:schemeClr val="accent1"/>
+    </dgm:fillClrLst>
+    <dgm:linClrLst meth="repeat">
+      <a:schemeClr val="accent1">
+        <a:shade val="80000"/>
+      </a:schemeClr>
+    </dgm:linClrLst>
+    <dgm:effectClrLst/>
+    <dgm:txLinClrLst/>
+    <dgm:txFillClrLst meth="repeat">
+      <a:schemeClr val="tx1"/>
+    </dgm:txFillClrLst>
+    <dgm:txEffectClrLst/>
+  </dgm:styleLbl>
+  <dgm:styleLbl name="fgAcc1">
+    <dgm:fillClrLst meth="repeat">
+      <a:schemeClr val="lt1">
+        <a:alpha val="90000"/>
+      </a:schemeClr>
+    </dgm:fillClrLst>
+    <dgm:linClrLst meth="repeat">
+      <a:schemeClr val="accent1"/>
+    </dgm:linClrLst>
+    <dgm:effectClrLst/>
+    <dgm:txLinClrLst/>
+    <dgm:txFillClrLst meth="repeat">
+      <a:schemeClr val="dk1"/>
+    </dgm:txFillClrLst>
+    <dgm:txEffectClrLst/>
+  </dgm:styleLbl>
+  <dgm:styleLbl name="conFgAcc1">
+    <dgm:fillClrLst meth="repeat">
+      <a:schemeClr val="lt1">
+        <a:alpha val="90000"/>
+      </a:schemeClr>
+    </dgm:fillClrLst>
+    <dgm:linClrLst meth="repeat">
+      <a:schemeClr val="accent1"/>
+    </dgm:linClrLst>
+    <dgm:effectClrLst/>
+    <dgm:txLinClrLst/>
+    <dgm:txFillClrLst meth="repeat">
+      <a:schemeClr val="dk1"/>
+    </dgm:txFillClrLst>
+    <dgm:txEffectClrLst/>
+  </dgm:styleLbl>
+  <dgm:styleLbl name="alignAcc1">
+    <dgm:fillClrLst meth="repeat">
+      <a:schemeClr val="lt1">
+        <a:alpha val="90000"/>
+      </a:schemeClr>
+    </dgm:fillClrLst>
+    <dgm:linClrLst meth="repeat">
+      <a:schemeClr val="accent1"/>
+    </dgm:linClrLst>
+    <dgm:effectClrLst/>
+    <dgm:txLinClrLst/>
+    <dgm:txFillClrLst meth="repeat">
+      <a:schemeClr val="dk1"/>
+    </dgm:txFillClrLst>
+    <dgm:txEffectClrLst/>
+  </dgm:styleLbl>
+  <dgm:styleLbl name="trAlignAcc1">
+    <dgm:fillClrLst meth="repeat">
+      <a:schemeClr val="lt1">
+        <a:alpha val="40000"/>
+      </a:schemeClr>
+    </dgm:fillClrLst>
+    <dgm:linClrLst meth="repeat">
+      <a:schemeClr val="accent1"/>
+    </dgm:linClrLst>
+    <dgm:effectClrLst/>
+    <dgm:txLinClrLst/>
+    <dgm:txFillClrLst meth="repeat">
+      <a:schemeClr val="dk1"/>
+    </dgm:txFillClrLst>
+    <dgm:txEffectClrLst/>
+  </dgm:styleLbl>
+  <dgm:styleLbl name="bgAcc1">
+    <dgm:fillClrLst meth="repeat">
+      <a:schemeClr val="lt1">
+        <a:alpha val="90000"/>
+      </a:schemeClr>
+    </dgm:fillClrLst>
+    <dgm:linClrLst meth="repeat">
+      <a:schemeClr val="accent1"/>
+    </dgm:linClrLst>
+    <dgm:effectClrLst/>
+    <dgm:txLinClrLst/>
+    <dgm:txFillClrLst meth="repeat">
+      <a:schemeClr val="dk1"/>
+    </dgm:txFillClrLst>
+    <dgm:txEffectClrLst/>
+  </dgm:styleLbl>
+  <dgm:styleLbl name="solidFgAcc1">
+    <dgm:fillClrLst meth="repeat">
+      <a:schemeClr val="lt1"/>
+    </dgm:fillClrLst>
+    <dgm:linClrLst meth="repeat">
+      <a:schemeClr val="accent1"/>
+    </dgm:linClrLst>
+    <dgm:effectClrLst/>
+    <dgm:txLinClrLst/>
+    <dgm:txFillClrLst meth="repeat">
+      <a:schemeClr val="dk1"/>
+    </dgm:txFillClrLst>
+    <dgm:txEffectClrLst/>
+  </dgm:styleLbl>
+  <dgm:styleLbl name="solidAlignAcc1">
+    <dgm:fillClrLst meth="repeat">
+      <a:schemeClr val="lt1"/>
+    </dgm:fillClrLst>
+    <dgm:linClrLst meth="repeat">
+      <a:schemeClr val="accent1"/>
+    </dgm:linClrLst>
+    <dgm:effectClrLst/>
+    <dgm:txLinClrLst/>
+    <dgm:txFillClrLst meth="repeat">
+      <a:schemeClr val="dk1"/>
+    </dgm:txFillClrLst>
+    <dgm:txEffectClrLst/>
+  </dgm:styleLbl>
+  <dgm:styleLbl name="solidBgAcc1">
+    <dgm:fillClrLst meth="repeat">
+      <a:schemeClr val="lt1"/>
+    </dgm:fillClrLst>
+    <dgm:linClrLst meth="repeat">
+      <a:schemeClr val="accent1"/>
+    </dgm:linClrLst>
+    <dgm:effectClrLst/>
+    <dgm:txLinClrLst/>
+    <dgm:txFillClrLst meth="repeat">
+      <a:schemeClr val="dk1"/>
+    </dgm:txFillClrLst>
+    <dgm:txEffectClrLst/>
+  </dgm:styleLbl>
+  <dgm:styleLbl name="fgAccFollowNode1">
+    <dgm:fillClrLst meth="repeat">
+      <a:schemeClr val="accent1">
+        <a:alpha val="90000"/>
+        <a:tint val="40000"/>
+      </a:schemeClr>
+    </dgm:fillClrLst>
+    <dgm:linClrLst meth="repeat">
+      <a:schemeClr val="accent1">
+        <a:alpha val="90000"/>
+        <a:tint val="40000"/>
+      </a:schemeClr>
+    </dgm:linClrLst>
+    <dgm:effectClrLst/>
+    <dgm:txLinClrLst/>
+    <dgm:txFillClrLst meth="repeat">
+      <a:schemeClr val="dk1"/>
+    </dgm:txFillClrLst>
+    <dgm:txEffectClrLst/>
+  </dgm:styleLbl>
+  <dgm:styleLbl name="alignAccFollowNode1">
+    <dgm:fillClrLst meth="repeat">
+      <a:schemeClr val="accent1">
+        <a:alpha val="90000"/>
+        <a:tint val="40000"/>
+      </a:schemeClr>
+    </dgm:fillClrLst>
+    <dgm:linClrLst meth="repeat">
+      <a:schemeClr val="accent1">
+        <a:alpha val="90000"/>
+        <a:tint val="40000"/>
+      </a:schemeClr>
+    </dgm:linClrLst>
+    <dgm:effectClrLst/>
+    <dgm:txLinClrLst/>
+    <dgm:txFillClrLst meth="repeat">
+      <a:schemeClr val="dk1"/>
+    </dgm:txFillClrLst>
+    <dgm:txEffectClrLst/>
+  </dgm:styleLbl>
+  <dgm:styleLbl name="bgAccFollowNode1">
+    <dgm:fillClrLst meth="repeat">
+      <a:schemeClr val="accent1">
+        <a:alpha val="90000"/>
+        <a:tint val="40000"/>
+      </a:schemeClr>
+    </dgm:fillClrLst>
+    <dgm:linClrLst meth="repeat">
+      <a:schemeClr val="accent1">
+        <a:alpha val="90000"/>
+        <a:tint val="40000"/>
+      </a:schemeClr>
+    </dgm:linClrLst>
+    <dgm:effectClrLst/>
+    <dgm:txLinClrLst/>
+    <dgm:txFillClrLst meth="repeat">
+      <a:schemeClr val="dk1"/>
+    </dgm:txFillClrLst>
+    <dgm:txEffectClrLst/>
+  </dgm:styleLbl>
+  <dgm:styleLbl name="fgAcc0">
+    <dgm:fillClrLst meth="repeat">
+      <a:schemeClr val="lt1">
+        <a:alpha val="90000"/>
+      </a:schemeClr>
+    </dgm:fillClrLst>
+    <dgm:linClrLst meth="repeat">
+      <a:schemeClr val="accent1"/>
+    </dgm:linClrLst>
+    <dgm:effectClrLst/>
+    <dgm:txLinClrLst/>
+    <dgm:txFillClrLst meth="repeat">
+      <a:schemeClr val="dk1"/>
+    </dgm:txFillClrLst>
+    <dgm:txEffectClrLst/>
+  </dgm:styleLbl>
+  <dgm:styleLbl name="fgAcc2">
+    <dgm:fillClrLst meth="repeat">
+      <a:schemeClr val="lt1">
+        <a:alpha val="90000"/>
+      </a:schemeClr>
+    </dgm:fillClrLst>
+    <dgm:linClrLst meth="repeat">
+      <a:schemeClr val="accent1"/>
+    </dgm:linClrLst>
+    <dgm:effectClrLst/>
+    <dgm:txLinClrLst/>
+    <dgm:txFillClrLst meth="repeat">
+      <a:schemeClr val="dk1"/>
+    </dgm:txFillClrLst>
+    <dgm:txEffectClrLst/>
+  </dgm:styleLbl>
+  <dgm:styleLbl name="fgAcc3">
+    <dgm:fillClrLst meth="repeat">
+      <a:schemeClr val="lt1">
+        <a:alpha val="90000"/>
+      </a:schemeClr>
+    </dgm:fillClrLst>
+    <dgm:linClrLst meth="repeat">
+      <a:schemeClr val="accent1"/>
+    </dgm:linClrLst>
+    <dgm:effectClrLst/>
+    <dgm:txLinClrLst/>
+    <dgm:txFillClrLst meth="repeat">
+      <a:schemeClr val="dk1"/>
+    </dgm:txFillClrLst>
+    <dgm:txEffectClrLst/>
+  </dgm:styleLbl>
+  <dgm:styleLbl name="fgAcc4">
+    <dgm:fillClrLst meth="repeat">
+      <a:schemeClr val="lt1">
+        <a:alpha val="90000"/>
+      </a:schemeClr>
+    </dgm:fillClrLst>
+    <dgm:linClrLst meth="repeat">
+      <a:schemeClr val="accent1"/>
+    </dgm:linClrLst>
+    <dgm:effectClrLst/>
+    <dgm:txLinClrLst/>
+    <dgm:txFillClrLst meth="repeat">
+      <a:schemeClr val="dk1"/>
+    </dgm:txFillClrLst>
+    <dgm:txEffectClrLst/>
+  </dgm:styleLbl>
+  <dgm:styleLbl name="bgShp">
+    <dgm:fillClrLst meth="repeat">
+      <a:schemeClr val="accent1">
+        <a:tint val="40000"/>
+      </a:schemeClr>
+    </dgm:fillClrLst>
+    <dgm:linClrLst meth="repeat">
+      <a:schemeClr val="accent1"/>
+    </dgm:linClrLst>
+    <dgm:effectClrLst/>
+    <dgm:txLinClrLst/>
+    <dgm:txFillClrLst meth="repeat">
+      <a:schemeClr val="dk1"/>
+    </dgm:txFillClrLst>
+    <dgm:txEffectClrLst/>
+  </dgm:styleLbl>
+  <dgm:styleLbl name="dkBgShp">
+    <dgm:fillClrLst meth="repeat">
+      <a:schemeClr val="accent1">
+        <a:shade val="80000"/>
+      </a:schemeClr>
+    </dgm:fillClrLst>
+    <dgm:linClrLst meth="repeat">
+      <a:schemeClr val="accent1"/>
+    </dgm:linClrLst>
+    <dgm:effectClrLst/>
+    <dgm:txLinClrLst/>
+    <dgm:txFillClrLst meth="repeat">
+      <a:schemeClr val="lt1"/>
+    </dgm:txFillClrLst>
+    <dgm:txEffectClrLst/>
+  </dgm:styleLbl>
+  <dgm:styleLbl name="trBgShp">
+    <dgm:fillClrLst meth="repeat">
+      <a:schemeClr val="accent1">
+        <a:tint val="50000"/>
+        <a:alpha val="40000"/>
+      </a:schemeClr>
+    </dgm:fillClrLst>
+    <dgm:linClrLst meth="repeat">
+      <a:schemeClr val="accent1"/>
+    </dgm:linClrLst>
+    <dgm:effectClrLst/>
+    <dgm:txLinClrLst/>
+    <dgm:txFillClrLst meth="repeat">
+      <a:schemeClr val="lt1"/>
+    </dgm:txFillClrLst>
+    <dgm:txEffectClrLst/>
+  </dgm:styleLbl>
+  <dgm:styleLbl name="fgShp">
+    <dgm:fillClrLst meth="repeat">
+      <a:schemeClr val="accent1">
+        <a:tint val="60000"/>
       </a:schemeClr>
     </dgm:fillClrLst>
     <dgm:linClrLst meth="repeat">
@@ -4314,227 +4324,6 @@
 <dgm:dataModel xmlns:dgm="http://schemas.openxmlformats.org/drawingml/2006/diagram" xmlns:a="http://schemas.openxmlformats.org/drawingml/2006/main">
   <dgm:ptLst>
     <dgm:pt modelId="{774BABEB-39D0-5842-A995-002DD80AB169}" type="doc">
-      <dgm:prSet loTypeId="urn:microsoft.com/office/officeart/2005/8/layout/process1" loCatId="" qsTypeId="urn:microsoft.com/office/officeart/2005/8/quickstyle/simple1" qsCatId="simple" csTypeId="urn:microsoft.com/office/officeart/2005/8/colors/accent1_2" csCatId="accent1" phldr="1"/>
-      <dgm:spPr/>
-    </dgm:pt>
-    <dgm:pt modelId="{F63BB3FE-229E-3A44-B5CF-2FED3A8C27FC}">
-      <dgm:prSet phldrT="[Text]"/>
-      <dgm:spPr/>
-      <dgm:t>
-        <a:bodyPr/>
-        <a:lstStyle/>
-        <a:p>
-          <a:r>
-            <a:rPr lang="en-US" dirty="0"/>
-            <a:t>Step 1: </a:t>
-          </a:r>
-        </a:p>
-        <a:p>
-          <a:r>
-            <a:rPr lang="en-US" dirty="0"/>
-            <a:t>Create </a:t>
-          </a:r>
-          <a:r>
-            <a:rPr lang="en-US" dirty="0" err="1"/>
-            <a:t>json</a:t>
-          </a:r>
-          <a:r>
-            <a:rPr lang="en-US" dirty="0"/>
-            <a:t> config for ingestion</a:t>
-          </a:r>
-        </a:p>
-      </dgm:t>
-    </dgm:pt>
-    <dgm:pt modelId="{3950D63A-60D9-7949-83D2-00F1B3BA007E}" type="parTrans" cxnId="{8E513D0D-6DD8-CC4D-BF18-4A1586DB5131}">
-      <dgm:prSet/>
-      <dgm:spPr/>
-      <dgm:t>
-        <a:bodyPr/>
-        <a:lstStyle/>
-        <a:p>
-          <a:endParaRPr lang="en-US"/>
-        </a:p>
-      </dgm:t>
-    </dgm:pt>
-    <dgm:pt modelId="{3C2C153C-C89B-C04A-BD50-2F7D01976AC6}" type="sibTrans" cxnId="{8E513D0D-6DD8-CC4D-BF18-4A1586DB5131}">
-      <dgm:prSet/>
-      <dgm:spPr/>
-      <dgm:t>
-        <a:bodyPr/>
-        <a:lstStyle/>
-        <a:p>
-          <a:endParaRPr lang="en-US"/>
-        </a:p>
-      </dgm:t>
-    </dgm:pt>
-    <dgm:pt modelId="{797719B3-D81C-4C45-AEB8-A3090DAA84FA}">
-      <dgm:prSet phldrT="[Text]"/>
-      <dgm:spPr/>
-      <dgm:t>
-        <a:bodyPr/>
-        <a:lstStyle/>
-        <a:p>
-          <a:r>
-            <a:rPr lang="en-US" dirty="0"/>
-            <a:t>Step 2:</a:t>
-          </a:r>
-        </a:p>
-        <a:p>
-          <a:r>
-            <a:rPr lang="en-US" dirty="0"/>
-            <a:t>Ingest through Airflow or Ingest API</a:t>
-          </a:r>
-        </a:p>
-      </dgm:t>
-    </dgm:pt>
-    <dgm:pt modelId="{13A75B88-07A5-A14C-B2F3-E4E24C08EAF3}" type="parTrans" cxnId="{969F881B-8B90-1E44-AB23-554CB7274406}">
-      <dgm:prSet/>
-      <dgm:spPr/>
-      <dgm:t>
-        <a:bodyPr/>
-        <a:lstStyle/>
-        <a:p>
-          <a:endParaRPr lang="en-US"/>
-        </a:p>
-      </dgm:t>
-    </dgm:pt>
-    <dgm:pt modelId="{F73CDC64-B58C-F14D-873D-69C77BE22D09}" type="sibTrans" cxnId="{969F881B-8B90-1E44-AB23-554CB7274406}">
-      <dgm:prSet/>
-      <dgm:spPr/>
-      <dgm:t>
-        <a:bodyPr/>
-        <a:lstStyle/>
-        <a:p>
-          <a:endParaRPr lang="en-US"/>
-        </a:p>
-      </dgm:t>
-    </dgm:pt>
-    <dgm:pt modelId="{DCCB40E2-BC9F-524F-93E2-C33114B4EE8D}">
-      <dgm:prSet phldrT="[Text]"/>
-      <dgm:spPr/>
-      <dgm:t>
-        <a:bodyPr/>
-        <a:lstStyle/>
-        <a:p>
-          <a:r>
-            <a:rPr lang="en-US" dirty="0"/>
-            <a:t>Step 3:</a:t>
-          </a:r>
-        </a:p>
-        <a:p>
-          <a:r>
-            <a:rPr lang="en-US" dirty="0"/>
-            <a:t>Create a markdown page and check if it will visualize</a:t>
-          </a:r>
-        </a:p>
-      </dgm:t>
-    </dgm:pt>
-    <dgm:pt modelId="{369B379E-7FEC-1142-B880-A9CC509CE14A}" type="parTrans" cxnId="{A3C31FFC-110D-2940-A9A7-1F58EB3BFFAC}">
-      <dgm:prSet/>
-      <dgm:spPr/>
-      <dgm:t>
-        <a:bodyPr/>
-        <a:lstStyle/>
-        <a:p>
-          <a:endParaRPr lang="en-US"/>
-        </a:p>
-      </dgm:t>
-    </dgm:pt>
-    <dgm:pt modelId="{B84CAEF1-D5AA-324C-93C4-4016BCC1EC8F}" type="sibTrans" cxnId="{A3C31FFC-110D-2940-A9A7-1F58EB3BFFAC}">
-      <dgm:prSet/>
-      <dgm:spPr/>
-      <dgm:t>
-        <a:bodyPr/>
-        <a:lstStyle/>
-        <a:p>
-          <a:endParaRPr lang="en-US"/>
-        </a:p>
-      </dgm:t>
-    </dgm:pt>
-    <dgm:pt modelId="{9FF54158-708B-E544-AE48-0FDDFE1EC42E}" type="pres">
-      <dgm:prSet presAssocID="{774BABEB-39D0-5842-A995-002DD80AB169}" presName="Name0" presStyleCnt="0">
-        <dgm:presLayoutVars>
-          <dgm:dir/>
-          <dgm:resizeHandles val="exact"/>
-        </dgm:presLayoutVars>
-      </dgm:prSet>
-      <dgm:spPr/>
-    </dgm:pt>
-    <dgm:pt modelId="{E725F556-18E6-254C-8562-AC7A36C72367}" type="pres">
-      <dgm:prSet presAssocID="{F63BB3FE-229E-3A44-B5CF-2FED3A8C27FC}" presName="node" presStyleLbl="node1" presStyleIdx="0" presStyleCnt="3">
-        <dgm:presLayoutVars>
-          <dgm:bulletEnabled val="1"/>
-        </dgm:presLayoutVars>
-      </dgm:prSet>
-      <dgm:spPr/>
-    </dgm:pt>
-    <dgm:pt modelId="{83C840A2-D579-CB45-8CA1-C8596B5BDAB8}" type="pres">
-      <dgm:prSet presAssocID="{3C2C153C-C89B-C04A-BD50-2F7D01976AC6}" presName="sibTrans" presStyleLbl="sibTrans2D1" presStyleIdx="0" presStyleCnt="2"/>
-      <dgm:spPr/>
-    </dgm:pt>
-    <dgm:pt modelId="{AACE5D66-C0F9-CD41-99FD-97D3B2BE90DB}" type="pres">
-      <dgm:prSet presAssocID="{3C2C153C-C89B-C04A-BD50-2F7D01976AC6}" presName="connectorText" presStyleLbl="sibTrans2D1" presStyleIdx="0" presStyleCnt="2"/>
-      <dgm:spPr/>
-    </dgm:pt>
-    <dgm:pt modelId="{BE2301A5-92D8-834F-883D-CC0B6EE02FDA}" type="pres">
-      <dgm:prSet presAssocID="{797719B3-D81C-4C45-AEB8-A3090DAA84FA}" presName="node" presStyleLbl="node1" presStyleIdx="1" presStyleCnt="3">
-        <dgm:presLayoutVars>
-          <dgm:bulletEnabled val="1"/>
-        </dgm:presLayoutVars>
-      </dgm:prSet>
-      <dgm:spPr/>
-    </dgm:pt>
-    <dgm:pt modelId="{4383071E-1B6A-6243-A583-06C783D6B0EB}" type="pres">
-      <dgm:prSet presAssocID="{F73CDC64-B58C-F14D-873D-69C77BE22D09}" presName="sibTrans" presStyleLbl="sibTrans2D1" presStyleIdx="1" presStyleCnt="2"/>
-      <dgm:spPr/>
-    </dgm:pt>
-    <dgm:pt modelId="{4789E3AF-8D8C-9A4A-B513-8EAB5A264256}" type="pres">
-      <dgm:prSet presAssocID="{F73CDC64-B58C-F14D-873D-69C77BE22D09}" presName="connectorText" presStyleLbl="sibTrans2D1" presStyleIdx="1" presStyleCnt="2"/>
-      <dgm:spPr/>
-    </dgm:pt>
-    <dgm:pt modelId="{732002F7-6276-3A4B-9D30-BC8A68FEBF92}" type="pres">
-      <dgm:prSet presAssocID="{DCCB40E2-BC9F-524F-93E2-C33114B4EE8D}" presName="node" presStyleLbl="node1" presStyleIdx="2" presStyleCnt="3">
-        <dgm:presLayoutVars>
-          <dgm:bulletEnabled val="1"/>
-        </dgm:presLayoutVars>
-      </dgm:prSet>
-      <dgm:spPr/>
-    </dgm:pt>
-  </dgm:ptLst>
-  <dgm:cxnLst>
-    <dgm:cxn modelId="{8E513D0D-6DD8-CC4D-BF18-4A1586DB5131}" srcId="{774BABEB-39D0-5842-A995-002DD80AB169}" destId="{F63BB3FE-229E-3A44-B5CF-2FED3A8C27FC}" srcOrd="0" destOrd="0" parTransId="{3950D63A-60D9-7949-83D2-00F1B3BA007E}" sibTransId="{3C2C153C-C89B-C04A-BD50-2F7D01976AC6}"/>
-    <dgm:cxn modelId="{969F881B-8B90-1E44-AB23-554CB7274406}" srcId="{774BABEB-39D0-5842-A995-002DD80AB169}" destId="{797719B3-D81C-4C45-AEB8-A3090DAA84FA}" srcOrd="1" destOrd="0" parTransId="{13A75B88-07A5-A14C-B2F3-E4E24C08EAF3}" sibTransId="{F73CDC64-B58C-F14D-873D-69C77BE22D09}"/>
-    <dgm:cxn modelId="{544BBF3A-6AFD-824C-8C05-850D7570C744}" type="presOf" srcId="{797719B3-D81C-4C45-AEB8-A3090DAA84FA}" destId="{BE2301A5-92D8-834F-883D-CC0B6EE02FDA}" srcOrd="0" destOrd="0" presId="urn:microsoft.com/office/officeart/2005/8/layout/process1"/>
-    <dgm:cxn modelId="{ECB9EF3E-1DCF-C44B-B423-1024E945A556}" type="presOf" srcId="{F73CDC64-B58C-F14D-873D-69C77BE22D09}" destId="{4383071E-1B6A-6243-A583-06C783D6B0EB}" srcOrd="0" destOrd="0" presId="urn:microsoft.com/office/officeart/2005/8/layout/process1"/>
-    <dgm:cxn modelId="{0CA24D69-DB78-BA4B-AEEC-DBB4C1C9A636}" type="presOf" srcId="{F63BB3FE-229E-3A44-B5CF-2FED3A8C27FC}" destId="{E725F556-18E6-254C-8562-AC7A36C72367}" srcOrd="0" destOrd="0" presId="urn:microsoft.com/office/officeart/2005/8/layout/process1"/>
-    <dgm:cxn modelId="{2AFEF469-2F72-3D47-8B05-3B24955C518C}" type="presOf" srcId="{3C2C153C-C89B-C04A-BD50-2F7D01976AC6}" destId="{83C840A2-D579-CB45-8CA1-C8596B5BDAB8}" srcOrd="0" destOrd="0" presId="urn:microsoft.com/office/officeart/2005/8/layout/process1"/>
-    <dgm:cxn modelId="{BF1C8771-E504-A34E-8725-617FE7880773}" type="presOf" srcId="{3C2C153C-C89B-C04A-BD50-2F7D01976AC6}" destId="{AACE5D66-C0F9-CD41-99FD-97D3B2BE90DB}" srcOrd="1" destOrd="0" presId="urn:microsoft.com/office/officeart/2005/8/layout/process1"/>
-    <dgm:cxn modelId="{3827CF97-D6C2-C643-8B0F-F71042A19627}" type="presOf" srcId="{774BABEB-39D0-5842-A995-002DD80AB169}" destId="{9FF54158-708B-E544-AE48-0FDDFE1EC42E}" srcOrd="0" destOrd="0" presId="urn:microsoft.com/office/officeart/2005/8/layout/process1"/>
-    <dgm:cxn modelId="{69A493A6-C2F3-004F-BFAA-AFBC4B253690}" type="presOf" srcId="{DCCB40E2-BC9F-524F-93E2-C33114B4EE8D}" destId="{732002F7-6276-3A4B-9D30-BC8A68FEBF92}" srcOrd="0" destOrd="0" presId="urn:microsoft.com/office/officeart/2005/8/layout/process1"/>
-    <dgm:cxn modelId="{21D16DD4-50FA-9B4E-8AC2-BA7B1D6D13FF}" type="presOf" srcId="{F73CDC64-B58C-F14D-873D-69C77BE22D09}" destId="{4789E3AF-8D8C-9A4A-B513-8EAB5A264256}" srcOrd="1" destOrd="0" presId="urn:microsoft.com/office/officeart/2005/8/layout/process1"/>
-    <dgm:cxn modelId="{A3C31FFC-110D-2940-A9A7-1F58EB3BFFAC}" srcId="{774BABEB-39D0-5842-A995-002DD80AB169}" destId="{DCCB40E2-BC9F-524F-93E2-C33114B4EE8D}" srcOrd="2" destOrd="0" parTransId="{369B379E-7FEC-1142-B880-A9CC509CE14A}" sibTransId="{B84CAEF1-D5AA-324C-93C4-4016BCC1EC8F}"/>
-    <dgm:cxn modelId="{C3F36B93-3D3A-A94D-ACEE-8E9397079B33}" type="presParOf" srcId="{9FF54158-708B-E544-AE48-0FDDFE1EC42E}" destId="{E725F556-18E6-254C-8562-AC7A36C72367}" srcOrd="0" destOrd="0" presId="urn:microsoft.com/office/officeart/2005/8/layout/process1"/>
-    <dgm:cxn modelId="{74D19D78-0824-784A-B8B6-379E3ECBBF24}" type="presParOf" srcId="{9FF54158-708B-E544-AE48-0FDDFE1EC42E}" destId="{83C840A2-D579-CB45-8CA1-C8596B5BDAB8}" srcOrd="1" destOrd="0" presId="urn:microsoft.com/office/officeart/2005/8/layout/process1"/>
-    <dgm:cxn modelId="{3FD00BD2-917D-0C4C-A7FA-BB4965E83F6A}" type="presParOf" srcId="{83C840A2-D579-CB45-8CA1-C8596B5BDAB8}" destId="{AACE5D66-C0F9-CD41-99FD-97D3B2BE90DB}" srcOrd="0" destOrd="0" presId="urn:microsoft.com/office/officeart/2005/8/layout/process1"/>
-    <dgm:cxn modelId="{284C7588-7D20-144A-8C43-FD0C008BCE50}" type="presParOf" srcId="{9FF54158-708B-E544-AE48-0FDDFE1EC42E}" destId="{BE2301A5-92D8-834F-883D-CC0B6EE02FDA}" srcOrd="2" destOrd="0" presId="urn:microsoft.com/office/officeart/2005/8/layout/process1"/>
-    <dgm:cxn modelId="{D14BC9A4-CB8D-DE4E-A762-E6BD8FF993AF}" type="presParOf" srcId="{9FF54158-708B-E544-AE48-0FDDFE1EC42E}" destId="{4383071E-1B6A-6243-A583-06C783D6B0EB}" srcOrd="3" destOrd="0" presId="urn:microsoft.com/office/officeart/2005/8/layout/process1"/>
-    <dgm:cxn modelId="{8719F695-6068-A34D-8BD0-D6A29E1733F4}" type="presParOf" srcId="{4383071E-1B6A-6243-A583-06C783D6B0EB}" destId="{4789E3AF-8D8C-9A4A-B513-8EAB5A264256}" srcOrd="0" destOrd="0" presId="urn:microsoft.com/office/officeart/2005/8/layout/process1"/>
-    <dgm:cxn modelId="{86D1F1FE-E44B-744B-B7C2-68F78B10549E}" type="presParOf" srcId="{9FF54158-708B-E544-AE48-0FDDFE1EC42E}" destId="{732002F7-6276-3A4B-9D30-BC8A68FEBF92}" srcOrd="4" destOrd="0" presId="urn:microsoft.com/office/officeart/2005/8/layout/process1"/>
-  </dgm:cxnLst>
-  <dgm:bg/>
-  <dgm:whole/>
-  <dgm:extLst>
-    <a:ext uri="http://schemas.microsoft.com/office/drawing/2008/diagram">
-      <dsp:dataModelExt xmlns:dsp="http://schemas.microsoft.com/office/drawing/2008/diagram" relId="rId7" minVer="http://schemas.openxmlformats.org/drawingml/2006/diagram"/>
-    </a:ext>
-  </dgm:extLst>
-</dgm:dataModel>
-</file>
-
-<file path=ppt/diagrams/data4.xml><?xml version="1.0" encoding="utf-8"?>
-<dgm:dataModel xmlns:dgm="http://schemas.openxmlformats.org/drawingml/2006/diagram" xmlns:a="http://schemas.openxmlformats.org/drawingml/2006/main">
-  <dgm:ptLst>
-    <dgm:pt modelId="{774BABEB-39D0-5842-A995-002DD80AB169}" type="doc">
       <dgm:prSet loTypeId="urn:microsoft.com/office/officeart/2005/8/layout/process1" loCatId="" qsTypeId="urn:microsoft.com/office/officeart/2005/8/quickstyle/simple1" qsCatId="simple" csTypeId="urn:microsoft.com/office/officeart/2005/8/colors/colorful5" csCatId="colorful" phldr="1"/>
       <dgm:spPr/>
     </dgm:pt>
@@ -4656,6 +4445,227 @@
           <a:r>
             <a:rPr lang="en-US" dirty="0"/>
             <a:t> page and check if it will visualize</a:t>
+          </a:r>
+        </a:p>
+      </dgm:t>
+    </dgm:pt>
+    <dgm:pt modelId="{369B379E-7FEC-1142-B880-A9CC509CE14A}" type="parTrans" cxnId="{A3C31FFC-110D-2940-A9A7-1F58EB3BFFAC}">
+      <dgm:prSet/>
+      <dgm:spPr/>
+      <dgm:t>
+        <a:bodyPr/>
+        <a:lstStyle/>
+        <a:p>
+          <a:endParaRPr lang="en-US"/>
+        </a:p>
+      </dgm:t>
+    </dgm:pt>
+    <dgm:pt modelId="{B84CAEF1-D5AA-324C-93C4-4016BCC1EC8F}" type="sibTrans" cxnId="{A3C31FFC-110D-2940-A9A7-1F58EB3BFFAC}">
+      <dgm:prSet/>
+      <dgm:spPr/>
+      <dgm:t>
+        <a:bodyPr/>
+        <a:lstStyle/>
+        <a:p>
+          <a:endParaRPr lang="en-US"/>
+        </a:p>
+      </dgm:t>
+    </dgm:pt>
+    <dgm:pt modelId="{9FF54158-708B-E544-AE48-0FDDFE1EC42E}" type="pres">
+      <dgm:prSet presAssocID="{774BABEB-39D0-5842-A995-002DD80AB169}" presName="Name0" presStyleCnt="0">
+        <dgm:presLayoutVars>
+          <dgm:dir/>
+          <dgm:resizeHandles val="exact"/>
+        </dgm:presLayoutVars>
+      </dgm:prSet>
+      <dgm:spPr/>
+    </dgm:pt>
+    <dgm:pt modelId="{E725F556-18E6-254C-8562-AC7A36C72367}" type="pres">
+      <dgm:prSet presAssocID="{F63BB3FE-229E-3A44-B5CF-2FED3A8C27FC}" presName="node" presStyleLbl="node1" presStyleIdx="0" presStyleCnt="3">
+        <dgm:presLayoutVars>
+          <dgm:bulletEnabled val="1"/>
+        </dgm:presLayoutVars>
+      </dgm:prSet>
+      <dgm:spPr/>
+    </dgm:pt>
+    <dgm:pt modelId="{83C840A2-D579-CB45-8CA1-C8596B5BDAB8}" type="pres">
+      <dgm:prSet presAssocID="{3C2C153C-C89B-C04A-BD50-2F7D01976AC6}" presName="sibTrans" presStyleLbl="sibTrans2D1" presStyleIdx="0" presStyleCnt="2"/>
+      <dgm:spPr/>
+    </dgm:pt>
+    <dgm:pt modelId="{AACE5D66-C0F9-CD41-99FD-97D3B2BE90DB}" type="pres">
+      <dgm:prSet presAssocID="{3C2C153C-C89B-C04A-BD50-2F7D01976AC6}" presName="connectorText" presStyleLbl="sibTrans2D1" presStyleIdx="0" presStyleCnt="2"/>
+      <dgm:spPr/>
+    </dgm:pt>
+    <dgm:pt modelId="{BE2301A5-92D8-834F-883D-CC0B6EE02FDA}" type="pres">
+      <dgm:prSet presAssocID="{797719B3-D81C-4C45-AEB8-A3090DAA84FA}" presName="node" presStyleLbl="node1" presStyleIdx="1" presStyleCnt="3">
+        <dgm:presLayoutVars>
+          <dgm:bulletEnabled val="1"/>
+        </dgm:presLayoutVars>
+      </dgm:prSet>
+      <dgm:spPr/>
+    </dgm:pt>
+    <dgm:pt modelId="{4383071E-1B6A-6243-A583-06C783D6B0EB}" type="pres">
+      <dgm:prSet presAssocID="{F73CDC64-B58C-F14D-873D-69C77BE22D09}" presName="sibTrans" presStyleLbl="sibTrans2D1" presStyleIdx="1" presStyleCnt="2"/>
+      <dgm:spPr/>
+    </dgm:pt>
+    <dgm:pt modelId="{4789E3AF-8D8C-9A4A-B513-8EAB5A264256}" type="pres">
+      <dgm:prSet presAssocID="{F73CDC64-B58C-F14D-873D-69C77BE22D09}" presName="connectorText" presStyleLbl="sibTrans2D1" presStyleIdx="1" presStyleCnt="2"/>
+      <dgm:spPr/>
+    </dgm:pt>
+    <dgm:pt modelId="{732002F7-6276-3A4B-9D30-BC8A68FEBF92}" type="pres">
+      <dgm:prSet presAssocID="{DCCB40E2-BC9F-524F-93E2-C33114B4EE8D}" presName="node" presStyleLbl="node1" presStyleIdx="2" presStyleCnt="3">
+        <dgm:presLayoutVars>
+          <dgm:bulletEnabled val="1"/>
+        </dgm:presLayoutVars>
+      </dgm:prSet>
+      <dgm:spPr/>
+    </dgm:pt>
+  </dgm:ptLst>
+  <dgm:cxnLst>
+    <dgm:cxn modelId="{8E513D0D-6DD8-CC4D-BF18-4A1586DB5131}" srcId="{774BABEB-39D0-5842-A995-002DD80AB169}" destId="{F63BB3FE-229E-3A44-B5CF-2FED3A8C27FC}" srcOrd="0" destOrd="0" parTransId="{3950D63A-60D9-7949-83D2-00F1B3BA007E}" sibTransId="{3C2C153C-C89B-C04A-BD50-2F7D01976AC6}"/>
+    <dgm:cxn modelId="{969F881B-8B90-1E44-AB23-554CB7274406}" srcId="{774BABEB-39D0-5842-A995-002DD80AB169}" destId="{797719B3-D81C-4C45-AEB8-A3090DAA84FA}" srcOrd="1" destOrd="0" parTransId="{13A75B88-07A5-A14C-B2F3-E4E24C08EAF3}" sibTransId="{F73CDC64-B58C-F14D-873D-69C77BE22D09}"/>
+    <dgm:cxn modelId="{544BBF3A-6AFD-824C-8C05-850D7570C744}" type="presOf" srcId="{797719B3-D81C-4C45-AEB8-A3090DAA84FA}" destId="{BE2301A5-92D8-834F-883D-CC0B6EE02FDA}" srcOrd="0" destOrd="0" presId="urn:microsoft.com/office/officeart/2005/8/layout/process1"/>
+    <dgm:cxn modelId="{ECB9EF3E-1DCF-C44B-B423-1024E945A556}" type="presOf" srcId="{F73CDC64-B58C-F14D-873D-69C77BE22D09}" destId="{4383071E-1B6A-6243-A583-06C783D6B0EB}" srcOrd="0" destOrd="0" presId="urn:microsoft.com/office/officeart/2005/8/layout/process1"/>
+    <dgm:cxn modelId="{0CA24D69-DB78-BA4B-AEEC-DBB4C1C9A636}" type="presOf" srcId="{F63BB3FE-229E-3A44-B5CF-2FED3A8C27FC}" destId="{E725F556-18E6-254C-8562-AC7A36C72367}" srcOrd="0" destOrd="0" presId="urn:microsoft.com/office/officeart/2005/8/layout/process1"/>
+    <dgm:cxn modelId="{2AFEF469-2F72-3D47-8B05-3B24955C518C}" type="presOf" srcId="{3C2C153C-C89B-C04A-BD50-2F7D01976AC6}" destId="{83C840A2-D579-CB45-8CA1-C8596B5BDAB8}" srcOrd="0" destOrd="0" presId="urn:microsoft.com/office/officeart/2005/8/layout/process1"/>
+    <dgm:cxn modelId="{BF1C8771-E504-A34E-8725-617FE7880773}" type="presOf" srcId="{3C2C153C-C89B-C04A-BD50-2F7D01976AC6}" destId="{AACE5D66-C0F9-CD41-99FD-97D3B2BE90DB}" srcOrd="1" destOrd="0" presId="urn:microsoft.com/office/officeart/2005/8/layout/process1"/>
+    <dgm:cxn modelId="{3827CF97-D6C2-C643-8B0F-F71042A19627}" type="presOf" srcId="{774BABEB-39D0-5842-A995-002DD80AB169}" destId="{9FF54158-708B-E544-AE48-0FDDFE1EC42E}" srcOrd="0" destOrd="0" presId="urn:microsoft.com/office/officeart/2005/8/layout/process1"/>
+    <dgm:cxn modelId="{69A493A6-C2F3-004F-BFAA-AFBC4B253690}" type="presOf" srcId="{DCCB40E2-BC9F-524F-93E2-C33114B4EE8D}" destId="{732002F7-6276-3A4B-9D30-BC8A68FEBF92}" srcOrd="0" destOrd="0" presId="urn:microsoft.com/office/officeart/2005/8/layout/process1"/>
+    <dgm:cxn modelId="{21D16DD4-50FA-9B4E-8AC2-BA7B1D6D13FF}" type="presOf" srcId="{F73CDC64-B58C-F14D-873D-69C77BE22D09}" destId="{4789E3AF-8D8C-9A4A-B513-8EAB5A264256}" srcOrd="1" destOrd="0" presId="urn:microsoft.com/office/officeart/2005/8/layout/process1"/>
+    <dgm:cxn modelId="{A3C31FFC-110D-2940-A9A7-1F58EB3BFFAC}" srcId="{774BABEB-39D0-5842-A995-002DD80AB169}" destId="{DCCB40E2-BC9F-524F-93E2-C33114B4EE8D}" srcOrd="2" destOrd="0" parTransId="{369B379E-7FEC-1142-B880-A9CC509CE14A}" sibTransId="{B84CAEF1-D5AA-324C-93C4-4016BCC1EC8F}"/>
+    <dgm:cxn modelId="{C3F36B93-3D3A-A94D-ACEE-8E9397079B33}" type="presParOf" srcId="{9FF54158-708B-E544-AE48-0FDDFE1EC42E}" destId="{E725F556-18E6-254C-8562-AC7A36C72367}" srcOrd="0" destOrd="0" presId="urn:microsoft.com/office/officeart/2005/8/layout/process1"/>
+    <dgm:cxn modelId="{74D19D78-0824-784A-B8B6-379E3ECBBF24}" type="presParOf" srcId="{9FF54158-708B-E544-AE48-0FDDFE1EC42E}" destId="{83C840A2-D579-CB45-8CA1-C8596B5BDAB8}" srcOrd="1" destOrd="0" presId="urn:microsoft.com/office/officeart/2005/8/layout/process1"/>
+    <dgm:cxn modelId="{3FD00BD2-917D-0C4C-A7FA-BB4965E83F6A}" type="presParOf" srcId="{83C840A2-D579-CB45-8CA1-C8596B5BDAB8}" destId="{AACE5D66-C0F9-CD41-99FD-97D3B2BE90DB}" srcOrd="0" destOrd="0" presId="urn:microsoft.com/office/officeart/2005/8/layout/process1"/>
+    <dgm:cxn modelId="{284C7588-7D20-144A-8C43-FD0C008BCE50}" type="presParOf" srcId="{9FF54158-708B-E544-AE48-0FDDFE1EC42E}" destId="{BE2301A5-92D8-834F-883D-CC0B6EE02FDA}" srcOrd="2" destOrd="0" presId="urn:microsoft.com/office/officeart/2005/8/layout/process1"/>
+    <dgm:cxn modelId="{D14BC9A4-CB8D-DE4E-A762-E6BD8FF993AF}" type="presParOf" srcId="{9FF54158-708B-E544-AE48-0FDDFE1EC42E}" destId="{4383071E-1B6A-6243-A583-06C783D6B0EB}" srcOrd="3" destOrd="0" presId="urn:microsoft.com/office/officeart/2005/8/layout/process1"/>
+    <dgm:cxn modelId="{8719F695-6068-A34D-8BD0-D6A29E1733F4}" type="presParOf" srcId="{4383071E-1B6A-6243-A583-06C783D6B0EB}" destId="{4789E3AF-8D8C-9A4A-B513-8EAB5A264256}" srcOrd="0" destOrd="0" presId="urn:microsoft.com/office/officeart/2005/8/layout/process1"/>
+    <dgm:cxn modelId="{86D1F1FE-E44B-744B-B7C2-68F78B10549E}" type="presParOf" srcId="{9FF54158-708B-E544-AE48-0FDDFE1EC42E}" destId="{732002F7-6276-3A4B-9D30-BC8A68FEBF92}" srcOrd="4" destOrd="0" presId="urn:microsoft.com/office/officeart/2005/8/layout/process1"/>
+  </dgm:cxnLst>
+  <dgm:bg/>
+  <dgm:whole/>
+  <dgm:extLst>
+    <a:ext uri="http://schemas.microsoft.com/office/drawing/2008/diagram">
+      <dsp:dataModelExt xmlns:dsp="http://schemas.microsoft.com/office/drawing/2008/diagram" relId="rId7" minVer="http://schemas.openxmlformats.org/drawingml/2006/diagram"/>
+    </a:ext>
+  </dgm:extLst>
+</dgm:dataModel>
+</file>
+
+<file path=ppt/diagrams/data4.xml><?xml version="1.0" encoding="utf-8"?>
+<dgm:dataModel xmlns:dgm="http://schemas.openxmlformats.org/drawingml/2006/diagram" xmlns:a="http://schemas.openxmlformats.org/drawingml/2006/main">
+  <dgm:ptLst>
+    <dgm:pt modelId="{774BABEB-39D0-5842-A995-002DD80AB169}" type="doc">
+      <dgm:prSet loTypeId="urn:microsoft.com/office/officeart/2005/8/layout/process1" loCatId="" qsTypeId="urn:microsoft.com/office/officeart/2005/8/quickstyle/simple1" qsCatId="simple" csTypeId="urn:microsoft.com/office/officeart/2005/8/colors/accent1_2" csCatId="accent1" phldr="1"/>
+      <dgm:spPr/>
+    </dgm:pt>
+    <dgm:pt modelId="{F63BB3FE-229E-3A44-B5CF-2FED3A8C27FC}">
+      <dgm:prSet phldrT="[Text]"/>
+      <dgm:spPr/>
+      <dgm:t>
+        <a:bodyPr/>
+        <a:lstStyle/>
+        <a:p>
+          <a:r>
+            <a:rPr lang="en-US" dirty="0"/>
+            <a:t>Step 1: </a:t>
+          </a:r>
+        </a:p>
+        <a:p>
+          <a:r>
+            <a:rPr lang="en-US" dirty="0"/>
+            <a:t>Create </a:t>
+          </a:r>
+          <a:r>
+            <a:rPr lang="en-US" dirty="0" err="1"/>
+            <a:t>json</a:t>
+          </a:r>
+          <a:r>
+            <a:rPr lang="en-US" dirty="0"/>
+            <a:t> config for ingestion</a:t>
+          </a:r>
+        </a:p>
+      </dgm:t>
+    </dgm:pt>
+    <dgm:pt modelId="{3950D63A-60D9-7949-83D2-00F1B3BA007E}" type="parTrans" cxnId="{8E513D0D-6DD8-CC4D-BF18-4A1586DB5131}">
+      <dgm:prSet/>
+      <dgm:spPr/>
+      <dgm:t>
+        <a:bodyPr/>
+        <a:lstStyle/>
+        <a:p>
+          <a:endParaRPr lang="en-US"/>
+        </a:p>
+      </dgm:t>
+    </dgm:pt>
+    <dgm:pt modelId="{3C2C153C-C89B-C04A-BD50-2F7D01976AC6}" type="sibTrans" cxnId="{8E513D0D-6DD8-CC4D-BF18-4A1586DB5131}">
+      <dgm:prSet/>
+      <dgm:spPr/>
+      <dgm:t>
+        <a:bodyPr/>
+        <a:lstStyle/>
+        <a:p>
+          <a:endParaRPr lang="en-US"/>
+        </a:p>
+      </dgm:t>
+    </dgm:pt>
+    <dgm:pt modelId="{797719B3-D81C-4C45-AEB8-A3090DAA84FA}">
+      <dgm:prSet phldrT="[Text]"/>
+      <dgm:spPr/>
+      <dgm:t>
+        <a:bodyPr/>
+        <a:lstStyle/>
+        <a:p>
+          <a:r>
+            <a:rPr lang="en-US" dirty="0"/>
+            <a:t>Step 2:</a:t>
+          </a:r>
+        </a:p>
+        <a:p>
+          <a:r>
+            <a:rPr lang="en-US" dirty="0"/>
+            <a:t>Ingest through Airflow or Ingest API</a:t>
+          </a:r>
+        </a:p>
+      </dgm:t>
+    </dgm:pt>
+    <dgm:pt modelId="{13A75B88-07A5-A14C-B2F3-E4E24C08EAF3}" type="parTrans" cxnId="{969F881B-8B90-1E44-AB23-554CB7274406}">
+      <dgm:prSet/>
+      <dgm:spPr/>
+      <dgm:t>
+        <a:bodyPr/>
+        <a:lstStyle/>
+        <a:p>
+          <a:endParaRPr lang="en-US"/>
+        </a:p>
+      </dgm:t>
+    </dgm:pt>
+    <dgm:pt modelId="{F73CDC64-B58C-F14D-873D-69C77BE22D09}" type="sibTrans" cxnId="{969F881B-8B90-1E44-AB23-554CB7274406}">
+      <dgm:prSet/>
+      <dgm:spPr/>
+      <dgm:t>
+        <a:bodyPr/>
+        <a:lstStyle/>
+        <a:p>
+          <a:endParaRPr lang="en-US"/>
+        </a:p>
+      </dgm:t>
+    </dgm:pt>
+    <dgm:pt modelId="{DCCB40E2-BC9F-524F-93E2-C33114B4EE8D}">
+      <dgm:prSet phldrT="[Text]"/>
+      <dgm:spPr/>
+      <dgm:t>
+        <a:bodyPr/>
+        <a:lstStyle/>
+        <a:p>
+          <a:r>
+            <a:rPr lang="en-US" dirty="0"/>
+            <a:t>Step 3:</a:t>
+          </a:r>
+        </a:p>
+        <a:p>
+          <a:r>
+            <a:rPr lang="en-US" dirty="0"/>
+            <a:t>Create a markdown page and check if it will visualize</a:t>
           </a:r>
         </a:p>
       </dgm:t>
@@ -6239,461 +6249,7 @@
       </dsp:nvSpPr>
       <dsp:spPr>
         <a:xfrm>
-          <a:off x="8046" y="1987806"/>
-          <a:ext cx="2405091" cy="1443054"/>
-        </a:xfrm>
-        <a:prstGeom prst="roundRect">
-          <a:avLst>
-            <a:gd name="adj" fmla="val 10000"/>
-          </a:avLst>
-        </a:prstGeom>
-        <a:solidFill>
-          <a:schemeClr val="accent1">
-            <a:hueOff val="0"/>
-            <a:satOff val="0"/>
-            <a:lumOff val="0"/>
-            <a:alphaOff val="0"/>
-          </a:schemeClr>
-        </a:solidFill>
-        <a:ln w="12700" cap="flat" cmpd="sng" algn="ctr">
-          <a:solidFill>
-            <a:schemeClr val="lt1">
-              <a:hueOff val="0"/>
-              <a:satOff val="0"/>
-              <a:lumOff val="0"/>
-              <a:alphaOff val="0"/>
-            </a:schemeClr>
-          </a:solidFill>
-          <a:prstDash val="solid"/>
-          <a:miter lim="800000"/>
-        </a:ln>
-        <a:effectLst/>
-      </dsp:spPr>
-      <dsp:style>
-        <a:lnRef idx="2">
-          <a:scrgbClr r="0" g="0" b="0"/>
-        </a:lnRef>
-        <a:fillRef idx="1">
-          <a:scrgbClr r="0" g="0" b="0"/>
-        </a:fillRef>
-        <a:effectRef idx="0">
-          <a:scrgbClr r="0" g="0" b="0"/>
-        </a:effectRef>
-        <a:fontRef idx="minor">
-          <a:schemeClr val="lt1"/>
-        </a:fontRef>
-      </dsp:style>
-      <dsp:txBody>
-        <a:bodyPr spcFirstLastPara="0" vert="horz" wrap="square" lIns="72390" tIns="72390" rIns="72390" bIns="72390" numCol="1" spcCol="1270" anchor="ctr" anchorCtr="0">
-          <a:noAutofit/>
-        </a:bodyPr>
-        <a:lstStyle/>
-        <a:p>
-          <a:pPr marL="0" lvl="0" indent="0" algn="ctr" defTabSz="844550">
-            <a:lnSpc>
-              <a:spcPct val="90000"/>
-            </a:lnSpc>
-            <a:spcBef>
-              <a:spcPct val="0"/>
-            </a:spcBef>
-            <a:spcAft>
-              <a:spcPct val="35000"/>
-            </a:spcAft>
-            <a:buNone/>
-          </a:pPr>
-          <a:r>
-            <a:rPr lang="en-US" sz="1900" kern="1200" dirty="0"/>
-            <a:t>Step 1: </a:t>
-          </a:r>
-        </a:p>
-        <a:p>
-          <a:pPr marL="0" lvl="0" indent="0" algn="ctr" defTabSz="844550">
-            <a:lnSpc>
-              <a:spcPct val="90000"/>
-            </a:lnSpc>
-            <a:spcBef>
-              <a:spcPct val="0"/>
-            </a:spcBef>
-            <a:spcAft>
-              <a:spcPct val="35000"/>
-            </a:spcAft>
-            <a:buNone/>
-          </a:pPr>
-          <a:r>
-            <a:rPr lang="en-US" sz="1900" kern="1200" dirty="0"/>
-            <a:t>Create </a:t>
-          </a:r>
-          <a:r>
-            <a:rPr lang="en-US" sz="1900" kern="1200" dirty="0" err="1"/>
-            <a:t>json</a:t>
-          </a:r>
-          <a:r>
-            <a:rPr lang="en-US" sz="1900" kern="1200" dirty="0"/>
-            <a:t> config for ingestion</a:t>
-          </a:r>
-        </a:p>
-      </dsp:txBody>
-      <dsp:txXfrm>
-        <a:off x="50312" y="2030072"/>
-        <a:ext cx="2320559" cy="1358522"/>
-      </dsp:txXfrm>
-    </dsp:sp>
-    <dsp:sp modelId="{83C840A2-D579-CB45-8CA1-C8596B5BDAB8}">
-      <dsp:nvSpPr>
-        <dsp:cNvPr id="0" name=""/>
-        <dsp:cNvSpPr/>
-      </dsp:nvSpPr>
-      <dsp:spPr>
-        <a:xfrm>
-          <a:off x="2653647" y="2411102"/>
-          <a:ext cx="509879" cy="596462"/>
-        </a:xfrm>
-        <a:prstGeom prst="rightArrow">
-          <a:avLst>
-            <a:gd name="adj1" fmla="val 60000"/>
-            <a:gd name="adj2" fmla="val 50000"/>
-          </a:avLst>
-        </a:prstGeom>
-        <a:solidFill>
-          <a:schemeClr val="accent1">
-            <a:tint val="60000"/>
-            <a:hueOff val="0"/>
-            <a:satOff val="0"/>
-            <a:lumOff val="0"/>
-            <a:alphaOff val="0"/>
-          </a:schemeClr>
-        </a:solidFill>
-        <a:ln>
-          <a:noFill/>
-        </a:ln>
-        <a:effectLst/>
-      </dsp:spPr>
-      <dsp:style>
-        <a:lnRef idx="0">
-          <a:scrgbClr r="0" g="0" b="0"/>
-        </a:lnRef>
-        <a:fillRef idx="1">
-          <a:scrgbClr r="0" g="0" b="0"/>
-        </a:fillRef>
-        <a:effectRef idx="0">
-          <a:scrgbClr r="0" g="0" b="0"/>
-        </a:effectRef>
-        <a:fontRef idx="minor">
-          <a:schemeClr val="lt1"/>
-        </a:fontRef>
-      </dsp:style>
-      <dsp:txBody>
-        <a:bodyPr spcFirstLastPara="0" vert="horz" wrap="square" lIns="0" tIns="0" rIns="0" bIns="0" numCol="1" spcCol="1270" anchor="ctr" anchorCtr="0">
-          <a:noAutofit/>
-        </a:bodyPr>
-        <a:lstStyle/>
-        <a:p>
-          <a:pPr marL="0" lvl="0" indent="0" algn="ctr" defTabSz="666750">
-            <a:lnSpc>
-              <a:spcPct val="90000"/>
-            </a:lnSpc>
-            <a:spcBef>
-              <a:spcPct val="0"/>
-            </a:spcBef>
-            <a:spcAft>
-              <a:spcPct val="35000"/>
-            </a:spcAft>
-            <a:buNone/>
-          </a:pPr>
-          <a:endParaRPr lang="en-US" sz="1500" kern="1200"/>
-        </a:p>
-      </dsp:txBody>
-      <dsp:txXfrm>
-        <a:off x="2653647" y="2530394"/>
-        <a:ext cx="356915" cy="357878"/>
-      </dsp:txXfrm>
-    </dsp:sp>
-    <dsp:sp modelId="{BE2301A5-92D8-834F-883D-CC0B6EE02FDA}">
-      <dsp:nvSpPr>
-        <dsp:cNvPr id="0" name=""/>
-        <dsp:cNvSpPr/>
-      </dsp:nvSpPr>
-      <dsp:spPr>
-        <a:xfrm>
-          <a:off x="3375174" y="1987806"/>
-          <a:ext cx="2405091" cy="1443054"/>
-        </a:xfrm>
-        <a:prstGeom prst="roundRect">
-          <a:avLst>
-            <a:gd name="adj" fmla="val 10000"/>
-          </a:avLst>
-        </a:prstGeom>
-        <a:solidFill>
-          <a:schemeClr val="accent1">
-            <a:hueOff val="0"/>
-            <a:satOff val="0"/>
-            <a:lumOff val="0"/>
-            <a:alphaOff val="0"/>
-          </a:schemeClr>
-        </a:solidFill>
-        <a:ln w="12700" cap="flat" cmpd="sng" algn="ctr">
-          <a:solidFill>
-            <a:schemeClr val="lt1">
-              <a:hueOff val="0"/>
-              <a:satOff val="0"/>
-              <a:lumOff val="0"/>
-              <a:alphaOff val="0"/>
-            </a:schemeClr>
-          </a:solidFill>
-          <a:prstDash val="solid"/>
-          <a:miter lim="800000"/>
-        </a:ln>
-        <a:effectLst/>
-      </dsp:spPr>
-      <dsp:style>
-        <a:lnRef idx="2">
-          <a:scrgbClr r="0" g="0" b="0"/>
-        </a:lnRef>
-        <a:fillRef idx="1">
-          <a:scrgbClr r="0" g="0" b="0"/>
-        </a:fillRef>
-        <a:effectRef idx="0">
-          <a:scrgbClr r="0" g="0" b="0"/>
-        </a:effectRef>
-        <a:fontRef idx="minor">
-          <a:schemeClr val="lt1"/>
-        </a:fontRef>
-      </dsp:style>
-      <dsp:txBody>
-        <a:bodyPr spcFirstLastPara="0" vert="horz" wrap="square" lIns="72390" tIns="72390" rIns="72390" bIns="72390" numCol="1" spcCol="1270" anchor="ctr" anchorCtr="0">
-          <a:noAutofit/>
-        </a:bodyPr>
-        <a:lstStyle/>
-        <a:p>
-          <a:pPr marL="0" lvl="0" indent="0" algn="ctr" defTabSz="844550">
-            <a:lnSpc>
-              <a:spcPct val="90000"/>
-            </a:lnSpc>
-            <a:spcBef>
-              <a:spcPct val="0"/>
-            </a:spcBef>
-            <a:spcAft>
-              <a:spcPct val="35000"/>
-            </a:spcAft>
-            <a:buNone/>
-          </a:pPr>
-          <a:r>
-            <a:rPr lang="en-US" sz="1900" kern="1200" dirty="0"/>
-            <a:t>Step 2:</a:t>
-          </a:r>
-        </a:p>
-        <a:p>
-          <a:pPr marL="0" lvl="0" indent="0" algn="ctr" defTabSz="844550">
-            <a:lnSpc>
-              <a:spcPct val="90000"/>
-            </a:lnSpc>
-            <a:spcBef>
-              <a:spcPct val="0"/>
-            </a:spcBef>
-            <a:spcAft>
-              <a:spcPct val="35000"/>
-            </a:spcAft>
-            <a:buNone/>
-          </a:pPr>
-          <a:r>
-            <a:rPr lang="en-US" sz="1900" kern="1200" dirty="0"/>
-            <a:t>Ingest through Airflow or Ingest API</a:t>
-          </a:r>
-        </a:p>
-      </dsp:txBody>
-      <dsp:txXfrm>
-        <a:off x="3417440" y="2030072"/>
-        <a:ext cx="2320559" cy="1358522"/>
-      </dsp:txXfrm>
-    </dsp:sp>
-    <dsp:sp modelId="{4383071E-1B6A-6243-A583-06C783D6B0EB}">
-      <dsp:nvSpPr>
-        <dsp:cNvPr id="0" name=""/>
-        <dsp:cNvSpPr/>
-      </dsp:nvSpPr>
-      <dsp:spPr>
-        <a:xfrm>
-          <a:off x="6020774" y="2411102"/>
-          <a:ext cx="509879" cy="596462"/>
-        </a:xfrm>
-        <a:prstGeom prst="rightArrow">
-          <a:avLst>
-            <a:gd name="adj1" fmla="val 60000"/>
-            <a:gd name="adj2" fmla="val 50000"/>
-          </a:avLst>
-        </a:prstGeom>
-        <a:solidFill>
-          <a:schemeClr val="accent1">
-            <a:tint val="60000"/>
-            <a:hueOff val="0"/>
-            <a:satOff val="0"/>
-            <a:lumOff val="0"/>
-            <a:alphaOff val="0"/>
-          </a:schemeClr>
-        </a:solidFill>
-        <a:ln>
-          <a:noFill/>
-        </a:ln>
-        <a:effectLst/>
-      </dsp:spPr>
-      <dsp:style>
-        <a:lnRef idx="0">
-          <a:scrgbClr r="0" g="0" b="0"/>
-        </a:lnRef>
-        <a:fillRef idx="1">
-          <a:scrgbClr r="0" g="0" b="0"/>
-        </a:fillRef>
-        <a:effectRef idx="0">
-          <a:scrgbClr r="0" g="0" b="0"/>
-        </a:effectRef>
-        <a:fontRef idx="minor">
-          <a:schemeClr val="lt1"/>
-        </a:fontRef>
-      </dsp:style>
-      <dsp:txBody>
-        <a:bodyPr spcFirstLastPara="0" vert="horz" wrap="square" lIns="0" tIns="0" rIns="0" bIns="0" numCol="1" spcCol="1270" anchor="ctr" anchorCtr="0">
-          <a:noAutofit/>
-        </a:bodyPr>
-        <a:lstStyle/>
-        <a:p>
-          <a:pPr marL="0" lvl="0" indent="0" algn="ctr" defTabSz="666750">
-            <a:lnSpc>
-              <a:spcPct val="90000"/>
-            </a:lnSpc>
-            <a:spcBef>
-              <a:spcPct val="0"/>
-            </a:spcBef>
-            <a:spcAft>
-              <a:spcPct val="35000"/>
-            </a:spcAft>
-            <a:buNone/>
-          </a:pPr>
-          <a:endParaRPr lang="en-US" sz="1500" kern="1200"/>
-        </a:p>
-      </dsp:txBody>
-      <dsp:txXfrm>
-        <a:off x="6020774" y="2530394"/>
-        <a:ext cx="356915" cy="357878"/>
-      </dsp:txXfrm>
-    </dsp:sp>
-    <dsp:sp modelId="{732002F7-6276-3A4B-9D30-BC8A68FEBF92}">
-      <dsp:nvSpPr>
-        <dsp:cNvPr id="0" name=""/>
-        <dsp:cNvSpPr/>
-      </dsp:nvSpPr>
-      <dsp:spPr>
-        <a:xfrm>
-          <a:off x="6742302" y="1987806"/>
-          <a:ext cx="2405091" cy="1443054"/>
-        </a:xfrm>
-        <a:prstGeom prst="roundRect">
-          <a:avLst>
-            <a:gd name="adj" fmla="val 10000"/>
-          </a:avLst>
-        </a:prstGeom>
-        <a:solidFill>
-          <a:schemeClr val="accent1">
-            <a:hueOff val="0"/>
-            <a:satOff val="0"/>
-            <a:lumOff val="0"/>
-            <a:alphaOff val="0"/>
-          </a:schemeClr>
-        </a:solidFill>
-        <a:ln w="12700" cap="flat" cmpd="sng" algn="ctr">
-          <a:solidFill>
-            <a:schemeClr val="lt1">
-              <a:hueOff val="0"/>
-              <a:satOff val="0"/>
-              <a:lumOff val="0"/>
-              <a:alphaOff val="0"/>
-            </a:schemeClr>
-          </a:solidFill>
-          <a:prstDash val="solid"/>
-          <a:miter lim="800000"/>
-        </a:ln>
-        <a:effectLst/>
-      </dsp:spPr>
-      <dsp:style>
-        <a:lnRef idx="2">
-          <a:scrgbClr r="0" g="0" b="0"/>
-        </a:lnRef>
-        <a:fillRef idx="1">
-          <a:scrgbClr r="0" g="0" b="0"/>
-        </a:fillRef>
-        <a:effectRef idx="0">
-          <a:scrgbClr r="0" g="0" b="0"/>
-        </a:effectRef>
-        <a:fontRef idx="minor">
-          <a:schemeClr val="lt1"/>
-        </a:fontRef>
-      </dsp:style>
-      <dsp:txBody>
-        <a:bodyPr spcFirstLastPara="0" vert="horz" wrap="square" lIns="72390" tIns="72390" rIns="72390" bIns="72390" numCol="1" spcCol="1270" anchor="ctr" anchorCtr="0">
-          <a:noAutofit/>
-        </a:bodyPr>
-        <a:lstStyle/>
-        <a:p>
-          <a:pPr marL="0" lvl="0" indent="0" algn="ctr" defTabSz="844550">
-            <a:lnSpc>
-              <a:spcPct val="90000"/>
-            </a:lnSpc>
-            <a:spcBef>
-              <a:spcPct val="0"/>
-            </a:spcBef>
-            <a:spcAft>
-              <a:spcPct val="35000"/>
-            </a:spcAft>
-            <a:buNone/>
-          </a:pPr>
-          <a:r>
-            <a:rPr lang="en-US" sz="1900" kern="1200" dirty="0"/>
-            <a:t>Step 3:</a:t>
-          </a:r>
-        </a:p>
-        <a:p>
-          <a:pPr marL="0" lvl="0" indent="0" algn="ctr" defTabSz="844550">
-            <a:lnSpc>
-              <a:spcPct val="90000"/>
-            </a:lnSpc>
-            <a:spcBef>
-              <a:spcPct val="0"/>
-            </a:spcBef>
-            <a:spcAft>
-              <a:spcPct val="35000"/>
-            </a:spcAft>
-            <a:buNone/>
-          </a:pPr>
-          <a:r>
-            <a:rPr lang="en-US" sz="1900" kern="1200" dirty="0"/>
-            <a:t>Create a markdown page and check if it will visualize</a:t>
-          </a:r>
-        </a:p>
-      </dsp:txBody>
-      <dsp:txXfrm>
-        <a:off x="6784568" y="2030072"/>
-        <a:ext cx="2320559" cy="1358522"/>
-      </dsp:txXfrm>
-    </dsp:sp>
-  </dsp:spTree>
-</dsp:drawing>
-</file>
-
-<file path=ppt/diagrams/drawing4.xml><?xml version="1.0" encoding="utf-8"?>
-<dsp:drawing xmlns:dgm="http://schemas.openxmlformats.org/drawingml/2006/diagram" xmlns:dsp="http://schemas.microsoft.com/office/drawing/2008/diagram" xmlns:a="http://schemas.openxmlformats.org/drawingml/2006/main">
-  <dsp:spTree>
-    <dsp:nvGrpSpPr>
-      <dsp:cNvPr id="0" name=""/>
-      <dsp:cNvGrpSpPr/>
-    </dsp:nvGrpSpPr>
-    <dsp:grpSpPr/>
-    <dsp:sp modelId="{E725F556-18E6-254C-8562-AC7A36C72367}">
-      <dsp:nvSpPr>
-        <dsp:cNvPr id="0" name=""/>
-        <dsp:cNvSpPr/>
-      </dsp:nvSpPr>
-      <dsp:spPr>
-        <a:xfrm>
-          <a:off x="8046" y="1987806"/>
+          <a:off x="8046" y="1540892"/>
           <a:ext cx="2405091" cy="1443054"/>
         </a:xfrm>
         <a:prstGeom prst="roundRect">
@@ -6788,7 +6344,7 @@
         </a:p>
       </dsp:txBody>
       <dsp:txXfrm>
-        <a:off x="50312" y="2030072"/>
+        <a:off x="50312" y="1583158"/>
         <a:ext cx="2320559" cy="1358522"/>
       </dsp:txXfrm>
     </dsp:sp>
@@ -6799,7 +6355,7 @@
       </dsp:nvSpPr>
       <dsp:spPr>
         <a:xfrm>
-          <a:off x="2653647" y="2411102"/>
+          <a:off x="2653647" y="1964188"/>
           <a:ext cx="509879" cy="596462"/>
         </a:xfrm>
         <a:prstGeom prst="rightArrow">
@@ -6857,7 +6413,7 @@
         </a:p>
       </dsp:txBody>
       <dsp:txXfrm>
-        <a:off x="2653647" y="2530394"/>
+        <a:off x="2653647" y="2083480"/>
         <a:ext cx="356915" cy="357878"/>
       </dsp:txXfrm>
     </dsp:sp>
@@ -6868,7 +6424,7 @@
       </dsp:nvSpPr>
       <dsp:spPr>
         <a:xfrm>
-          <a:off x="3375174" y="1987806"/>
+          <a:off x="3375174" y="1540892"/>
           <a:ext cx="2405091" cy="1443054"/>
         </a:xfrm>
         <a:prstGeom prst="roundRect">
@@ -6955,7 +6511,7 @@
         </a:p>
       </dsp:txBody>
       <dsp:txXfrm>
-        <a:off x="3417440" y="2030072"/>
+        <a:off x="3417440" y="1583158"/>
         <a:ext cx="2320559" cy="1358522"/>
       </dsp:txXfrm>
     </dsp:sp>
@@ -6966,7 +6522,7 @@
       </dsp:nvSpPr>
       <dsp:spPr>
         <a:xfrm>
-          <a:off x="6020774" y="2411102"/>
+          <a:off x="6020774" y="1964188"/>
           <a:ext cx="509879" cy="596462"/>
         </a:xfrm>
         <a:prstGeom prst="rightArrow">
@@ -7024,7 +6580,7 @@
         </a:p>
       </dsp:txBody>
       <dsp:txXfrm>
-        <a:off x="6020774" y="2530394"/>
+        <a:off x="6020774" y="2083480"/>
         <a:ext cx="356915" cy="357878"/>
       </dsp:txXfrm>
     </dsp:sp>
@@ -7035,7 +6591,7 @@
       </dsp:nvSpPr>
       <dsp:spPr>
         <a:xfrm>
-          <a:off x="6742302" y="1987806"/>
+          <a:off x="6742302" y="1540892"/>
           <a:ext cx="2405091" cy="1443054"/>
         </a:xfrm>
         <a:prstGeom prst="roundRect">
@@ -7132,7 +6688,461 @@
         </a:p>
       </dsp:txBody>
       <dsp:txXfrm>
-        <a:off x="6784568" y="2030072"/>
+        <a:off x="6784568" y="1583158"/>
+        <a:ext cx="2320559" cy="1358522"/>
+      </dsp:txXfrm>
+    </dsp:sp>
+  </dsp:spTree>
+</dsp:drawing>
+</file>
+
+<file path=ppt/diagrams/drawing4.xml><?xml version="1.0" encoding="utf-8"?>
+<dsp:drawing xmlns:dgm="http://schemas.openxmlformats.org/drawingml/2006/diagram" xmlns:dsp="http://schemas.microsoft.com/office/drawing/2008/diagram" xmlns:a="http://schemas.openxmlformats.org/drawingml/2006/main">
+  <dsp:spTree>
+    <dsp:nvGrpSpPr>
+      <dsp:cNvPr id="0" name=""/>
+      <dsp:cNvGrpSpPr/>
+    </dsp:nvGrpSpPr>
+    <dsp:grpSpPr/>
+    <dsp:sp modelId="{E725F556-18E6-254C-8562-AC7A36C72367}">
+      <dsp:nvSpPr>
+        <dsp:cNvPr id="0" name=""/>
+        <dsp:cNvSpPr/>
+      </dsp:nvSpPr>
+      <dsp:spPr>
+        <a:xfrm>
+          <a:off x="8046" y="1183291"/>
+          <a:ext cx="2405091" cy="1443054"/>
+        </a:xfrm>
+        <a:prstGeom prst="roundRect">
+          <a:avLst>
+            <a:gd name="adj" fmla="val 10000"/>
+          </a:avLst>
+        </a:prstGeom>
+        <a:solidFill>
+          <a:schemeClr val="accent1">
+            <a:hueOff val="0"/>
+            <a:satOff val="0"/>
+            <a:lumOff val="0"/>
+            <a:alphaOff val="0"/>
+          </a:schemeClr>
+        </a:solidFill>
+        <a:ln w="12700" cap="flat" cmpd="sng" algn="ctr">
+          <a:solidFill>
+            <a:schemeClr val="lt1">
+              <a:hueOff val="0"/>
+              <a:satOff val="0"/>
+              <a:lumOff val="0"/>
+              <a:alphaOff val="0"/>
+            </a:schemeClr>
+          </a:solidFill>
+          <a:prstDash val="solid"/>
+          <a:miter lim="800000"/>
+        </a:ln>
+        <a:effectLst/>
+      </dsp:spPr>
+      <dsp:style>
+        <a:lnRef idx="2">
+          <a:scrgbClr r="0" g="0" b="0"/>
+        </a:lnRef>
+        <a:fillRef idx="1">
+          <a:scrgbClr r="0" g="0" b="0"/>
+        </a:fillRef>
+        <a:effectRef idx="0">
+          <a:scrgbClr r="0" g="0" b="0"/>
+        </a:effectRef>
+        <a:fontRef idx="minor">
+          <a:schemeClr val="lt1"/>
+        </a:fontRef>
+      </dsp:style>
+      <dsp:txBody>
+        <a:bodyPr spcFirstLastPara="0" vert="horz" wrap="square" lIns="72390" tIns="72390" rIns="72390" bIns="72390" numCol="1" spcCol="1270" anchor="ctr" anchorCtr="0">
+          <a:noAutofit/>
+        </a:bodyPr>
+        <a:lstStyle/>
+        <a:p>
+          <a:pPr marL="0" lvl="0" indent="0" algn="ctr" defTabSz="844550">
+            <a:lnSpc>
+              <a:spcPct val="90000"/>
+            </a:lnSpc>
+            <a:spcBef>
+              <a:spcPct val="0"/>
+            </a:spcBef>
+            <a:spcAft>
+              <a:spcPct val="35000"/>
+            </a:spcAft>
+            <a:buNone/>
+          </a:pPr>
+          <a:r>
+            <a:rPr lang="en-US" sz="1900" kern="1200" dirty="0"/>
+            <a:t>Step 1: </a:t>
+          </a:r>
+        </a:p>
+        <a:p>
+          <a:pPr marL="0" lvl="0" indent="0" algn="ctr" defTabSz="844550">
+            <a:lnSpc>
+              <a:spcPct val="90000"/>
+            </a:lnSpc>
+            <a:spcBef>
+              <a:spcPct val="0"/>
+            </a:spcBef>
+            <a:spcAft>
+              <a:spcPct val="35000"/>
+            </a:spcAft>
+            <a:buNone/>
+          </a:pPr>
+          <a:r>
+            <a:rPr lang="en-US" sz="1900" kern="1200" dirty="0"/>
+            <a:t>Create </a:t>
+          </a:r>
+          <a:r>
+            <a:rPr lang="en-US" sz="1900" kern="1200" dirty="0" err="1"/>
+            <a:t>json</a:t>
+          </a:r>
+          <a:r>
+            <a:rPr lang="en-US" sz="1900" kern="1200" dirty="0"/>
+            <a:t> config for ingestion</a:t>
+          </a:r>
+        </a:p>
+      </dsp:txBody>
+      <dsp:txXfrm>
+        <a:off x="50312" y="1225557"/>
+        <a:ext cx="2320559" cy="1358522"/>
+      </dsp:txXfrm>
+    </dsp:sp>
+    <dsp:sp modelId="{83C840A2-D579-CB45-8CA1-C8596B5BDAB8}">
+      <dsp:nvSpPr>
+        <dsp:cNvPr id="0" name=""/>
+        <dsp:cNvSpPr/>
+      </dsp:nvSpPr>
+      <dsp:spPr>
+        <a:xfrm>
+          <a:off x="2653647" y="1606587"/>
+          <a:ext cx="509879" cy="596462"/>
+        </a:xfrm>
+        <a:prstGeom prst="rightArrow">
+          <a:avLst>
+            <a:gd name="adj1" fmla="val 60000"/>
+            <a:gd name="adj2" fmla="val 50000"/>
+          </a:avLst>
+        </a:prstGeom>
+        <a:solidFill>
+          <a:schemeClr val="accent1">
+            <a:tint val="60000"/>
+            <a:hueOff val="0"/>
+            <a:satOff val="0"/>
+            <a:lumOff val="0"/>
+            <a:alphaOff val="0"/>
+          </a:schemeClr>
+        </a:solidFill>
+        <a:ln>
+          <a:noFill/>
+        </a:ln>
+        <a:effectLst/>
+      </dsp:spPr>
+      <dsp:style>
+        <a:lnRef idx="0">
+          <a:scrgbClr r="0" g="0" b="0"/>
+        </a:lnRef>
+        <a:fillRef idx="1">
+          <a:scrgbClr r="0" g="0" b="0"/>
+        </a:fillRef>
+        <a:effectRef idx="0">
+          <a:scrgbClr r="0" g="0" b="0"/>
+        </a:effectRef>
+        <a:fontRef idx="minor">
+          <a:schemeClr val="lt1"/>
+        </a:fontRef>
+      </dsp:style>
+      <dsp:txBody>
+        <a:bodyPr spcFirstLastPara="0" vert="horz" wrap="square" lIns="0" tIns="0" rIns="0" bIns="0" numCol="1" spcCol="1270" anchor="ctr" anchorCtr="0">
+          <a:noAutofit/>
+        </a:bodyPr>
+        <a:lstStyle/>
+        <a:p>
+          <a:pPr marL="0" lvl="0" indent="0" algn="ctr" defTabSz="666750">
+            <a:lnSpc>
+              <a:spcPct val="90000"/>
+            </a:lnSpc>
+            <a:spcBef>
+              <a:spcPct val="0"/>
+            </a:spcBef>
+            <a:spcAft>
+              <a:spcPct val="35000"/>
+            </a:spcAft>
+            <a:buNone/>
+          </a:pPr>
+          <a:endParaRPr lang="en-US" sz="1500" kern="1200"/>
+        </a:p>
+      </dsp:txBody>
+      <dsp:txXfrm>
+        <a:off x="2653647" y="1725879"/>
+        <a:ext cx="356915" cy="357878"/>
+      </dsp:txXfrm>
+    </dsp:sp>
+    <dsp:sp modelId="{BE2301A5-92D8-834F-883D-CC0B6EE02FDA}">
+      <dsp:nvSpPr>
+        <dsp:cNvPr id="0" name=""/>
+        <dsp:cNvSpPr/>
+      </dsp:nvSpPr>
+      <dsp:spPr>
+        <a:xfrm>
+          <a:off x="3375174" y="1183291"/>
+          <a:ext cx="2405091" cy="1443054"/>
+        </a:xfrm>
+        <a:prstGeom prst="roundRect">
+          <a:avLst>
+            <a:gd name="adj" fmla="val 10000"/>
+          </a:avLst>
+        </a:prstGeom>
+        <a:solidFill>
+          <a:schemeClr val="accent1">
+            <a:hueOff val="0"/>
+            <a:satOff val="0"/>
+            <a:lumOff val="0"/>
+            <a:alphaOff val="0"/>
+          </a:schemeClr>
+        </a:solidFill>
+        <a:ln w="12700" cap="flat" cmpd="sng" algn="ctr">
+          <a:solidFill>
+            <a:schemeClr val="lt1">
+              <a:hueOff val="0"/>
+              <a:satOff val="0"/>
+              <a:lumOff val="0"/>
+              <a:alphaOff val="0"/>
+            </a:schemeClr>
+          </a:solidFill>
+          <a:prstDash val="solid"/>
+          <a:miter lim="800000"/>
+        </a:ln>
+        <a:effectLst/>
+      </dsp:spPr>
+      <dsp:style>
+        <a:lnRef idx="2">
+          <a:scrgbClr r="0" g="0" b="0"/>
+        </a:lnRef>
+        <a:fillRef idx="1">
+          <a:scrgbClr r="0" g="0" b="0"/>
+        </a:fillRef>
+        <a:effectRef idx="0">
+          <a:scrgbClr r="0" g="0" b="0"/>
+        </a:effectRef>
+        <a:fontRef idx="minor">
+          <a:schemeClr val="lt1"/>
+        </a:fontRef>
+      </dsp:style>
+      <dsp:txBody>
+        <a:bodyPr spcFirstLastPara="0" vert="horz" wrap="square" lIns="72390" tIns="72390" rIns="72390" bIns="72390" numCol="1" spcCol="1270" anchor="ctr" anchorCtr="0">
+          <a:noAutofit/>
+        </a:bodyPr>
+        <a:lstStyle/>
+        <a:p>
+          <a:pPr marL="0" lvl="0" indent="0" algn="ctr" defTabSz="844550">
+            <a:lnSpc>
+              <a:spcPct val="90000"/>
+            </a:lnSpc>
+            <a:spcBef>
+              <a:spcPct val="0"/>
+            </a:spcBef>
+            <a:spcAft>
+              <a:spcPct val="35000"/>
+            </a:spcAft>
+            <a:buNone/>
+          </a:pPr>
+          <a:r>
+            <a:rPr lang="en-US" sz="1900" kern="1200" dirty="0"/>
+            <a:t>Step 2:</a:t>
+          </a:r>
+        </a:p>
+        <a:p>
+          <a:pPr marL="0" lvl="0" indent="0" algn="ctr" defTabSz="844550">
+            <a:lnSpc>
+              <a:spcPct val="90000"/>
+            </a:lnSpc>
+            <a:spcBef>
+              <a:spcPct val="0"/>
+            </a:spcBef>
+            <a:spcAft>
+              <a:spcPct val="35000"/>
+            </a:spcAft>
+            <a:buNone/>
+          </a:pPr>
+          <a:r>
+            <a:rPr lang="en-US" sz="1900" kern="1200" dirty="0"/>
+            <a:t>Ingest through Airflow or Ingest API</a:t>
+          </a:r>
+        </a:p>
+      </dsp:txBody>
+      <dsp:txXfrm>
+        <a:off x="3417440" y="1225557"/>
+        <a:ext cx="2320559" cy="1358522"/>
+      </dsp:txXfrm>
+    </dsp:sp>
+    <dsp:sp modelId="{4383071E-1B6A-6243-A583-06C783D6B0EB}">
+      <dsp:nvSpPr>
+        <dsp:cNvPr id="0" name=""/>
+        <dsp:cNvSpPr/>
+      </dsp:nvSpPr>
+      <dsp:spPr>
+        <a:xfrm>
+          <a:off x="6020774" y="1606587"/>
+          <a:ext cx="509879" cy="596462"/>
+        </a:xfrm>
+        <a:prstGeom prst="rightArrow">
+          <a:avLst>
+            <a:gd name="adj1" fmla="val 60000"/>
+            <a:gd name="adj2" fmla="val 50000"/>
+          </a:avLst>
+        </a:prstGeom>
+        <a:solidFill>
+          <a:schemeClr val="accent1">
+            <a:tint val="60000"/>
+            <a:hueOff val="0"/>
+            <a:satOff val="0"/>
+            <a:lumOff val="0"/>
+            <a:alphaOff val="0"/>
+          </a:schemeClr>
+        </a:solidFill>
+        <a:ln>
+          <a:noFill/>
+        </a:ln>
+        <a:effectLst/>
+      </dsp:spPr>
+      <dsp:style>
+        <a:lnRef idx="0">
+          <a:scrgbClr r="0" g="0" b="0"/>
+        </a:lnRef>
+        <a:fillRef idx="1">
+          <a:scrgbClr r="0" g="0" b="0"/>
+        </a:fillRef>
+        <a:effectRef idx="0">
+          <a:scrgbClr r="0" g="0" b="0"/>
+        </a:effectRef>
+        <a:fontRef idx="minor">
+          <a:schemeClr val="lt1"/>
+        </a:fontRef>
+      </dsp:style>
+      <dsp:txBody>
+        <a:bodyPr spcFirstLastPara="0" vert="horz" wrap="square" lIns="0" tIns="0" rIns="0" bIns="0" numCol="1" spcCol="1270" anchor="ctr" anchorCtr="0">
+          <a:noAutofit/>
+        </a:bodyPr>
+        <a:lstStyle/>
+        <a:p>
+          <a:pPr marL="0" lvl="0" indent="0" algn="ctr" defTabSz="666750">
+            <a:lnSpc>
+              <a:spcPct val="90000"/>
+            </a:lnSpc>
+            <a:spcBef>
+              <a:spcPct val="0"/>
+            </a:spcBef>
+            <a:spcAft>
+              <a:spcPct val="35000"/>
+            </a:spcAft>
+            <a:buNone/>
+          </a:pPr>
+          <a:endParaRPr lang="en-US" sz="1500" kern="1200"/>
+        </a:p>
+      </dsp:txBody>
+      <dsp:txXfrm>
+        <a:off x="6020774" y="1725879"/>
+        <a:ext cx="356915" cy="357878"/>
+      </dsp:txXfrm>
+    </dsp:sp>
+    <dsp:sp modelId="{732002F7-6276-3A4B-9D30-BC8A68FEBF92}">
+      <dsp:nvSpPr>
+        <dsp:cNvPr id="0" name=""/>
+        <dsp:cNvSpPr/>
+      </dsp:nvSpPr>
+      <dsp:spPr>
+        <a:xfrm>
+          <a:off x="6742302" y="1183291"/>
+          <a:ext cx="2405091" cy="1443054"/>
+        </a:xfrm>
+        <a:prstGeom prst="roundRect">
+          <a:avLst>
+            <a:gd name="adj" fmla="val 10000"/>
+          </a:avLst>
+        </a:prstGeom>
+        <a:solidFill>
+          <a:schemeClr val="accent1">
+            <a:hueOff val="0"/>
+            <a:satOff val="0"/>
+            <a:lumOff val="0"/>
+            <a:alphaOff val="0"/>
+          </a:schemeClr>
+        </a:solidFill>
+        <a:ln w="12700" cap="flat" cmpd="sng" algn="ctr">
+          <a:solidFill>
+            <a:schemeClr val="lt1">
+              <a:hueOff val="0"/>
+              <a:satOff val="0"/>
+              <a:lumOff val="0"/>
+              <a:alphaOff val="0"/>
+            </a:schemeClr>
+          </a:solidFill>
+          <a:prstDash val="solid"/>
+          <a:miter lim="800000"/>
+        </a:ln>
+        <a:effectLst/>
+      </dsp:spPr>
+      <dsp:style>
+        <a:lnRef idx="2">
+          <a:scrgbClr r="0" g="0" b="0"/>
+        </a:lnRef>
+        <a:fillRef idx="1">
+          <a:scrgbClr r="0" g="0" b="0"/>
+        </a:fillRef>
+        <a:effectRef idx="0">
+          <a:scrgbClr r="0" g="0" b="0"/>
+        </a:effectRef>
+        <a:fontRef idx="minor">
+          <a:schemeClr val="lt1"/>
+        </a:fontRef>
+      </dsp:style>
+      <dsp:txBody>
+        <a:bodyPr spcFirstLastPara="0" vert="horz" wrap="square" lIns="72390" tIns="72390" rIns="72390" bIns="72390" numCol="1" spcCol="1270" anchor="ctr" anchorCtr="0">
+          <a:noAutofit/>
+        </a:bodyPr>
+        <a:lstStyle/>
+        <a:p>
+          <a:pPr marL="0" lvl="0" indent="0" algn="ctr" defTabSz="844550">
+            <a:lnSpc>
+              <a:spcPct val="90000"/>
+            </a:lnSpc>
+            <a:spcBef>
+              <a:spcPct val="0"/>
+            </a:spcBef>
+            <a:spcAft>
+              <a:spcPct val="35000"/>
+            </a:spcAft>
+            <a:buNone/>
+          </a:pPr>
+          <a:r>
+            <a:rPr lang="en-US" sz="1900" kern="1200" dirty="0"/>
+            <a:t>Step 3:</a:t>
+          </a:r>
+        </a:p>
+        <a:p>
+          <a:pPr marL="0" lvl="0" indent="0" algn="ctr" defTabSz="844550">
+            <a:lnSpc>
+              <a:spcPct val="90000"/>
+            </a:lnSpc>
+            <a:spcBef>
+              <a:spcPct val="0"/>
+            </a:spcBef>
+            <a:spcAft>
+              <a:spcPct val="35000"/>
+            </a:spcAft>
+            <a:buNone/>
+          </a:pPr>
+          <a:r>
+            <a:rPr lang="en-US" sz="1900" kern="1200" dirty="0"/>
+            <a:t>Create a markdown page and check if it will visualize</a:t>
+          </a:r>
+        </a:p>
+      </dsp:txBody>
+      <dsp:txXfrm>
+        <a:off x="6784568" y="1225557"/>
         <a:ext cx="2320559" cy="1358522"/>
       </dsp:txXfrm>
     </dsp:sp>
@@ -12204,6 +12214,355 @@
 </dgm:styleDef>
 </file>
 
+<file path=ppt/notesMasters/notesMaster1.xml><?xml version="1.0" encoding="utf-8"?>
+<p:notesMaster xmlns:a="http://schemas.openxmlformats.org/drawingml/2006/main" xmlns:r="http://schemas.openxmlformats.org/officeDocument/2006/relationships" xmlns:p="http://schemas.openxmlformats.org/presentationml/2006/main">
+  <p:cSld>
+    <p:bg>
+      <p:bgRef idx="1001">
+        <a:schemeClr val="bg1"/>
+      </p:bgRef>
+    </p:bg>
+    <p:spTree>
+      <p:nvGrpSpPr>
+        <p:cNvPr id="1" name=""/>
+        <p:cNvGrpSpPr/>
+        <p:nvPr/>
+      </p:nvGrpSpPr>
+      <p:grpSpPr>
+        <a:xfrm>
+          <a:off x="0" y="0"/>
+          <a:ext cx="0" cy="0"/>
+          <a:chOff x="0" y="0"/>
+          <a:chExt cx="0" cy="0"/>
+        </a:xfrm>
+      </p:grpSpPr>
+      <p:sp>
+        <p:nvSpPr>
+          <p:cNvPr id="2" name="Header Placeholder 1"/>
+          <p:cNvSpPr>
+            <a:spLocks noGrp="1"/>
+          </p:cNvSpPr>
+          <p:nvPr>
+            <p:ph type="hdr" sz="quarter"/>
+          </p:nvPr>
+        </p:nvSpPr>
+        <p:spPr>
+          <a:xfrm>
+            <a:off x="0" y="0"/>
+            <a:ext cx="2971800" cy="458788"/>
+          </a:xfrm>
+          <a:prstGeom prst="rect">
+            <a:avLst/>
+          </a:prstGeom>
+        </p:spPr>
+        <p:txBody>
+          <a:bodyPr vert="horz" lIns="91440" tIns="45720" rIns="91440" bIns="45720" rtlCol="0"/>
+          <a:lstStyle>
+            <a:lvl1pPr algn="l">
+              <a:defRPr sz="1200"/>
+            </a:lvl1pPr>
+          </a:lstStyle>
+          <a:p>
+            <a:endParaRPr lang="en-US"/>
+          </a:p>
+        </p:txBody>
+      </p:sp>
+      <p:sp>
+        <p:nvSpPr>
+          <p:cNvPr id="3" name="Date Placeholder 2"/>
+          <p:cNvSpPr>
+            <a:spLocks noGrp="1"/>
+          </p:cNvSpPr>
+          <p:nvPr>
+            <p:ph type="dt" idx="1"/>
+          </p:nvPr>
+        </p:nvSpPr>
+        <p:spPr>
+          <a:xfrm>
+            <a:off x="3884613" y="0"/>
+            <a:ext cx="2971800" cy="458788"/>
+          </a:xfrm>
+          <a:prstGeom prst="rect">
+            <a:avLst/>
+          </a:prstGeom>
+        </p:spPr>
+        <p:txBody>
+          <a:bodyPr vert="horz" lIns="91440" tIns="45720" rIns="91440" bIns="45720" rtlCol="0"/>
+          <a:lstStyle>
+            <a:lvl1pPr algn="r">
+              <a:defRPr sz="1200"/>
+            </a:lvl1pPr>
+          </a:lstStyle>
+          <a:p>
+            <a:fld id="{78B68A80-4FBB-5141-A3B3-23F9B2481514}" type="datetimeFigureOut">
+              <a:rPr lang="en-US" smtClean="0"/>
+              <a:t>9/11/25</a:t>
+            </a:fld>
+            <a:endParaRPr lang="en-US"/>
+          </a:p>
+        </p:txBody>
+      </p:sp>
+      <p:sp>
+        <p:nvSpPr>
+          <p:cNvPr id="4" name="Slide Image Placeholder 3"/>
+          <p:cNvSpPr>
+            <a:spLocks noGrp="1" noRot="1" noChangeAspect="1"/>
+          </p:cNvSpPr>
+          <p:nvPr>
+            <p:ph type="sldImg" idx="2"/>
+          </p:nvPr>
+        </p:nvSpPr>
+        <p:spPr>
+          <a:xfrm>
+            <a:off x="685800" y="1143000"/>
+            <a:ext cx="5486400" cy="3086100"/>
+          </a:xfrm>
+          <a:prstGeom prst="rect">
+            <a:avLst/>
+          </a:prstGeom>
+          <a:noFill/>
+          <a:ln w="12700">
+            <a:solidFill>
+              <a:prstClr val="black"/>
+            </a:solidFill>
+          </a:ln>
+        </p:spPr>
+        <p:txBody>
+          <a:bodyPr vert="horz" lIns="91440" tIns="45720" rIns="91440" bIns="45720" rtlCol="0" anchor="ctr"/>
+          <a:lstStyle/>
+          <a:p>
+            <a:endParaRPr lang="en-US"/>
+          </a:p>
+        </p:txBody>
+      </p:sp>
+      <p:sp>
+        <p:nvSpPr>
+          <p:cNvPr id="5" name="Notes Placeholder 4"/>
+          <p:cNvSpPr>
+            <a:spLocks noGrp="1"/>
+          </p:cNvSpPr>
+          <p:nvPr>
+            <p:ph type="body" sz="quarter" idx="3"/>
+          </p:nvPr>
+        </p:nvSpPr>
+        <p:spPr>
+          <a:xfrm>
+            <a:off x="685800" y="4400550"/>
+            <a:ext cx="5486400" cy="3600450"/>
+          </a:xfrm>
+          <a:prstGeom prst="rect">
+            <a:avLst/>
+          </a:prstGeom>
+        </p:spPr>
+        <p:txBody>
+          <a:bodyPr vert="horz" lIns="91440" tIns="45720" rIns="91440" bIns="45720" rtlCol="0"/>
+          <a:lstStyle/>
+          <a:p>
+            <a:pPr lvl="0"/>
+            <a:r>
+              <a:rPr lang="en-US"/>
+              <a:t>Click to edit Master text styles</a:t>
+            </a:r>
+          </a:p>
+          <a:p>
+            <a:pPr lvl="1"/>
+            <a:r>
+              <a:rPr lang="en-US"/>
+              <a:t>Second level</a:t>
+            </a:r>
+          </a:p>
+          <a:p>
+            <a:pPr lvl="2"/>
+            <a:r>
+              <a:rPr lang="en-US"/>
+              <a:t>Third level</a:t>
+            </a:r>
+          </a:p>
+          <a:p>
+            <a:pPr lvl="3"/>
+            <a:r>
+              <a:rPr lang="en-US"/>
+              <a:t>Fourth level</a:t>
+            </a:r>
+          </a:p>
+          <a:p>
+            <a:pPr lvl="4"/>
+            <a:r>
+              <a:rPr lang="en-US"/>
+              <a:t>Fifth level</a:t>
+            </a:r>
+          </a:p>
+        </p:txBody>
+      </p:sp>
+      <p:sp>
+        <p:nvSpPr>
+          <p:cNvPr id="6" name="Footer Placeholder 5"/>
+          <p:cNvSpPr>
+            <a:spLocks noGrp="1"/>
+          </p:cNvSpPr>
+          <p:nvPr>
+            <p:ph type="ftr" sz="quarter" idx="4"/>
+          </p:nvPr>
+        </p:nvSpPr>
+        <p:spPr>
+          <a:xfrm>
+            <a:off x="0" y="8685213"/>
+            <a:ext cx="2971800" cy="458787"/>
+          </a:xfrm>
+          <a:prstGeom prst="rect">
+            <a:avLst/>
+          </a:prstGeom>
+        </p:spPr>
+        <p:txBody>
+          <a:bodyPr vert="horz" lIns="91440" tIns="45720" rIns="91440" bIns="45720" rtlCol="0" anchor="b"/>
+          <a:lstStyle>
+            <a:lvl1pPr algn="l">
+              <a:defRPr sz="1200"/>
+            </a:lvl1pPr>
+          </a:lstStyle>
+          <a:p>
+            <a:endParaRPr lang="en-US"/>
+          </a:p>
+        </p:txBody>
+      </p:sp>
+      <p:sp>
+        <p:nvSpPr>
+          <p:cNvPr id="7" name="Slide Number Placeholder 6"/>
+          <p:cNvSpPr>
+            <a:spLocks noGrp="1"/>
+          </p:cNvSpPr>
+          <p:nvPr>
+            <p:ph type="sldNum" sz="quarter" idx="5"/>
+          </p:nvPr>
+        </p:nvSpPr>
+        <p:spPr>
+          <a:xfrm>
+            <a:off x="3884613" y="8685213"/>
+            <a:ext cx="2971800" cy="458787"/>
+          </a:xfrm>
+          <a:prstGeom prst="rect">
+            <a:avLst/>
+          </a:prstGeom>
+        </p:spPr>
+        <p:txBody>
+          <a:bodyPr vert="horz" lIns="91440" tIns="45720" rIns="91440" bIns="45720" rtlCol="0" anchor="b"/>
+          <a:lstStyle>
+            <a:lvl1pPr algn="r">
+              <a:defRPr sz="1200"/>
+            </a:lvl1pPr>
+          </a:lstStyle>
+          <a:p>
+            <a:fld id="{5E4C183C-E9E9-004F-BB29-5B221C8A88C8}" type="slidenum">
+              <a:rPr lang="en-US" smtClean="0"/>
+              <a:t>‹#›</a:t>
+            </a:fld>
+            <a:endParaRPr lang="en-US"/>
+          </a:p>
+        </p:txBody>
+      </p:sp>
+    </p:spTree>
+    <p:extLst>
+      <p:ext uri="{BB962C8B-B14F-4D97-AF65-F5344CB8AC3E}">
+        <p14:creationId xmlns:p14="http://schemas.microsoft.com/office/powerpoint/2010/main" val="2608288331"/>
+      </p:ext>
+    </p:extLst>
+  </p:cSld>
+  <p:clrMap bg1="lt1" tx1="dk1" bg2="lt2" tx2="dk2" accent1="accent1" accent2="accent2" accent3="accent3" accent4="accent4" accent5="accent5" accent6="accent6" hlink="hlink" folHlink="folHlink"/>
+  <p:notesStyle>
+    <a:lvl1pPr marL="0" algn="l" defTabSz="914400" rtl="0" eaLnBrk="1" latinLnBrk="0" hangingPunct="1">
+      <a:defRPr sz="1200" kern="1200">
+        <a:solidFill>
+          <a:schemeClr val="tx1"/>
+        </a:solidFill>
+        <a:latin typeface="+mn-lt"/>
+        <a:ea typeface="+mn-ea"/>
+        <a:cs typeface="+mn-cs"/>
+      </a:defRPr>
+    </a:lvl1pPr>
+    <a:lvl2pPr marL="457200" algn="l" defTabSz="914400" rtl="0" eaLnBrk="1" latinLnBrk="0" hangingPunct="1">
+      <a:defRPr sz="1200" kern="1200">
+        <a:solidFill>
+          <a:schemeClr val="tx1"/>
+        </a:solidFill>
+        <a:latin typeface="+mn-lt"/>
+        <a:ea typeface="+mn-ea"/>
+        <a:cs typeface="+mn-cs"/>
+      </a:defRPr>
+    </a:lvl2pPr>
+    <a:lvl3pPr marL="914400" algn="l" defTabSz="914400" rtl="0" eaLnBrk="1" latinLnBrk="0" hangingPunct="1">
+      <a:defRPr sz="1200" kern="1200">
+        <a:solidFill>
+          <a:schemeClr val="tx1"/>
+        </a:solidFill>
+        <a:latin typeface="+mn-lt"/>
+        <a:ea typeface="+mn-ea"/>
+        <a:cs typeface="+mn-cs"/>
+      </a:defRPr>
+    </a:lvl3pPr>
+    <a:lvl4pPr marL="1371600" algn="l" defTabSz="914400" rtl="0" eaLnBrk="1" latinLnBrk="0" hangingPunct="1">
+      <a:defRPr sz="1200" kern="1200">
+        <a:solidFill>
+          <a:schemeClr val="tx1"/>
+        </a:solidFill>
+        <a:latin typeface="+mn-lt"/>
+        <a:ea typeface="+mn-ea"/>
+        <a:cs typeface="+mn-cs"/>
+      </a:defRPr>
+    </a:lvl4pPr>
+    <a:lvl5pPr marL="1828800" algn="l" defTabSz="914400" rtl="0" eaLnBrk="1" latinLnBrk="0" hangingPunct="1">
+      <a:defRPr sz="1200" kern="1200">
+        <a:solidFill>
+          <a:schemeClr val="tx1"/>
+        </a:solidFill>
+        <a:latin typeface="+mn-lt"/>
+        <a:ea typeface="+mn-ea"/>
+        <a:cs typeface="+mn-cs"/>
+      </a:defRPr>
+    </a:lvl5pPr>
+    <a:lvl6pPr marL="2286000" algn="l" defTabSz="914400" rtl="0" eaLnBrk="1" latinLnBrk="0" hangingPunct="1">
+      <a:defRPr sz="1200" kern="1200">
+        <a:solidFill>
+          <a:schemeClr val="tx1"/>
+        </a:solidFill>
+        <a:latin typeface="+mn-lt"/>
+        <a:ea typeface="+mn-ea"/>
+        <a:cs typeface="+mn-cs"/>
+      </a:defRPr>
+    </a:lvl6pPr>
+    <a:lvl7pPr marL="2743200" algn="l" defTabSz="914400" rtl="0" eaLnBrk="1" latinLnBrk="0" hangingPunct="1">
+      <a:defRPr sz="1200" kern="1200">
+        <a:solidFill>
+          <a:schemeClr val="tx1"/>
+        </a:solidFill>
+        <a:latin typeface="+mn-lt"/>
+        <a:ea typeface="+mn-ea"/>
+        <a:cs typeface="+mn-cs"/>
+      </a:defRPr>
+    </a:lvl7pPr>
+    <a:lvl8pPr marL="3200400" algn="l" defTabSz="914400" rtl="0" eaLnBrk="1" latinLnBrk="0" hangingPunct="1">
+      <a:defRPr sz="1200" kern="1200">
+        <a:solidFill>
+          <a:schemeClr val="tx1"/>
+        </a:solidFill>
+        <a:latin typeface="+mn-lt"/>
+        <a:ea typeface="+mn-ea"/>
+        <a:cs typeface="+mn-cs"/>
+      </a:defRPr>
+    </a:lvl8pPr>
+    <a:lvl9pPr marL="3657600" algn="l" defTabSz="914400" rtl="0" eaLnBrk="1" latinLnBrk="0" hangingPunct="1">
+      <a:defRPr sz="1200" kern="1200">
+        <a:solidFill>
+          <a:schemeClr val="tx1"/>
+        </a:solidFill>
+        <a:latin typeface="+mn-lt"/>
+        <a:ea typeface="+mn-ea"/>
+        <a:cs typeface="+mn-cs"/>
+      </a:defRPr>
+    </a:lvl9pPr>
+  </p:notesStyle>
+</p:notesMaster>
+</file>
+
 <file path=ppt/slideLayouts/slideLayout1.xml><?xml version="1.0" encoding="utf-8"?>
 <p:sldLayout xmlns:a="http://schemas.openxmlformats.org/drawingml/2006/main" xmlns:r="http://schemas.openxmlformats.org/officeDocument/2006/relationships" xmlns:p="http://schemas.openxmlformats.org/presentationml/2006/main" type="title" preserve="1">
   <p:cSld name="Title Slide">
@@ -12349,9 +12708,9 @@
           <a:bodyPr/>
           <a:lstStyle/>
           <a:p>
-            <a:fld id="{457A4FE8-D29A-044B-8A64-C21E78F129D9}" type="datetimeFigureOut">
+            <a:fld id="{FF4DEEEC-2E29-C84C-A9D1-696C148D6430}" type="datetime1">
               <a:rPr lang="en-US" smtClean="0"/>
-              <a:t>9/8/25</a:t>
+              <a:t>9/11/25</a:t>
             </a:fld>
             <a:endParaRPr lang="en-US"/>
           </a:p>
@@ -12547,9 +12906,9 @@
           <a:bodyPr/>
           <a:lstStyle/>
           <a:p>
-            <a:fld id="{457A4FE8-D29A-044B-8A64-C21E78F129D9}" type="datetimeFigureOut">
+            <a:fld id="{4DE1B606-960E-AC44-91E2-CD5BC06C902C}" type="datetime1">
               <a:rPr lang="en-US" smtClean="0"/>
-              <a:t>9/8/25</a:t>
+              <a:t>9/11/25</a:t>
             </a:fld>
             <a:endParaRPr lang="en-US"/>
           </a:p>
@@ -12755,9 +13114,9 @@
           <a:bodyPr/>
           <a:lstStyle/>
           <a:p>
-            <a:fld id="{457A4FE8-D29A-044B-8A64-C21E78F129D9}" type="datetimeFigureOut">
+            <a:fld id="{CC080992-275A-9F4B-A8EF-14E52280F80C}" type="datetime1">
               <a:rPr lang="en-US" smtClean="0"/>
-              <a:t>9/8/25</a:t>
+              <a:t>9/11/25</a:t>
             </a:fld>
             <a:endParaRPr lang="en-US"/>
           </a:p>
@@ -12953,9 +13312,9 @@
           <a:bodyPr/>
           <a:lstStyle/>
           <a:p>
-            <a:fld id="{457A4FE8-D29A-044B-8A64-C21E78F129D9}" type="datetimeFigureOut">
+            <a:fld id="{2DA395C4-8919-C441-A59C-CAC645B24382}" type="datetime1">
               <a:rPr lang="en-US" smtClean="0"/>
-              <a:t>9/8/25</a:t>
+              <a:t>9/11/25</a:t>
             </a:fld>
             <a:endParaRPr lang="en-US"/>
           </a:p>
@@ -13228,9 +13587,9 @@
           <a:bodyPr/>
           <a:lstStyle/>
           <a:p>
-            <a:fld id="{457A4FE8-D29A-044B-8A64-C21E78F129D9}" type="datetimeFigureOut">
+            <a:fld id="{8315B42B-7BFD-CF4A-BADA-449BFB91CAA9}" type="datetime1">
               <a:rPr lang="en-US" smtClean="0"/>
-              <a:t>9/8/25</a:t>
+              <a:t>9/11/25</a:t>
             </a:fld>
             <a:endParaRPr lang="en-US"/>
           </a:p>
@@ -13493,9 +13852,9 @@
           <a:bodyPr/>
           <a:lstStyle/>
           <a:p>
-            <a:fld id="{457A4FE8-D29A-044B-8A64-C21E78F129D9}" type="datetimeFigureOut">
+            <a:fld id="{FAEFF218-EB21-374E-BEA9-7AAA79505662}" type="datetime1">
               <a:rPr lang="en-US" smtClean="0"/>
-              <a:t>9/8/25</a:t>
+              <a:t>9/11/25</a:t>
             </a:fld>
             <a:endParaRPr lang="en-US"/>
           </a:p>
@@ -13905,9 +14264,9 @@
           <a:bodyPr/>
           <a:lstStyle/>
           <a:p>
-            <a:fld id="{457A4FE8-D29A-044B-8A64-C21E78F129D9}" type="datetimeFigureOut">
+            <a:fld id="{0953F16B-3CD0-6640-B3CE-BCB782B75192}" type="datetime1">
               <a:rPr lang="en-US" smtClean="0"/>
-              <a:t>9/8/25</a:t>
+              <a:t>9/11/25</a:t>
             </a:fld>
             <a:endParaRPr lang="en-US"/>
           </a:p>
@@ -14046,9 +14405,9 @@
           <a:bodyPr/>
           <a:lstStyle/>
           <a:p>
-            <a:fld id="{457A4FE8-D29A-044B-8A64-C21E78F129D9}" type="datetimeFigureOut">
+            <a:fld id="{9DA7585A-5404-D649-AE05-4BB52187E2BC}" type="datetime1">
               <a:rPr lang="en-US" smtClean="0"/>
-              <a:t>9/8/25</a:t>
+              <a:t>9/11/25</a:t>
             </a:fld>
             <a:endParaRPr lang="en-US"/>
           </a:p>
@@ -14159,9 +14518,9 @@
           <a:bodyPr/>
           <a:lstStyle/>
           <a:p>
-            <a:fld id="{457A4FE8-D29A-044B-8A64-C21E78F129D9}" type="datetimeFigureOut">
+            <a:fld id="{0A9C6F1F-2897-DC4C-B9AD-1C91A82EC31C}" type="datetime1">
               <a:rPr lang="en-US" smtClean="0"/>
-              <a:t>9/8/25</a:t>
+              <a:t>9/11/25</a:t>
             </a:fld>
             <a:endParaRPr lang="en-US"/>
           </a:p>
@@ -14470,9 +14829,9 @@
           <a:bodyPr/>
           <a:lstStyle/>
           <a:p>
-            <a:fld id="{457A4FE8-D29A-044B-8A64-C21E78F129D9}" type="datetimeFigureOut">
+            <a:fld id="{3951993C-0E7F-6A41-8ACF-2167C1B7DF9D}" type="datetime1">
               <a:rPr lang="en-US" smtClean="0"/>
-              <a:t>9/8/25</a:t>
+              <a:t>9/11/25</a:t>
             </a:fld>
             <a:endParaRPr lang="en-US"/>
           </a:p>
@@ -14758,9 +15117,9 @@
           <a:bodyPr/>
           <a:lstStyle/>
           <a:p>
-            <a:fld id="{457A4FE8-D29A-044B-8A64-C21E78F129D9}" type="datetimeFigureOut">
+            <a:fld id="{91CE600D-2F7F-5F41-A2BB-1917B061E2BC}" type="datetime1">
               <a:rPr lang="en-US" smtClean="0"/>
-              <a:t>9/8/25</a:t>
+              <a:t>9/11/25</a:t>
             </a:fld>
             <a:endParaRPr lang="en-US"/>
           </a:p>
@@ -14999,9 +15358,9 @@
             </a:lvl1pPr>
           </a:lstStyle>
           <a:p>
-            <a:fld id="{457A4FE8-D29A-044B-8A64-C21E78F129D9}" type="datetimeFigureOut">
+            <a:fld id="{9C563242-E400-3A43-9818-454EC99B9427}" type="datetime1">
               <a:rPr lang="en-US" smtClean="0"/>
-              <a:t>9/8/25</a:t>
+              <a:t>9/11/25</a:t>
             </a:fld>
             <a:endParaRPr lang="en-US"/>
           </a:p>
@@ -15118,6 +15477,7 @@
     <p:sldLayoutId id="2147483658" r:id="rId10"/>
     <p:sldLayoutId id="2147483659" r:id="rId11"/>
   </p:sldLayoutIdLst>
+  <p:hf hdr="0" ftr="0" dt="0"/>
   <p:txStyles>
     <p:titleStyle>
       <a:lvl1pPr algn="l" defTabSz="914400" rtl="0" eaLnBrk="1" latinLnBrk="0" hangingPunct="1">
@@ -15477,6 +15837,35 @@
           </a:prstGeom>
         </p:spPr>
       </p:pic>
+      <p:sp>
+        <p:nvSpPr>
+          <p:cNvPr id="3" name="Slide Number Placeholder 2">
+            <a:extLst>
+              <a:ext uri="{FF2B5EF4-FFF2-40B4-BE49-F238E27FC236}">
+                <a16:creationId xmlns:a16="http://schemas.microsoft.com/office/drawing/2014/main" id="{56C064E3-B662-2BA3-44A9-0624D9BA3C3C}"/>
+              </a:ext>
+            </a:extLst>
+          </p:cNvPr>
+          <p:cNvSpPr>
+            <a:spLocks noGrp="1"/>
+          </p:cNvSpPr>
+          <p:nvPr>
+            <p:ph type="sldNum" sz="quarter" idx="12"/>
+          </p:nvPr>
+        </p:nvSpPr>
+        <p:spPr/>
+        <p:txBody>
+          <a:bodyPr/>
+          <a:lstStyle/>
+          <a:p>
+            <a:fld id="{5D28F90B-7FA5-3745-B8A4-A3C1EAD30D95}" type="slidenum">
+              <a:rPr lang="en-US" smtClean="0"/>
+              <a:t>1</a:t>
+            </a:fld>
+            <a:endParaRPr lang="en-US"/>
+          </a:p>
+        </p:txBody>
+      </p:sp>
     </p:spTree>
     <p:extLst>
       <p:ext uri="{BB962C8B-B14F-4D97-AF65-F5344CB8AC3E}">
@@ -15491,6 +15880,251 @@
 </file>
 
 <file path=ppt/slides/slide10.xml><?xml version="1.0" encoding="utf-8"?>
+<p:sld xmlns:a="http://schemas.openxmlformats.org/drawingml/2006/main" xmlns:r="http://schemas.openxmlformats.org/officeDocument/2006/relationships" xmlns:p="http://schemas.openxmlformats.org/presentationml/2006/main">
+  <p:cSld>
+    <p:spTree>
+      <p:nvGrpSpPr>
+        <p:cNvPr id="1" name="">
+          <a:extLst>
+            <a:ext uri="{FF2B5EF4-FFF2-40B4-BE49-F238E27FC236}">
+              <a16:creationId xmlns:a16="http://schemas.microsoft.com/office/drawing/2014/main" id="{0790AF12-CAEA-6378-5921-F7A197ED1FEA}"/>
+            </a:ext>
+          </a:extLst>
+        </p:cNvPr>
+        <p:cNvGrpSpPr/>
+        <p:nvPr/>
+      </p:nvGrpSpPr>
+      <p:grpSpPr>
+        <a:xfrm>
+          <a:off x="0" y="0"/>
+          <a:ext cx="0" cy="0"/>
+          <a:chOff x="0" y="0"/>
+          <a:chExt cx="0" cy="0"/>
+        </a:xfrm>
+      </p:grpSpPr>
+      <p:sp>
+        <p:nvSpPr>
+          <p:cNvPr id="2" name="Title 1">
+            <a:extLst>
+              <a:ext uri="{FF2B5EF4-FFF2-40B4-BE49-F238E27FC236}">
+                <a16:creationId xmlns:a16="http://schemas.microsoft.com/office/drawing/2014/main" id="{706E94BD-9C58-1D5C-571E-29C4273D4621}"/>
+              </a:ext>
+            </a:extLst>
+          </p:cNvPr>
+          <p:cNvSpPr>
+            <a:spLocks noGrp="1"/>
+          </p:cNvSpPr>
+          <p:nvPr>
+            <p:ph type="title"/>
+          </p:nvPr>
+        </p:nvSpPr>
+        <p:spPr>
+          <a:solidFill>
+            <a:schemeClr val="accent5">
+              <a:lumMod val="40000"/>
+              <a:lumOff val="60000"/>
+            </a:schemeClr>
+          </a:solidFill>
+        </p:spPr>
+        <p:txBody>
+          <a:bodyPr vert="horz" lIns="91440" tIns="45720" rIns="91440" bIns="45720" rtlCol="0" anchor="ctr">
+            <a:normAutofit/>
+          </a:bodyPr>
+          <a:lstStyle/>
+          <a:p>
+            <a:r>
+              <a:rPr lang="en-US" dirty="0"/>
+              <a:t>When to use </a:t>
+            </a:r>
+            <a:r>
+              <a:rPr lang="en-US" dirty="0">
+                <a:hlinkClick r:id="rId2"/>
+              </a:rPr>
+              <a:t>Airflow</a:t>
+            </a:r>
+            <a:r>
+              <a:rPr lang="en-US" dirty="0"/>
+              <a:t>?	</a:t>
+            </a:r>
+          </a:p>
+        </p:txBody>
+      </p:sp>
+      <p:sp>
+        <p:nvSpPr>
+          <p:cNvPr id="3" name="Content Placeholder 2">
+            <a:extLst>
+              <a:ext uri="{FF2B5EF4-FFF2-40B4-BE49-F238E27FC236}">
+                <a16:creationId xmlns:a16="http://schemas.microsoft.com/office/drawing/2014/main" id="{368E1C6C-B030-E6DB-1BAE-35B9121F9CA6}"/>
+              </a:ext>
+            </a:extLst>
+          </p:cNvPr>
+          <p:cNvSpPr>
+            <a:spLocks noGrp="1"/>
+          </p:cNvSpPr>
+          <p:nvPr>
+            <p:ph idx="1"/>
+          </p:nvPr>
+        </p:nvSpPr>
+        <p:spPr>
+          <a:xfrm>
+            <a:off x="838200" y="1825625"/>
+            <a:ext cx="10515600" cy="4667250"/>
+          </a:xfrm>
+        </p:spPr>
+        <p:txBody>
+          <a:bodyPr>
+            <a:normAutofit fontScale="92500" lnSpcReduction="20000"/>
+          </a:bodyPr>
+          <a:lstStyle/>
+          <a:p>
+            <a:r>
+              <a:rPr lang="en-US" dirty="0"/>
+              <a:t>If you want a fully automated ingestion pipeline.</a:t>
+            </a:r>
+          </a:p>
+          <a:p>
+            <a:pPr lvl="1"/>
+            <a:r>
+              <a:rPr lang="en-US" dirty="0"/>
+              <a:t>Simplest case is with a single variable (asset), you can use the </a:t>
+            </a:r>
+            <a:r>
+              <a:rPr lang="en-US" b="1" dirty="0" err="1"/>
+              <a:t>veda_dataset_pipeline</a:t>
+            </a:r>
+            <a:r>
+              <a:rPr lang="en-US" b="1" dirty="0"/>
+              <a:t> DAG</a:t>
+            </a:r>
+            <a:r>
+              <a:rPr lang="en-US" dirty="0"/>
+              <a:t> to create the collection and discover files from S3</a:t>
+            </a:r>
+          </a:p>
+          <a:p>
+            <a:pPr lvl="1"/>
+            <a:endParaRPr lang="en-US" dirty="0"/>
+          </a:p>
+          <a:p>
+            <a:r>
+              <a:rPr lang="en-US" dirty="0"/>
+              <a:t>If you want to discover items from S3 which need to be ingested (</a:t>
+            </a:r>
+            <a:r>
+              <a:rPr lang="en-US" b="1" dirty="0" err="1"/>
+              <a:t>veda_discover</a:t>
+            </a:r>
+            <a:r>
+              <a:rPr lang="en-US" b="1" dirty="0"/>
+              <a:t> DAG</a:t>
+            </a:r>
+            <a:r>
+              <a:rPr lang="en-US" dirty="0"/>
+              <a:t>). This pipeline can be used in conjunction with </a:t>
+            </a:r>
+            <a:r>
+              <a:rPr lang="en-US" b="1" dirty="0" err="1"/>
+              <a:t>veda_collection_pipeline</a:t>
+            </a:r>
+            <a:r>
+              <a:rPr lang="en-US" dirty="0"/>
+              <a:t> which created a multi-asset collection.</a:t>
+            </a:r>
+          </a:p>
+          <a:p>
+            <a:endParaRPr lang="en-US" dirty="0"/>
+          </a:p>
+          <a:p>
+            <a:r>
+              <a:rPr lang="en-US" dirty="0"/>
+              <a:t>If you want to ingest Feature/Vector data (e.g., station data). </a:t>
+            </a:r>
+          </a:p>
+          <a:p>
+            <a:pPr lvl="1"/>
+            <a:r>
+              <a:rPr lang="en-US" b="1" dirty="0" err="1"/>
+              <a:t>veda_ingest_vector</a:t>
+            </a:r>
+            <a:r>
+              <a:rPr lang="en-US" dirty="0"/>
+              <a:t> </a:t>
+            </a:r>
+            <a:r>
+              <a:rPr lang="en-US" b="1" dirty="0"/>
+              <a:t>DAG</a:t>
+            </a:r>
+          </a:p>
+          <a:p>
+            <a:pPr lvl="1"/>
+            <a:endParaRPr lang="en-US" b="1" dirty="0"/>
+          </a:p>
+          <a:p>
+            <a:r>
+              <a:rPr lang="en-US" dirty="0"/>
+              <a:t>If you want to create an ingestion pipeline that runs everyday, Airflow is great for that. You can create your own DAG!</a:t>
+            </a:r>
+          </a:p>
+          <a:p>
+            <a:endParaRPr lang="en-US" b="1" dirty="0"/>
+          </a:p>
+          <a:p>
+            <a:pPr marL="0" indent="0">
+              <a:buNone/>
+            </a:pPr>
+            <a:endParaRPr lang="en-US" dirty="0"/>
+          </a:p>
+          <a:p>
+            <a:endParaRPr lang="en-US" dirty="0"/>
+          </a:p>
+          <a:p>
+            <a:endParaRPr lang="en-US" dirty="0"/>
+          </a:p>
+        </p:txBody>
+      </p:sp>
+      <p:sp>
+        <p:nvSpPr>
+          <p:cNvPr id="4" name="Slide Number Placeholder 3">
+            <a:extLst>
+              <a:ext uri="{FF2B5EF4-FFF2-40B4-BE49-F238E27FC236}">
+                <a16:creationId xmlns:a16="http://schemas.microsoft.com/office/drawing/2014/main" id="{15C2474F-7E15-C81C-C5B1-839986FE3A2A}"/>
+              </a:ext>
+            </a:extLst>
+          </p:cNvPr>
+          <p:cNvSpPr>
+            <a:spLocks noGrp="1"/>
+          </p:cNvSpPr>
+          <p:nvPr>
+            <p:ph type="sldNum" sz="quarter" idx="12"/>
+          </p:nvPr>
+        </p:nvSpPr>
+        <p:spPr/>
+        <p:txBody>
+          <a:bodyPr/>
+          <a:lstStyle/>
+          <a:p>
+            <a:fld id="{5D28F90B-7FA5-3745-B8A4-A3C1EAD30D95}" type="slidenum">
+              <a:rPr lang="en-US" smtClean="0"/>
+              <a:t>10</a:t>
+            </a:fld>
+            <a:endParaRPr lang="en-US"/>
+          </a:p>
+        </p:txBody>
+      </p:sp>
+    </p:spTree>
+    <p:extLst>
+      <p:ext uri="{BB962C8B-B14F-4D97-AF65-F5344CB8AC3E}">
+        <p14:creationId xmlns:p14="http://schemas.microsoft.com/office/powerpoint/2010/main" val="927982038"/>
+      </p:ext>
+    </p:extLst>
+  </p:cSld>
+  <p:clrMapOvr>
+    <a:masterClrMapping/>
+  </p:clrMapOvr>
+</p:sld>
+</file>
+
+<file path=ppt/slides/slide11.xml><?xml version="1.0" encoding="utf-8"?>
 <p:sld xmlns:a="http://schemas.openxmlformats.org/drawingml/2006/main" xmlns:r="http://schemas.openxmlformats.org/officeDocument/2006/relationships" xmlns:p="http://schemas.openxmlformats.org/presentationml/2006/main">
   <p:cSld>
     <p:spTree>
@@ -15648,6 +16282,35 @@
           </a:p>
         </p:txBody>
       </p:sp>
+      <p:sp>
+        <p:nvSpPr>
+          <p:cNvPr id="4" name="Slide Number Placeholder 3">
+            <a:extLst>
+              <a:ext uri="{FF2B5EF4-FFF2-40B4-BE49-F238E27FC236}">
+                <a16:creationId xmlns:a16="http://schemas.microsoft.com/office/drawing/2014/main" id="{416B5884-40BF-7D96-BE01-32D8E381145D}"/>
+              </a:ext>
+            </a:extLst>
+          </p:cNvPr>
+          <p:cNvSpPr>
+            <a:spLocks noGrp="1"/>
+          </p:cNvSpPr>
+          <p:nvPr>
+            <p:ph type="sldNum" sz="quarter" idx="12"/>
+          </p:nvPr>
+        </p:nvSpPr>
+        <p:spPr/>
+        <p:txBody>
+          <a:bodyPr/>
+          <a:lstStyle/>
+          <a:p>
+            <a:fld id="{5D28F90B-7FA5-3745-B8A4-A3C1EAD30D95}" type="slidenum">
+              <a:rPr lang="en-US" smtClean="0"/>
+              <a:t>11</a:t>
+            </a:fld>
+            <a:endParaRPr lang="en-US"/>
+          </a:p>
+        </p:txBody>
+      </p:sp>
     </p:spTree>
     <p:extLst>
       <p:ext uri="{BB962C8B-B14F-4D97-AF65-F5344CB8AC3E}">
@@ -15661,7 +16324,7 @@
 </p:sld>
 </file>
 
-<file path=ppt/slides/slide11.xml><?xml version="1.0" encoding="utf-8"?>
+<file path=ppt/slides/slide12.xml><?xml version="1.0" encoding="utf-8"?>
 <p:sld xmlns:a="http://schemas.openxmlformats.org/drawingml/2006/main" xmlns:r="http://schemas.openxmlformats.org/officeDocument/2006/relationships" xmlns:p="http://schemas.openxmlformats.org/presentationml/2006/main">
   <p:cSld>
     <p:spTree>
@@ -15753,6 +16416,35 @@
           </a:graphicData>
         </a:graphic>
       </p:graphicFrame>
+      <p:sp>
+        <p:nvSpPr>
+          <p:cNvPr id="3" name="Slide Number Placeholder 2">
+            <a:extLst>
+              <a:ext uri="{FF2B5EF4-FFF2-40B4-BE49-F238E27FC236}">
+                <a16:creationId xmlns:a16="http://schemas.microsoft.com/office/drawing/2014/main" id="{92D07AD7-391B-EE80-6011-01F384A5E92D}"/>
+              </a:ext>
+            </a:extLst>
+          </p:cNvPr>
+          <p:cNvSpPr>
+            <a:spLocks noGrp="1"/>
+          </p:cNvSpPr>
+          <p:nvPr>
+            <p:ph type="sldNum" sz="quarter" idx="12"/>
+          </p:nvPr>
+        </p:nvSpPr>
+        <p:spPr/>
+        <p:txBody>
+          <a:bodyPr/>
+          <a:lstStyle/>
+          <a:p>
+            <a:fld id="{5D28F90B-7FA5-3745-B8A4-A3C1EAD30D95}" type="slidenum">
+              <a:rPr lang="en-US" smtClean="0"/>
+              <a:t>12</a:t>
+            </a:fld>
+            <a:endParaRPr lang="en-US"/>
+          </a:p>
+        </p:txBody>
+      </p:sp>
     </p:spTree>
     <p:extLst>
       <p:ext uri="{BB962C8B-B14F-4D97-AF65-F5344CB8AC3E}">
@@ -15766,7 +16458,7 @@
 </p:sld>
 </file>
 
-<file path=ppt/slides/slide12.xml><?xml version="1.0" encoding="utf-8"?>
+<file path=ppt/slides/slide13.xml><?xml version="1.0" encoding="utf-8"?>
 <p:sld xmlns:a="http://schemas.openxmlformats.org/drawingml/2006/main" xmlns:r="http://schemas.openxmlformats.org/officeDocument/2006/relationships" xmlns:p="http://schemas.openxmlformats.org/presentationml/2006/main">
   <p:cSld>
     <p:spTree>
@@ -15976,6 +16668,35 @@
           </a:p>
         </p:txBody>
       </p:sp>
+      <p:sp>
+        <p:nvSpPr>
+          <p:cNvPr id="4" name="Slide Number Placeholder 3">
+            <a:extLst>
+              <a:ext uri="{FF2B5EF4-FFF2-40B4-BE49-F238E27FC236}">
+                <a16:creationId xmlns:a16="http://schemas.microsoft.com/office/drawing/2014/main" id="{2704BB64-F845-8C79-0819-FBAF69FBD923}"/>
+              </a:ext>
+            </a:extLst>
+          </p:cNvPr>
+          <p:cNvSpPr>
+            <a:spLocks noGrp="1"/>
+          </p:cNvSpPr>
+          <p:nvPr>
+            <p:ph type="sldNum" sz="quarter" idx="12"/>
+          </p:nvPr>
+        </p:nvSpPr>
+        <p:spPr/>
+        <p:txBody>
+          <a:bodyPr/>
+          <a:lstStyle/>
+          <a:p>
+            <a:fld id="{5D28F90B-7FA5-3745-B8A4-A3C1EAD30D95}" type="slidenum">
+              <a:rPr lang="en-US" smtClean="0"/>
+              <a:t>13</a:t>
+            </a:fld>
+            <a:endParaRPr lang="en-US"/>
+          </a:p>
+        </p:txBody>
+      </p:sp>
     </p:spTree>
     <p:extLst>
       <p:ext uri="{BB962C8B-B14F-4D97-AF65-F5344CB8AC3E}">
@@ -15989,7 +16710,7 @@
 </p:sld>
 </file>
 
-<file path=ppt/slides/slide13.xml><?xml version="1.0" encoding="utf-8"?>
+<file path=ppt/slides/slide14.xml><?xml version="1.0" encoding="utf-8"?>
 <p:sld xmlns:a="http://schemas.openxmlformats.org/drawingml/2006/main" xmlns:r="http://schemas.openxmlformats.org/officeDocument/2006/relationships" xmlns:p="http://schemas.openxmlformats.org/presentationml/2006/main">
   <p:cSld>
     <p:spTree>
@@ -16196,6 +16917,35 @@
           </a:p>
         </p:txBody>
       </p:sp>
+      <p:sp>
+        <p:nvSpPr>
+          <p:cNvPr id="4" name="Slide Number Placeholder 3">
+            <a:extLst>
+              <a:ext uri="{FF2B5EF4-FFF2-40B4-BE49-F238E27FC236}">
+                <a16:creationId xmlns:a16="http://schemas.microsoft.com/office/drawing/2014/main" id="{6B369043-A206-5C7F-59AA-646DC9341AF1}"/>
+              </a:ext>
+            </a:extLst>
+          </p:cNvPr>
+          <p:cNvSpPr>
+            <a:spLocks noGrp="1"/>
+          </p:cNvSpPr>
+          <p:nvPr>
+            <p:ph type="sldNum" sz="quarter" idx="12"/>
+          </p:nvPr>
+        </p:nvSpPr>
+        <p:spPr/>
+        <p:txBody>
+          <a:bodyPr/>
+          <a:lstStyle/>
+          <a:p>
+            <a:fld id="{5D28F90B-7FA5-3745-B8A4-A3C1EAD30D95}" type="slidenum">
+              <a:rPr lang="en-US" smtClean="0"/>
+              <a:t>14</a:t>
+            </a:fld>
+            <a:endParaRPr lang="en-US"/>
+          </a:p>
+        </p:txBody>
+      </p:sp>
     </p:spTree>
     <p:extLst>
       <p:ext uri="{BB962C8B-B14F-4D97-AF65-F5344CB8AC3E}">
@@ -16209,7 +16959,7 @@
 </p:sld>
 </file>
 
-<file path=ppt/slides/slide14.xml><?xml version="1.0" encoding="utf-8"?>
+<file path=ppt/slides/slide15.xml><?xml version="1.0" encoding="utf-8"?>
 <p:sld xmlns:a="http://schemas.openxmlformats.org/drawingml/2006/main" xmlns:r="http://schemas.openxmlformats.org/officeDocument/2006/relationships" xmlns:p="http://schemas.openxmlformats.org/presentationml/2006/main">
   <p:cSld>
     <p:spTree>
@@ -16264,7 +17014,7 @@
           <a:p>
             <a:r>
               <a:rPr lang="en-US" dirty="0"/>
-              <a:t>Troubleshooting	</a:t>
+              <a:t>Troubleshooting	 in Airflow</a:t>
             </a:r>
           </a:p>
         </p:txBody>
@@ -16319,7 +17069,14 @@
             <a:pPr lvl="1"/>
             <a:r>
               <a:rPr lang="en-US" dirty="0"/>
-              <a:t>Solution: Make sure that you run a collection pipeline first, then run the discover items pipeline</a:t>
+              <a:t>Solution 1: Make sure that you run a collection pipeline first, then run the discover items pipeline</a:t>
+            </a:r>
+          </a:p>
+          <a:p>
+            <a:pPr lvl="1"/>
+            <a:r>
+              <a:rPr lang="en-US" dirty="0"/>
+              <a:t>Solution 2: Run the Ingest API and create a collection with multi-assets, then run the discover items pipeline in Airflow.</a:t>
             </a:r>
           </a:p>
           <a:p>
@@ -16342,6 +17099,35 @@
           </a:p>
           <a:p>
             <a:endParaRPr lang="en-US" dirty="0"/>
+          </a:p>
+        </p:txBody>
+      </p:sp>
+      <p:sp>
+        <p:nvSpPr>
+          <p:cNvPr id="4" name="Slide Number Placeholder 3">
+            <a:extLst>
+              <a:ext uri="{FF2B5EF4-FFF2-40B4-BE49-F238E27FC236}">
+                <a16:creationId xmlns:a16="http://schemas.microsoft.com/office/drawing/2014/main" id="{72F07E60-BDCF-F23D-C9BE-ABF88A9848DC}"/>
+              </a:ext>
+            </a:extLst>
+          </p:cNvPr>
+          <p:cNvSpPr>
+            <a:spLocks noGrp="1"/>
+          </p:cNvSpPr>
+          <p:nvPr>
+            <p:ph type="sldNum" sz="quarter" idx="12"/>
+          </p:nvPr>
+        </p:nvSpPr>
+        <p:spPr/>
+        <p:txBody>
+          <a:bodyPr/>
+          <a:lstStyle/>
+          <a:p>
+            <a:fld id="{5D28F90B-7FA5-3745-B8A4-A3C1EAD30D95}" type="slidenum">
+              <a:rPr lang="en-US" smtClean="0"/>
+              <a:t>15</a:t>
+            </a:fld>
+            <a:endParaRPr lang="en-US"/>
           </a:p>
         </p:txBody>
       </p:sp>
@@ -16358,7 +17144,7 @@
 </p:sld>
 </file>
 
-<file path=ppt/slides/slide15.xml><?xml version="1.0" encoding="utf-8"?>
+<file path=ppt/slides/slide16.xml><?xml version="1.0" encoding="utf-8"?>
 <p:sld xmlns:a="http://schemas.openxmlformats.org/drawingml/2006/main" xmlns:r="http://schemas.openxmlformats.org/officeDocument/2006/relationships" xmlns:p="http://schemas.openxmlformats.org/presentationml/2006/main">
   <p:cSld>
     <p:spTree>
@@ -17182,6 +17968,35 @@
           </a:p>
         </p:txBody>
       </p:sp>
+      <p:sp>
+        <p:nvSpPr>
+          <p:cNvPr id="5" name="Slide Number Placeholder 4">
+            <a:extLst>
+              <a:ext uri="{FF2B5EF4-FFF2-40B4-BE49-F238E27FC236}">
+                <a16:creationId xmlns:a16="http://schemas.microsoft.com/office/drawing/2014/main" id="{0ECBCA80-B10A-BDB6-AAEA-54FA99891426}"/>
+              </a:ext>
+            </a:extLst>
+          </p:cNvPr>
+          <p:cNvSpPr>
+            <a:spLocks noGrp="1"/>
+          </p:cNvSpPr>
+          <p:nvPr>
+            <p:ph type="sldNum" sz="quarter" idx="12"/>
+          </p:nvPr>
+        </p:nvSpPr>
+        <p:spPr/>
+        <p:txBody>
+          <a:bodyPr/>
+          <a:lstStyle/>
+          <a:p>
+            <a:fld id="{5D28F90B-7FA5-3745-B8A4-A3C1EAD30D95}" type="slidenum">
+              <a:rPr lang="en-US" smtClean="0"/>
+              <a:t>16</a:t>
+            </a:fld>
+            <a:endParaRPr lang="en-US"/>
+          </a:p>
+        </p:txBody>
+      </p:sp>
     </p:spTree>
     <p:extLst>
       <p:ext uri="{BB962C8B-B14F-4D97-AF65-F5344CB8AC3E}">
@@ -17195,7 +18010,7 @@
 </p:sld>
 </file>
 
-<file path=ppt/slides/slide16.xml><?xml version="1.0" encoding="utf-8"?>
+<file path=ppt/slides/slide17.xml><?xml version="1.0" encoding="utf-8"?>
 <p:sld xmlns:a="http://schemas.openxmlformats.org/drawingml/2006/main" xmlns:r="http://schemas.openxmlformats.org/officeDocument/2006/relationships" xmlns:p="http://schemas.openxmlformats.org/presentationml/2006/main">
   <p:cSld>
     <p:spTree>
@@ -17287,6 +18102,35 @@
           </a:graphicData>
         </a:graphic>
       </p:graphicFrame>
+      <p:sp>
+        <p:nvSpPr>
+          <p:cNvPr id="3" name="Slide Number Placeholder 2">
+            <a:extLst>
+              <a:ext uri="{FF2B5EF4-FFF2-40B4-BE49-F238E27FC236}">
+                <a16:creationId xmlns:a16="http://schemas.microsoft.com/office/drawing/2014/main" id="{14F1F3EF-89C0-12BF-0432-486EC3C954C7}"/>
+              </a:ext>
+            </a:extLst>
+          </p:cNvPr>
+          <p:cNvSpPr>
+            <a:spLocks noGrp="1"/>
+          </p:cNvSpPr>
+          <p:nvPr>
+            <p:ph type="sldNum" sz="quarter" idx="12"/>
+          </p:nvPr>
+        </p:nvSpPr>
+        <p:spPr/>
+        <p:txBody>
+          <a:bodyPr/>
+          <a:lstStyle/>
+          <a:p>
+            <a:fld id="{5D28F90B-7FA5-3745-B8A4-A3C1EAD30D95}" type="slidenum">
+              <a:rPr lang="en-US" smtClean="0"/>
+              <a:t>17</a:t>
+            </a:fld>
+            <a:endParaRPr lang="en-US"/>
+          </a:p>
+        </p:txBody>
+      </p:sp>
     </p:spTree>
     <p:extLst>
       <p:ext uri="{BB962C8B-B14F-4D97-AF65-F5344CB8AC3E}">
@@ -17300,7 +18144,7 @@
 </p:sld>
 </file>
 
-<file path=ppt/slides/slide17.xml><?xml version="1.0" encoding="utf-8"?>
+<file path=ppt/slides/slide18.xml><?xml version="1.0" encoding="utf-8"?>
 <p:sld xmlns:a="http://schemas.openxmlformats.org/drawingml/2006/main" xmlns:r="http://schemas.openxmlformats.org/officeDocument/2006/relationships" xmlns:p="http://schemas.openxmlformats.org/presentationml/2006/main">
   <p:cSld>
     <p:spTree>
@@ -17379,7 +18223,7 @@
         <p:spPr>
           <a:xfrm>
             <a:off x="857839" y="1234911"/>
-            <a:ext cx="10492033" cy="1754326"/>
+            <a:ext cx="10492033" cy="2215991"/>
           </a:xfrm>
           <a:prstGeom prst="rect">
             <a:avLst/>
@@ -17397,17 +18241,17 @@
               <a:buChar char="•"/>
             </a:pPr>
             <a:r>
-              <a:rPr lang="en-US" dirty="0"/>
+              <a:rPr lang="en-US" sz="2000" dirty="0"/>
               <a:t>The goal is to take the STAC collection that was created during ingestion, and render it within our </a:t>
             </a:r>
             <a:r>
-              <a:rPr lang="en-US" dirty="0">
+              <a:rPr lang="en-US" sz="2000" dirty="0">
                 <a:hlinkClick r:id="rId2"/>
               </a:rPr>
               <a:t>E&amp;A </a:t>
             </a:r>
             <a:r>
-              <a:rPr lang="en-US" dirty="0"/>
+              <a:rPr lang="en-US" sz="2000" dirty="0"/>
               <a:t>.</a:t>
             </a:r>
           </a:p>
@@ -17417,15 +18261,15 @@
               <a:buChar char="•"/>
             </a:pPr>
             <a:r>
-              <a:rPr lang="en-US" dirty="0"/>
+              <a:rPr lang="en-US" sz="2000" dirty="0"/>
               <a:t>Requires a markdown file which our </a:t>
             </a:r>
             <a:r>
-              <a:rPr lang="en-US" dirty="0" err="1"/>
+              <a:rPr lang="en-US" sz="2000" dirty="0" err="1"/>
               <a:t>veda-ui</a:t>
             </a:r>
             <a:r>
-              <a:rPr lang="en-US" dirty="0"/>
+              <a:rPr lang="en-US" sz="2000" dirty="0"/>
               <a:t> can read and apply</a:t>
             </a:r>
           </a:p>
@@ -17435,17 +18279,17 @@
               <a:buChar char="•"/>
             </a:pPr>
             <a:r>
-              <a:rPr lang="en-US" dirty="0"/>
+              <a:rPr lang="en-US" sz="2000" dirty="0"/>
               <a:t>Example directory with </a:t>
             </a:r>
             <a:r>
-              <a:rPr lang="en-US" dirty="0">
+              <a:rPr lang="en-US" sz="2000" dirty="0">
                 <a:hlinkClick r:id="rId3"/>
               </a:rPr>
               <a:t>markdowns</a:t>
             </a:r>
             <a:r>
-              <a:rPr lang="en-US" dirty="0"/>
+              <a:rPr lang="en-US" sz="2000" dirty="0"/>
               <a:t> </a:t>
             </a:r>
           </a:p>
@@ -17454,7 +18298,7 @@
               <a:buFont typeface="Arial" panose="020B0604020202020204" pitchFamily="34" charset="0"/>
               <a:buChar char="•"/>
             </a:pPr>
-            <a:endParaRPr lang="en-US" dirty="0"/>
+            <a:endParaRPr lang="en-US" sz="2000" dirty="0"/>
           </a:p>
           <a:p>
             <a:pPr marL="285750" indent="-285750">
@@ -17462,13 +18306,13 @@
               <a:buChar char="•"/>
             </a:pPr>
             <a:r>
-              <a:rPr lang="en-US" dirty="0">
+              <a:rPr lang="en-US" sz="2000" dirty="0">
                 <a:hlinkClick r:id="rId4"/>
               </a:rPr>
               <a:t>Fldas-soil-moisture-anomalies</a:t>
             </a:r>
             <a:r>
-              <a:rPr lang="en-US" dirty="0"/>
+              <a:rPr lang="en-US" sz="2000" dirty="0"/>
               <a:t> (example)</a:t>
             </a:r>
           </a:p>
@@ -17491,13 +18335,18 @@
         </p:nvSpPr>
         <p:spPr>
           <a:xfrm>
-            <a:off x="725863" y="5118754"/>
-            <a:ext cx="9605914" cy="1754326"/>
+            <a:off x="857839" y="4475803"/>
+            <a:ext cx="10276326" cy="1938992"/>
           </a:xfrm>
           <a:prstGeom prst="rect">
             <a:avLst/>
           </a:prstGeom>
-          <a:noFill/>
+          <a:solidFill>
+            <a:schemeClr val="accent2">
+              <a:lumMod val="20000"/>
+              <a:lumOff val="80000"/>
+            </a:schemeClr>
+          </a:solidFill>
         </p:spPr>
         <p:txBody>
           <a:bodyPr wrap="square" rtlCol="0">
@@ -17506,36 +18355,36 @@
           <a:lstStyle/>
           <a:p>
             <a:r>
-              <a:rPr lang="en-US" dirty="0"/>
+              <a:rPr lang="en-US" sz="2000" dirty="0"/>
               <a:t>New Creation (author Kyle Lesinger):</a:t>
             </a:r>
           </a:p>
           <a:p>
             <a:r>
-              <a:rPr lang="en-US" dirty="0"/>
+              <a:rPr lang="en-US" sz="2000" dirty="0"/>
               <a:t>1.) Fill out the information with </a:t>
             </a:r>
             <a:r>
-              <a:rPr lang="en-US" dirty="0">
+              <a:rPr lang="en-US" sz="2000" dirty="0">
                 <a:hlinkClick r:id="rId5"/>
               </a:rPr>
               <a:t>the Word document for each layer that we want</a:t>
             </a:r>
-            <a:endParaRPr lang="en-US" dirty="0"/>
-          </a:p>
-          <a:p>
-            <a:r>
-              <a:rPr lang="en-US" dirty="0"/>
+            <a:endParaRPr lang="en-US" sz="2000" dirty="0"/>
+          </a:p>
+          <a:p>
+            <a:r>
+              <a:rPr lang="en-US" sz="2000" dirty="0"/>
               <a:t>2.) Use the </a:t>
             </a:r>
             <a:r>
-              <a:rPr lang="en-US" dirty="0">
+              <a:rPr lang="en-US" sz="2000" dirty="0">
                 <a:hlinkClick r:id="rId6"/>
               </a:rPr>
               <a:t>docx2mdx converter </a:t>
             </a:r>
             <a:r>
-              <a:rPr lang="en-US" dirty="0"/>
+              <a:rPr lang="en-US" sz="2000" dirty="0"/>
               <a:t>to write the markdown file</a:t>
             </a:r>
           </a:p>
@@ -17545,7 +18394,7 @@
               <a:buChar char="•"/>
             </a:pPr>
             <a:r>
-              <a:rPr lang="en-US" dirty="0"/>
+              <a:rPr lang="en-US" sz="2000" dirty="0"/>
               <a:t>Clone repo</a:t>
             </a:r>
           </a:p>
@@ -17555,7 +18404,7 @@
               <a:buChar char="•"/>
             </a:pPr>
             <a:r>
-              <a:rPr lang="en-US" dirty="0"/>
+              <a:rPr lang="en-US" sz="2000" dirty="0"/>
               <a:t>Run script to create markdown from layers in Word (see README)</a:t>
             </a:r>
           </a:p>
@@ -17565,62 +18414,26 @@
               <a:buChar char="•"/>
             </a:pPr>
             <a:r>
-              <a:rPr lang="en-US" dirty="0"/>
+              <a:rPr lang="en-US" sz="2000" dirty="0"/>
               <a:t>Suggestion: Use </a:t>
             </a:r>
             <a:r>
-              <a:rPr lang="en-US" dirty="0" err="1"/>
+              <a:rPr lang="en-US" sz="2000" dirty="0" err="1"/>
               <a:t>VsCode</a:t>
             </a:r>
             <a:r>
-              <a:rPr lang="en-US" dirty="0"/>
+              <a:rPr lang="en-US" sz="2000" dirty="0"/>
               <a:t>	</a:t>
             </a:r>
           </a:p>
         </p:txBody>
       </p:sp>
-    </p:spTree>
-    <p:extLst>
-      <p:ext uri="{BB962C8B-B14F-4D97-AF65-F5344CB8AC3E}">
-        <p14:creationId xmlns:p14="http://schemas.microsoft.com/office/powerpoint/2010/main" val="1496199853"/>
-      </p:ext>
-    </p:extLst>
-  </p:cSld>
-  <p:clrMapOvr>
-    <a:masterClrMapping/>
-  </p:clrMapOvr>
-</p:sld>
-</file>
-
-<file path=ppt/slides/slide18.xml><?xml version="1.0" encoding="utf-8"?>
-<p:sld xmlns:a="http://schemas.openxmlformats.org/drawingml/2006/main" xmlns:r="http://schemas.openxmlformats.org/officeDocument/2006/relationships" xmlns:p="http://schemas.openxmlformats.org/presentationml/2006/main">
-  <p:cSld>
-    <p:spTree>
-      <p:nvGrpSpPr>
-        <p:cNvPr id="1" name="">
-          <a:extLst>
-            <a:ext uri="{FF2B5EF4-FFF2-40B4-BE49-F238E27FC236}">
-              <a16:creationId xmlns:a16="http://schemas.microsoft.com/office/drawing/2014/main" id="{7571DC34-DE7C-5A13-4ECF-C37A2F6636E3}"/>
-            </a:ext>
-          </a:extLst>
-        </p:cNvPr>
-        <p:cNvGrpSpPr/>
-        <p:nvPr/>
-      </p:nvGrpSpPr>
-      <p:grpSpPr>
-        <a:xfrm>
-          <a:off x="0" y="0"/>
-          <a:ext cx="0" cy="0"/>
-          <a:chOff x="0" y="0"/>
-          <a:chExt cx="0" cy="0"/>
-        </a:xfrm>
-      </p:grpSpPr>
       <p:sp>
         <p:nvSpPr>
-          <p:cNvPr id="2" name="Title 1">
+          <p:cNvPr id="4" name="Slide Number Placeholder 3">
             <a:extLst>
               <a:ext uri="{FF2B5EF4-FFF2-40B4-BE49-F238E27FC236}">
-                <a16:creationId xmlns:a16="http://schemas.microsoft.com/office/drawing/2014/main" id="{19F644FC-DB5F-160A-F024-86D30D783299}"/>
+                <a16:creationId xmlns:a16="http://schemas.microsoft.com/office/drawing/2014/main" id="{094A392B-D298-6C9B-9D6F-E0A99B20A3E5}"/>
               </a:ext>
             </a:extLst>
           </p:cNvPr>
@@ -17628,112 +18441,26 @@
             <a:spLocks noGrp="1"/>
           </p:cNvSpPr>
           <p:nvPr>
-            <p:ph type="title"/>
+            <p:ph type="sldNum" sz="quarter" idx="12"/>
           </p:nvPr>
         </p:nvSpPr>
-        <p:spPr>
-          <a:xfrm>
-            <a:off x="725863" y="1"/>
-            <a:ext cx="10897385" cy="961534"/>
-          </a:xfrm>
-          <a:solidFill>
-            <a:schemeClr val="accent5">
-              <a:lumMod val="40000"/>
-              <a:lumOff val="60000"/>
-            </a:schemeClr>
-          </a:solidFill>
-        </p:spPr>
+        <p:spPr/>
         <p:txBody>
-          <a:bodyPr vert="horz" lIns="91440" tIns="45720" rIns="91440" bIns="45720" rtlCol="0" anchor="ctr">
-            <a:normAutofit/>
-          </a:bodyPr>
+          <a:bodyPr/>
           <a:lstStyle/>
           <a:p>
-            <a:r>
-              <a:rPr lang="en-US" dirty="0"/>
-              <a:t>Time for Ingestion Practice	</a:t>
-            </a:r>
+            <a:fld id="{5D28F90B-7FA5-3745-B8A4-A3C1EAD30D95}" type="slidenum">
+              <a:rPr lang="en-US" smtClean="0"/>
+              <a:t>18</a:t>
+            </a:fld>
+            <a:endParaRPr lang="en-US"/>
           </a:p>
         </p:txBody>
       </p:sp>
-      <p:sp>
-        <p:nvSpPr>
-          <p:cNvPr id="3" name="TextBox 2">
-            <a:extLst>
-              <a:ext uri="{FF2B5EF4-FFF2-40B4-BE49-F238E27FC236}">
-                <a16:creationId xmlns:a16="http://schemas.microsoft.com/office/drawing/2014/main" id="{CF281A92-70DD-91BA-1718-35D94C422D09}"/>
-              </a:ext>
-            </a:extLst>
-          </p:cNvPr>
-          <p:cNvSpPr txBox="1"/>
-          <p:nvPr/>
-        </p:nvSpPr>
-        <p:spPr>
-          <a:xfrm>
-            <a:off x="725863" y="1239651"/>
-            <a:ext cx="10492033" cy="369332"/>
-          </a:xfrm>
-          <a:prstGeom prst="rect">
-            <a:avLst/>
-          </a:prstGeom>
-          <a:noFill/>
-        </p:spPr>
-        <p:txBody>
-          <a:bodyPr wrap="square" rtlCol="0">
-            <a:spAutoFit/>
-          </a:bodyPr>
-          <a:lstStyle/>
-          <a:p>
-            <a:pPr marL="285750" indent="-285750">
-              <a:buFont typeface="Arial" panose="020B0604020202020204" pitchFamily="34" charset="0"/>
-              <a:buChar char="•"/>
-            </a:pPr>
-            <a:r>
-              <a:rPr lang="en-US" dirty="0"/>
-              <a:t>Ingestion </a:t>
-            </a:r>
-            <a:r>
-              <a:rPr lang="en-US" dirty="0">
-                <a:hlinkClick r:id="rId2"/>
-              </a:rPr>
-              <a:t>example json config files</a:t>
-            </a:r>
-            <a:endParaRPr lang="en-US" dirty="0"/>
-          </a:p>
-        </p:txBody>
-      </p:sp>
-      <p:graphicFrame>
-        <p:nvGraphicFramePr>
-          <p:cNvPr id="4" name="Diagram 3">
-            <a:extLst>
-              <a:ext uri="{FF2B5EF4-FFF2-40B4-BE49-F238E27FC236}">
-                <a16:creationId xmlns:a16="http://schemas.microsoft.com/office/drawing/2014/main" id="{C9F34EED-A0D9-37E2-14E1-C872E43DB53D}"/>
-              </a:ext>
-            </a:extLst>
-          </p:cNvPr>
-          <p:cNvGraphicFramePr/>
-          <p:nvPr>
-            <p:extLst>
-              <p:ext uri="{D42A27DB-BD31-4B8C-83A1-F6EECF244321}">
-                <p14:modId xmlns:p14="http://schemas.microsoft.com/office/powerpoint/2010/main" val="2910084092"/>
-              </p:ext>
-            </p:extLst>
-          </p:nvPr>
-        </p:nvGraphicFramePr>
-        <p:xfrm>
-          <a:off x="1394159" y="851367"/>
-          <a:ext cx="9155440" cy="5418667"/>
-        </p:xfrm>
-        <a:graphic>
-          <a:graphicData uri="http://schemas.openxmlformats.org/drawingml/2006/diagram">
-            <dgm:relIds xmlns:dgm="http://schemas.openxmlformats.org/drawingml/2006/diagram" xmlns:r="http://schemas.openxmlformats.org/officeDocument/2006/relationships" r:dm="rId3" r:lo="rId4" r:qs="rId5" r:cs="rId6"/>
-          </a:graphicData>
-        </a:graphic>
-      </p:graphicFrame>
     </p:spTree>
     <p:extLst>
       <p:ext uri="{BB962C8B-B14F-4D97-AF65-F5344CB8AC3E}">
-        <p14:creationId xmlns:p14="http://schemas.microsoft.com/office/powerpoint/2010/main" val="3257850134"/>
+        <p14:creationId xmlns:p14="http://schemas.microsoft.com/office/powerpoint/2010/main" val="1496199853"/>
       </p:ext>
     </p:extLst>
   </p:cSld>
@@ -17866,14 +18593,14 @@
           <p:nvPr>
             <p:extLst>
               <p:ext uri="{D42A27DB-BD31-4B8C-83A1-F6EECF244321}">
-                <p14:modId xmlns:p14="http://schemas.microsoft.com/office/powerpoint/2010/main" val="2675295717"/>
+                <p14:modId xmlns:p14="http://schemas.microsoft.com/office/powerpoint/2010/main" val="3679453513"/>
               </p:ext>
             </p:extLst>
           </p:nvPr>
         </p:nvGraphicFramePr>
         <p:xfrm>
-          <a:off x="1228906" y="961535"/>
-          <a:ext cx="9155440" cy="5418667"/>
+          <a:off x="1246879" y="1687398"/>
+          <a:ext cx="9155440" cy="4524840"/>
         </p:xfrm>
         <a:graphic>
           <a:graphicData uri="http://schemas.openxmlformats.org/drawingml/2006/diagram">
@@ -17881,6 +18608,35 @@
           </a:graphicData>
         </a:graphic>
       </p:graphicFrame>
+      <p:sp>
+        <p:nvSpPr>
+          <p:cNvPr id="6" name="Slide Number Placeholder 5">
+            <a:extLst>
+              <a:ext uri="{FF2B5EF4-FFF2-40B4-BE49-F238E27FC236}">
+                <a16:creationId xmlns:a16="http://schemas.microsoft.com/office/drawing/2014/main" id="{0A973DD6-61F8-5828-4AD5-192E5156E25D}"/>
+              </a:ext>
+            </a:extLst>
+          </p:cNvPr>
+          <p:cNvSpPr>
+            <a:spLocks noGrp="1"/>
+          </p:cNvSpPr>
+          <p:nvPr>
+            <p:ph type="sldNum" sz="quarter" idx="12"/>
+          </p:nvPr>
+        </p:nvSpPr>
+        <p:spPr/>
+        <p:txBody>
+          <a:bodyPr/>
+          <a:lstStyle/>
+          <a:p>
+            <a:fld id="{5D28F90B-7FA5-3745-B8A4-A3C1EAD30D95}" type="slidenum">
+              <a:rPr lang="en-US" smtClean="0"/>
+              <a:t>19</a:t>
+            </a:fld>
+            <a:endParaRPr lang="en-US"/>
+          </a:p>
+        </p:txBody>
+      </p:sp>
     </p:spTree>
     <p:extLst>
       <p:ext uri="{BB962C8B-B14F-4D97-AF65-F5344CB8AC3E}">
@@ -18080,10 +18836,507 @@
           </a:extLst>
         </p:spPr>
       </p:pic>
+      <p:sp>
+        <p:nvSpPr>
+          <p:cNvPr id="4" name="Slide Number Placeholder 3">
+            <a:extLst>
+              <a:ext uri="{FF2B5EF4-FFF2-40B4-BE49-F238E27FC236}">
+                <a16:creationId xmlns:a16="http://schemas.microsoft.com/office/drawing/2014/main" id="{B4EDC076-79E8-9CF8-3C1F-BEADF8B52A70}"/>
+              </a:ext>
+            </a:extLst>
+          </p:cNvPr>
+          <p:cNvSpPr>
+            <a:spLocks noGrp="1"/>
+          </p:cNvSpPr>
+          <p:nvPr>
+            <p:ph type="sldNum" sz="quarter" idx="12"/>
+          </p:nvPr>
+        </p:nvSpPr>
+        <p:spPr/>
+        <p:txBody>
+          <a:bodyPr/>
+          <a:lstStyle/>
+          <a:p>
+            <a:fld id="{5D28F90B-7FA5-3745-B8A4-A3C1EAD30D95}" type="slidenum">
+              <a:rPr lang="en-US" smtClean="0"/>
+              <a:t>2</a:t>
+            </a:fld>
+            <a:endParaRPr lang="en-US"/>
+          </a:p>
+        </p:txBody>
+      </p:sp>
     </p:spTree>
     <p:extLst>
       <p:ext uri="{BB962C8B-B14F-4D97-AF65-F5344CB8AC3E}">
         <p14:creationId xmlns:p14="http://schemas.microsoft.com/office/powerpoint/2010/main" val="3126500712"/>
+      </p:ext>
+    </p:extLst>
+  </p:cSld>
+  <p:clrMapOvr>
+    <a:masterClrMapping/>
+  </p:clrMapOvr>
+</p:sld>
+</file>
+
+<file path=ppt/slides/slide20.xml><?xml version="1.0" encoding="utf-8"?>
+<p:sld xmlns:a="http://schemas.openxmlformats.org/drawingml/2006/main" xmlns:r="http://schemas.openxmlformats.org/officeDocument/2006/relationships" xmlns:p="http://schemas.openxmlformats.org/presentationml/2006/main">
+  <p:cSld>
+    <p:spTree>
+      <p:nvGrpSpPr>
+        <p:cNvPr id="1" name="">
+          <a:extLst>
+            <a:ext uri="{FF2B5EF4-FFF2-40B4-BE49-F238E27FC236}">
+              <a16:creationId xmlns:a16="http://schemas.microsoft.com/office/drawing/2014/main" id="{7571DC34-DE7C-5A13-4ECF-C37A2F6636E3}"/>
+            </a:ext>
+          </a:extLst>
+        </p:cNvPr>
+        <p:cNvGrpSpPr/>
+        <p:nvPr/>
+      </p:nvGrpSpPr>
+      <p:grpSpPr>
+        <a:xfrm>
+          <a:off x="0" y="0"/>
+          <a:ext cx="0" cy="0"/>
+          <a:chOff x="0" y="0"/>
+          <a:chExt cx="0" cy="0"/>
+        </a:xfrm>
+      </p:grpSpPr>
+      <p:sp>
+        <p:nvSpPr>
+          <p:cNvPr id="2" name="Title 1">
+            <a:extLst>
+              <a:ext uri="{FF2B5EF4-FFF2-40B4-BE49-F238E27FC236}">
+                <a16:creationId xmlns:a16="http://schemas.microsoft.com/office/drawing/2014/main" id="{19F644FC-DB5F-160A-F024-86D30D783299}"/>
+              </a:ext>
+            </a:extLst>
+          </p:cNvPr>
+          <p:cNvSpPr>
+            <a:spLocks noGrp="1"/>
+          </p:cNvSpPr>
+          <p:nvPr>
+            <p:ph type="title"/>
+          </p:nvPr>
+        </p:nvSpPr>
+        <p:spPr>
+          <a:xfrm>
+            <a:off x="725863" y="1"/>
+            <a:ext cx="10897385" cy="961534"/>
+          </a:xfrm>
+          <a:solidFill>
+            <a:schemeClr val="accent5">
+              <a:lumMod val="40000"/>
+              <a:lumOff val="60000"/>
+            </a:schemeClr>
+          </a:solidFill>
+        </p:spPr>
+        <p:txBody>
+          <a:bodyPr vert="horz" lIns="91440" tIns="45720" rIns="91440" bIns="45720" rtlCol="0" anchor="ctr">
+            <a:normAutofit/>
+          </a:bodyPr>
+          <a:lstStyle/>
+          <a:p>
+            <a:r>
+              <a:rPr lang="en-US" dirty="0"/>
+              <a:t>Time for Ingestion Practice	</a:t>
+            </a:r>
+          </a:p>
+        </p:txBody>
+      </p:sp>
+      <p:sp>
+        <p:nvSpPr>
+          <p:cNvPr id="3" name="TextBox 2">
+            <a:extLst>
+              <a:ext uri="{FF2B5EF4-FFF2-40B4-BE49-F238E27FC236}">
+                <a16:creationId xmlns:a16="http://schemas.microsoft.com/office/drawing/2014/main" id="{CF281A92-70DD-91BA-1718-35D94C422D09}"/>
+              </a:ext>
+            </a:extLst>
+          </p:cNvPr>
+          <p:cNvSpPr txBox="1"/>
+          <p:nvPr/>
+        </p:nvSpPr>
+        <p:spPr>
+          <a:xfrm>
+            <a:off x="725863" y="1239651"/>
+            <a:ext cx="10492033" cy="369332"/>
+          </a:xfrm>
+          <a:prstGeom prst="rect">
+            <a:avLst/>
+          </a:prstGeom>
+          <a:noFill/>
+        </p:spPr>
+        <p:txBody>
+          <a:bodyPr wrap="square" rtlCol="0">
+            <a:spAutoFit/>
+          </a:bodyPr>
+          <a:lstStyle/>
+          <a:p>
+            <a:pPr marL="285750" indent="-285750">
+              <a:buFont typeface="Arial" panose="020B0604020202020204" pitchFamily="34" charset="0"/>
+              <a:buChar char="•"/>
+            </a:pPr>
+            <a:r>
+              <a:rPr lang="en-US" dirty="0"/>
+              <a:t>Ingestion </a:t>
+            </a:r>
+            <a:r>
+              <a:rPr lang="en-US" dirty="0">
+                <a:hlinkClick r:id="rId2"/>
+              </a:rPr>
+              <a:t>example json config files</a:t>
+            </a:r>
+            <a:endParaRPr lang="en-US" dirty="0"/>
+          </a:p>
+        </p:txBody>
+      </p:sp>
+      <p:graphicFrame>
+        <p:nvGraphicFramePr>
+          <p:cNvPr id="4" name="Diagram 3">
+            <a:extLst>
+              <a:ext uri="{FF2B5EF4-FFF2-40B4-BE49-F238E27FC236}">
+                <a16:creationId xmlns:a16="http://schemas.microsoft.com/office/drawing/2014/main" id="{C9F34EED-A0D9-37E2-14E1-C872E43DB53D}"/>
+              </a:ext>
+            </a:extLst>
+          </p:cNvPr>
+          <p:cNvGraphicFramePr/>
+          <p:nvPr>
+            <p:extLst>
+              <p:ext uri="{D42A27DB-BD31-4B8C-83A1-F6EECF244321}">
+                <p14:modId xmlns:p14="http://schemas.microsoft.com/office/powerpoint/2010/main" val="2795813360"/>
+              </p:ext>
+            </p:extLst>
+          </p:nvPr>
+        </p:nvGraphicFramePr>
+        <p:xfrm>
+          <a:off x="1518280" y="2091064"/>
+          <a:ext cx="9155440" cy="3809638"/>
+        </p:xfrm>
+        <a:graphic>
+          <a:graphicData uri="http://schemas.openxmlformats.org/drawingml/2006/diagram">
+            <dgm:relIds xmlns:dgm="http://schemas.openxmlformats.org/drawingml/2006/diagram" xmlns:r="http://schemas.openxmlformats.org/officeDocument/2006/relationships" r:dm="rId3" r:lo="rId4" r:qs="rId5" r:cs="rId6"/>
+          </a:graphicData>
+        </a:graphic>
+      </p:graphicFrame>
+      <p:sp>
+        <p:nvSpPr>
+          <p:cNvPr id="5" name="Slide Number Placeholder 4">
+            <a:extLst>
+              <a:ext uri="{FF2B5EF4-FFF2-40B4-BE49-F238E27FC236}">
+                <a16:creationId xmlns:a16="http://schemas.microsoft.com/office/drawing/2014/main" id="{B1BBD222-EE52-3BEB-D457-171B88B116A4}"/>
+              </a:ext>
+            </a:extLst>
+          </p:cNvPr>
+          <p:cNvSpPr>
+            <a:spLocks noGrp="1"/>
+          </p:cNvSpPr>
+          <p:nvPr>
+            <p:ph type="sldNum" sz="quarter" idx="12"/>
+          </p:nvPr>
+        </p:nvSpPr>
+        <p:spPr/>
+        <p:txBody>
+          <a:bodyPr/>
+          <a:lstStyle/>
+          <a:p>
+            <a:fld id="{5D28F90B-7FA5-3745-B8A4-A3C1EAD30D95}" type="slidenum">
+              <a:rPr lang="en-US" smtClean="0"/>
+              <a:t>20</a:t>
+            </a:fld>
+            <a:endParaRPr lang="en-US"/>
+          </a:p>
+        </p:txBody>
+      </p:sp>
+    </p:spTree>
+    <p:extLst>
+      <p:ext uri="{BB962C8B-B14F-4D97-AF65-F5344CB8AC3E}">
+        <p14:creationId xmlns:p14="http://schemas.microsoft.com/office/powerpoint/2010/main" val="3257850134"/>
+      </p:ext>
+    </p:extLst>
+  </p:cSld>
+  <p:clrMapOvr>
+    <a:masterClrMapping/>
+  </p:clrMapOvr>
+</p:sld>
+</file>
+
+<file path=ppt/slides/slide21.xml><?xml version="1.0" encoding="utf-8"?>
+<p:sld xmlns:a="http://schemas.openxmlformats.org/drawingml/2006/main" xmlns:r="http://schemas.openxmlformats.org/officeDocument/2006/relationships" xmlns:p="http://schemas.openxmlformats.org/presentationml/2006/main">
+  <p:cSld>
+    <p:spTree>
+      <p:nvGrpSpPr>
+        <p:cNvPr id="1" name="">
+          <a:extLst>
+            <a:ext uri="{FF2B5EF4-FFF2-40B4-BE49-F238E27FC236}">
+              <a16:creationId xmlns:a16="http://schemas.microsoft.com/office/drawing/2014/main" id="{E0817A1B-5A1F-F0D8-D9B5-FB4E532CC390}"/>
+            </a:ext>
+          </a:extLst>
+        </p:cNvPr>
+        <p:cNvGrpSpPr/>
+        <p:nvPr/>
+      </p:nvGrpSpPr>
+      <p:grpSpPr>
+        <a:xfrm>
+          <a:off x="0" y="0"/>
+          <a:ext cx="0" cy="0"/>
+          <a:chOff x="0" y="0"/>
+          <a:chExt cx="0" cy="0"/>
+        </a:xfrm>
+      </p:grpSpPr>
+      <p:sp>
+        <p:nvSpPr>
+          <p:cNvPr id="2" name="Title 1">
+            <a:extLst>
+              <a:ext uri="{FF2B5EF4-FFF2-40B4-BE49-F238E27FC236}">
+                <a16:creationId xmlns:a16="http://schemas.microsoft.com/office/drawing/2014/main" id="{6F9CCDB0-DE86-F2B4-2F55-18C483D0C2CF}"/>
+              </a:ext>
+            </a:extLst>
+          </p:cNvPr>
+          <p:cNvSpPr>
+            <a:spLocks noGrp="1"/>
+          </p:cNvSpPr>
+          <p:nvPr>
+            <p:ph type="title"/>
+          </p:nvPr>
+        </p:nvSpPr>
+        <p:spPr>
+          <a:xfrm>
+            <a:off x="725863" y="1"/>
+            <a:ext cx="10897385" cy="961534"/>
+          </a:xfrm>
+          <a:solidFill>
+            <a:schemeClr val="accent5">
+              <a:lumMod val="40000"/>
+              <a:lumOff val="60000"/>
+            </a:schemeClr>
+          </a:solidFill>
+        </p:spPr>
+        <p:txBody>
+          <a:bodyPr vert="horz" lIns="91440" tIns="45720" rIns="91440" bIns="45720" rtlCol="0" anchor="ctr">
+            <a:normAutofit/>
+          </a:bodyPr>
+          <a:lstStyle/>
+          <a:p>
+            <a:r>
+              <a:rPr lang="en-US" dirty="0"/>
+              <a:t>Troubleshooting Visualization Issues	</a:t>
+            </a:r>
+          </a:p>
+        </p:txBody>
+      </p:sp>
+      <p:sp>
+        <p:nvSpPr>
+          <p:cNvPr id="3" name="TextBox 2">
+            <a:extLst>
+              <a:ext uri="{FF2B5EF4-FFF2-40B4-BE49-F238E27FC236}">
+                <a16:creationId xmlns:a16="http://schemas.microsoft.com/office/drawing/2014/main" id="{E87C3604-5A2F-A647-7CB5-6DFA70144C56}"/>
+              </a:ext>
+            </a:extLst>
+          </p:cNvPr>
+          <p:cNvSpPr txBox="1"/>
+          <p:nvPr/>
+        </p:nvSpPr>
+        <p:spPr>
+          <a:xfrm>
+            <a:off x="725863" y="1239651"/>
+            <a:ext cx="10492033" cy="4524315"/>
+          </a:xfrm>
+          <a:prstGeom prst="rect">
+            <a:avLst/>
+          </a:prstGeom>
+          <a:noFill/>
+        </p:spPr>
+        <p:txBody>
+          <a:bodyPr wrap="square" rtlCol="0">
+            <a:spAutoFit/>
+          </a:bodyPr>
+          <a:lstStyle/>
+          <a:p>
+            <a:pPr marL="285750" indent="-285750">
+              <a:buFont typeface="Arial" panose="020B0604020202020204" pitchFamily="34" charset="0"/>
+              <a:buChar char="•"/>
+            </a:pPr>
+            <a:r>
+              <a:rPr lang="en-US" dirty="0"/>
+              <a:t>Our visualization software (</a:t>
+            </a:r>
+            <a:r>
+              <a:rPr lang="en-US" dirty="0" err="1"/>
+              <a:t>Titiler</a:t>
+            </a:r>
+            <a:r>
+              <a:rPr lang="en-US" dirty="0"/>
+              <a:t>), receives API requests and send back the different image tiles to render on screen.</a:t>
+            </a:r>
+          </a:p>
+          <a:p>
+            <a:pPr marL="285750" indent="-285750">
+              <a:buFont typeface="Arial" panose="020B0604020202020204" pitchFamily="34" charset="0"/>
+              <a:buChar char="•"/>
+            </a:pPr>
+            <a:endParaRPr lang="en-US" dirty="0"/>
+          </a:p>
+          <a:p>
+            <a:pPr marL="285750" indent="-285750">
+              <a:buFont typeface="Arial" panose="020B0604020202020204" pitchFamily="34" charset="0"/>
+              <a:buChar char="•"/>
+            </a:pPr>
+            <a:r>
+              <a:rPr lang="en-US" dirty="0"/>
+              <a:t>To identify what is being returned, the </a:t>
+            </a:r>
+            <a:r>
+              <a:rPr lang="en-US" b="1" i="1" dirty="0"/>
+              <a:t>Inspect </a:t>
+            </a:r>
+            <a:r>
+              <a:rPr lang="en-US" dirty="0"/>
+              <a:t>button is crucial within the internet browser. </a:t>
+            </a:r>
+            <a:r>
+              <a:rPr lang="en-US" dirty="0">
+                <a:hlinkClick r:id="rId2"/>
+              </a:rPr>
+              <a:t>Example E&amp;A</a:t>
+            </a:r>
+            <a:endParaRPr lang="en-US" dirty="0"/>
+          </a:p>
+          <a:p>
+            <a:pPr marL="742950" lvl="1" indent="-285750">
+              <a:buFont typeface="Arial" panose="020B0604020202020204" pitchFamily="34" charset="0"/>
+              <a:buChar char="•"/>
+            </a:pPr>
+            <a:r>
+              <a:rPr lang="en-US" b="1" i="1" dirty="0"/>
+              <a:t>Right click in the browser</a:t>
+            </a:r>
+          </a:p>
+          <a:p>
+            <a:pPr marL="742950" lvl="1" indent="-285750">
+              <a:buFont typeface="Arial" panose="020B0604020202020204" pitchFamily="34" charset="0"/>
+              <a:buChar char="•"/>
+            </a:pPr>
+            <a:r>
+              <a:rPr lang="en-US" b="1" i="1" dirty="0"/>
+              <a:t>Select [ Inspect ]</a:t>
+            </a:r>
+          </a:p>
+          <a:p>
+            <a:pPr marL="742950" lvl="1" indent="-285750">
+              <a:buFont typeface="Arial" panose="020B0604020202020204" pitchFamily="34" charset="0"/>
+              <a:buChar char="•"/>
+            </a:pPr>
+            <a:r>
+              <a:rPr lang="en-US" b="1" i="1" dirty="0"/>
+              <a:t>Click [ Network ] tab</a:t>
+            </a:r>
+          </a:p>
+          <a:p>
+            <a:pPr lvl="1"/>
+            <a:endParaRPr lang="en-US" dirty="0"/>
+          </a:p>
+          <a:p>
+            <a:pPr marL="285750" indent="-285750">
+              <a:buFont typeface="Arial" panose="020B0604020202020204" pitchFamily="34" charset="0"/>
+              <a:buChar char="•"/>
+            </a:pPr>
+            <a:r>
+              <a:rPr lang="en-US" dirty="0"/>
+              <a:t>You should now see the different requests (sometimes you need to zoom in and out of the image)</a:t>
+            </a:r>
+          </a:p>
+          <a:p>
+            <a:pPr marL="285750" indent="-285750">
+              <a:buFont typeface="Arial" panose="020B0604020202020204" pitchFamily="34" charset="0"/>
+              <a:buChar char="•"/>
+            </a:pPr>
+            <a:endParaRPr lang="en-US" dirty="0"/>
+          </a:p>
+          <a:p>
+            <a:pPr marL="285750" indent="-285750">
+              <a:buFont typeface="Arial" panose="020B0604020202020204" pitchFamily="34" charset="0"/>
+              <a:buChar char="•"/>
+            </a:pPr>
+            <a:r>
+              <a:rPr lang="en-US" dirty="0"/>
+              <a:t>To see the STAC collection that is being called, in the filter search bar type </a:t>
+            </a:r>
+            <a:r>
+              <a:rPr lang="en-US" b="1" dirty="0" err="1"/>
+              <a:t>stac</a:t>
+            </a:r>
+            <a:endParaRPr lang="en-US" dirty="0"/>
+          </a:p>
+          <a:p>
+            <a:pPr marL="742950" lvl="1" indent="-285750">
+              <a:buFont typeface="Arial" panose="020B0604020202020204" pitchFamily="34" charset="0"/>
+              <a:buChar char="•"/>
+            </a:pPr>
+            <a:r>
+              <a:rPr lang="en-US" dirty="0"/>
+              <a:t>Refresh the page and you should see the STAC collection</a:t>
+            </a:r>
+          </a:p>
+          <a:p>
+            <a:pPr marL="742950" lvl="1" indent="-285750">
+              <a:buFont typeface="Arial" panose="020B0604020202020204" pitchFamily="34" charset="0"/>
+              <a:buChar char="•"/>
+            </a:pPr>
+            <a:r>
+              <a:rPr lang="en-US" dirty="0"/>
+              <a:t>Fun fact: You can double click on it and it will take you to the STAC collection!</a:t>
+            </a:r>
+          </a:p>
+          <a:p>
+            <a:pPr marL="742950" lvl="1" indent="-285750">
+              <a:buFont typeface="Arial" panose="020B0604020202020204" pitchFamily="34" charset="0"/>
+              <a:buChar char="•"/>
+            </a:pPr>
+            <a:endParaRPr lang="en-US" dirty="0"/>
+          </a:p>
+          <a:p>
+            <a:pPr marL="285750" indent="-285750">
+              <a:buFont typeface="Arial" panose="020B0604020202020204" pitchFamily="34" charset="0"/>
+              <a:buChar char="•"/>
+            </a:pPr>
+            <a:r>
+              <a:rPr lang="en-US" dirty="0"/>
+              <a:t>If no data is rendering after you created a .mdx file, then there is likely something wrong with the .mdx, this can sometimes be diagnosed in the Inspect bar in browser.</a:t>
+            </a:r>
+          </a:p>
+        </p:txBody>
+      </p:sp>
+      <p:sp>
+        <p:nvSpPr>
+          <p:cNvPr id="5" name="Slide Number Placeholder 4">
+            <a:extLst>
+              <a:ext uri="{FF2B5EF4-FFF2-40B4-BE49-F238E27FC236}">
+                <a16:creationId xmlns:a16="http://schemas.microsoft.com/office/drawing/2014/main" id="{867125EF-D88E-10D6-5A6B-1DE26F640D4E}"/>
+              </a:ext>
+            </a:extLst>
+          </p:cNvPr>
+          <p:cNvSpPr>
+            <a:spLocks noGrp="1"/>
+          </p:cNvSpPr>
+          <p:nvPr>
+            <p:ph type="sldNum" sz="quarter" idx="12"/>
+          </p:nvPr>
+        </p:nvSpPr>
+        <p:spPr/>
+        <p:txBody>
+          <a:bodyPr/>
+          <a:lstStyle/>
+          <a:p>
+            <a:fld id="{5D28F90B-7FA5-3745-B8A4-A3C1EAD30D95}" type="slidenum">
+              <a:rPr lang="en-US" smtClean="0"/>
+              <a:t>21</a:t>
+            </a:fld>
+            <a:endParaRPr lang="en-US"/>
+          </a:p>
+        </p:txBody>
+      </p:sp>
+    </p:spTree>
+    <p:extLst>
+      <p:ext uri="{BB962C8B-B14F-4D97-AF65-F5344CB8AC3E}">
+        <p14:creationId xmlns:p14="http://schemas.microsoft.com/office/powerpoint/2010/main" val="4193327396"/>
       </p:ext>
     </p:extLst>
   </p:cSld>
@@ -18524,6 +19777,35 @@
           </a:p>
         </p:txBody>
       </p:sp>
+      <p:sp>
+        <p:nvSpPr>
+          <p:cNvPr id="5" name="Slide Number Placeholder 4">
+            <a:extLst>
+              <a:ext uri="{FF2B5EF4-FFF2-40B4-BE49-F238E27FC236}">
+                <a16:creationId xmlns:a16="http://schemas.microsoft.com/office/drawing/2014/main" id="{636B9F4A-44E0-FEC9-CC85-03BE493105DA}"/>
+              </a:ext>
+            </a:extLst>
+          </p:cNvPr>
+          <p:cNvSpPr>
+            <a:spLocks noGrp="1"/>
+          </p:cNvSpPr>
+          <p:nvPr>
+            <p:ph type="sldNum" sz="quarter" idx="12"/>
+          </p:nvPr>
+        </p:nvSpPr>
+        <p:spPr/>
+        <p:txBody>
+          <a:bodyPr/>
+          <a:lstStyle/>
+          <a:p>
+            <a:fld id="{5D28F90B-7FA5-3745-B8A4-A3C1EAD30D95}" type="slidenum">
+              <a:rPr lang="en-US" smtClean="0"/>
+              <a:t>3</a:t>
+            </a:fld>
+            <a:endParaRPr lang="en-US"/>
+          </a:p>
+        </p:txBody>
+      </p:sp>
     </p:spTree>
     <p:extLst>
       <p:ext uri="{BB962C8B-B14F-4D97-AF65-F5344CB8AC3E}">
@@ -19169,6 +20451,35 @@
               <a:buNone/>
             </a:pPr>
             <a:endParaRPr lang="en-US" dirty="0"/>
+          </a:p>
+        </p:txBody>
+      </p:sp>
+      <p:sp>
+        <p:nvSpPr>
+          <p:cNvPr id="6" name="Slide Number Placeholder 5">
+            <a:extLst>
+              <a:ext uri="{FF2B5EF4-FFF2-40B4-BE49-F238E27FC236}">
+                <a16:creationId xmlns:a16="http://schemas.microsoft.com/office/drawing/2014/main" id="{E047F3A4-129A-50A4-BAF1-C75D5F1336C7}"/>
+              </a:ext>
+            </a:extLst>
+          </p:cNvPr>
+          <p:cNvSpPr>
+            <a:spLocks noGrp="1"/>
+          </p:cNvSpPr>
+          <p:nvPr>
+            <p:ph type="sldNum" sz="quarter" idx="12"/>
+          </p:nvPr>
+        </p:nvSpPr>
+        <p:spPr/>
+        <p:txBody>
+          <a:bodyPr/>
+          <a:lstStyle/>
+          <a:p>
+            <a:fld id="{5D28F90B-7FA5-3745-B8A4-A3C1EAD30D95}" type="slidenum">
+              <a:rPr lang="en-US" smtClean="0"/>
+              <a:t>4</a:t>
+            </a:fld>
+            <a:endParaRPr lang="en-US"/>
           </a:p>
         </p:txBody>
       </p:sp>
@@ -19928,6 +21239,35 @@
           </a:p>
         </p:txBody>
       </p:sp>
+      <p:sp>
+        <p:nvSpPr>
+          <p:cNvPr id="9" name="Slide Number Placeholder 8">
+            <a:extLst>
+              <a:ext uri="{FF2B5EF4-FFF2-40B4-BE49-F238E27FC236}">
+                <a16:creationId xmlns:a16="http://schemas.microsoft.com/office/drawing/2014/main" id="{915EBE2B-7999-D31D-F207-DD9B179176E0}"/>
+              </a:ext>
+            </a:extLst>
+          </p:cNvPr>
+          <p:cNvSpPr>
+            <a:spLocks noGrp="1"/>
+          </p:cNvSpPr>
+          <p:nvPr>
+            <p:ph type="sldNum" sz="quarter" idx="12"/>
+          </p:nvPr>
+        </p:nvSpPr>
+        <p:spPr/>
+        <p:txBody>
+          <a:bodyPr/>
+          <a:lstStyle/>
+          <a:p>
+            <a:fld id="{5D28F90B-7FA5-3745-B8A4-A3C1EAD30D95}" type="slidenum">
+              <a:rPr lang="en-US" smtClean="0"/>
+              <a:t>5</a:t>
+            </a:fld>
+            <a:endParaRPr lang="en-US"/>
+          </a:p>
+        </p:txBody>
+      </p:sp>
     </p:spTree>
     <p:extLst>
       <p:ext uri="{BB962C8B-B14F-4D97-AF65-F5344CB8AC3E}">
@@ -20091,6 +21431,35 @@
           </a:p>
         </p:txBody>
       </p:sp>
+      <p:sp>
+        <p:nvSpPr>
+          <p:cNvPr id="4" name="Slide Number Placeholder 3">
+            <a:extLst>
+              <a:ext uri="{FF2B5EF4-FFF2-40B4-BE49-F238E27FC236}">
+                <a16:creationId xmlns:a16="http://schemas.microsoft.com/office/drawing/2014/main" id="{AF8528CB-4B9A-DDA0-841E-7328335F1076}"/>
+              </a:ext>
+            </a:extLst>
+          </p:cNvPr>
+          <p:cNvSpPr>
+            <a:spLocks noGrp="1"/>
+          </p:cNvSpPr>
+          <p:nvPr>
+            <p:ph type="sldNum" sz="quarter" idx="12"/>
+          </p:nvPr>
+        </p:nvSpPr>
+        <p:spPr/>
+        <p:txBody>
+          <a:bodyPr/>
+          <a:lstStyle/>
+          <a:p>
+            <a:fld id="{5D28F90B-7FA5-3745-B8A4-A3C1EAD30D95}" type="slidenum">
+              <a:rPr lang="en-US" smtClean="0"/>
+              <a:t>6</a:t>
+            </a:fld>
+            <a:endParaRPr lang="en-US"/>
+          </a:p>
+        </p:txBody>
+      </p:sp>
     </p:spTree>
     <p:extLst>
       <p:ext uri="{BB962C8B-B14F-4D97-AF65-F5344CB8AC3E}">
@@ -20105,6 +21474,200 @@
 </file>
 
 <file path=ppt/slides/slide7.xml><?xml version="1.0" encoding="utf-8"?>
+<p:sld xmlns:a="http://schemas.openxmlformats.org/drawingml/2006/main" xmlns:r="http://schemas.openxmlformats.org/officeDocument/2006/relationships" xmlns:p="http://schemas.openxmlformats.org/presentationml/2006/main">
+  <p:cSld>
+    <p:spTree>
+      <p:nvGrpSpPr>
+        <p:cNvPr id="1" name="">
+          <a:extLst>
+            <a:ext uri="{FF2B5EF4-FFF2-40B4-BE49-F238E27FC236}">
+              <a16:creationId xmlns:a16="http://schemas.microsoft.com/office/drawing/2014/main" id="{B610B1DA-3304-62A3-A83A-8046A93A0C53}"/>
+            </a:ext>
+          </a:extLst>
+        </p:cNvPr>
+        <p:cNvGrpSpPr/>
+        <p:nvPr/>
+      </p:nvGrpSpPr>
+      <p:grpSpPr>
+        <a:xfrm>
+          <a:off x="0" y="0"/>
+          <a:ext cx="0" cy="0"/>
+          <a:chOff x="0" y="0"/>
+          <a:chExt cx="0" cy="0"/>
+        </a:xfrm>
+      </p:grpSpPr>
+      <p:sp>
+        <p:nvSpPr>
+          <p:cNvPr id="2" name="Title 1">
+            <a:extLst>
+              <a:ext uri="{FF2B5EF4-FFF2-40B4-BE49-F238E27FC236}">
+                <a16:creationId xmlns:a16="http://schemas.microsoft.com/office/drawing/2014/main" id="{5BB62816-5EBB-1528-C9A1-2813C5D85019}"/>
+              </a:ext>
+            </a:extLst>
+          </p:cNvPr>
+          <p:cNvSpPr>
+            <a:spLocks noGrp="1"/>
+          </p:cNvSpPr>
+          <p:nvPr>
+            <p:ph type="title"/>
+          </p:nvPr>
+        </p:nvSpPr>
+        <p:spPr>
+          <a:solidFill>
+            <a:schemeClr val="accent5">
+              <a:lumMod val="40000"/>
+              <a:lumOff val="60000"/>
+            </a:schemeClr>
+          </a:solidFill>
+        </p:spPr>
+        <p:txBody>
+          <a:bodyPr vert="horz" lIns="91440" tIns="45720" rIns="91440" bIns="45720" rtlCol="0" anchor="ctr">
+            <a:normAutofit/>
+          </a:bodyPr>
+          <a:lstStyle/>
+          <a:p>
+            <a:r>
+              <a:rPr lang="en-US" dirty="0"/>
+              <a:t>Git and </a:t>
+            </a:r>
+            <a:r>
+              <a:rPr lang="en-US" dirty="0" err="1"/>
+              <a:t>Github</a:t>
+            </a:r>
+            <a:r>
+              <a:rPr lang="en-US" dirty="0"/>
+              <a:t>	</a:t>
+            </a:r>
+          </a:p>
+        </p:txBody>
+      </p:sp>
+      <p:sp>
+        <p:nvSpPr>
+          <p:cNvPr id="3" name="Content Placeholder 2">
+            <a:extLst>
+              <a:ext uri="{FF2B5EF4-FFF2-40B4-BE49-F238E27FC236}">
+                <a16:creationId xmlns:a16="http://schemas.microsoft.com/office/drawing/2014/main" id="{AD0292C5-3F31-09C1-CCA5-A65E0E083299}"/>
+              </a:ext>
+            </a:extLst>
+          </p:cNvPr>
+          <p:cNvSpPr>
+            <a:spLocks noGrp="1"/>
+          </p:cNvSpPr>
+          <p:nvPr>
+            <p:ph idx="1"/>
+          </p:nvPr>
+        </p:nvSpPr>
+        <p:spPr/>
+        <p:txBody>
+          <a:bodyPr>
+            <a:normAutofit/>
+          </a:bodyPr>
+          <a:lstStyle/>
+          <a:p>
+            <a:r>
+              <a:rPr lang="en-US" dirty="0"/>
+              <a:t>Effective workflows in VEDA require a combination of git and </a:t>
+            </a:r>
+            <a:r>
+              <a:rPr lang="en-US" dirty="0" err="1"/>
+              <a:t>github</a:t>
+            </a:r>
+            <a:r>
+              <a:rPr lang="en-US" dirty="0"/>
+              <a:t> to ensure that information can be tracked and implemented across dev, staging, and production</a:t>
+            </a:r>
+          </a:p>
+          <a:p>
+            <a:pPr marL="0" indent="0">
+              <a:buNone/>
+            </a:pPr>
+            <a:endParaRPr lang="en-US" dirty="0"/>
+          </a:p>
+          <a:p>
+            <a:r>
+              <a:rPr lang="en-US" dirty="0"/>
+              <a:t>Git branches are the primary means of integrating new changes to a repository</a:t>
+            </a:r>
+          </a:p>
+          <a:p>
+            <a:endParaRPr lang="en-US" dirty="0"/>
+          </a:p>
+          <a:p>
+            <a:pPr marL="0" indent="0">
+              <a:buNone/>
+            </a:pPr>
+            <a:r>
+              <a:rPr lang="en-US" dirty="0">
+                <a:hlinkClick r:id="rId2"/>
+              </a:rPr>
+              <a:t>Comprehensive guide to git and </a:t>
+            </a:r>
+            <a:r>
+              <a:rPr lang="en-US" dirty="0" err="1">
+                <a:hlinkClick r:id="rId2"/>
+              </a:rPr>
+              <a:t>github</a:t>
+            </a:r>
+            <a:endParaRPr lang="en-US" dirty="0"/>
+          </a:p>
+          <a:p>
+            <a:pPr lvl="1"/>
+            <a:endParaRPr lang="en-US" dirty="0"/>
+          </a:p>
+          <a:p>
+            <a:pPr marL="457200" lvl="1" indent="0">
+              <a:buNone/>
+            </a:pPr>
+            <a:endParaRPr lang="en-US" dirty="0"/>
+          </a:p>
+          <a:p>
+            <a:endParaRPr lang="en-US" dirty="0"/>
+          </a:p>
+        </p:txBody>
+      </p:sp>
+      <p:sp>
+        <p:nvSpPr>
+          <p:cNvPr id="4" name="Slide Number Placeholder 3">
+            <a:extLst>
+              <a:ext uri="{FF2B5EF4-FFF2-40B4-BE49-F238E27FC236}">
+                <a16:creationId xmlns:a16="http://schemas.microsoft.com/office/drawing/2014/main" id="{E2200F65-8DA0-F23F-AC00-9024B71E86A9}"/>
+              </a:ext>
+            </a:extLst>
+          </p:cNvPr>
+          <p:cNvSpPr>
+            <a:spLocks noGrp="1"/>
+          </p:cNvSpPr>
+          <p:nvPr>
+            <p:ph type="sldNum" sz="quarter" idx="12"/>
+          </p:nvPr>
+        </p:nvSpPr>
+        <p:spPr/>
+        <p:txBody>
+          <a:bodyPr/>
+          <a:lstStyle/>
+          <a:p>
+            <a:fld id="{5D28F90B-7FA5-3745-B8A4-A3C1EAD30D95}" type="slidenum">
+              <a:rPr lang="en-US" smtClean="0"/>
+              <a:t>7</a:t>
+            </a:fld>
+            <a:endParaRPr lang="en-US"/>
+          </a:p>
+        </p:txBody>
+      </p:sp>
+    </p:spTree>
+    <p:extLst>
+      <p:ext uri="{BB962C8B-B14F-4D97-AF65-F5344CB8AC3E}">
+        <p14:creationId xmlns:p14="http://schemas.microsoft.com/office/powerpoint/2010/main" val="4116486598"/>
+      </p:ext>
+    </p:extLst>
+  </p:cSld>
+  <p:clrMapOvr>
+    <a:masterClrMapping/>
+  </p:clrMapOvr>
+</p:sld>
+</file>
+
+<file path=ppt/slides/slide8.xml><?xml version="1.0" encoding="utf-8"?>
 <p:sld xmlns:a="http://schemas.openxmlformats.org/drawingml/2006/main" xmlns:r="http://schemas.openxmlformats.org/officeDocument/2006/relationships" xmlns:p="http://schemas.openxmlformats.org/presentationml/2006/main">
   <p:cSld>
     <p:spTree>
@@ -20493,6 +22056,35 @@
           </a:p>
         </p:txBody>
       </p:sp>
+      <p:sp>
+        <p:nvSpPr>
+          <p:cNvPr id="7" name="Slide Number Placeholder 6">
+            <a:extLst>
+              <a:ext uri="{FF2B5EF4-FFF2-40B4-BE49-F238E27FC236}">
+                <a16:creationId xmlns:a16="http://schemas.microsoft.com/office/drawing/2014/main" id="{CADB15AE-8AC1-2451-EB03-EA4665AC447C}"/>
+              </a:ext>
+            </a:extLst>
+          </p:cNvPr>
+          <p:cNvSpPr>
+            <a:spLocks noGrp="1"/>
+          </p:cNvSpPr>
+          <p:nvPr>
+            <p:ph type="sldNum" sz="quarter" idx="12"/>
+          </p:nvPr>
+        </p:nvSpPr>
+        <p:spPr/>
+        <p:txBody>
+          <a:bodyPr/>
+          <a:lstStyle/>
+          <a:p>
+            <a:fld id="{5D28F90B-7FA5-3745-B8A4-A3C1EAD30D95}" type="slidenum">
+              <a:rPr lang="en-US" smtClean="0"/>
+              <a:t>8</a:t>
+            </a:fld>
+            <a:endParaRPr lang="en-US"/>
+          </a:p>
+        </p:txBody>
+      </p:sp>
     </p:spTree>
     <p:extLst>
       <p:ext uri="{BB962C8B-B14F-4D97-AF65-F5344CB8AC3E}">
@@ -20506,7 +22098,7 @@
 </p:sld>
 </file>
 
-<file path=ppt/slides/slide8.xml><?xml version="1.0" encoding="utf-8"?>
+<file path=ppt/slides/slide9.xml><?xml version="1.0" encoding="utf-8"?>
 <p:sld xmlns:a="http://schemas.openxmlformats.org/drawingml/2006/main" xmlns:r="http://schemas.openxmlformats.org/officeDocument/2006/relationships" xmlns:p="http://schemas.openxmlformats.org/presentationml/2006/main">
   <p:cSld>
     <p:spTree>
@@ -20726,48 +22318,12 @@
           </a:p>
         </p:txBody>
       </p:sp>
-    </p:spTree>
-    <p:extLst>
-      <p:ext uri="{BB962C8B-B14F-4D97-AF65-F5344CB8AC3E}">
-        <p14:creationId xmlns:p14="http://schemas.microsoft.com/office/powerpoint/2010/main" val="4023566750"/>
-      </p:ext>
-    </p:extLst>
-  </p:cSld>
-  <p:clrMapOvr>
-    <a:masterClrMapping/>
-  </p:clrMapOvr>
-</p:sld>
-</file>
-
-<file path=ppt/slides/slide9.xml><?xml version="1.0" encoding="utf-8"?>
-<p:sld xmlns:a="http://schemas.openxmlformats.org/drawingml/2006/main" xmlns:r="http://schemas.openxmlformats.org/officeDocument/2006/relationships" xmlns:p="http://schemas.openxmlformats.org/presentationml/2006/main">
-  <p:cSld>
-    <p:spTree>
-      <p:nvGrpSpPr>
-        <p:cNvPr id="1" name="">
-          <a:extLst>
-            <a:ext uri="{FF2B5EF4-FFF2-40B4-BE49-F238E27FC236}">
-              <a16:creationId xmlns:a16="http://schemas.microsoft.com/office/drawing/2014/main" id="{0790AF12-CAEA-6378-5921-F7A197ED1FEA}"/>
-            </a:ext>
-          </a:extLst>
-        </p:cNvPr>
-        <p:cNvGrpSpPr/>
-        <p:nvPr/>
-      </p:nvGrpSpPr>
-      <p:grpSpPr>
-        <a:xfrm>
-          <a:off x="0" y="0"/>
-          <a:ext cx="0" cy="0"/>
-          <a:chOff x="0" y="0"/>
-          <a:chExt cx="0" cy="0"/>
-        </a:xfrm>
-      </p:grpSpPr>
       <p:sp>
         <p:nvSpPr>
-          <p:cNvPr id="2" name="Title 1">
+          <p:cNvPr id="4" name="Slide Number Placeholder 3">
             <a:extLst>
               <a:ext uri="{FF2B5EF4-FFF2-40B4-BE49-F238E27FC236}">
-                <a16:creationId xmlns:a16="http://schemas.microsoft.com/office/drawing/2014/main" id="{706E94BD-9C58-1D5C-571E-29C4273D4621}"/>
+                <a16:creationId xmlns:a16="http://schemas.microsoft.com/office/drawing/2014/main" id="{952C7EEB-1163-1331-05C4-D831D9DFD699}"/>
               </a:ext>
             </a:extLst>
           </p:cNvPr>
@@ -20775,177 +22331,26 @@
             <a:spLocks noGrp="1"/>
           </p:cNvSpPr>
           <p:nvPr>
-            <p:ph type="title"/>
+            <p:ph type="sldNum" sz="quarter" idx="12"/>
           </p:nvPr>
         </p:nvSpPr>
-        <p:spPr>
-          <a:solidFill>
-            <a:schemeClr val="accent5">
-              <a:lumMod val="40000"/>
-              <a:lumOff val="60000"/>
-            </a:schemeClr>
-          </a:solidFill>
-        </p:spPr>
+        <p:spPr/>
         <p:txBody>
-          <a:bodyPr vert="horz" lIns="91440" tIns="45720" rIns="91440" bIns="45720" rtlCol="0" anchor="ctr">
-            <a:normAutofit/>
-          </a:bodyPr>
+          <a:bodyPr/>
           <a:lstStyle/>
           <a:p>
-            <a:r>
-              <a:rPr lang="en-US" dirty="0"/>
-              <a:t>When to use </a:t>
-            </a:r>
-            <a:r>
-              <a:rPr lang="en-US" dirty="0">
-                <a:hlinkClick r:id="rId2"/>
-              </a:rPr>
-              <a:t>Airflow</a:t>
-            </a:r>
-            <a:r>
-              <a:rPr lang="en-US" dirty="0"/>
-              <a:t>?	</a:t>
-            </a:r>
-          </a:p>
-        </p:txBody>
-      </p:sp>
-      <p:sp>
-        <p:nvSpPr>
-          <p:cNvPr id="3" name="Content Placeholder 2">
-            <a:extLst>
-              <a:ext uri="{FF2B5EF4-FFF2-40B4-BE49-F238E27FC236}">
-                <a16:creationId xmlns:a16="http://schemas.microsoft.com/office/drawing/2014/main" id="{368E1C6C-B030-E6DB-1BAE-35B9121F9CA6}"/>
-              </a:ext>
-            </a:extLst>
-          </p:cNvPr>
-          <p:cNvSpPr>
-            <a:spLocks noGrp="1"/>
-          </p:cNvSpPr>
-          <p:nvPr>
-            <p:ph idx="1"/>
-          </p:nvPr>
-        </p:nvSpPr>
-        <p:spPr>
-          <a:xfrm>
-            <a:off x="838200" y="1825625"/>
-            <a:ext cx="10515600" cy="4667250"/>
-          </a:xfrm>
-        </p:spPr>
-        <p:txBody>
-          <a:bodyPr>
-            <a:normAutofit fontScale="92500" lnSpcReduction="20000"/>
-          </a:bodyPr>
-          <a:lstStyle/>
-          <a:p>
-            <a:r>
-              <a:rPr lang="en-US" dirty="0"/>
-              <a:t>If you want a fully automated ingestion pipeline.</a:t>
-            </a:r>
-          </a:p>
-          <a:p>
-            <a:pPr lvl="1"/>
-            <a:r>
-              <a:rPr lang="en-US" dirty="0"/>
-              <a:t>Simplest case is with a single variable (asset), you can use the </a:t>
-            </a:r>
-            <a:r>
-              <a:rPr lang="en-US" b="1" dirty="0" err="1"/>
-              <a:t>veda_dataset_pipeline</a:t>
-            </a:r>
-            <a:r>
-              <a:rPr lang="en-US" b="1" dirty="0"/>
-              <a:t> DAG</a:t>
-            </a:r>
-            <a:r>
-              <a:rPr lang="en-US" dirty="0"/>
-              <a:t> to create the collection and discover files from S3</a:t>
-            </a:r>
-          </a:p>
-          <a:p>
-            <a:pPr lvl="1"/>
-            <a:endParaRPr lang="en-US" dirty="0"/>
-          </a:p>
-          <a:p>
-            <a:r>
-              <a:rPr lang="en-US" dirty="0"/>
-              <a:t>If you want to discover items from S3 which need to be ingested (</a:t>
-            </a:r>
-            <a:r>
-              <a:rPr lang="en-US" b="1" dirty="0" err="1"/>
-              <a:t>veda_discover</a:t>
-            </a:r>
-            <a:r>
-              <a:rPr lang="en-US" b="1" dirty="0"/>
-              <a:t> DAG</a:t>
-            </a:r>
-            <a:r>
-              <a:rPr lang="en-US" dirty="0"/>
-              <a:t>). This pipeline can be used in conjunction with </a:t>
-            </a:r>
-            <a:r>
-              <a:rPr lang="en-US" b="1" dirty="0" err="1"/>
-              <a:t>veda_collection_pipeline</a:t>
-            </a:r>
-            <a:r>
-              <a:rPr lang="en-US" dirty="0"/>
-              <a:t> which created a multi-asset collection.</a:t>
-            </a:r>
-          </a:p>
-          <a:p>
-            <a:endParaRPr lang="en-US" dirty="0"/>
-          </a:p>
-          <a:p>
-            <a:r>
-              <a:rPr lang="en-US" dirty="0"/>
-              <a:t>If you want to ingest Feature/Vector data (e.g., station data). </a:t>
-            </a:r>
-          </a:p>
-          <a:p>
-            <a:pPr lvl="1"/>
-            <a:r>
-              <a:rPr lang="en-US" b="1" dirty="0" err="1"/>
-              <a:t>veda_ingest_vector</a:t>
-            </a:r>
-            <a:r>
-              <a:rPr lang="en-US" dirty="0"/>
-              <a:t> </a:t>
-            </a:r>
-            <a:r>
-              <a:rPr lang="en-US" b="1" dirty="0"/>
-              <a:t>DAG</a:t>
-            </a:r>
-          </a:p>
-          <a:p>
-            <a:pPr lvl="1"/>
-            <a:endParaRPr lang="en-US" b="1" dirty="0"/>
-          </a:p>
-          <a:p>
-            <a:r>
-              <a:rPr lang="en-US" dirty="0"/>
-              <a:t>If you want to create an ingestion pipeline that runs everyday, Airflow is great for that. You can create your own DAG!</a:t>
-            </a:r>
-          </a:p>
-          <a:p>
-            <a:endParaRPr lang="en-US" b="1" dirty="0"/>
-          </a:p>
-          <a:p>
-            <a:pPr marL="0" indent="0">
-              <a:buNone/>
-            </a:pPr>
-            <a:endParaRPr lang="en-US" dirty="0"/>
-          </a:p>
-          <a:p>
-            <a:endParaRPr lang="en-US" dirty="0"/>
-          </a:p>
-          <a:p>
-            <a:endParaRPr lang="en-US" dirty="0"/>
+            <a:fld id="{5D28F90B-7FA5-3745-B8A4-A3C1EAD30D95}" type="slidenum">
+              <a:rPr lang="en-US" smtClean="0"/>
+              <a:t>9</a:t>
+            </a:fld>
+            <a:endParaRPr lang="en-US"/>
           </a:p>
         </p:txBody>
       </p:sp>
     </p:spTree>
     <p:extLst>
       <p:ext uri="{BB962C8B-B14F-4D97-AF65-F5344CB8AC3E}">
-        <p14:creationId xmlns:p14="http://schemas.microsoft.com/office/powerpoint/2010/main" val="927982038"/>
+        <p14:creationId xmlns:p14="http://schemas.microsoft.com/office/powerpoint/2010/main" val="4023566750"/>
       </p:ext>
     </p:extLst>
   </p:cSld>
@@ -21248,4 +22653,299 @@
     </a:ext>
   </a:extLst>
 </a:theme>
+</file>
+
+<file path=ppt/theme/theme2.xml><?xml version="1.0" encoding="utf-8"?>
+<a:theme xmlns:a="http://schemas.openxmlformats.org/drawingml/2006/main" name="Office Theme">
+  <a:themeElements>
+    <a:clrScheme name="Office">
+      <a:dk1>
+        <a:sysClr val="windowText" lastClr="000000"/>
+      </a:dk1>
+      <a:lt1>
+        <a:sysClr val="window" lastClr="FFFFFF"/>
+      </a:lt1>
+      <a:dk2>
+        <a:srgbClr val="44546A"/>
+      </a:dk2>
+      <a:lt2>
+        <a:srgbClr val="E7E6E6"/>
+      </a:lt2>
+      <a:accent1>
+        <a:srgbClr val="4472C4"/>
+      </a:accent1>
+      <a:accent2>
+        <a:srgbClr val="ED7D31"/>
+      </a:accent2>
+      <a:accent3>
+        <a:srgbClr val="A5A5A5"/>
+      </a:accent3>
+      <a:accent4>
+        <a:srgbClr val="FFC000"/>
+      </a:accent4>
+      <a:accent5>
+        <a:srgbClr val="5B9BD5"/>
+      </a:accent5>
+      <a:accent6>
+        <a:srgbClr val="70AD47"/>
+      </a:accent6>
+      <a:hlink>
+        <a:srgbClr val="0563C1"/>
+      </a:hlink>
+      <a:folHlink>
+        <a:srgbClr val="954F72"/>
+      </a:folHlink>
+    </a:clrScheme>
+    <a:fontScheme name="Office">
+      <a:majorFont>
+        <a:latin typeface="Calibri Light" panose="020F0302020204030204"/>
+        <a:ea typeface=""/>
+        <a:cs typeface=""/>
+        <a:font script="Jpan" typeface="游ゴシック Light"/>
+        <a:font script="Hang" typeface="맑은 고딕"/>
+        <a:font script="Hans" typeface="等线 Light"/>
+        <a:font script="Hant" typeface="新細明體"/>
+        <a:font script="Arab" typeface="Times New Roman"/>
+        <a:font script="Hebr" typeface="Times New Roman"/>
+        <a:font script="Thai" typeface="Angsana New"/>
+        <a:font script="Ethi" typeface="Nyala"/>
+        <a:font script="Beng" typeface="Vrinda"/>
+        <a:font script="Gujr" typeface="Shruti"/>
+        <a:font script="Khmr" typeface="MoolBoran"/>
+        <a:font script="Knda" typeface="Tunga"/>
+        <a:font script="Guru" typeface="Raavi"/>
+        <a:font script="Cans" typeface="Euphemia"/>
+        <a:font script="Cher" typeface="Plantagenet Cherokee"/>
+        <a:font script="Yiii" typeface="Microsoft Yi Baiti"/>
+        <a:font script="Tibt" typeface="Microsoft Himalaya"/>
+        <a:font script="Thaa" typeface="MV Boli"/>
+        <a:font script="Deva" typeface="Mangal"/>
+        <a:font script="Telu" typeface="Gautami"/>
+        <a:font script="Taml" typeface="Latha"/>
+        <a:font script="Syrc" typeface="Estrangelo Edessa"/>
+        <a:font script="Orya" typeface="Kalinga"/>
+        <a:font script="Mlym" typeface="Kartika"/>
+        <a:font script="Laoo" typeface="DokChampa"/>
+        <a:font script="Sinh" typeface="Iskoola Pota"/>
+        <a:font script="Mong" typeface="Mongolian Baiti"/>
+        <a:font script="Viet" typeface="Times New Roman"/>
+        <a:font script="Uigh" typeface="Microsoft Uighur"/>
+        <a:font script="Geor" typeface="Sylfaen"/>
+        <a:font script="Armn" typeface="Arial"/>
+        <a:font script="Bugi" typeface="Leelawadee UI"/>
+        <a:font script="Bopo" typeface="Microsoft JhengHei"/>
+        <a:font script="Java" typeface="Javanese Text"/>
+        <a:font script="Lisu" typeface="Segoe UI"/>
+        <a:font script="Mymr" typeface="Myanmar Text"/>
+        <a:font script="Nkoo" typeface="Ebrima"/>
+        <a:font script="Olck" typeface="Nirmala UI"/>
+        <a:font script="Osma" typeface="Ebrima"/>
+        <a:font script="Phag" typeface="Phagspa"/>
+        <a:font script="Syrn" typeface="Estrangelo Edessa"/>
+        <a:font script="Syrj" typeface="Estrangelo Edessa"/>
+        <a:font script="Syre" typeface="Estrangelo Edessa"/>
+        <a:font script="Sora" typeface="Nirmala UI"/>
+        <a:font script="Tale" typeface="Microsoft Tai Le"/>
+        <a:font script="Talu" typeface="Microsoft New Tai Lue"/>
+        <a:font script="Tfng" typeface="Ebrima"/>
+      </a:majorFont>
+      <a:minorFont>
+        <a:latin typeface="Calibri" panose="020F0502020204030204"/>
+        <a:ea typeface=""/>
+        <a:cs typeface=""/>
+        <a:font script="Jpan" typeface="游ゴシック"/>
+        <a:font script="Hang" typeface="맑은 고딕"/>
+        <a:font script="Hans" typeface="等线"/>
+        <a:font script="Hant" typeface="新細明體"/>
+        <a:font script="Arab" typeface="Arial"/>
+        <a:font script="Hebr" typeface="Arial"/>
+        <a:font script="Thai" typeface="Cordia New"/>
+        <a:font script="Ethi" typeface="Nyala"/>
+        <a:font script="Beng" typeface="Vrinda"/>
+        <a:font script="Gujr" typeface="Shruti"/>
+        <a:font script="Khmr" typeface="DaunPenh"/>
+        <a:font script="Knda" typeface="Tunga"/>
+        <a:font script="Guru" typeface="Raavi"/>
+        <a:font script="Cans" typeface="Euphemia"/>
+        <a:font script="Cher" typeface="Plantagenet Cherokee"/>
+        <a:font script="Yiii" typeface="Microsoft Yi Baiti"/>
+        <a:font script="Tibt" typeface="Microsoft Himalaya"/>
+        <a:font script="Thaa" typeface="MV Boli"/>
+        <a:font script="Deva" typeface="Mangal"/>
+        <a:font script="Telu" typeface="Gautami"/>
+        <a:font script="Taml" typeface="Latha"/>
+        <a:font script="Syrc" typeface="Estrangelo Edessa"/>
+        <a:font script="Orya" typeface="Kalinga"/>
+        <a:font script="Mlym" typeface="Kartika"/>
+        <a:font script="Laoo" typeface="DokChampa"/>
+        <a:font script="Sinh" typeface="Iskoola Pota"/>
+        <a:font script="Mong" typeface="Mongolian Baiti"/>
+        <a:font script="Viet" typeface="Arial"/>
+        <a:font script="Uigh" typeface="Microsoft Uighur"/>
+        <a:font script="Geor" typeface="Sylfaen"/>
+        <a:font script="Armn" typeface="Arial"/>
+        <a:font script="Bugi" typeface="Leelawadee UI"/>
+        <a:font script="Bopo" typeface="Microsoft JhengHei"/>
+        <a:font script="Java" typeface="Javanese Text"/>
+        <a:font script="Lisu" typeface="Segoe UI"/>
+        <a:font script="Mymr" typeface="Myanmar Text"/>
+        <a:font script="Nkoo" typeface="Ebrima"/>
+        <a:font script="Olck" typeface="Nirmala UI"/>
+        <a:font script="Osma" typeface="Ebrima"/>
+        <a:font script="Phag" typeface="Phagspa"/>
+        <a:font script="Syrn" typeface="Estrangelo Edessa"/>
+        <a:font script="Syrj" typeface="Estrangelo Edessa"/>
+        <a:font script="Syre" typeface="Estrangelo Edessa"/>
+        <a:font script="Sora" typeface="Nirmala UI"/>
+        <a:font script="Tale" typeface="Microsoft Tai Le"/>
+        <a:font script="Talu" typeface="Microsoft New Tai Lue"/>
+        <a:font script="Tfng" typeface="Ebrima"/>
+      </a:minorFont>
+    </a:fontScheme>
+    <a:fmtScheme name="Office">
+      <a:fillStyleLst>
+        <a:solidFill>
+          <a:schemeClr val="phClr"/>
+        </a:solidFill>
+        <a:gradFill rotWithShape="1">
+          <a:gsLst>
+            <a:gs pos="0">
+              <a:schemeClr val="phClr">
+                <a:lumMod val="110000"/>
+                <a:satMod val="105000"/>
+                <a:tint val="67000"/>
+              </a:schemeClr>
+            </a:gs>
+            <a:gs pos="50000">
+              <a:schemeClr val="phClr">
+                <a:lumMod val="105000"/>
+                <a:satMod val="103000"/>
+                <a:tint val="73000"/>
+              </a:schemeClr>
+            </a:gs>
+            <a:gs pos="100000">
+              <a:schemeClr val="phClr">
+                <a:lumMod val="105000"/>
+                <a:satMod val="109000"/>
+                <a:tint val="81000"/>
+              </a:schemeClr>
+            </a:gs>
+          </a:gsLst>
+          <a:lin ang="5400000" scaled="0"/>
+        </a:gradFill>
+        <a:gradFill rotWithShape="1">
+          <a:gsLst>
+            <a:gs pos="0">
+              <a:schemeClr val="phClr">
+                <a:satMod val="103000"/>
+                <a:lumMod val="102000"/>
+                <a:tint val="94000"/>
+              </a:schemeClr>
+            </a:gs>
+            <a:gs pos="50000">
+              <a:schemeClr val="phClr">
+                <a:satMod val="110000"/>
+                <a:lumMod val="100000"/>
+                <a:shade val="100000"/>
+              </a:schemeClr>
+            </a:gs>
+            <a:gs pos="100000">
+              <a:schemeClr val="phClr">
+                <a:lumMod val="99000"/>
+                <a:satMod val="120000"/>
+                <a:shade val="78000"/>
+              </a:schemeClr>
+            </a:gs>
+          </a:gsLst>
+          <a:lin ang="5400000" scaled="0"/>
+        </a:gradFill>
+      </a:fillStyleLst>
+      <a:lnStyleLst>
+        <a:ln w="6350" cap="flat" cmpd="sng" algn="ctr">
+          <a:solidFill>
+            <a:schemeClr val="phClr"/>
+          </a:solidFill>
+          <a:prstDash val="solid"/>
+          <a:miter lim="800000"/>
+        </a:ln>
+        <a:ln w="12700" cap="flat" cmpd="sng" algn="ctr">
+          <a:solidFill>
+            <a:schemeClr val="phClr"/>
+          </a:solidFill>
+          <a:prstDash val="solid"/>
+          <a:miter lim="800000"/>
+        </a:ln>
+        <a:ln w="19050" cap="flat" cmpd="sng" algn="ctr">
+          <a:solidFill>
+            <a:schemeClr val="phClr"/>
+          </a:solidFill>
+          <a:prstDash val="solid"/>
+          <a:miter lim="800000"/>
+        </a:ln>
+      </a:lnStyleLst>
+      <a:effectStyleLst>
+        <a:effectStyle>
+          <a:effectLst/>
+        </a:effectStyle>
+        <a:effectStyle>
+          <a:effectLst/>
+        </a:effectStyle>
+        <a:effectStyle>
+          <a:effectLst>
+            <a:outerShdw blurRad="57150" dist="19050" dir="5400000" algn="ctr" rotWithShape="0">
+              <a:srgbClr val="000000">
+                <a:alpha val="63000"/>
+              </a:srgbClr>
+            </a:outerShdw>
+          </a:effectLst>
+        </a:effectStyle>
+      </a:effectStyleLst>
+      <a:bgFillStyleLst>
+        <a:solidFill>
+          <a:schemeClr val="phClr"/>
+        </a:solidFill>
+        <a:solidFill>
+          <a:schemeClr val="phClr">
+            <a:tint val="95000"/>
+            <a:satMod val="170000"/>
+          </a:schemeClr>
+        </a:solidFill>
+        <a:gradFill rotWithShape="1">
+          <a:gsLst>
+            <a:gs pos="0">
+              <a:schemeClr val="phClr">
+                <a:tint val="93000"/>
+                <a:satMod val="150000"/>
+                <a:shade val="98000"/>
+                <a:lumMod val="102000"/>
+              </a:schemeClr>
+            </a:gs>
+            <a:gs pos="50000">
+              <a:schemeClr val="phClr">
+                <a:tint val="98000"/>
+                <a:satMod val="130000"/>
+                <a:shade val="90000"/>
+                <a:lumMod val="103000"/>
+              </a:schemeClr>
+            </a:gs>
+            <a:gs pos="100000">
+              <a:schemeClr val="phClr">
+                <a:shade val="63000"/>
+                <a:satMod val="120000"/>
+              </a:schemeClr>
+            </a:gs>
+          </a:gsLst>
+          <a:lin ang="5400000" scaled="0"/>
+        </a:gradFill>
+      </a:bgFillStyleLst>
+    </a:fmtScheme>
+  </a:themeElements>
+  <a:objectDefaults/>
+  <a:extraClrSchemeLst/>
+  <a:extLst>
+    <a:ext uri="{05A4C25C-085E-4340-85A3-A5531E510DB2}">
+      <thm15:themeFamily xmlns:thm15="http://schemas.microsoft.com/office/thememl/2012/main" name="Office Theme" id="{62F939B6-93AF-4DB8-9C6B-D6C7DFDC589F}" vid="{4A3C46E8-61CC-4603-A589-7422A47A8E4A}"/>
+    </a:ext>
+  </a:extLst>
+</a:theme>
 </file>
--- a/Data-ingest/data-ingestion-OVERVIEW.pptx
+++ b/Data-ingest/data-ingestion-OVERVIEW.pptx
@@ -4608,90 +4608,6 @@
         </a:p>
       </dgm:t>
     </dgm:pt>
-    <dgm:pt modelId="{797719B3-D81C-4C45-AEB8-A3090DAA84FA}">
-      <dgm:prSet phldrT="[Text]"/>
-      <dgm:spPr/>
-      <dgm:t>
-        <a:bodyPr/>
-        <a:lstStyle/>
-        <a:p>
-          <a:r>
-            <a:rPr lang="en-US" dirty="0"/>
-            <a:t>Step 2:</a:t>
-          </a:r>
-        </a:p>
-        <a:p>
-          <a:r>
-            <a:rPr lang="en-US" dirty="0"/>
-            <a:t>Ingest through Airflow or Ingest API</a:t>
-          </a:r>
-        </a:p>
-      </dgm:t>
-    </dgm:pt>
-    <dgm:pt modelId="{13A75B88-07A5-A14C-B2F3-E4E24C08EAF3}" type="parTrans" cxnId="{969F881B-8B90-1E44-AB23-554CB7274406}">
-      <dgm:prSet/>
-      <dgm:spPr/>
-      <dgm:t>
-        <a:bodyPr/>
-        <a:lstStyle/>
-        <a:p>
-          <a:endParaRPr lang="en-US"/>
-        </a:p>
-      </dgm:t>
-    </dgm:pt>
-    <dgm:pt modelId="{F73CDC64-B58C-F14D-873D-69C77BE22D09}" type="sibTrans" cxnId="{969F881B-8B90-1E44-AB23-554CB7274406}">
-      <dgm:prSet/>
-      <dgm:spPr/>
-      <dgm:t>
-        <a:bodyPr/>
-        <a:lstStyle/>
-        <a:p>
-          <a:endParaRPr lang="en-US"/>
-        </a:p>
-      </dgm:t>
-    </dgm:pt>
-    <dgm:pt modelId="{DCCB40E2-BC9F-524F-93E2-C33114B4EE8D}">
-      <dgm:prSet phldrT="[Text]"/>
-      <dgm:spPr/>
-      <dgm:t>
-        <a:bodyPr/>
-        <a:lstStyle/>
-        <a:p>
-          <a:r>
-            <a:rPr lang="en-US" dirty="0"/>
-            <a:t>Step 3:</a:t>
-          </a:r>
-        </a:p>
-        <a:p>
-          <a:r>
-            <a:rPr lang="en-US" dirty="0"/>
-            <a:t>Create a markdown page and check if it will visualize</a:t>
-          </a:r>
-        </a:p>
-      </dgm:t>
-    </dgm:pt>
-    <dgm:pt modelId="{369B379E-7FEC-1142-B880-A9CC509CE14A}" type="parTrans" cxnId="{A3C31FFC-110D-2940-A9A7-1F58EB3BFFAC}">
-      <dgm:prSet/>
-      <dgm:spPr/>
-      <dgm:t>
-        <a:bodyPr/>
-        <a:lstStyle/>
-        <a:p>
-          <a:endParaRPr lang="en-US"/>
-        </a:p>
-      </dgm:t>
-    </dgm:pt>
-    <dgm:pt modelId="{B84CAEF1-D5AA-324C-93C4-4016BCC1EC8F}" type="sibTrans" cxnId="{A3C31FFC-110D-2940-A9A7-1F58EB3BFFAC}">
-      <dgm:prSet/>
-      <dgm:spPr/>
-      <dgm:t>
-        <a:bodyPr/>
-        <a:lstStyle/>
-        <a:p>
-          <a:endParaRPr lang="en-US"/>
-        </a:p>
-      </dgm:t>
-    </dgm:pt>
     <dgm:pt modelId="{9FF54158-708B-E544-AE48-0FDDFE1EC42E}" type="pres">
       <dgm:prSet presAssocID="{774BABEB-39D0-5842-A995-002DD80AB169}" presName="Name0" presStyleCnt="0">
         <dgm:presLayoutVars>
@@ -4702,39 +4618,7 @@
       <dgm:spPr/>
     </dgm:pt>
     <dgm:pt modelId="{E725F556-18E6-254C-8562-AC7A36C72367}" type="pres">
-      <dgm:prSet presAssocID="{F63BB3FE-229E-3A44-B5CF-2FED3A8C27FC}" presName="node" presStyleLbl="node1" presStyleIdx="0" presStyleCnt="3">
-        <dgm:presLayoutVars>
-          <dgm:bulletEnabled val="1"/>
-        </dgm:presLayoutVars>
-      </dgm:prSet>
-      <dgm:spPr/>
-    </dgm:pt>
-    <dgm:pt modelId="{83C840A2-D579-CB45-8CA1-C8596B5BDAB8}" type="pres">
-      <dgm:prSet presAssocID="{3C2C153C-C89B-C04A-BD50-2F7D01976AC6}" presName="sibTrans" presStyleLbl="sibTrans2D1" presStyleIdx="0" presStyleCnt="2"/>
-      <dgm:spPr/>
-    </dgm:pt>
-    <dgm:pt modelId="{AACE5D66-C0F9-CD41-99FD-97D3B2BE90DB}" type="pres">
-      <dgm:prSet presAssocID="{3C2C153C-C89B-C04A-BD50-2F7D01976AC6}" presName="connectorText" presStyleLbl="sibTrans2D1" presStyleIdx="0" presStyleCnt="2"/>
-      <dgm:spPr/>
-    </dgm:pt>
-    <dgm:pt modelId="{BE2301A5-92D8-834F-883D-CC0B6EE02FDA}" type="pres">
-      <dgm:prSet presAssocID="{797719B3-D81C-4C45-AEB8-A3090DAA84FA}" presName="node" presStyleLbl="node1" presStyleIdx="1" presStyleCnt="3">
-        <dgm:presLayoutVars>
-          <dgm:bulletEnabled val="1"/>
-        </dgm:presLayoutVars>
-      </dgm:prSet>
-      <dgm:spPr/>
-    </dgm:pt>
-    <dgm:pt modelId="{4383071E-1B6A-6243-A583-06C783D6B0EB}" type="pres">
-      <dgm:prSet presAssocID="{F73CDC64-B58C-F14D-873D-69C77BE22D09}" presName="sibTrans" presStyleLbl="sibTrans2D1" presStyleIdx="1" presStyleCnt="2"/>
-      <dgm:spPr/>
-    </dgm:pt>
-    <dgm:pt modelId="{4789E3AF-8D8C-9A4A-B513-8EAB5A264256}" type="pres">
-      <dgm:prSet presAssocID="{F73CDC64-B58C-F14D-873D-69C77BE22D09}" presName="connectorText" presStyleLbl="sibTrans2D1" presStyleIdx="1" presStyleCnt="2"/>
-      <dgm:spPr/>
-    </dgm:pt>
-    <dgm:pt modelId="{732002F7-6276-3A4B-9D30-BC8A68FEBF92}" type="pres">
-      <dgm:prSet presAssocID="{DCCB40E2-BC9F-524F-93E2-C33114B4EE8D}" presName="node" presStyleLbl="node1" presStyleIdx="2" presStyleCnt="3">
+      <dgm:prSet presAssocID="{F63BB3FE-229E-3A44-B5CF-2FED3A8C27FC}" presName="node" presStyleLbl="node1" presStyleIdx="0" presStyleCnt="1" custLinFactNeighborX="9328" custLinFactNeighborY="-13215">
         <dgm:presLayoutVars>
           <dgm:bulletEnabled val="1"/>
         </dgm:presLayoutVars>
@@ -4744,23 +4628,9 @@
   </dgm:ptLst>
   <dgm:cxnLst>
     <dgm:cxn modelId="{8E513D0D-6DD8-CC4D-BF18-4A1586DB5131}" srcId="{774BABEB-39D0-5842-A995-002DD80AB169}" destId="{F63BB3FE-229E-3A44-B5CF-2FED3A8C27FC}" srcOrd="0" destOrd="0" parTransId="{3950D63A-60D9-7949-83D2-00F1B3BA007E}" sibTransId="{3C2C153C-C89B-C04A-BD50-2F7D01976AC6}"/>
-    <dgm:cxn modelId="{969F881B-8B90-1E44-AB23-554CB7274406}" srcId="{774BABEB-39D0-5842-A995-002DD80AB169}" destId="{797719B3-D81C-4C45-AEB8-A3090DAA84FA}" srcOrd="1" destOrd="0" parTransId="{13A75B88-07A5-A14C-B2F3-E4E24C08EAF3}" sibTransId="{F73CDC64-B58C-F14D-873D-69C77BE22D09}"/>
-    <dgm:cxn modelId="{544BBF3A-6AFD-824C-8C05-850D7570C744}" type="presOf" srcId="{797719B3-D81C-4C45-AEB8-A3090DAA84FA}" destId="{BE2301A5-92D8-834F-883D-CC0B6EE02FDA}" srcOrd="0" destOrd="0" presId="urn:microsoft.com/office/officeart/2005/8/layout/process1"/>
-    <dgm:cxn modelId="{ECB9EF3E-1DCF-C44B-B423-1024E945A556}" type="presOf" srcId="{F73CDC64-B58C-F14D-873D-69C77BE22D09}" destId="{4383071E-1B6A-6243-A583-06C783D6B0EB}" srcOrd="0" destOrd="0" presId="urn:microsoft.com/office/officeart/2005/8/layout/process1"/>
     <dgm:cxn modelId="{0CA24D69-DB78-BA4B-AEEC-DBB4C1C9A636}" type="presOf" srcId="{F63BB3FE-229E-3A44-B5CF-2FED3A8C27FC}" destId="{E725F556-18E6-254C-8562-AC7A36C72367}" srcOrd="0" destOrd="0" presId="urn:microsoft.com/office/officeart/2005/8/layout/process1"/>
-    <dgm:cxn modelId="{2AFEF469-2F72-3D47-8B05-3B24955C518C}" type="presOf" srcId="{3C2C153C-C89B-C04A-BD50-2F7D01976AC6}" destId="{83C840A2-D579-CB45-8CA1-C8596B5BDAB8}" srcOrd="0" destOrd="0" presId="urn:microsoft.com/office/officeart/2005/8/layout/process1"/>
-    <dgm:cxn modelId="{BF1C8771-E504-A34E-8725-617FE7880773}" type="presOf" srcId="{3C2C153C-C89B-C04A-BD50-2F7D01976AC6}" destId="{AACE5D66-C0F9-CD41-99FD-97D3B2BE90DB}" srcOrd="1" destOrd="0" presId="urn:microsoft.com/office/officeart/2005/8/layout/process1"/>
     <dgm:cxn modelId="{3827CF97-D6C2-C643-8B0F-F71042A19627}" type="presOf" srcId="{774BABEB-39D0-5842-A995-002DD80AB169}" destId="{9FF54158-708B-E544-AE48-0FDDFE1EC42E}" srcOrd="0" destOrd="0" presId="urn:microsoft.com/office/officeart/2005/8/layout/process1"/>
-    <dgm:cxn modelId="{69A493A6-C2F3-004F-BFAA-AFBC4B253690}" type="presOf" srcId="{DCCB40E2-BC9F-524F-93E2-C33114B4EE8D}" destId="{732002F7-6276-3A4B-9D30-BC8A68FEBF92}" srcOrd="0" destOrd="0" presId="urn:microsoft.com/office/officeart/2005/8/layout/process1"/>
-    <dgm:cxn modelId="{21D16DD4-50FA-9B4E-8AC2-BA7B1D6D13FF}" type="presOf" srcId="{F73CDC64-B58C-F14D-873D-69C77BE22D09}" destId="{4789E3AF-8D8C-9A4A-B513-8EAB5A264256}" srcOrd="1" destOrd="0" presId="urn:microsoft.com/office/officeart/2005/8/layout/process1"/>
-    <dgm:cxn modelId="{A3C31FFC-110D-2940-A9A7-1F58EB3BFFAC}" srcId="{774BABEB-39D0-5842-A995-002DD80AB169}" destId="{DCCB40E2-BC9F-524F-93E2-C33114B4EE8D}" srcOrd="2" destOrd="0" parTransId="{369B379E-7FEC-1142-B880-A9CC509CE14A}" sibTransId="{B84CAEF1-D5AA-324C-93C4-4016BCC1EC8F}"/>
     <dgm:cxn modelId="{C3F36B93-3D3A-A94D-ACEE-8E9397079B33}" type="presParOf" srcId="{9FF54158-708B-E544-AE48-0FDDFE1EC42E}" destId="{E725F556-18E6-254C-8562-AC7A36C72367}" srcOrd="0" destOrd="0" presId="urn:microsoft.com/office/officeart/2005/8/layout/process1"/>
-    <dgm:cxn modelId="{74D19D78-0824-784A-B8B6-379E3ECBBF24}" type="presParOf" srcId="{9FF54158-708B-E544-AE48-0FDDFE1EC42E}" destId="{83C840A2-D579-CB45-8CA1-C8596B5BDAB8}" srcOrd="1" destOrd="0" presId="urn:microsoft.com/office/officeart/2005/8/layout/process1"/>
-    <dgm:cxn modelId="{3FD00BD2-917D-0C4C-A7FA-BB4965E83F6A}" type="presParOf" srcId="{83C840A2-D579-CB45-8CA1-C8596B5BDAB8}" destId="{AACE5D66-C0F9-CD41-99FD-97D3B2BE90DB}" srcOrd="0" destOrd="0" presId="urn:microsoft.com/office/officeart/2005/8/layout/process1"/>
-    <dgm:cxn modelId="{284C7588-7D20-144A-8C43-FD0C008BCE50}" type="presParOf" srcId="{9FF54158-708B-E544-AE48-0FDDFE1EC42E}" destId="{BE2301A5-92D8-834F-883D-CC0B6EE02FDA}" srcOrd="2" destOrd="0" presId="urn:microsoft.com/office/officeart/2005/8/layout/process1"/>
-    <dgm:cxn modelId="{D14BC9A4-CB8D-DE4E-A762-E6BD8FF993AF}" type="presParOf" srcId="{9FF54158-708B-E544-AE48-0FDDFE1EC42E}" destId="{4383071E-1B6A-6243-A583-06C783D6B0EB}" srcOrd="3" destOrd="0" presId="urn:microsoft.com/office/officeart/2005/8/layout/process1"/>
-    <dgm:cxn modelId="{8719F695-6068-A34D-8BD0-D6A29E1733F4}" type="presParOf" srcId="{4383071E-1B6A-6243-A583-06C783D6B0EB}" destId="{4789E3AF-8D8C-9A4A-B513-8EAB5A264256}" srcOrd="0" destOrd="0" presId="urn:microsoft.com/office/officeart/2005/8/layout/process1"/>
-    <dgm:cxn modelId="{86D1F1FE-E44B-744B-B7C2-68F78B10549E}" type="presParOf" srcId="{9FF54158-708B-E544-AE48-0FDDFE1EC42E}" destId="{732002F7-6276-3A4B-9D30-BC8A68FEBF92}" srcOrd="4" destOrd="0" presId="urn:microsoft.com/office/officeart/2005/8/layout/process1"/>
   </dgm:cxnLst>
   <dgm:bg/>
   <dgm:whole/>
@@ -6711,8 +6581,8 @@
       </dsp:nvSpPr>
       <dsp:spPr>
         <a:xfrm>
-          <a:off x="8046" y="1183291"/>
-          <a:ext cx="2405091" cy="1443054"/>
+          <a:off x="4148" y="0"/>
+          <a:ext cx="4244420" cy="1854737"/>
         </a:xfrm>
         <a:prstGeom prst="roundRect">
           <a:avLst>
@@ -6756,12 +6626,12 @@
         </a:fontRef>
       </dsp:style>
       <dsp:txBody>
-        <a:bodyPr spcFirstLastPara="0" vert="horz" wrap="square" lIns="72390" tIns="72390" rIns="72390" bIns="72390" numCol="1" spcCol="1270" anchor="ctr" anchorCtr="0">
+        <a:bodyPr spcFirstLastPara="0" vert="horz" wrap="square" lIns="118110" tIns="118110" rIns="118110" bIns="118110" numCol="1" spcCol="1270" anchor="ctr" anchorCtr="0">
           <a:noAutofit/>
         </a:bodyPr>
         <a:lstStyle/>
         <a:p>
-          <a:pPr marL="0" lvl="0" indent="0" algn="ctr" defTabSz="844550">
+          <a:pPr marL="0" lvl="0" indent="0" algn="ctr" defTabSz="1377950">
             <a:lnSpc>
               <a:spcPct val="90000"/>
             </a:lnSpc>
@@ -6774,12 +6644,12 @@
             <a:buNone/>
           </a:pPr>
           <a:r>
-            <a:rPr lang="en-US" sz="1900" kern="1200" dirty="0"/>
+            <a:rPr lang="en-US" sz="3100" kern="1200" dirty="0"/>
             <a:t>Step 1: </a:t>
           </a:r>
         </a:p>
         <a:p>
-          <a:pPr marL="0" lvl="0" indent="0" algn="ctr" defTabSz="844550">
+          <a:pPr marL="0" lvl="0" indent="0" algn="ctr" defTabSz="1377950">
             <a:lnSpc>
               <a:spcPct val="90000"/>
             </a:lnSpc>
@@ -6792,358 +6662,22 @@
             <a:buNone/>
           </a:pPr>
           <a:r>
-            <a:rPr lang="en-US" sz="1900" kern="1200" dirty="0"/>
+            <a:rPr lang="en-US" sz="3100" kern="1200" dirty="0"/>
             <a:t>Create </a:t>
           </a:r>
           <a:r>
-            <a:rPr lang="en-US" sz="1900" kern="1200" dirty="0" err="1"/>
+            <a:rPr lang="en-US" sz="3100" kern="1200" dirty="0" err="1"/>
             <a:t>json</a:t>
           </a:r>
           <a:r>
-            <a:rPr lang="en-US" sz="1900" kern="1200" dirty="0"/>
+            <a:rPr lang="en-US" sz="3100" kern="1200" dirty="0"/>
             <a:t> config for ingestion</a:t>
           </a:r>
         </a:p>
       </dsp:txBody>
       <dsp:txXfrm>
-        <a:off x="50312" y="1225557"/>
-        <a:ext cx="2320559" cy="1358522"/>
-      </dsp:txXfrm>
-    </dsp:sp>
-    <dsp:sp modelId="{83C840A2-D579-CB45-8CA1-C8596B5BDAB8}">
-      <dsp:nvSpPr>
-        <dsp:cNvPr id="0" name=""/>
-        <dsp:cNvSpPr/>
-      </dsp:nvSpPr>
-      <dsp:spPr>
-        <a:xfrm>
-          <a:off x="2653647" y="1606587"/>
-          <a:ext cx="509879" cy="596462"/>
-        </a:xfrm>
-        <a:prstGeom prst="rightArrow">
-          <a:avLst>
-            <a:gd name="adj1" fmla="val 60000"/>
-            <a:gd name="adj2" fmla="val 50000"/>
-          </a:avLst>
-        </a:prstGeom>
-        <a:solidFill>
-          <a:schemeClr val="accent1">
-            <a:tint val="60000"/>
-            <a:hueOff val="0"/>
-            <a:satOff val="0"/>
-            <a:lumOff val="0"/>
-            <a:alphaOff val="0"/>
-          </a:schemeClr>
-        </a:solidFill>
-        <a:ln>
-          <a:noFill/>
-        </a:ln>
-        <a:effectLst/>
-      </dsp:spPr>
-      <dsp:style>
-        <a:lnRef idx="0">
-          <a:scrgbClr r="0" g="0" b="0"/>
-        </a:lnRef>
-        <a:fillRef idx="1">
-          <a:scrgbClr r="0" g="0" b="0"/>
-        </a:fillRef>
-        <a:effectRef idx="0">
-          <a:scrgbClr r="0" g="0" b="0"/>
-        </a:effectRef>
-        <a:fontRef idx="minor">
-          <a:schemeClr val="lt1"/>
-        </a:fontRef>
-      </dsp:style>
-      <dsp:txBody>
-        <a:bodyPr spcFirstLastPara="0" vert="horz" wrap="square" lIns="0" tIns="0" rIns="0" bIns="0" numCol="1" spcCol="1270" anchor="ctr" anchorCtr="0">
-          <a:noAutofit/>
-        </a:bodyPr>
-        <a:lstStyle/>
-        <a:p>
-          <a:pPr marL="0" lvl="0" indent="0" algn="ctr" defTabSz="666750">
-            <a:lnSpc>
-              <a:spcPct val="90000"/>
-            </a:lnSpc>
-            <a:spcBef>
-              <a:spcPct val="0"/>
-            </a:spcBef>
-            <a:spcAft>
-              <a:spcPct val="35000"/>
-            </a:spcAft>
-            <a:buNone/>
-          </a:pPr>
-          <a:endParaRPr lang="en-US" sz="1500" kern="1200"/>
-        </a:p>
-      </dsp:txBody>
-      <dsp:txXfrm>
-        <a:off x="2653647" y="1725879"/>
-        <a:ext cx="356915" cy="357878"/>
-      </dsp:txXfrm>
-    </dsp:sp>
-    <dsp:sp modelId="{BE2301A5-92D8-834F-883D-CC0B6EE02FDA}">
-      <dsp:nvSpPr>
-        <dsp:cNvPr id="0" name=""/>
-        <dsp:cNvSpPr/>
-      </dsp:nvSpPr>
-      <dsp:spPr>
-        <a:xfrm>
-          <a:off x="3375174" y="1183291"/>
-          <a:ext cx="2405091" cy="1443054"/>
-        </a:xfrm>
-        <a:prstGeom prst="roundRect">
-          <a:avLst>
-            <a:gd name="adj" fmla="val 10000"/>
-          </a:avLst>
-        </a:prstGeom>
-        <a:solidFill>
-          <a:schemeClr val="accent1">
-            <a:hueOff val="0"/>
-            <a:satOff val="0"/>
-            <a:lumOff val="0"/>
-            <a:alphaOff val="0"/>
-          </a:schemeClr>
-        </a:solidFill>
-        <a:ln w="12700" cap="flat" cmpd="sng" algn="ctr">
-          <a:solidFill>
-            <a:schemeClr val="lt1">
-              <a:hueOff val="0"/>
-              <a:satOff val="0"/>
-              <a:lumOff val="0"/>
-              <a:alphaOff val="0"/>
-            </a:schemeClr>
-          </a:solidFill>
-          <a:prstDash val="solid"/>
-          <a:miter lim="800000"/>
-        </a:ln>
-        <a:effectLst/>
-      </dsp:spPr>
-      <dsp:style>
-        <a:lnRef idx="2">
-          <a:scrgbClr r="0" g="0" b="0"/>
-        </a:lnRef>
-        <a:fillRef idx="1">
-          <a:scrgbClr r="0" g="0" b="0"/>
-        </a:fillRef>
-        <a:effectRef idx="0">
-          <a:scrgbClr r="0" g="0" b="0"/>
-        </a:effectRef>
-        <a:fontRef idx="minor">
-          <a:schemeClr val="lt1"/>
-        </a:fontRef>
-      </dsp:style>
-      <dsp:txBody>
-        <a:bodyPr spcFirstLastPara="0" vert="horz" wrap="square" lIns="72390" tIns="72390" rIns="72390" bIns="72390" numCol="1" spcCol="1270" anchor="ctr" anchorCtr="0">
-          <a:noAutofit/>
-        </a:bodyPr>
-        <a:lstStyle/>
-        <a:p>
-          <a:pPr marL="0" lvl="0" indent="0" algn="ctr" defTabSz="844550">
-            <a:lnSpc>
-              <a:spcPct val="90000"/>
-            </a:lnSpc>
-            <a:spcBef>
-              <a:spcPct val="0"/>
-            </a:spcBef>
-            <a:spcAft>
-              <a:spcPct val="35000"/>
-            </a:spcAft>
-            <a:buNone/>
-          </a:pPr>
-          <a:r>
-            <a:rPr lang="en-US" sz="1900" kern="1200" dirty="0"/>
-            <a:t>Step 2:</a:t>
-          </a:r>
-        </a:p>
-        <a:p>
-          <a:pPr marL="0" lvl="0" indent="0" algn="ctr" defTabSz="844550">
-            <a:lnSpc>
-              <a:spcPct val="90000"/>
-            </a:lnSpc>
-            <a:spcBef>
-              <a:spcPct val="0"/>
-            </a:spcBef>
-            <a:spcAft>
-              <a:spcPct val="35000"/>
-            </a:spcAft>
-            <a:buNone/>
-          </a:pPr>
-          <a:r>
-            <a:rPr lang="en-US" sz="1900" kern="1200" dirty="0"/>
-            <a:t>Ingest through Airflow or Ingest API</a:t>
-          </a:r>
-        </a:p>
-      </dsp:txBody>
-      <dsp:txXfrm>
-        <a:off x="3417440" y="1225557"/>
-        <a:ext cx="2320559" cy="1358522"/>
-      </dsp:txXfrm>
-    </dsp:sp>
-    <dsp:sp modelId="{4383071E-1B6A-6243-A583-06C783D6B0EB}">
-      <dsp:nvSpPr>
-        <dsp:cNvPr id="0" name=""/>
-        <dsp:cNvSpPr/>
-      </dsp:nvSpPr>
-      <dsp:spPr>
-        <a:xfrm>
-          <a:off x="6020774" y="1606587"/>
-          <a:ext cx="509879" cy="596462"/>
-        </a:xfrm>
-        <a:prstGeom prst="rightArrow">
-          <a:avLst>
-            <a:gd name="adj1" fmla="val 60000"/>
-            <a:gd name="adj2" fmla="val 50000"/>
-          </a:avLst>
-        </a:prstGeom>
-        <a:solidFill>
-          <a:schemeClr val="accent1">
-            <a:tint val="60000"/>
-            <a:hueOff val="0"/>
-            <a:satOff val="0"/>
-            <a:lumOff val="0"/>
-            <a:alphaOff val="0"/>
-          </a:schemeClr>
-        </a:solidFill>
-        <a:ln>
-          <a:noFill/>
-        </a:ln>
-        <a:effectLst/>
-      </dsp:spPr>
-      <dsp:style>
-        <a:lnRef idx="0">
-          <a:scrgbClr r="0" g="0" b="0"/>
-        </a:lnRef>
-        <a:fillRef idx="1">
-          <a:scrgbClr r="0" g="0" b="0"/>
-        </a:fillRef>
-        <a:effectRef idx="0">
-          <a:scrgbClr r="0" g="0" b="0"/>
-        </a:effectRef>
-        <a:fontRef idx="minor">
-          <a:schemeClr val="lt1"/>
-        </a:fontRef>
-      </dsp:style>
-      <dsp:txBody>
-        <a:bodyPr spcFirstLastPara="0" vert="horz" wrap="square" lIns="0" tIns="0" rIns="0" bIns="0" numCol="1" spcCol="1270" anchor="ctr" anchorCtr="0">
-          <a:noAutofit/>
-        </a:bodyPr>
-        <a:lstStyle/>
-        <a:p>
-          <a:pPr marL="0" lvl="0" indent="0" algn="ctr" defTabSz="666750">
-            <a:lnSpc>
-              <a:spcPct val="90000"/>
-            </a:lnSpc>
-            <a:spcBef>
-              <a:spcPct val="0"/>
-            </a:spcBef>
-            <a:spcAft>
-              <a:spcPct val="35000"/>
-            </a:spcAft>
-            <a:buNone/>
-          </a:pPr>
-          <a:endParaRPr lang="en-US" sz="1500" kern="1200"/>
-        </a:p>
-      </dsp:txBody>
-      <dsp:txXfrm>
-        <a:off x="6020774" y="1725879"/>
-        <a:ext cx="356915" cy="357878"/>
-      </dsp:txXfrm>
-    </dsp:sp>
-    <dsp:sp modelId="{732002F7-6276-3A4B-9D30-BC8A68FEBF92}">
-      <dsp:nvSpPr>
-        <dsp:cNvPr id="0" name=""/>
-        <dsp:cNvSpPr/>
-      </dsp:nvSpPr>
-      <dsp:spPr>
-        <a:xfrm>
-          <a:off x="6742302" y="1183291"/>
-          <a:ext cx="2405091" cy="1443054"/>
-        </a:xfrm>
-        <a:prstGeom prst="roundRect">
-          <a:avLst>
-            <a:gd name="adj" fmla="val 10000"/>
-          </a:avLst>
-        </a:prstGeom>
-        <a:solidFill>
-          <a:schemeClr val="accent1">
-            <a:hueOff val="0"/>
-            <a:satOff val="0"/>
-            <a:lumOff val="0"/>
-            <a:alphaOff val="0"/>
-          </a:schemeClr>
-        </a:solidFill>
-        <a:ln w="12700" cap="flat" cmpd="sng" algn="ctr">
-          <a:solidFill>
-            <a:schemeClr val="lt1">
-              <a:hueOff val="0"/>
-              <a:satOff val="0"/>
-              <a:lumOff val="0"/>
-              <a:alphaOff val="0"/>
-            </a:schemeClr>
-          </a:solidFill>
-          <a:prstDash val="solid"/>
-          <a:miter lim="800000"/>
-        </a:ln>
-        <a:effectLst/>
-      </dsp:spPr>
-      <dsp:style>
-        <a:lnRef idx="2">
-          <a:scrgbClr r="0" g="0" b="0"/>
-        </a:lnRef>
-        <a:fillRef idx="1">
-          <a:scrgbClr r="0" g="0" b="0"/>
-        </a:fillRef>
-        <a:effectRef idx="0">
-          <a:scrgbClr r="0" g="0" b="0"/>
-        </a:effectRef>
-        <a:fontRef idx="minor">
-          <a:schemeClr val="lt1"/>
-        </a:fontRef>
-      </dsp:style>
-      <dsp:txBody>
-        <a:bodyPr spcFirstLastPara="0" vert="horz" wrap="square" lIns="72390" tIns="72390" rIns="72390" bIns="72390" numCol="1" spcCol="1270" anchor="ctr" anchorCtr="0">
-          <a:noAutofit/>
-        </a:bodyPr>
-        <a:lstStyle/>
-        <a:p>
-          <a:pPr marL="0" lvl="0" indent="0" algn="ctr" defTabSz="844550">
-            <a:lnSpc>
-              <a:spcPct val="90000"/>
-            </a:lnSpc>
-            <a:spcBef>
-              <a:spcPct val="0"/>
-            </a:spcBef>
-            <a:spcAft>
-              <a:spcPct val="35000"/>
-            </a:spcAft>
-            <a:buNone/>
-          </a:pPr>
-          <a:r>
-            <a:rPr lang="en-US" sz="1900" kern="1200" dirty="0"/>
-            <a:t>Step 3:</a:t>
-          </a:r>
-        </a:p>
-        <a:p>
-          <a:pPr marL="0" lvl="0" indent="0" algn="ctr" defTabSz="844550">
-            <a:lnSpc>
-              <a:spcPct val="90000"/>
-            </a:lnSpc>
-            <a:spcBef>
-              <a:spcPct val="0"/>
-            </a:spcBef>
-            <a:spcAft>
-              <a:spcPct val="35000"/>
-            </a:spcAft>
-            <a:buNone/>
-          </a:pPr>
-          <a:r>
-            <a:rPr lang="en-US" sz="1900" kern="1200" dirty="0"/>
-            <a:t>Create a markdown page and check if it will visualize</a:t>
-          </a:r>
-        </a:p>
-      </dsp:txBody>
-      <dsp:txXfrm>
-        <a:off x="6784568" y="1225557"/>
-        <a:ext cx="2320559" cy="1358522"/>
+        <a:off x="58471" y="54323"/>
+        <a:ext cx="4135774" cy="1746091"/>
       </dsp:txXfrm>
     </dsp:sp>
   </dsp:spTree>
@@ -18956,8 +18490,8 @@
         </p:nvSpPr>
         <p:spPr>
           <a:xfrm>
-            <a:off x="725863" y="1239651"/>
-            <a:ext cx="10492033" cy="369332"/>
+            <a:off x="725863" y="3351255"/>
+            <a:ext cx="10492033" cy="2954655"/>
           </a:xfrm>
           <a:prstGeom prst="rect">
             <a:avLst/>
@@ -18970,20 +18504,106 @@
           </a:bodyPr>
           <a:lstStyle/>
           <a:p>
+            <a:r>
+              <a:rPr lang="en-US" sz="2400" b="1" u="sng" dirty="0"/>
+              <a:t>Goal is to ingest Disaster soil moisture data into the VEDA dev STAC catalogue</a:t>
+            </a:r>
+          </a:p>
+          <a:p>
+            <a:endParaRPr lang="en-US" dirty="0"/>
+          </a:p>
+          <a:p>
+            <a:endParaRPr lang="en-US" dirty="0"/>
+          </a:p>
+          <a:p>
+            <a:r>
+              <a:rPr lang="en-US" dirty="0"/>
+              <a:t>Step 1: Create a </a:t>
+            </a:r>
+            <a:r>
+              <a:rPr lang="en-US" dirty="0" err="1"/>
+              <a:t>json</a:t>
+            </a:r>
+            <a:r>
+              <a:rPr lang="en-US" dirty="0"/>
+              <a:t> config</a:t>
+            </a:r>
+          </a:p>
+          <a:p>
             <a:pPr marL="285750" indent="-285750">
-              <a:buFont typeface="Arial" panose="020B0604020202020204" pitchFamily="34" charset="0"/>
-              <a:buChar char="•"/>
+              <a:buFontTx/>
+              <a:buChar char="-"/>
             </a:pPr>
             <a:r>
               <a:rPr lang="en-US" dirty="0"/>
-              <a:t>Ingestion </a:t>
+              <a:t>Clone repository for </a:t>
             </a:r>
             <a:r>
               <a:rPr lang="en-US" dirty="0">
                 <a:hlinkClick r:id="rId2"/>
               </a:rPr>
-              <a:t>example json config files</a:t>
-            </a:r>
+              <a:t>veda-disasters</a:t>
+            </a:r>
+            <a:endParaRPr lang="en-US" dirty="0"/>
+          </a:p>
+          <a:p>
+            <a:pPr marL="285750" indent="-285750">
+              <a:buFontTx/>
+              <a:buChar char="-"/>
+            </a:pPr>
+            <a:r>
+              <a:rPr lang="en-US" dirty="0"/>
+              <a:t>command:    cd </a:t>
+            </a:r>
+            <a:r>
+              <a:rPr lang="en-US" dirty="0" err="1"/>
+              <a:t>veda</a:t>
+            </a:r>
+            <a:r>
+              <a:rPr lang="en-US" dirty="0"/>
+              <a:t>-disasters</a:t>
+            </a:r>
+          </a:p>
+          <a:p>
+            <a:pPr marL="285750" indent="-285750">
+              <a:buFontTx/>
+              <a:buChar char="-"/>
+            </a:pPr>
+            <a:r>
+              <a:rPr lang="en-US" dirty="0"/>
+              <a:t>Create a new branch off of </a:t>
+            </a:r>
+            <a:r>
+              <a:rPr lang="en-US" b="1" dirty="0"/>
+              <a:t>ingestion-config</a:t>
+            </a:r>
+            <a:r>
+              <a:rPr lang="en-US" dirty="0"/>
+              <a:t> branch ( git checkout –b &lt;your-name&gt; origin/ingestion-config )</a:t>
+            </a:r>
+          </a:p>
+          <a:p>
+            <a:pPr marL="285750" indent="-285750">
+              <a:buFontTx/>
+              <a:buChar char="-"/>
+            </a:pPr>
+            <a:r>
+              <a:rPr lang="en-US" dirty="0"/>
+              <a:t>View template file in ingestion-data/dev/dataset-config</a:t>
+            </a:r>
+          </a:p>
+          <a:p>
+            <a:pPr marL="285750" indent="-285750">
+              <a:buFontTx/>
+              <a:buChar char="-"/>
+            </a:pPr>
+            <a:r>
+              <a:rPr lang="en-US"/>
+              <a:t>cp file for the </a:t>
+            </a:r>
+            <a:endParaRPr lang="en-US" dirty="0"/>
+          </a:p>
+          <a:p>
             <a:endParaRPr lang="en-US" dirty="0"/>
           </a:p>
         </p:txBody>
@@ -19001,14 +18621,14 @@
           <p:nvPr>
             <p:extLst>
               <p:ext uri="{D42A27DB-BD31-4B8C-83A1-F6EECF244321}">
-                <p14:modId xmlns:p14="http://schemas.microsoft.com/office/powerpoint/2010/main" val="2795813360"/>
+                <p14:modId xmlns:p14="http://schemas.microsoft.com/office/powerpoint/2010/main" val="203775880"/>
               </p:ext>
             </p:extLst>
           </p:nvPr>
         </p:nvGraphicFramePr>
         <p:xfrm>
-          <a:off x="1518280" y="2091064"/>
-          <a:ext cx="9155440" cy="3809638"/>
+          <a:off x="3971715" y="1229026"/>
+          <a:ext cx="4248569" cy="1854737"/>
         </p:xfrm>
         <a:graphic>
           <a:graphicData uri="http://schemas.openxmlformats.org/drawingml/2006/diagram">

--- a/Data-ingest/data-ingestion-OVERVIEW.pptx
+++ b/Data-ingest/data-ingestion-OVERVIEW.pptx
@@ -5,7 +5,7 @@
     <p:sldMasterId id="2147483648" r:id="rId1"/>
   </p:sldMasterIdLst>
   <p:notesMasterIdLst>
-    <p:notesMasterId r:id="rId23"/>
+    <p:notesMasterId r:id="rId27"/>
   </p:notesMasterIdLst>
   <p:sldIdLst>
     <p:sldId id="256" r:id="rId2"/>
@@ -28,7 +28,11 @@
     <p:sldId id="272" r:id="rId19"/>
     <p:sldId id="274" r:id="rId20"/>
     <p:sldId id="273" r:id="rId21"/>
-    <p:sldId id="276" r:id="rId22"/>
+    <p:sldId id="277" r:id="rId22"/>
+    <p:sldId id="279" r:id="rId23"/>
+    <p:sldId id="280" r:id="rId24"/>
+    <p:sldId id="276" r:id="rId25"/>
+    <p:sldId id="278" r:id="rId26"/>
   </p:sldIdLst>
   <p:sldSz cx="12192000" cy="6858000"/>
   <p:notesSz cx="6858000" cy="9144000"/>
@@ -2412,6 +2416,1500 @@
 </file>
 
 <file path=ppt/diagrams/colors4.xml><?xml version="1.0" encoding="utf-8"?>
+<dgm:colorsDef xmlns:dgm="http://schemas.openxmlformats.org/drawingml/2006/diagram" xmlns:a="http://schemas.openxmlformats.org/drawingml/2006/main" uniqueId="urn:microsoft.com/office/officeart/2005/8/colors/accent1_2">
+  <dgm:title val=""/>
+  <dgm:desc val=""/>
+  <dgm:catLst>
+    <dgm:cat type="accent1" pri="11200"/>
+  </dgm:catLst>
+  <dgm:styleLbl name="node0">
+    <dgm:fillClrLst meth="repeat">
+      <a:schemeClr val="accent1"/>
+    </dgm:fillClrLst>
+    <dgm:linClrLst meth="repeat">
+      <a:schemeClr val="lt1"/>
+    </dgm:linClrLst>
+    <dgm:effectClrLst/>
+    <dgm:txLinClrLst/>
+    <dgm:txFillClrLst/>
+    <dgm:txEffectClrLst/>
+  </dgm:styleLbl>
+  <dgm:styleLbl name="alignNode1">
+    <dgm:fillClrLst meth="repeat">
+      <a:schemeClr val="accent1"/>
+    </dgm:fillClrLst>
+    <dgm:linClrLst meth="repeat">
+      <a:schemeClr val="accent1"/>
+    </dgm:linClrLst>
+    <dgm:effectClrLst/>
+    <dgm:txLinClrLst/>
+    <dgm:txFillClrLst/>
+    <dgm:txEffectClrLst/>
+  </dgm:styleLbl>
+  <dgm:styleLbl name="node1">
+    <dgm:fillClrLst meth="repeat">
+      <a:schemeClr val="accent1"/>
+    </dgm:fillClrLst>
+    <dgm:linClrLst meth="repeat">
+      <a:schemeClr val="lt1"/>
+    </dgm:linClrLst>
+    <dgm:effectClrLst/>
+    <dgm:txLinClrLst/>
+    <dgm:txFillClrLst/>
+    <dgm:txEffectClrLst/>
+  </dgm:styleLbl>
+  <dgm:styleLbl name="lnNode1">
+    <dgm:fillClrLst meth="repeat">
+      <a:schemeClr val="accent1"/>
+    </dgm:fillClrLst>
+    <dgm:linClrLst meth="repeat">
+      <a:schemeClr val="lt1"/>
+    </dgm:linClrLst>
+    <dgm:effectClrLst/>
+    <dgm:txLinClrLst/>
+    <dgm:txFillClrLst/>
+    <dgm:txEffectClrLst/>
+  </dgm:styleLbl>
+  <dgm:styleLbl name="vennNode1">
+    <dgm:fillClrLst meth="repeat">
+      <a:schemeClr val="accent1">
+        <a:alpha val="50000"/>
+      </a:schemeClr>
+    </dgm:fillClrLst>
+    <dgm:linClrLst meth="repeat">
+      <a:schemeClr val="lt1"/>
+    </dgm:linClrLst>
+    <dgm:effectClrLst/>
+    <dgm:txLinClrLst/>
+    <dgm:txFillClrLst/>
+    <dgm:txEffectClrLst/>
+  </dgm:styleLbl>
+  <dgm:styleLbl name="node2">
+    <dgm:fillClrLst meth="repeat">
+      <a:schemeClr val="accent1"/>
+    </dgm:fillClrLst>
+    <dgm:linClrLst meth="repeat">
+      <a:schemeClr val="lt1"/>
+    </dgm:linClrLst>
+    <dgm:effectClrLst/>
+    <dgm:txLinClrLst/>
+    <dgm:txFillClrLst/>
+    <dgm:txEffectClrLst/>
+  </dgm:styleLbl>
+  <dgm:styleLbl name="node3">
+    <dgm:fillClrLst meth="repeat">
+      <a:schemeClr val="accent1"/>
+    </dgm:fillClrLst>
+    <dgm:linClrLst meth="repeat">
+      <a:schemeClr val="lt1"/>
+    </dgm:linClrLst>
+    <dgm:effectClrLst/>
+    <dgm:txLinClrLst/>
+    <dgm:txFillClrLst/>
+    <dgm:txEffectClrLst/>
+  </dgm:styleLbl>
+  <dgm:styleLbl name="node4">
+    <dgm:fillClrLst meth="repeat">
+      <a:schemeClr val="accent1"/>
+    </dgm:fillClrLst>
+    <dgm:linClrLst meth="repeat">
+      <a:schemeClr val="lt1"/>
+    </dgm:linClrLst>
+    <dgm:effectClrLst/>
+    <dgm:txLinClrLst/>
+    <dgm:txFillClrLst/>
+    <dgm:txEffectClrLst/>
+  </dgm:styleLbl>
+  <dgm:styleLbl name="fgImgPlace1">
+    <dgm:fillClrLst meth="repeat">
+      <a:schemeClr val="accent1">
+        <a:tint val="50000"/>
+      </a:schemeClr>
+    </dgm:fillClrLst>
+    <dgm:linClrLst meth="repeat">
+      <a:schemeClr val="lt1"/>
+    </dgm:linClrLst>
+    <dgm:effectClrLst/>
+    <dgm:txLinClrLst/>
+    <dgm:txFillClrLst meth="repeat">
+      <a:schemeClr val="lt1"/>
+    </dgm:txFillClrLst>
+    <dgm:txEffectClrLst/>
+  </dgm:styleLbl>
+  <dgm:styleLbl name="alignImgPlace1">
+    <dgm:fillClrLst meth="repeat">
+      <a:schemeClr val="accent1">
+        <a:tint val="50000"/>
+      </a:schemeClr>
+    </dgm:fillClrLst>
+    <dgm:linClrLst meth="repeat">
+      <a:schemeClr val="lt1"/>
+    </dgm:linClrLst>
+    <dgm:effectClrLst/>
+    <dgm:txLinClrLst/>
+    <dgm:txFillClrLst meth="repeat">
+      <a:schemeClr val="lt1"/>
+    </dgm:txFillClrLst>
+    <dgm:txEffectClrLst/>
+  </dgm:styleLbl>
+  <dgm:styleLbl name="bgImgPlace1">
+    <dgm:fillClrLst meth="repeat">
+      <a:schemeClr val="accent1">
+        <a:tint val="50000"/>
+      </a:schemeClr>
+    </dgm:fillClrLst>
+    <dgm:linClrLst meth="repeat">
+      <a:schemeClr val="lt1"/>
+    </dgm:linClrLst>
+    <dgm:effectClrLst/>
+    <dgm:txLinClrLst/>
+    <dgm:txFillClrLst meth="repeat">
+      <a:schemeClr val="lt1"/>
+    </dgm:txFillClrLst>
+    <dgm:txEffectClrLst/>
+  </dgm:styleLbl>
+  <dgm:styleLbl name="sibTrans2D1">
+    <dgm:fillClrLst meth="repeat">
+      <a:schemeClr val="accent1">
+        <a:tint val="60000"/>
+      </a:schemeClr>
+    </dgm:fillClrLst>
+    <dgm:linClrLst meth="repeat">
+      <a:schemeClr val="accent1">
+        <a:tint val="60000"/>
+      </a:schemeClr>
+    </dgm:linClrLst>
+    <dgm:effectClrLst/>
+    <dgm:txLinClrLst/>
+    <dgm:txFillClrLst/>
+    <dgm:txEffectClrLst/>
+  </dgm:styleLbl>
+  <dgm:styleLbl name="fgSibTrans2D1">
+    <dgm:fillClrLst meth="repeat">
+      <a:schemeClr val="accent1">
+        <a:tint val="60000"/>
+      </a:schemeClr>
+    </dgm:fillClrLst>
+    <dgm:linClrLst meth="repeat">
+      <a:schemeClr val="accent1">
+        <a:tint val="60000"/>
+      </a:schemeClr>
+    </dgm:linClrLst>
+    <dgm:effectClrLst/>
+    <dgm:txLinClrLst/>
+    <dgm:txFillClrLst/>
+    <dgm:txEffectClrLst/>
+  </dgm:styleLbl>
+  <dgm:styleLbl name="bgSibTrans2D1">
+    <dgm:fillClrLst meth="repeat">
+      <a:schemeClr val="accent1">
+        <a:tint val="60000"/>
+      </a:schemeClr>
+    </dgm:fillClrLst>
+    <dgm:linClrLst meth="repeat">
+      <a:schemeClr val="accent1">
+        <a:tint val="60000"/>
+      </a:schemeClr>
+    </dgm:linClrLst>
+    <dgm:effectClrLst/>
+    <dgm:txLinClrLst/>
+    <dgm:txFillClrLst/>
+    <dgm:txEffectClrLst/>
+  </dgm:styleLbl>
+  <dgm:styleLbl name="sibTrans1D1">
+    <dgm:fillClrLst meth="repeat">
+      <a:schemeClr val="accent1"/>
+    </dgm:fillClrLst>
+    <dgm:linClrLst meth="repeat">
+      <a:schemeClr val="accent1"/>
+    </dgm:linClrLst>
+    <dgm:effectClrLst/>
+    <dgm:txLinClrLst/>
+    <dgm:txFillClrLst meth="repeat">
+      <a:schemeClr val="tx1"/>
+    </dgm:txFillClrLst>
+    <dgm:txEffectClrLst/>
+  </dgm:styleLbl>
+  <dgm:styleLbl name="callout">
+    <dgm:fillClrLst meth="repeat">
+      <a:schemeClr val="accent1"/>
+    </dgm:fillClrLst>
+    <dgm:linClrLst meth="repeat">
+      <a:schemeClr val="accent1">
+        <a:tint val="50000"/>
+      </a:schemeClr>
+    </dgm:linClrLst>
+    <dgm:effectClrLst/>
+    <dgm:txLinClrLst/>
+    <dgm:txFillClrLst meth="repeat">
+      <a:schemeClr val="tx1"/>
+    </dgm:txFillClrLst>
+    <dgm:txEffectClrLst/>
+  </dgm:styleLbl>
+  <dgm:styleLbl name="asst0">
+    <dgm:fillClrLst meth="repeat">
+      <a:schemeClr val="accent1"/>
+    </dgm:fillClrLst>
+    <dgm:linClrLst meth="repeat">
+      <a:schemeClr val="lt1"/>
+    </dgm:linClrLst>
+    <dgm:effectClrLst/>
+    <dgm:txLinClrLst/>
+    <dgm:txFillClrLst/>
+    <dgm:txEffectClrLst/>
+  </dgm:styleLbl>
+  <dgm:styleLbl name="asst1">
+    <dgm:fillClrLst meth="repeat">
+      <a:schemeClr val="accent1"/>
+    </dgm:fillClrLst>
+    <dgm:linClrLst meth="repeat">
+      <a:schemeClr val="lt1"/>
+    </dgm:linClrLst>
+    <dgm:effectClrLst/>
+    <dgm:txLinClrLst/>
+    <dgm:txFillClrLst/>
+    <dgm:txEffectClrLst/>
+  </dgm:styleLbl>
+  <dgm:styleLbl name="asst2">
+    <dgm:fillClrLst meth="repeat">
+      <a:schemeClr val="accent1"/>
+    </dgm:fillClrLst>
+    <dgm:linClrLst meth="repeat">
+      <a:schemeClr val="lt1"/>
+    </dgm:linClrLst>
+    <dgm:effectClrLst/>
+    <dgm:txLinClrLst/>
+    <dgm:txFillClrLst/>
+    <dgm:txEffectClrLst/>
+  </dgm:styleLbl>
+  <dgm:styleLbl name="asst3">
+    <dgm:fillClrLst meth="repeat">
+      <a:schemeClr val="accent1"/>
+    </dgm:fillClrLst>
+    <dgm:linClrLst meth="repeat">
+      <a:schemeClr val="lt1"/>
+    </dgm:linClrLst>
+    <dgm:effectClrLst/>
+    <dgm:txLinClrLst/>
+    <dgm:txFillClrLst/>
+    <dgm:txEffectClrLst/>
+  </dgm:styleLbl>
+  <dgm:styleLbl name="asst4">
+    <dgm:fillClrLst meth="repeat">
+      <a:schemeClr val="accent1"/>
+    </dgm:fillClrLst>
+    <dgm:linClrLst meth="repeat">
+      <a:schemeClr val="lt1"/>
+    </dgm:linClrLst>
+    <dgm:effectClrLst/>
+    <dgm:txLinClrLst/>
+    <dgm:txFillClrLst/>
+    <dgm:txEffectClrLst/>
+  </dgm:styleLbl>
+  <dgm:styleLbl name="parChTrans2D1">
+    <dgm:fillClrLst meth="repeat">
+      <a:schemeClr val="accent1">
+        <a:tint val="60000"/>
+      </a:schemeClr>
+    </dgm:fillClrLst>
+    <dgm:linClrLst meth="repeat">
+      <a:schemeClr val="accent1">
+        <a:tint val="60000"/>
+      </a:schemeClr>
+    </dgm:linClrLst>
+    <dgm:effectClrLst/>
+    <dgm:txLinClrLst/>
+    <dgm:txFillClrLst meth="repeat">
+      <a:schemeClr val="lt1"/>
+    </dgm:txFillClrLst>
+    <dgm:txEffectClrLst/>
+  </dgm:styleLbl>
+  <dgm:styleLbl name="parChTrans2D2">
+    <dgm:fillClrLst meth="repeat">
+      <a:schemeClr val="accent1"/>
+    </dgm:fillClrLst>
+    <dgm:linClrLst meth="repeat">
+      <a:schemeClr val="accent1"/>
+    </dgm:linClrLst>
+    <dgm:effectClrLst/>
+    <dgm:txLinClrLst/>
+    <dgm:txFillClrLst meth="repeat">
+      <a:schemeClr val="lt1"/>
+    </dgm:txFillClrLst>
+    <dgm:txEffectClrLst/>
+  </dgm:styleLbl>
+  <dgm:styleLbl name="parChTrans2D3">
+    <dgm:fillClrLst meth="repeat">
+      <a:schemeClr val="accent1"/>
+    </dgm:fillClrLst>
+    <dgm:linClrLst meth="repeat">
+      <a:schemeClr val="accent1"/>
+    </dgm:linClrLst>
+    <dgm:effectClrLst/>
+    <dgm:txLinClrLst/>
+    <dgm:txFillClrLst meth="repeat">
+      <a:schemeClr val="lt1"/>
+    </dgm:txFillClrLst>
+    <dgm:txEffectClrLst/>
+  </dgm:styleLbl>
+  <dgm:styleLbl name="parChTrans2D4">
+    <dgm:fillClrLst meth="repeat">
+      <a:schemeClr val="accent1"/>
+    </dgm:fillClrLst>
+    <dgm:linClrLst meth="repeat">
+      <a:schemeClr val="accent1"/>
+    </dgm:linClrLst>
+    <dgm:effectClrLst/>
+    <dgm:txLinClrLst/>
+    <dgm:txFillClrLst meth="repeat">
+      <a:schemeClr val="lt1"/>
+    </dgm:txFillClrLst>
+    <dgm:txEffectClrLst/>
+  </dgm:styleLbl>
+  <dgm:styleLbl name="parChTrans1D1">
+    <dgm:fillClrLst meth="repeat">
+      <a:schemeClr val="accent1"/>
+    </dgm:fillClrLst>
+    <dgm:linClrLst meth="repeat">
+      <a:schemeClr val="accent1">
+        <a:shade val="60000"/>
+      </a:schemeClr>
+    </dgm:linClrLst>
+    <dgm:effectClrLst/>
+    <dgm:txLinClrLst/>
+    <dgm:txFillClrLst meth="repeat">
+      <a:schemeClr val="tx1"/>
+    </dgm:txFillClrLst>
+    <dgm:txEffectClrLst/>
+  </dgm:styleLbl>
+  <dgm:styleLbl name="parChTrans1D2">
+    <dgm:fillClrLst meth="repeat">
+      <a:schemeClr val="accent1"/>
+    </dgm:fillClrLst>
+    <dgm:linClrLst meth="repeat">
+      <a:schemeClr val="accent1">
+        <a:shade val="60000"/>
+      </a:schemeClr>
+    </dgm:linClrLst>
+    <dgm:effectClrLst/>
+    <dgm:txLinClrLst/>
+    <dgm:txFillClrLst meth="repeat">
+      <a:schemeClr val="tx1"/>
+    </dgm:txFillClrLst>
+    <dgm:txEffectClrLst/>
+  </dgm:styleLbl>
+  <dgm:styleLbl name="parChTrans1D3">
+    <dgm:fillClrLst meth="repeat">
+      <a:schemeClr val="accent1"/>
+    </dgm:fillClrLst>
+    <dgm:linClrLst meth="repeat">
+      <a:schemeClr val="accent1">
+        <a:shade val="80000"/>
+      </a:schemeClr>
+    </dgm:linClrLst>
+    <dgm:effectClrLst/>
+    <dgm:txLinClrLst/>
+    <dgm:txFillClrLst meth="repeat">
+      <a:schemeClr val="tx1"/>
+    </dgm:txFillClrLst>
+    <dgm:txEffectClrLst/>
+  </dgm:styleLbl>
+  <dgm:styleLbl name="parChTrans1D4">
+    <dgm:fillClrLst meth="repeat">
+      <a:schemeClr val="accent1"/>
+    </dgm:fillClrLst>
+    <dgm:linClrLst meth="repeat">
+      <a:schemeClr val="accent1">
+        <a:shade val="80000"/>
+      </a:schemeClr>
+    </dgm:linClrLst>
+    <dgm:effectClrLst/>
+    <dgm:txLinClrLst/>
+    <dgm:txFillClrLst meth="repeat">
+      <a:schemeClr val="tx1"/>
+    </dgm:txFillClrLst>
+    <dgm:txEffectClrLst/>
+  </dgm:styleLbl>
+  <dgm:styleLbl name="fgAcc1">
+    <dgm:fillClrLst meth="repeat">
+      <a:schemeClr val="lt1">
+        <a:alpha val="90000"/>
+      </a:schemeClr>
+    </dgm:fillClrLst>
+    <dgm:linClrLst meth="repeat">
+      <a:schemeClr val="accent1"/>
+    </dgm:linClrLst>
+    <dgm:effectClrLst/>
+    <dgm:txLinClrLst/>
+    <dgm:txFillClrLst meth="repeat">
+      <a:schemeClr val="dk1"/>
+    </dgm:txFillClrLst>
+    <dgm:txEffectClrLst/>
+  </dgm:styleLbl>
+  <dgm:styleLbl name="conFgAcc1">
+    <dgm:fillClrLst meth="repeat">
+      <a:schemeClr val="lt1">
+        <a:alpha val="90000"/>
+      </a:schemeClr>
+    </dgm:fillClrLst>
+    <dgm:linClrLst meth="repeat">
+      <a:schemeClr val="accent1"/>
+    </dgm:linClrLst>
+    <dgm:effectClrLst/>
+    <dgm:txLinClrLst/>
+    <dgm:txFillClrLst meth="repeat">
+      <a:schemeClr val="dk1"/>
+    </dgm:txFillClrLst>
+    <dgm:txEffectClrLst/>
+  </dgm:styleLbl>
+  <dgm:styleLbl name="alignAcc1">
+    <dgm:fillClrLst meth="repeat">
+      <a:schemeClr val="lt1">
+        <a:alpha val="90000"/>
+      </a:schemeClr>
+    </dgm:fillClrLst>
+    <dgm:linClrLst meth="repeat">
+      <a:schemeClr val="accent1"/>
+    </dgm:linClrLst>
+    <dgm:effectClrLst/>
+    <dgm:txLinClrLst/>
+    <dgm:txFillClrLst meth="repeat">
+      <a:schemeClr val="dk1"/>
+    </dgm:txFillClrLst>
+    <dgm:txEffectClrLst/>
+  </dgm:styleLbl>
+  <dgm:styleLbl name="trAlignAcc1">
+    <dgm:fillClrLst meth="repeat">
+      <a:schemeClr val="lt1">
+        <a:alpha val="40000"/>
+      </a:schemeClr>
+    </dgm:fillClrLst>
+    <dgm:linClrLst meth="repeat">
+      <a:schemeClr val="accent1"/>
+    </dgm:linClrLst>
+    <dgm:effectClrLst/>
+    <dgm:txLinClrLst/>
+    <dgm:txFillClrLst meth="repeat">
+      <a:schemeClr val="dk1"/>
+    </dgm:txFillClrLst>
+    <dgm:txEffectClrLst/>
+  </dgm:styleLbl>
+  <dgm:styleLbl name="bgAcc1">
+    <dgm:fillClrLst meth="repeat">
+      <a:schemeClr val="lt1">
+        <a:alpha val="90000"/>
+      </a:schemeClr>
+    </dgm:fillClrLst>
+    <dgm:linClrLst meth="repeat">
+      <a:schemeClr val="accent1"/>
+    </dgm:linClrLst>
+    <dgm:effectClrLst/>
+    <dgm:txLinClrLst/>
+    <dgm:txFillClrLst meth="repeat">
+      <a:schemeClr val="dk1"/>
+    </dgm:txFillClrLst>
+    <dgm:txEffectClrLst/>
+  </dgm:styleLbl>
+  <dgm:styleLbl name="solidFgAcc1">
+    <dgm:fillClrLst meth="repeat">
+      <a:schemeClr val="lt1"/>
+    </dgm:fillClrLst>
+    <dgm:linClrLst meth="repeat">
+      <a:schemeClr val="accent1"/>
+    </dgm:linClrLst>
+    <dgm:effectClrLst/>
+    <dgm:txLinClrLst/>
+    <dgm:txFillClrLst meth="repeat">
+      <a:schemeClr val="dk1"/>
+    </dgm:txFillClrLst>
+    <dgm:txEffectClrLst/>
+  </dgm:styleLbl>
+  <dgm:styleLbl name="solidAlignAcc1">
+    <dgm:fillClrLst meth="repeat">
+      <a:schemeClr val="lt1"/>
+    </dgm:fillClrLst>
+    <dgm:linClrLst meth="repeat">
+      <a:schemeClr val="accent1"/>
+    </dgm:linClrLst>
+    <dgm:effectClrLst/>
+    <dgm:txLinClrLst/>
+    <dgm:txFillClrLst meth="repeat">
+      <a:schemeClr val="dk1"/>
+    </dgm:txFillClrLst>
+    <dgm:txEffectClrLst/>
+  </dgm:styleLbl>
+  <dgm:styleLbl name="solidBgAcc1">
+    <dgm:fillClrLst meth="repeat">
+      <a:schemeClr val="lt1"/>
+    </dgm:fillClrLst>
+    <dgm:linClrLst meth="repeat">
+      <a:schemeClr val="accent1"/>
+    </dgm:linClrLst>
+    <dgm:effectClrLst/>
+    <dgm:txLinClrLst/>
+    <dgm:txFillClrLst meth="repeat">
+      <a:schemeClr val="dk1"/>
+    </dgm:txFillClrLst>
+    <dgm:txEffectClrLst/>
+  </dgm:styleLbl>
+  <dgm:styleLbl name="fgAccFollowNode1">
+    <dgm:fillClrLst meth="repeat">
+      <a:schemeClr val="accent1">
+        <a:alpha val="90000"/>
+        <a:tint val="40000"/>
+      </a:schemeClr>
+    </dgm:fillClrLst>
+    <dgm:linClrLst meth="repeat">
+      <a:schemeClr val="accent1">
+        <a:alpha val="90000"/>
+        <a:tint val="40000"/>
+      </a:schemeClr>
+    </dgm:linClrLst>
+    <dgm:effectClrLst/>
+    <dgm:txLinClrLst/>
+    <dgm:txFillClrLst meth="repeat">
+      <a:schemeClr val="dk1"/>
+    </dgm:txFillClrLst>
+    <dgm:txEffectClrLst/>
+  </dgm:styleLbl>
+  <dgm:styleLbl name="alignAccFollowNode1">
+    <dgm:fillClrLst meth="repeat">
+      <a:schemeClr val="accent1">
+        <a:alpha val="90000"/>
+        <a:tint val="40000"/>
+      </a:schemeClr>
+    </dgm:fillClrLst>
+    <dgm:linClrLst meth="repeat">
+      <a:schemeClr val="accent1">
+        <a:alpha val="90000"/>
+        <a:tint val="40000"/>
+      </a:schemeClr>
+    </dgm:linClrLst>
+    <dgm:effectClrLst/>
+    <dgm:txLinClrLst/>
+    <dgm:txFillClrLst meth="repeat">
+      <a:schemeClr val="dk1"/>
+    </dgm:txFillClrLst>
+    <dgm:txEffectClrLst/>
+  </dgm:styleLbl>
+  <dgm:styleLbl name="bgAccFollowNode1">
+    <dgm:fillClrLst meth="repeat">
+      <a:schemeClr val="accent1">
+        <a:alpha val="90000"/>
+        <a:tint val="40000"/>
+      </a:schemeClr>
+    </dgm:fillClrLst>
+    <dgm:linClrLst meth="repeat">
+      <a:schemeClr val="accent1">
+        <a:alpha val="90000"/>
+        <a:tint val="40000"/>
+      </a:schemeClr>
+    </dgm:linClrLst>
+    <dgm:effectClrLst/>
+    <dgm:txLinClrLst/>
+    <dgm:txFillClrLst meth="repeat">
+      <a:schemeClr val="dk1"/>
+    </dgm:txFillClrLst>
+    <dgm:txEffectClrLst/>
+  </dgm:styleLbl>
+  <dgm:styleLbl name="fgAcc0">
+    <dgm:fillClrLst meth="repeat">
+      <a:schemeClr val="lt1">
+        <a:alpha val="90000"/>
+      </a:schemeClr>
+    </dgm:fillClrLst>
+    <dgm:linClrLst meth="repeat">
+      <a:schemeClr val="accent1"/>
+    </dgm:linClrLst>
+    <dgm:effectClrLst/>
+    <dgm:txLinClrLst/>
+    <dgm:txFillClrLst meth="repeat">
+      <a:schemeClr val="dk1"/>
+    </dgm:txFillClrLst>
+    <dgm:txEffectClrLst/>
+  </dgm:styleLbl>
+  <dgm:styleLbl name="fgAcc2">
+    <dgm:fillClrLst meth="repeat">
+      <a:schemeClr val="lt1">
+        <a:alpha val="90000"/>
+      </a:schemeClr>
+    </dgm:fillClrLst>
+    <dgm:linClrLst meth="repeat">
+      <a:schemeClr val="accent1"/>
+    </dgm:linClrLst>
+    <dgm:effectClrLst/>
+    <dgm:txLinClrLst/>
+    <dgm:txFillClrLst meth="repeat">
+      <a:schemeClr val="dk1"/>
+    </dgm:txFillClrLst>
+    <dgm:txEffectClrLst/>
+  </dgm:styleLbl>
+  <dgm:styleLbl name="fgAcc3">
+    <dgm:fillClrLst meth="repeat">
+      <a:schemeClr val="lt1">
+        <a:alpha val="90000"/>
+      </a:schemeClr>
+    </dgm:fillClrLst>
+    <dgm:linClrLst meth="repeat">
+      <a:schemeClr val="accent1"/>
+    </dgm:linClrLst>
+    <dgm:effectClrLst/>
+    <dgm:txLinClrLst/>
+    <dgm:txFillClrLst meth="repeat">
+      <a:schemeClr val="dk1"/>
+    </dgm:txFillClrLst>
+    <dgm:txEffectClrLst/>
+  </dgm:styleLbl>
+  <dgm:styleLbl name="fgAcc4">
+    <dgm:fillClrLst meth="repeat">
+      <a:schemeClr val="lt1">
+        <a:alpha val="90000"/>
+      </a:schemeClr>
+    </dgm:fillClrLst>
+    <dgm:linClrLst meth="repeat">
+      <a:schemeClr val="accent1"/>
+    </dgm:linClrLst>
+    <dgm:effectClrLst/>
+    <dgm:txLinClrLst/>
+    <dgm:txFillClrLst meth="repeat">
+      <a:schemeClr val="dk1"/>
+    </dgm:txFillClrLst>
+    <dgm:txEffectClrLst/>
+  </dgm:styleLbl>
+  <dgm:styleLbl name="bgShp">
+    <dgm:fillClrLst meth="repeat">
+      <a:schemeClr val="accent1">
+        <a:tint val="40000"/>
+      </a:schemeClr>
+    </dgm:fillClrLst>
+    <dgm:linClrLst meth="repeat">
+      <a:schemeClr val="accent1"/>
+    </dgm:linClrLst>
+    <dgm:effectClrLst/>
+    <dgm:txLinClrLst/>
+    <dgm:txFillClrLst meth="repeat">
+      <a:schemeClr val="dk1"/>
+    </dgm:txFillClrLst>
+    <dgm:txEffectClrLst/>
+  </dgm:styleLbl>
+  <dgm:styleLbl name="dkBgShp">
+    <dgm:fillClrLst meth="repeat">
+      <a:schemeClr val="accent1">
+        <a:shade val="80000"/>
+      </a:schemeClr>
+    </dgm:fillClrLst>
+    <dgm:linClrLst meth="repeat">
+      <a:schemeClr val="accent1"/>
+    </dgm:linClrLst>
+    <dgm:effectClrLst/>
+    <dgm:txLinClrLst/>
+    <dgm:txFillClrLst meth="repeat">
+      <a:schemeClr val="lt1"/>
+    </dgm:txFillClrLst>
+    <dgm:txEffectClrLst/>
+  </dgm:styleLbl>
+  <dgm:styleLbl name="trBgShp">
+    <dgm:fillClrLst meth="repeat">
+      <a:schemeClr val="accent1">
+        <a:tint val="50000"/>
+        <a:alpha val="40000"/>
+      </a:schemeClr>
+    </dgm:fillClrLst>
+    <dgm:linClrLst meth="repeat">
+      <a:schemeClr val="accent1"/>
+    </dgm:linClrLst>
+    <dgm:effectClrLst/>
+    <dgm:txLinClrLst/>
+    <dgm:txFillClrLst meth="repeat">
+      <a:schemeClr val="lt1"/>
+    </dgm:txFillClrLst>
+    <dgm:txEffectClrLst/>
+  </dgm:styleLbl>
+  <dgm:styleLbl name="fgShp">
+    <dgm:fillClrLst meth="repeat">
+      <a:schemeClr val="accent1">
+        <a:tint val="60000"/>
+      </a:schemeClr>
+    </dgm:fillClrLst>
+    <dgm:linClrLst meth="repeat">
+      <a:schemeClr val="lt1"/>
+    </dgm:linClrLst>
+    <dgm:effectClrLst/>
+    <dgm:txLinClrLst/>
+    <dgm:txFillClrLst meth="repeat">
+      <a:schemeClr val="dk1"/>
+    </dgm:txFillClrLst>
+    <dgm:txEffectClrLst/>
+  </dgm:styleLbl>
+  <dgm:styleLbl name="revTx">
+    <dgm:fillClrLst meth="repeat">
+      <a:schemeClr val="lt1">
+        <a:alpha val="0"/>
+      </a:schemeClr>
+    </dgm:fillClrLst>
+    <dgm:linClrLst meth="repeat">
+      <a:schemeClr val="dk1">
+        <a:alpha val="0"/>
+      </a:schemeClr>
+    </dgm:linClrLst>
+    <dgm:effectClrLst/>
+    <dgm:txLinClrLst/>
+    <dgm:txFillClrLst meth="repeat">
+      <a:schemeClr val="tx1"/>
+    </dgm:txFillClrLst>
+    <dgm:txEffectClrLst/>
+  </dgm:styleLbl>
+</dgm:colorsDef>
+</file>
+
+<file path=ppt/diagrams/colors5.xml><?xml version="1.0" encoding="utf-8"?>
+<dgm:colorsDef xmlns:dgm="http://schemas.openxmlformats.org/drawingml/2006/diagram" xmlns:a="http://schemas.openxmlformats.org/drawingml/2006/main" uniqueId="urn:microsoft.com/office/officeart/2005/8/colors/accent1_2">
+  <dgm:title val=""/>
+  <dgm:desc val=""/>
+  <dgm:catLst>
+    <dgm:cat type="accent1" pri="11200"/>
+  </dgm:catLst>
+  <dgm:styleLbl name="node0">
+    <dgm:fillClrLst meth="repeat">
+      <a:schemeClr val="accent1"/>
+    </dgm:fillClrLst>
+    <dgm:linClrLst meth="repeat">
+      <a:schemeClr val="lt1"/>
+    </dgm:linClrLst>
+    <dgm:effectClrLst/>
+    <dgm:txLinClrLst/>
+    <dgm:txFillClrLst/>
+    <dgm:txEffectClrLst/>
+  </dgm:styleLbl>
+  <dgm:styleLbl name="alignNode1">
+    <dgm:fillClrLst meth="repeat">
+      <a:schemeClr val="accent1"/>
+    </dgm:fillClrLst>
+    <dgm:linClrLst meth="repeat">
+      <a:schemeClr val="accent1"/>
+    </dgm:linClrLst>
+    <dgm:effectClrLst/>
+    <dgm:txLinClrLst/>
+    <dgm:txFillClrLst/>
+    <dgm:txEffectClrLst/>
+  </dgm:styleLbl>
+  <dgm:styleLbl name="node1">
+    <dgm:fillClrLst meth="repeat">
+      <a:schemeClr val="accent1"/>
+    </dgm:fillClrLst>
+    <dgm:linClrLst meth="repeat">
+      <a:schemeClr val="lt1"/>
+    </dgm:linClrLst>
+    <dgm:effectClrLst/>
+    <dgm:txLinClrLst/>
+    <dgm:txFillClrLst/>
+    <dgm:txEffectClrLst/>
+  </dgm:styleLbl>
+  <dgm:styleLbl name="lnNode1">
+    <dgm:fillClrLst meth="repeat">
+      <a:schemeClr val="accent1"/>
+    </dgm:fillClrLst>
+    <dgm:linClrLst meth="repeat">
+      <a:schemeClr val="lt1"/>
+    </dgm:linClrLst>
+    <dgm:effectClrLst/>
+    <dgm:txLinClrLst/>
+    <dgm:txFillClrLst/>
+    <dgm:txEffectClrLst/>
+  </dgm:styleLbl>
+  <dgm:styleLbl name="vennNode1">
+    <dgm:fillClrLst meth="repeat">
+      <a:schemeClr val="accent1">
+        <a:alpha val="50000"/>
+      </a:schemeClr>
+    </dgm:fillClrLst>
+    <dgm:linClrLst meth="repeat">
+      <a:schemeClr val="lt1"/>
+    </dgm:linClrLst>
+    <dgm:effectClrLst/>
+    <dgm:txLinClrLst/>
+    <dgm:txFillClrLst/>
+    <dgm:txEffectClrLst/>
+  </dgm:styleLbl>
+  <dgm:styleLbl name="node2">
+    <dgm:fillClrLst meth="repeat">
+      <a:schemeClr val="accent1"/>
+    </dgm:fillClrLst>
+    <dgm:linClrLst meth="repeat">
+      <a:schemeClr val="lt1"/>
+    </dgm:linClrLst>
+    <dgm:effectClrLst/>
+    <dgm:txLinClrLst/>
+    <dgm:txFillClrLst/>
+    <dgm:txEffectClrLst/>
+  </dgm:styleLbl>
+  <dgm:styleLbl name="node3">
+    <dgm:fillClrLst meth="repeat">
+      <a:schemeClr val="accent1"/>
+    </dgm:fillClrLst>
+    <dgm:linClrLst meth="repeat">
+      <a:schemeClr val="lt1"/>
+    </dgm:linClrLst>
+    <dgm:effectClrLst/>
+    <dgm:txLinClrLst/>
+    <dgm:txFillClrLst/>
+    <dgm:txEffectClrLst/>
+  </dgm:styleLbl>
+  <dgm:styleLbl name="node4">
+    <dgm:fillClrLst meth="repeat">
+      <a:schemeClr val="accent1"/>
+    </dgm:fillClrLst>
+    <dgm:linClrLst meth="repeat">
+      <a:schemeClr val="lt1"/>
+    </dgm:linClrLst>
+    <dgm:effectClrLst/>
+    <dgm:txLinClrLst/>
+    <dgm:txFillClrLst/>
+    <dgm:txEffectClrLst/>
+  </dgm:styleLbl>
+  <dgm:styleLbl name="fgImgPlace1">
+    <dgm:fillClrLst meth="repeat">
+      <a:schemeClr val="accent1">
+        <a:tint val="50000"/>
+      </a:schemeClr>
+    </dgm:fillClrLst>
+    <dgm:linClrLst meth="repeat">
+      <a:schemeClr val="lt1"/>
+    </dgm:linClrLst>
+    <dgm:effectClrLst/>
+    <dgm:txLinClrLst/>
+    <dgm:txFillClrLst meth="repeat">
+      <a:schemeClr val="lt1"/>
+    </dgm:txFillClrLst>
+    <dgm:txEffectClrLst/>
+  </dgm:styleLbl>
+  <dgm:styleLbl name="alignImgPlace1">
+    <dgm:fillClrLst meth="repeat">
+      <a:schemeClr val="accent1">
+        <a:tint val="50000"/>
+      </a:schemeClr>
+    </dgm:fillClrLst>
+    <dgm:linClrLst meth="repeat">
+      <a:schemeClr val="lt1"/>
+    </dgm:linClrLst>
+    <dgm:effectClrLst/>
+    <dgm:txLinClrLst/>
+    <dgm:txFillClrLst meth="repeat">
+      <a:schemeClr val="lt1"/>
+    </dgm:txFillClrLst>
+    <dgm:txEffectClrLst/>
+  </dgm:styleLbl>
+  <dgm:styleLbl name="bgImgPlace1">
+    <dgm:fillClrLst meth="repeat">
+      <a:schemeClr val="accent1">
+        <a:tint val="50000"/>
+      </a:schemeClr>
+    </dgm:fillClrLst>
+    <dgm:linClrLst meth="repeat">
+      <a:schemeClr val="lt1"/>
+    </dgm:linClrLst>
+    <dgm:effectClrLst/>
+    <dgm:txLinClrLst/>
+    <dgm:txFillClrLst meth="repeat">
+      <a:schemeClr val="lt1"/>
+    </dgm:txFillClrLst>
+    <dgm:txEffectClrLst/>
+  </dgm:styleLbl>
+  <dgm:styleLbl name="sibTrans2D1">
+    <dgm:fillClrLst meth="repeat">
+      <a:schemeClr val="accent1">
+        <a:tint val="60000"/>
+      </a:schemeClr>
+    </dgm:fillClrLst>
+    <dgm:linClrLst meth="repeat">
+      <a:schemeClr val="accent1">
+        <a:tint val="60000"/>
+      </a:schemeClr>
+    </dgm:linClrLst>
+    <dgm:effectClrLst/>
+    <dgm:txLinClrLst/>
+    <dgm:txFillClrLst/>
+    <dgm:txEffectClrLst/>
+  </dgm:styleLbl>
+  <dgm:styleLbl name="fgSibTrans2D1">
+    <dgm:fillClrLst meth="repeat">
+      <a:schemeClr val="accent1">
+        <a:tint val="60000"/>
+      </a:schemeClr>
+    </dgm:fillClrLst>
+    <dgm:linClrLst meth="repeat">
+      <a:schemeClr val="accent1">
+        <a:tint val="60000"/>
+      </a:schemeClr>
+    </dgm:linClrLst>
+    <dgm:effectClrLst/>
+    <dgm:txLinClrLst/>
+    <dgm:txFillClrLst/>
+    <dgm:txEffectClrLst/>
+  </dgm:styleLbl>
+  <dgm:styleLbl name="bgSibTrans2D1">
+    <dgm:fillClrLst meth="repeat">
+      <a:schemeClr val="accent1">
+        <a:tint val="60000"/>
+      </a:schemeClr>
+    </dgm:fillClrLst>
+    <dgm:linClrLst meth="repeat">
+      <a:schemeClr val="accent1">
+        <a:tint val="60000"/>
+      </a:schemeClr>
+    </dgm:linClrLst>
+    <dgm:effectClrLst/>
+    <dgm:txLinClrLst/>
+    <dgm:txFillClrLst/>
+    <dgm:txEffectClrLst/>
+  </dgm:styleLbl>
+  <dgm:styleLbl name="sibTrans1D1">
+    <dgm:fillClrLst meth="repeat">
+      <a:schemeClr val="accent1"/>
+    </dgm:fillClrLst>
+    <dgm:linClrLst meth="repeat">
+      <a:schemeClr val="accent1"/>
+    </dgm:linClrLst>
+    <dgm:effectClrLst/>
+    <dgm:txLinClrLst/>
+    <dgm:txFillClrLst meth="repeat">
+      <a:schemeClr val="tx1"/>
+    </dgm:txFillClrLst>
+    <dgm:txEffectClrLst/>
+  </dgm:styleLbl>
+  <dgm:styleLbl name="callout">
+    <dgm:fillClrLst meth="repeat">
+      <a:schemeClr val="accent1"/>
+    </dgm:fillClrLst>
+    <dgm:linClrLst meth="repeat">
+      <a:schemeClr val="accent1">
+        <a:tint val="50000"/>
+      </a:schemeClr>
+    </dgm:linClrLst>
+    <dgm:effectClrLst/>
+    <dgm:txLinClrLst/>
+    <dgm:txFillClrLst meth="repeat">
+      <a:schemeClr val="tx1"/>
+    </dgm:txFillClrLst>
+    <dgm:txEffectClrLst/>
+  </dgm:styleLbl>
+  <dgm:styleLbl name="asst0">
+    <dgm:fillClrLst meth="repeat">
+      <a:schemeClr val="accent1"/>
+    </dgm:fillClrLst>
+    <dgm:linClrLst meth="repeat">
+      <a:schemeClr val="lt1"/>
+    </dgm:linClrLst>
+    <dgm:effectClrLst/>
+    <dgm:txLinClrLst/>
+    <dgm:txFillClrLst/>
+    <dgm:txEffectClrLst/>
+  </dgm:styleLbl>
+  <dgm:styleLbl name="asst1">
+    <dgm:fillClrLst meth="repeat">
+      <a:schemeClr val="accent1"/>
+    </dgm:fillClrLst>
+    <dgm:linClrLst meth="repeat">
+      <a:schemeClr val="lt1"/>
+    </dgm:linClrLst>
+    <dgm:effectClrLst/>
+    <dgm:txLinClrLst/>
+    <dgm:txFillClrLst/>
+    <dgm:txEffectClrLst/>
+  </dgm:styleLbl>
+  <dgm:styleLbl name="asst2">
+    <dgm:fillClrLst meth="repeat">
+      <a:schemeClr val="accent1"/>
+    </dgm:fillClrLst>
+    <dgm:linClrLst meth="repeat">
+      <a:schemeClr val="lt1"/>
+    </dgm:linClrLst>
+    <dgm:effectClrLst/>
+    <dgm:txLinClrLst/>
+    <dgm:txFillClrLst/>
+    <dgm:txEffectClrLst/>
+  </dgm:styleLbl>
+  <dgm:styleLbl name="asst3">
+    <dgm:fillClrLst meth="repeat">
+      <a:schemeClr val="accent1"/>
+    </dgm:fillClrLst>
+    <dgm:linClrLst meth="repeat">
+      <a:schemeClr val="lt1"/>
+    </dgm:linClrLst>
+    <dgm:effectClrLst/>
+    <dgm:txLinClrLst/>
+    <dgm:txFillClrLst/>
+    <dgm:txEffectClrLst/>
+  </dgm:styleLbl>
+  <dgm:styleLbl name="asst4">
+    <dgm:fillClrLst meth="repeat">
+      <a:schemeClr val="accent1"/>
+    </dgm:fillClrLst>
+    <dgm:linClrLst meth="repeat">
+      <a:schemeClr val="lt1"/>
+    </dgm:linClrLst>
+    <dgm:effectClrLst/>
+    <dgm:txLinClrLst/>
+    <dgm:txFillClrLst/>
+    <dgm:txEffectClrLst/>
+  </dgm:styleLbl>
+  <dgm:styleLbl name="parChTrans2D1">
+    <dgm:fillClrLst meth="repeat">
+      <a:schemeClr val="accent1">
+        <a:tint val="60000"/>
+      </a:schemeClr>
+    </dgm:fillClrLst>
+    <dgm:linClrLst meth="repeat">
+      <a:schemeClr val="accent1">
+        <a:tint val="60000"/>
+      </a:schemeClr>
+    </dgm:linClrLst>
+    <dgm:effectClrLst/>
+    <dgm:txLinClrLst/>
+    <dgm:txFillClrLst meth="repeat">
+      <a:schemeClr val="lt1"/>
+    </dgm:txFillClrLst>
+    <dgm:txEffectClrLst/>
+  </dgm:styleLbl>
+  <dgm:styleLbl name="parChTrans2D2">
+    <dgm:fillClrLst meth="repeat">
+      <a:schemeClr val="accent1"/>
+    </dgm:fillClrLst>
+    <dgm:linClrLst meth="repeat">
+      <a:schemeClr val="accent1"/>
+    </dgm:linClrLst>
+    <dgm:effectClrLst/>
+    <dgm:txLinClrLst/>
+    <dgm:txFillClrLst meth="repeat">
+      <a:schemeClr val="lt1"/>
+    </dgm:txFillClrLst>
+    <dgm:txEffectClrLst/>
+  </dgm:styleLbl>
+  <dgm:styleLbl name="parChTrans2D3">
+    <dgm:fillClrLst meth="repeat">
+      <a:schemeClr val="accent1"/>
+    </dgm:fillClrLst>
+    <dgm:linClrLst meth="repeat">
+      <a:schemeClr val="accent1"/>
+    </dgm:linClrLst>
+    <dgm:effectClrLst/>
+    <dgm:txLinClrLst/>
+    <dgm:txFillClrLst meth="repeat">
+      <a:schemeClr val="lt1"/>
+    </dgm:txFillClrLst>
+    <dgm:txEffectClrLst/>
+  </dgm:styleLbl>
+  <dgm:styleLbl name="parChTrans2D4">
+    <dgm:fillClrLst meth="repeat">
+      <a:schemeClr val="accent1"/>
+    </dgm:fillClrLst>
+    <dgm:linClrLst meth="repeat">
+      <a:schemeClr val="accent1"/>
+    </dgm:linClrLst>
+    <dgm:effectClrLst/>
+    <dgm:txLinClrLst/>
+    <dgm:txFillClrLst meth="repeat">
+      <a:schemeClr val="lt1"/>
+    </dgm:txFillClrLst>
+    <dgm:txEffectClrLst/>
+  </dgm:styleLbl>
+  <dgm:styleLbl name="parChTrans1D1">
+    <dgm:fillClrLst meth="repeat">
+      <a:schemeClr val="accent1"/>
+    </dgm:fillClrLst>
+    <dgm:linClrLst meth="repeat">
+      <a:schemeClr val="accent1">
+        <a:shade val="60000"/>
+      </a:schemeClr>
+    </dgm:linClrLst>
+    <dgm:effectClrLst/>
+    <dgm:txLinClrLst/>
+    <dgm:txFillClrLst meth="repeat">
+      <a:schemeClr val="tx1"/>
+    </dgm:txFillClrLst>
+    <dgm:txEffectClrLst/>
+  </dgm:styleLbl>
+  <dgm:styleLbl name="parChTrans1D2">
+    <dgm:fillClrLst meth="repeat">
+      <a:schemeClr val="accent1"/>
+    </dgm:fillClrLst>
+    <dgm:linClrLst meth="repeat">
+      <a:schemeClr val="accent1">
+        <a:shade val="60000"/>
+      </a:schemeClr>
+    </dgm:linClrLst>
+    <dgm:effectClrLst/>
+    <dgm:txLinClrLst/>
+    <dgm:txFillClrLst meth="repeat">
+      <a:schemeClr val="tx1"/>
+    </dgm:txFillClrLst>
+    <dgm:txEffectClrLst/>
+  </dgm:styleLbl>
+  <dgm:styleLbl name="parChTrans1D3">
+    <dgm:fillClrLst meth="repeat">
+      <a:schemeClr val="accent1"/>
+    </dgm:fillClrLst>
+    <dgm:linClrLst meth="repeat">
+      <a:schemeClr val="accent1">
+        <a:shade val="80000"/>
+      </a:schemeClr>
+    </dgm:linClrLst>
+    <dgm:effectClrLst/>
+    <dgm:txLinClrLst/>
+    <dgm:txFillClrLst meth="repeat">
+      <a:schemeClr val="tx1"/>
+    </dgm:txFillClrLst>
+    <dgm:txEffectClrLst/>
+  </dgm:styleLbl>
+  <dgm:styleLbl name="parChTrans1D4">
+    <dgm:fillClrLst meth="repeat">
+      <a:schemeClr val="accent1"/>
+    </dgm:fillClrLst>
+    <dgm:linClrLst meth="repeat">
+      <a:schemeClr val="accent1">
+        <a:shade val="80000"/>
+      </a:schemeClr>
+    </dgm:linClrLst>
+    <dgm:effectClrLst/>
+    <dgm:txLinClrLst/>
+    <dgm:txFillClrLst meth="repeat">
+      <a:schemeClr val="tx1"/>
+    </dgm:txFillClrLst>
+    <dgm:txEffectClrLst/>
+  </dgm:styleLbl>
+  <dgm:styleLbl name="fgAcc1">
+    <dgm:fillClrLst meth="repeat">
+      <a:schemeClr val="lt1">
+        <a:alpha val="90000"/>
+      </a:schemeClr>
+    </dgm:fillClrLst>
+    <dgm:linClrLst meth="repeat">
+      <a:schemeClr val="accent1"/>
+    </dgm:linClrLst>
+    <dgm:effectClrLst/>
+    <dgm:txLinClrLst/>
+    <dgm:txFillClrLst meth="repeat">
+      <a:schemeClr val="dk1"/>
+    </dgm:txFillClrLst>
+    <dgm:txEffectClrLst/>
+  </dgm:styleLbl>
+  <dgm:styleLbl name="conFgAcc1">
+    <dgm:fillClrLst meth="repeat">
+      <a:schemeClr val="lt1">
+        <a:alpha val="90000"/>
+      </a:schemeClr>
+    </dgm:fillClrLst>
+    <dgm:linClrLst meth="repeat">
+      <a:schemeClr val="accent1"/>
+    </dgm:linClrLst>
+    <dgm:effectClrLst/>
+    <dgm:txLinClrLst/>
+    <dgm:txFillClrLst meth="repeat">
+      <a:schemeClr val="dk1"/>
+    </dgm:txFillClrLst>
+    <dgm:txEffectClrLst/>
+  </dgm:styleLbl>
+  <dgm:styleLbl name="alignAcc1">
+    <dgm:fillClrLst meth="repeat">
+      <a:schemeClr val="lt1">
+        <a:alpha val="90000"/>
+      </a:schemeClr>
+    </dgm:fillClrLst>
+    <dgm:linClrLst meth="repeat">
+      <a:schemeClr val="accent1"/>
+    </dgm:linClrLst>
+    <dgm:effectClrLst/>
+    <dgm:txLinClrLst/>
+    <dgm:txFillClrLst meth="repeat">
+      <a:schemeClr val="dk1"/>
+    </dgm:txFillClrLst>
+    <dgm:txEffectClrLst/>
+  </dgm:styleLbl>
+  <dgm:styleLbl name="trAlignAcc1">
+    <dgm:fillClrLst meth="repeat">
+      <a:schemeClr val="lt1">
+        <a:alpha val="40000"/>
+      </a:schemeClr>
+    </dgm:fillClrLst>
+    <dgm:linClrLst meth="repeat">
+      <a:schemeClr val="accent1"/>
+    </dgm:linClrLst>
+    <dgm:effectClrLst/>
+    <dgm:txLinClrLst/>
+    <dgm:txFillClrLst meth="repeat">
+      <a:schemeClr val="dk1"/>
+    </dgm:txFillClrLst>
+    <dgm:txEffectClrLst/>
+  </dgm:styleLbl>
+  <dgm:styleLbl name="bgAcc1">
+    <dgm:fillClrLst meth="repeat">
+      <a:schemeClr val="lt1">
+        <a:alpha val="90000"/>
+      </a:schemeClr>
+    </dgm:fillClrLst>
+    <dgm:linClrLst meth="repeat">
+      <a:schemeClr val="accent1"/>
+    </dgm:linClrLst>
+    <dgm:effectClrLst/>
+    <dgm:txLinClrLst/>
+    <dgm:txFillClrLst meth="repeat">
+      <a:schemeClr val="dk1"/>
+    </dgm:txFillClrLst>
+    <dgm:txEffectClrLst/>
+  </dgm:styleLbl>
+  <dgm:styleLbl name="solidFgAcc1">
+    <dgm:fillClrLst meth="repeat">
+      <a:schemeClr val="lt1"/>
+    </dgm:fillClrLst>
+    <dgm:linClrLst meth="repeat">
+      <a:schemeClr val="accent1"/>
+    </dgm:linClrLst>
+    <dgm:effectClrLst/>
+    <dgm:txLinClrLst/>
+    <dgm:txFillClrLst meth="repeat">
+      <a:schemeClr val="dk1"/>
+    </dgm:txFillClrLst>
+    <dgm:txEffectClrLst/>
+  </dgm:styleLbl>
+  <dgm:styleLbl name="solidAlignAcc1">
+    <dgm:fillClrLst meth="repeat">
+      <a:schemeClr val="lt1"/>
+    </dgm:fillClrLst>
+    <dgm:linClrLst meth="repeat">
+      <a:schemeClr val="accent1"/>
+    </dgm:linClrLst>
+    <dgm:effectClrLst/>
+    <dgm:txLinClrLst/>
+    <dgm:txFillClrLst meth="repeat">
+      <a:schemeClr val="dk1"/>
+    </dgm:txFillClrLst>
+    <dgm:txEffectClrLst/>
+  </dgm:styleLbl>
+  <dgm:styleLbl name="solidBgAcc1">
+    <dgm:fillClrLst meth="repeat">
+      <a:schemeClr val="lt1"/>
+    </dgm:fillClrLst>
+    <dgm:linClrLst meth="repeat">
+      <a:schemeClr val="accent1"/>
+    </dgm:linClrLst>
+    <dgm:effectClrLst/>
+    <dgm:txLinClrLst/>
+    <dgm:txFillClrLst meth="repeat">
+      <a:schemeClr val="dk1"/>
+    </dgm:txFillClrLst>
+    <dgm:txEffectClrLst/>
+  </dgm:styleLbl>
+  <dgm:styleLbl name="fgAccFollowNode1">
+    <dgm:fillClrLst meth="repeat">
+      <a:schemeClr val="accent1">
+        <a:alpha val="90000"/>
+        <a:tint val="40000"/>
+      </a:schemeClr>
+    </dgm:fillClrLst>
+    <dgm:linClrLst meth="repeat">
+      <a:schemeClr val="accent1">
+        <a:alpha val="90000"/>
+        <a:tint val="40000"/>
+      </a:schemeClr>
+    </dgm:linClrLst>
+    <dgm:effectClrLst/>
+    <dgm:txLinClrLst/>
+    <dgm:txFillClrLst meth="repeat">
+      <a:schemeClr val="dk1"/>
+    </dgm:txFillClrLst>
+    <dgm:txEffectClrLst/>
+  </dgm:styleLbl>
+  <dgm:styleLbl name="alignAccFollowNode1">
+    <dgm:fillClrLst meth="repeat">
+      <a:schemeClr val="accent1">
+        <a:alpha val="90000"/>
+        <a:tint val="40000"/>
+      </a:schemeClr>
+    </dgm:fillClrLst>
+    <dgm:linClrLst meth="repeat">
+      <a:schemeClr val="accent1">
+        <a:alpha val="90000"/>
+        <a:tint val="40000"/>
+      </a:schemeClr>
+    </dgm:linClrLst>
+    <dgm:effectClrLst/>
+    <dgm:txLinClrLst/>
+    <dgm:txFillClrLst meth="repeat">
+      <a:schemeClr val="dk1"/>
+    </dgm:txFillClrLst>
+    <dgm:txEffectClrLst/>
+  </dgm:styleLbl>
+  <dgm:styleLbl name="bgAccFollowNode1">
+    <dgm:fillClrLst meth="repeat">
+      <a:schemeClr val="accent1">
+        <a:alpha val="90000"/>
+        <a:tint val="40000"/>
+      </a:schemeClr>
+    </dgm:fillClrLst>
+    <dgm:linClrLst meth="repeat">
+      <a:schemeClr val="accent1">
+        <a:alpha val="90000"/>
+        <a:tint val="40000"/>
+      </a:schemeClr>
+    </dgm:linClrLst>
+    <dgm:effectClrLst/>
+    <dgm:txLinClrLst/>
+    <dgm:txFillClrLst meth="repeat">
+      <a:schemeClr val="dk1"/>
+    </dgm:txFillClrLst>
+    <dgm:txEffectClrLst/>
+  </dgm:styleLbl>
+  <dgm:styleLbl name="fgAcc0">
+    <dgm:fillClrLst meth="repeat">
+      <a:schemeClr val="lt1">
+        <a:alpha val="90000"/>
+      </a:schemeClr>
+    </dgm:fillClrLst>
+    <dgm:linClrLst meth="repeat">
+      <a:schemeClr val="accent1"/>
+    </dgm:linClrLst>
+    <dgm:effectClrLst/>
+    <dgm:txLinClrLst/>
+    <dgm:txFillClrLst meth="repeat">
+      <a:schemeClr val="dk1"/>
+    </dgm:txFillClrLst>
+    <dgm:txEffectClrLst/>
+  </dgm:styleLbl>
+  <dgm:styleLbl name="fgAcc2">
+    <dgm:fillClrLst meth="repeat">
+      <a:schemeClr val="lt1">
+        <a:alpha val="90000"/>
+      </a:schemeClr>
+    </dgm:fillClrLst>
+    <dgm:linClrLst meth="repeat">
+      <a:schemeClr val="accent1"/>
+    </dgm:linClrLst>
+    <dgm:effectClrLst/>
+    <dgm:txLinClrLst/>
+    <dgm:txFillClrLst meth="repeat">
+      <a:schemeClr val="dk1"/>
+    </dgm:txFillClrLst>
+    <dgm:txEffectClrLst/>
+  </dgm:styleLbl>
+  <dgm:styleLbl name="fgAcc3">
+    <dgm:fillClrLst meth="repeat">
+      <a:schemeClr val="lt1">
+        <a:alpha val="90000"/>
+      </a:schemeClr>
+    </dgm:fillClrLst>
+    <dgm:linClrLst meth="repeat">
+      <a:schemeClr val="accent1"/>
+    </dgm:linClrLst>
+    <dgm:effectClrLst/>
+    <dgm:txLinClrLst/>
+    <dgm:txFillClrLst meth="repeat">
+      <a:schemeClr val="dk1"/>
+    </dgm:txFillClrLst>
+    <dgm:txEffectClrLst/>
+  </dgm:styleLbl>
+  <dgm:styleLbl name="fgAcc4">
+    <dgm:fillClrLst meth="repeat">
+      <a:schemeClr val="lt1">
+        <a:alpha val="90000"/>
+      </a:schemeClr>
+    </dgm:fillClrLst>
+    <dgm:linClrLst meth="repeat">
+      <a:schemeClr val="accent1"/>
+    </dgm:linClrLst>
+    <dgm:effectClrLst/>
+    <dgm:txLinClrLst/>
+    <dgm:txFillClrLst meth="repeat">
+      <a:schemeClr val="dk1"/>
+    </dgm:txFillClrLst>
+    <dgm:txEffectClrLst/>
+  </dgm:styleLbl>
+  <dgm:styleLbl name="bgShp">
+    <dgm:fillClrLst meth="repeat">
+      <a:schemeClr val="accent1">
+        <a:tint val="40000"/>
+      </a:schemeClr>
+    </dgm:fillClrLst>
+    <dgm:linClrLst meth="repeat">
+      <a:schemeClr val="accent1"/>
+    </dgm:linClrLst>
+    <dgm:effectClrLst/>
+    <dgm:txLinClrLst/>
+    <dgm:txFillClrLst meth="repeat">
+      <a:schemeClr val="dk1"/>
+    </dgm:txFillClrLst>
+    <dgm:txEffectClrLst/>
+  </dgm:styleLbl>
+  <dgm:styleLbl name="dkBgShp">
+    <dgm:fillClrLst meth="repeat">
+      <a:schemeClr val="accent1">
+        <a:shade val="80000"/>
+      </a:schemeClr>
+    </dgm:fillClrLst>
+    <dgm:linClrLst meth="repeat">
+      <a:schemeClr val="accent1"/>
+    </dgm:linClrLst>
+    <dgm:effectClrLst/>
+    <dgm:txLinClrLst/>
+    <dgm:txFillClrLst meth="repeat">
+      <a:schemeClr val="lt1"/>
+    </dgm:txFillClrLst>
+    <dgm:txEffectClrLst/>
+  </dgm:styleLbl>
+  <dgm:styleLbl name="trBgShp">
+    <dgm:fillClrLst meth="repeat">
+      <a:schemeClr val="accent1">
+        <a:tint val="50000"/>
+        <a:alpha val="40000"/>
+      </a:schemeClr>
+    </dgm:fillClrLst>
+    <dgm:linClrLst meth="repeat">
+      <a:schemeClr val="accent1"/>
+    </dgm:linClrLst>
+    <dgm:effectClrLst/>
+    <dgm:txLinClrLst/>
+    <dgm:txFillClrLst meth="repeat">
+      <a:schemeClr val="lt1"/>
+    </dgm:txFillClrLst>
+    <dgm:txEffectClrLst/>
+  </dgm:styleLbl>
+  <dgm:styleLbl name="fgShp">
+    <dgm:fillClrLst meth="repeat">
+      <a:schemeClr val="accent1">
+        <a:tint val="60000"/>
+      </a:schemeClr>
+    </dgm:fillClrLst>
+    <dgm:linClrLst meth="repeat">
+      <a:schemeClr val="lt1"/>
+    </dgm:linClrLst>
+    <dgm:effectClrLst/>
+    <dgm:txLinClrLst/>
+    <dgm:txFillClrLst meth="repeat">
+      <a:schemeClr val="dk1"/>
+    </dgm:txFillClrLst>
+    <dgm:txEffectClrLst/>
+  </dgm:styleLbl>
+  <dgm:styleLbl name="revTx">
+    <dgm:fillClrLst meth="repeat">
+      <a:schemeClr val="lt1">
+        <a:alpha val="0"/>
+      </a:schemeClr>
+    </dgm:fillClrLst>
+    <dgm:linClrLst meth="repeat">
+      <a:schemeClr val="dk1">
+        <a:alpha val="0"/>
+      </a:schemeClr>
+    </dgm:linClrLst>
+    <dgm:effectClrLst/>
+    <dgm:txLinClrLst/>
+    <dgm:txFillClrLst meth="repeat">
+      <a:schemeClr val="tx1"/>
+    </dgm:txFillClrLst>
+    <dgm:txEffectClrLst/>
+  </dgm:styleLbl>
+</dgm:colorsDef>
+</file>
+
+<file path=ppt/diagrams/colors6.xml><?xml version="1.0" encoding="utf-8"?>
 <dgm:colorsDef xmlns:dgm="http://schemas.openxmlformats.org/drawingml/2006/diagram" xmlns:a="http://schemas.openxmlformats.org/drawingml/2006/main" uniqueId="urn:microsoft.com/office/officeart/2005/8/colors/accent1_2">
   <dgm:title val=""/>
   <dgm:desc val=""/>
@@ -4637,6 +6135,186 @@
   <dgm:extLst>
     <a:ext uri="http://schemas.microsoft.com/office/drawing/2008/diagram">
       <dsp:dataModelExt xmlns:dsp="http://schemas.microsoft.com/office/drawing/2008/diagram" relId="rId7" minVer="http://schemas.openxmlformats.org/drawingml/2006/diagram"/>
+    </a:ext>
+  </dgm:extLst>
+</dgm:dataModel>
+</file>
+
+<file path=ppt/diagrams/data5.xml><?xml version="1.0" encoding="utf-8"?>
+<dgm:dataModel xmlns:dgm="http://schemas.openxmlformats.org/drawingml/2006/diagram" xmlns:a="http://schemas.openxmlformats.org/drawingml/2006/main">
+  <dgm:ptLst>
+    <dgm:pt modelId="{774BABEB-39D0-5842-A995-002DD80AB169}" type="doc">
+      <dgm:prSet loTypeId="urn:microsoft.com/office/officeart/2005/8/layout/process1" loCatId="" qsTypeId="urn:microsoft.com/office/officeart/2005/8/quickstyle/simple1" qsCatId="simple" csTypeId="urn:microsoft.com/office/officeart/2005/8/colors/accent1_2" csCatId="accent1" phldr="1"/>
+      <dgm:spPr/>
+      <dgm:t>
+        <a:bodyPr/>
+        <a:lstStyle/>
+        <a:p>
+          <a:endParaRPr lang="en-US"/>
+        </a:p>
+      </dgm:t>
+    </dgm:pt>
+    <dgm:pt modelId="{128AA22E-8A6A-A04F-BCC4-C749E5320C17}">
+      <dgm:prSet phldrT="[Text]"/>
+      <dgm:spPr/>
+      <dgm:t>
+        <a:bodyPr/>
+        <a:lstStyle/>
+        <a:p>
+          <a:r>
+            <a:rPr lang="en-US" dirty="0"/>
+            <a:t>Step 2:</a:t>
+          </a:r>
+        </a:p>
+        <a:p>
+          <a:r>
+            <a:rPr lang="en-US" dirty="0"/>
+            <a:t>Create collection in Ingest API</a:t>
+          </a:r>
+        </a:p>
+      </dgm:t>
+    </dgm:pt>
+    <dgm:pt modelId="{0B98B347-A914-6A46-B386-BE00E8AC1002}" type="parTrans" cxnId="{93824C9F-DC60-F64C-89B9-88D2B1D96AB3}">
+      <dgm:prSet/>
+      <dgm:spPr/>
+      <dgm:t>
+        <a:bodyPr/>
+        <a:lstStyle/>
+        <a:p>
+          <a:endParaRPr lang="en-US"/>
+        </a:p>
+      </dgm:t>
+    </dgm:pt>
+    <dgm:pt modelId="{B1145016-053F-064B-A93E-B246FAC4A7E5}" type="sibTrans" cxnId="{93824C9F-DC60-F64C-89B9-88D2B1D96AB3}">
+      <dgm:prSet/>
+      <dgm:spPr/>
+      <dgm:t>
+        <a:bodyPr/>
+        <a:lstStyle/>
+        <a:p>
+          <a:endParaRPr lang="en-US"/>
+        </a:p>
+      </dgm:t>
+    </dgm:pt>
+    <dgm:pt modelId="{9FF54158-708B-E544-AE48-0FDDFE1EC42E}" type="pres">
+      <dgm:prSet presAssocID="{774BABEB-39D0-5842-A995-002DD80AB169}" presName="Name0" presStyleCnt="0">
+        <dgm:presLayoutVars>
+          <dgm:dir/>
+          <dgm:resizeHandles val="exact"/>
+        </dgm:presLayoutVars>
+      </dgm:prSet>
+      <dgm:spPr/>
+    </dgm:pt>
+    <dgm:pt modelId="{6375124F-CE50-A448-8839-9BA730014CE5}" type="pres">
+      <dgm:prSet presAssocID="{128AA22E-8A6A-A04F-BCC4-C749E5320C17}" presName="node" presStyleLbl="node1" presStyleIdx="0" presStyleCnt="1">
+        <dgm:presLayoutVars>
+          <dgm:bulletEnabled val="1"/>
+        </dgm:presLayoutVars>
+      </dgm:prSet>
+      <dgm:spPr/>
+    </dgm:pt>
+  </dgm:ptLst>
+  <dgm:cxnLst>
+    <dgm:cxn modelId="{A2A27C85-23A1-6B4B-B6AF-660F82BF2C3B}" type="presOf" srcId="{128AA22E-8A6A-A04F-BCC4-C749E5320C17}" destId="{6375124F-CE50-A448-8839-9BA730014CE5}" srcOrd="0" destOrd="0" presId="urn:microsoft.com/office/officeart/2005/8/layout/process1"/>
+    <dgm:cxn modelId="{3827CF97-D6C2-C643-8B0F-F71042A19627}" type="presOf" srcId="{774BABEB-39D0-5842-A995-002DD80AB169}" destId="{9FF54158-708B-E544-AE48-0FDDFE1EC42E}" srcOrd="0" destOrd="0" presId="urn:microsoft.com/office/officeart/2005/8/layout/process1"/>
+    <dgm:cxn modelId="{93824C9F-DC60-F64C-89B9-88D2B1D96AB3}" srcId="{774BABEB-39D0-5842-A995-002DD80AB169}" destId="{128AA22E-8A6A-A04F-BCC4-C749E5320C17}" srcOrd="0" destOrd="0" parTransId="{0B98B347-A914-6A46-B386-BE00E8AC1002}" sibTransId="{B1145016-053F-064B-A93E-B246FAC4A7E5}"/>
+    <dgm:cxn modelId="{6AC1F0FF-7F80-8E4D-AF38-F7C8E2614B0D}" type="presParOf" srcId="{9FF54158-708B-E544-AE48-0FDDFE1EC42E}" destId="{6375124F-CE50-A448-8839-9BA730014CE5}" srcOrd="0" destOrd="0" presId="urn:microsoft.com/office/officeart/2005/8/layout/process1"/>
+  </dgm:cxnLst>
+  <dgm:bg/>
+  <dgm:whole/>
+  <dgm:extLst>
+    <a:ext uri="http://schemas.microsoft.com/office/drawing/2008/diagram">
+      <dsp:dataModelExt xmlns:dsp="http://schemas.microsoft.com/office/drawing/2008/diagram" relId="rId9" minVer="http://schemas.openxmlformats.org/drawingml/2006/diagram"/>
+    </a:ext>
+  </dgm:extLst>
+</dgm:dataModel>
+</file>
+
+<file path=ppt/diagrams/data6.xml><?xml version="1.0" encoding="utf-8"?>
+<dgm:dataModel xmlns:dgm="http://schemas.openxmlformats.org/drawingml/2006/diagram" xmlns:a="http://schemas.openxmlformats.org/drawingml/2006/main">
+  <dgm:ptLst>
+    <dgm:pt modelId="{774BABEB-39D0-5842-A995-002DD80AB169}" type="doc">
+      <dgm:prSet loTypeId="urn:microsoft.com/office/officeart/2005/8/layout/process1" loCatId="" qsTypeId="urn:microsoft.com/office/officeart/2005/8/quickstyle/simple1" qsCatId="simple" csTypeId="urn:microsoft.com/office/officeart/2005/8/colors/accent1_2" csCatId="accent1" phldr="1"/>
+      <dgm:spPr/>
+      <dgm:t>
+        <a:bodyPr/>
+        <a:lstStyle/>
+        <a:p>
+          <a:endParaRPr lang="en-US"/>
+        </a:p>
+      </dgm:t>
+    </dgm:pt>
+    <dgm:pt modelId="{128AA22E-8A6A-A04F-BCC4-C749E5320C17}">
+      <dgm:prSet phldrT="[Text]"/>
+      <dgm:spPr/>
+      <dgm:t>
+        <a:bodyPr/>
+        <a:lstStyle/>
+        <a:p>
+          <a:r>
+            <a:rPr lang="en-US" dirty="0"/>
+            <a:t>Step 3:</a:t>
+          </a:r>
+        </a:p>
+        <a:p>
+          <a:r>
+            <a:rPr lang="en-US" dirty="0"/>
+            <a:t>Ingest items in Airflow </a:t>
+          </a:r>
+        </a:p>
+      </dgm:t>
+    </dgm:pt>
+    <dgm:pt modelId="{0B98B347-A914-6A46-B386-BE00E8AC1002}" type="parTrans" cxnId="{93824C9F-DC60-F64C-89B9-88D2B1D96AB3}">
+      <dgm:prSet/>
+      <dgm:spPr/>
+      <dgm:t>
+        <a:bodyPr/>
+        <a:lstStyle/>
+        <a:p>
+          <a:endParaRPr lang="en-US"/>
+        </a:p>
+      </dgm:t>
+    </dgm:pt>
+    <dgm:pt modelId="{B1145016-053F-064B-A93E-B246FAC4A7E5}" type="sibTrans" cxnId="{93824C9F-DC60-F64C-89B9-88D2B1D96AB3}">
+      <dgm:prSet/>
+      <dgm:spPr/>
+      <dgm:t>
+        <a:bodyPr/>
+        <a:lstStyle/>
+        <a:p>
+          <a:endParaRPr lang="en-US"/>
+        </a:p>
+      </dgm:t>
+    </dgm:pt>
+    <dgm:pt modelId="{9FF54158-708B-E544-AE48-0FDDFE1EC42E}" type="pres">
+      <dgm:prSet presAssocID="{774BABEB-39D0-5842-A995-002DD80AB169}" presName="Name0" presStyleCnt="0">
+        <dgm:presLayoutVars>
+          <dgm:dir/>
+          <dgm:resizeHandles val="exact"/>
+        </dgm:presLayoutVars>
+      </dgm:prSet>
+      <dgm:spPr/>
+    </dgm:pt>
+    <dgm:pt modelId="{6375124F-CE50-A448-8839-9BA730014CE5}" type="pres">
+      <dgm:prSet presAssocID="{128AA22E-8A6A-A04F-BCC4-C749E5320C17}" presName="node" presStyleLbl="node1" presStyleIdx="0" presStyleCnt="1" custLinFactNeighborX="49" custLinFactNeighborY="-12659">
+        <dgm:presLayoutVars>
+          <dgm:bulletEnabled val="1"/>
+        </dgm:presLayoutVars>
+      </dgm:prSet>
+      <dgm:spPr/>
+    </dgm:pt>
+  </dgm:ptLst>
+  <dgm:cxnLst>
+    <dgm:cxn modelId="{A2A27C85-23A1-6B4B-B6AF-660F82BF2C3B}" type="presOf" srcId="{128AA22E-8A6A-A04F-BCC4-C749E5320C17}" destId="{6375124F-CE50-A448-8839-9BA730014CE5}" srcOrd="0" destOrd="0" presId="urn:microsoft.com/office/officeart/2005/8/layout/process1"/>
+    <dgm:cxn modelId="{3827CF97-D6C2-C643-8B0F-F71042A19627}" type="presOf" srcId="{774BABEB-39D0-5842-A995-002DD80AB169}" destId="{9FF54158-708B-E544-AE48-0FDDFE1EC42E}" srcOrd="0" destOrd="0" presId="urn:microsoft.com/office/officeart/2005/8/layout/process1"/>
+    <dgm:cxn modelId="{93824C9F-DC60-F64C-89B9-88D2B1D96AB3}" srcId="{774BABEB-39D0-5842-A995-002DD80AB169}" destId="{128AA22E-8A6A-A04F-BCC4-C749E5320C17}" srcOrd="0" destOrd="0" parTransId="{0B98B347-A914-6A46-B386-BE00E8AC1002}" sibTransId="{B1145016-053F-064B-A93E-B246FAC4A7E5}"/>
+    <dgm:cxn modelId="{6AC1F0FF-7F80-8E4D-AF38-F7C8E2614B0D}" type="presParOf" srcId="{9FF54158-708B-E544-AE48-0FDDFE1EC42E}" destId="{6375124F-CE50-A448-8839-9BA730014CE5}" srcOrd="0" destOrd="0" presId="urn:microsoft.com/office/officeart/2005/8/layout/process1"/>
+  </dgm:cxnLst>
+  <dgm:bg/>
+  <dgm:whole/>
+  <dgm:extLst>
+    <a:ext uri="http://schemas.microsoft.com/office/drawing/2008/diagram">
+      <dsp:dataModelExt xmlns:dsp="http://schemas.microsoft.com/office/drawing/2008/diagram" relId="rId8" minVer="http://schemas.openxmlformats.org/drawingml/2006/diagram"/>
     </a:ext>
   </dgm:extLst>
 </dgm:dataModel>
@@ -6581,8 +8259,8 @@
       </dsp:nvSpPr>
       <dsp:spPr>
         <a:xfrm>
-          <a:off x="4148" y="0"/>
-          <a:ext cx="4244420" cy="1854737"/>
+          <a:off x="3614" y="0"/>
+          <a:ext cx="3698089" cy="1438760"/>
         </a:xfrm>
         <a:prstGeom prst="roundRect">
           <a:avLst>
@@ -6626,12 +8304,12 @@
         </a:fontRef>
       </dsp:style>
       <dsp:txBody>
-        <a:bodyPr spcFirstLastPara="0" vert="horz" wrap="square" lIns="118110" tIns="118110" rIns="118110" bIns="118110" numCol="1" spcCol="1270" anchor="ctr" anchorCtr="0">
+        <a:bodyPr spcFirstLastPara="0" vert="horz" wrap="square" lIns="91440" tIns="91440" rIns="91440" bIns="91440" numCol="1" spcCol="1270" anchor="ctr" anchorCtr="0">
           <a:noAutofit/>
         </a:bodyPr>
         <a:lstStyle/>
         <a:p>
-          <a:pPr marL="0" lvl="0" indent="0" algn="ctr" defTabSz="1377950">
+          <a:pPr marL="0" lvl="0" indent="0" algn="ctr" defTabSz="1066800">
             <a:lnSpc>
               <a:spcPct val="90000"/>
             </a:lnSpc>
@@ -6644,12 +8322,12 @@
             <a:buNone/>
           </a:pPr>
           <a:r>
-            <a:rPr lang="en-US" sz="3100" kern="1200" dirty="0"/>
+            <a:rPr lang="en-US" sz="2400" kern="1200" dirty="0"/>
             <a:t>Step 1: </a:t>
           </a:r>
         </a:p>
         <a:p>
-          <a:pPr marL="0" lvl="0" indent="0" algn="ctr" defTabSz="1377950">
+          <a:pPr marL="0" lvl="0" indent="0" algn="ctr" defTabSz="1066800">
             <a:lnSpc>
               <a:spcPct val="90000"/>
             </a:lnSpc>
@@ -6662,22 +8340,242 @@
             <a:buNone/>
           </a:pPr>
           <a:r>
-            <a:rPr lang="en-US" sz="3100" kern="1200" dirty="0"/>
+            <a:rPr lang="en-US" sz="2400" kern="1200" dirty="0"/>
             <a:t>Create </a:t>
           </a:r>
           <a:r>
-            <a:rPr lang="en-US" sz="3100" kern="1200" dirty="0" err="1"/>
+            <a:rPr lang="en-US" sz="2400" kern="1200" dirty="0" err="1"/>
             <a:t>json</a:t>
           </a:r>
           <a:r>
-            <a:rPr lang="en-US" sz="3100" kern="1200" dirty="0"/>
+            <a:rPr lang="en-US" sz="2400" kern="1200" dirty="0"/>
             <a:t> config for ingestion</a:t>
           </a:r>
         </a:p>
       </dsp:txBody>
       <dsp:txXfrm>
-        <a:off x="58471" y="54323"/>
-        <a:ext cx="4135774" cy="1746091"/>
+        <a:off x="45754" y="42140"/>
+        <a:ext cx="3613809" cy="1354480"/>
+      </dsp:txXfrm>
+    </dsp:sp>
+  </dsp:spTree>
+</dsp:drawing>
+</file>
+
+<file path=ppt/diagrams/drawing5.xml><?xml version="1.0" encoding="utf-8"?>
+<dsp:drawing xmlns:dgm="http://schemas.openxmlformats.org/drawingml/2006/diagram" xmlns:dsp="http://schemas.microsoft.com/office/drawing/2008/diagram" xmlns:a="http://schemas.openxmlformats.org/drawingml/2006/main">
+  <dsp:spTree>
+    <dsp:nvGrpSpPr>
+      <dsp:cNvPr id="0" name=""/>
+      <dsp:cNvGrpSpPr/>
+    </dsp:nvGrpSpPr>
+    <dsp:grpSpPr/>
+    <dsp:sp modelId="{6375124F-CE50-A448-8839-9BA730014CE5}">
+      <dsp:nvSpPr>
+        <dsp:cNvPr id="0" name=""/>
+        <dsp:cNvSpPr/>
+      </dsp:nvSpPr>
+      <dsp:spPr>
+        <a:xfrm>
+          <a:off x="1807" y="0"/>
+          <a:ext cx="3698089" cy="1438760"/>
+        </a:xfrm>
+        <a:prstGeom prst="roundRect">
+          <a:avLst>
+            <a:gd name="adj" fmla="val 10000"/>
+          </a:avLst>
+        </a:prstGeom>
+        <a:solidFill>
+          <a:schemeClr val="accent1">
+            <a:hueOff val="0"/>
+            <a:satOff val="0"/>
+            <a:lumOff val="0"/>
+            <a:alphaOff val="0"/>
+          </a:schemeClr>
+        </a:solidFill>
+        <a:ln w="12700" cap="flat" cmpd="sng" algn="ctr">
+          <a:solidFill>
+            <a:schemeClr val="lt1">
+              <a:hueOff val="0"/>
+              <a:satOff val="0"/>
+              <a:lumOff val="0"/>
+              <a:alphaOff val="0"/>
+            </a:schemeClr>
+          </a:solidFill>
+          <a:prstDash val="solid"/>
+          <a:miter lim="800000"/>
+        </a:ln>
+        <a:effectLst/>
+      </dsp:spPr>
+      <dsp:style>
+        <a:lnRef idx="2">
+          <a:scrgbClr r="0" g="0" b="0"/>
+        </a:lnRef>
+        <a:fillRef idx="1">
+          <a:scrgbClr r="0" g="0" b="0"/>
+        </a:fillRef>
+        <a:effectRef idx="0">
+          <a:scrgbClr r="0" g="0" b="0"/>
+        </a:effectRef>
+        <a:fontRef idx="minor">
+          <a:schemeClr val="lt1"/>
+        </a:fontRef>
+      </dsp:style>
+      <dsp:txBody>
+        <a:bodyPr spcFirstLastPara="0" vert="horz" wrap="square" lIns="91440" tIns="91440" rIns="91440" bIns="91440" numCol="1" spcCol="1270" anchor="ctr" anchorCtr="0">
+          <a:noAutofit/>
+        </a:bodyPr>
+        <a:lstStyle/>
+        <a:p>
+          <a:pPr marL="0" lvl="0" indent="0" algn="ctr" defTabSz="1066800">
+            <a:lnSpc>
+              <a:spcPct val="90000"/>
+            </a:lnSpc>
+            <a:spcBef>
+              <a:spcPct val="0"/>
+            </a:spcBef>
+            <a:spcAft>
+              <a:spcPct val="35000"/>
+            </a:spcAft>
+            <a:buNone/>
+          </a:pPr>
+          <a:r>
+            <a:rPr lang="en-US" sz="2400" kern="1200" dirty="0"/>
+            <a:t>Step 2:</a:t>
+          </a:r>
+        </a:p>
+        <a:p>
+          <a:pPr marL="0" lvl="0" indent="0" algn="ctr" defTabSz="1066800">
+            <a:lnSpc>
+              <a:spcPct val="90000"/>
+            </a:lnSpc>
+            <a:spcBef>
+              <a:spcPct val="0"/>
+            </a:spcBef>
+            <a:spcAft>
+              <a:spcPct val="35000"/>
+            </a:spcAft>
+            <a:buNone/>
+          </a:pPr>
+          <a:r>
+            <a:rPr lang="en-US" sz="2400" kern="1200" dirty="0"/>
+            <a:t>Create collection in Ingest API</a:t>
+          </a:r>
+        </a:p>
+      </dsp:txBody>
+      <dsp:txXfrm>
+        <a:off x="43947" y="42140"/>
+        <a:ext cx="3613809" cy="1354480"/>
+      </dsp:txXfrm>
+    </dsp:sp>
+  </dsp:spTree>
+</dsp:drawing>
+</file>
+
+<file path=ppt/diagrams/drawing6.xml><?xml version="1.0" encoding="utf-8"?>
+<dsp:drawing xmlns:dgm="http://schemas.openxmlformats.org/drawingml/2006/diagram" xmlns:dsp="http://schemas.microsoft.com/office/drawing/2008/diagram" xmlns:a="http://schemas.openxmlformats.org/drawingml/2006/main">
+  <dsp:spTree>
+    <dsp:nvGrpSpPr>
+      <dsp:cNvPr id="0" name=""/>
+      <dsp:cNvGrpSpPr/>
+    </dsp:nvGrpSpPr>
+    <dsp:grpSpPr/>
+    <dsp:sp modelId="{6375124F-CE50-A448-8839-9BA730014CE5}">
+      <dsp:nvSpPr>
+        <dsp:cNvPr id="0" name=""/>
+        <dsp:cNvSpPr/>
+      </dsp:nvSpPr>
+      <dsp:spPr>
+        <a:xfrm>
+          <a:off x="3614" y="0"/>
+          <a:ext cx="3698089" cy="1438760"/>
+        </a:xfrm>
+        <a:prstGeom prst="roundRect">
+          <a:avLst>
+            <a:gd name="adj" fmla="val 10000"/>
+          </a:avLst>
+        </a:prstGeom>
+        <a:solidFill>
+          <a:schemeClr val="accent1">
+            <a:hueOff val="0"/>
+            <a:satOff val="0"/>
+            <a:lumOff val="0"/>
+            <a:alphaOff val="0"/>
+          </a:schemeClr>
+        </a:solidFill>
+        <a:ln w="12700" cap="flat" cmpd="sng" algn="ctr">
+          <a:solidFill>
+            <a:schemeClr val="lt1">
+              <a:hueOff val="0"/>
+              <a:satOff val="0"/>
+              <a:lumOff val="0"/>
+              <a:alphaOff val="0"/>
+            </a:schemeClr>
+          </a:solidFill>
+          <a:prstDash val="solid"/>
+          <a:miter lim="800000"/>
+        </a:ln>
+        <a:effectLst/>
+      </dsp:spPr>
+      <dsp:style>
+        <a:lnRef idx="2">
+          <a:scrgbClr r="0" g="0" b="0"/>
+        </a:lnRef>
+        <a:fillRef idx="1">
+          <a:scrgbClr r="0" g="0" b="0"/>
+        </a:fillRef>
+        <a:effectRef idx="0">
+          <a:scrgbClr r="0" g="0" b="0"/>
+        </a:effectRef>
+        <a:fontRef idx="minor">
+          <a:schemeClr val="lt1"/>
+        </a:fontRef>
+      </dsp:style>
+      <dsp:txBody>
+        <a:bodyPr spcFirstLastPara="0" vert="horz" wrap="square" lIns="110490" tIns="110490" rIns="110490" bIns="110490" numCol="1" spcCol="1270" anchor="ctr" anchorCtr="0">
+          <a:noAutofit/>
+        </a:bodyPr>
+        <a:lstStyle/>
+        <a:p>
+          <a:pPr marL="0" lvl="0" indent="0" algn="ctr" defTabSz="1289050">
+            <a:lnSpc>
+              <a:spcPct val="90000"/>
+            </a:lnSpc>
+            <a:spcBef>
+              <a:spcPct val="0"/>
+            </a:spcBef>
+            <a:spcAft>
+              <a:spcPct val="35000"/>
+            </a:spcAft>
+            <a:buNone/>
+          </a:pPr>
+          <a:r>
+            <a:rPr lang="en-US" sz="2900" kern="1200" dirty="0"/>
+            <a:t>Step 3:</a:t>
+          </a:r>
+        </a:p>
+        <a:p>
+          <a:pPr marL="0" lvl="0" indent="0" algn="ctr" defTabSz="1289050">
+            <a:lnSpc>
+              <a:spcPct val="90000"/>
+            </a:lnSpc>
+            <a:spcBef>
+              <a:spcPct val="0"/>
+            </a:spcBef>
+            <a:spcAft>
+              <a:spcPct val="35000"/>
+            </a:spcAft>
+            <a:buNone/>
+          </a:pPr>
+          <a:r>
+            <a:rPr lang="en-US" sz="2900" kern="1200" dirty="0"/>
+            <a:t>Ingest items in Airflow </a:t>
+          </a:r>
+        </a:p>
+      </dsp:txBody>
+      <dsp:txXfrm>
+        <a:off x="45754" y="42140"/>
+        <a:ext cx="3613809" cy="1354480"/>
       </dsp:txXfrm>
     </dsp:sp>
   </dsp:spTree>
@@ -7612,6 +9510,298 @@
 </dgm:layoutDef>
 </file>
 
+<file path=ppt/diagrams/layout5.xml><?xml version="1.0" encoding="utf-8"?>
+<dgm:layoutDef xmlns:dgm="http://schemas.openxmlformats.org/drawingml/2006/diagram" xmlns:a="http://schemas.openxmlformats.org/drawingml/2006/main" uniqueId="urn:microsoft.com/office/officeart/2005/8/layout/process1">
+  <dgm:title val=""/>
+  <dgm:desc val=""/>
+  <dgm:catLst>
+    <dgm:cat type="process" pri="1000"/>
+    <dgm:cat type="convert" pri="15000"/>
+  </dgm:catLst>
+  <dgm:sampData useDef="1">
+    <dgm:dataModel>
+      <dgm:ptLst/>
+      <dgm:bg/>
+      <dgm:whole/>
+    </dgm:dataModel>
+  </dgm:sampData>
+  <dgm:styleData>
+    <dgm:dataModel>
+      <dgm:ptLst>
+        <dgm:pt modelId="0" type="doc"/>
+        <dgm:pt modelId="1"/>
+        <dgm:pt modelId="2"/>
+      </dgm:ptLst>
+      <dgm:cxnLst>
+        <dgm:cxn modelId="3" srcId="0" destId="1" srcOrd="0" destOrd="0"/>
+        <dgm:cxn modelId="4" srcId="0" destId="2" srcOrd="1" destOrd="0"/>
+      </dgm:cxnLst>
+      <dgm:bg/>
+      <dgm:whole/>
+    </dgm:dataModel>
+  </dgm:styleData>
+  <dgm:clrData>
+    <dgm:dataModel>
+      <dgm:ptLst>
+        <dgm:pt modelId="0" type="doc"/>
+        <dgm:pt modelId="1"/>
+        <dgm:pt modelId="2"/>
+        <dgm:pt modelId="3"/>
+        <dgm:pt modelId="4"/>
+      </dgm:ptLst>
+      <dgm:cxnLst>
+        <dgm:cxn modelId="5" srcId="0" destId="1" srcOrd="0" destOrd="0"/>
+        <dgm:cxn modelId="6" srcId="0" destId="2" srcOrd="1" destOrd="0"/>
+        <dgm:cxn modelId="7" srcId="0" destId="3" srcOrd="2" destOrd="0"/>
+        <dgm:cxn modelId="8" srcId="0" destId="4" srcOrd="3" destOrd="0"/>
+      </dgm:cxnLst>
+      <dgm:bg/>
+      <dgm:whole/>
+    </dgm:dataModel>
+  </dgm:clrData>
+  <dgm:layoutNode name="Name0">
+    <dgm:varLst>
+      <dgm:dir/>
+      <dgm:resizeHandles val="exact"/>
+    </dgm:varLst>
+    <dgm:choose name="Name1">
+      <dgm:if name="Name2" func="var" arg="dir" op="equ" val="norm">
+        <dgm:alg type="lin"/>
+      </dgm:if>
+      <dgm:else name="Name3">
+        <dgm:alg type="lin">
+          <dgm:param type="linDir" val="fromR"/>
+        </dgm:alg>
+      </dgm:else>
+    </dgm:choose>
+    <dgm:shape xmlns:r="http://schemas.openxmlformats.org/officeDocument/2006/relationships" r:blip="">
+      <dgm:adjLst/>
+    </dgm:shape>
+    <dgm:presOf/>
+    <dgm:constrLst>
+      <dgm:constr type="w" for="ch" ptType="node" refType="w"/>
+      <dgm:constr type="h" for="ch" ptType="node" op="equ"/>
+      <dgm:constr type="primFontSz" for="ch" ptType="node" op="equ" val="65"/>
+      <dgm:constr type="w" for="ch" ptType="sibTrans" refType="w" refFor="ch" refPtType="node" op="equ" fact="0.4"/>
+      <dgm:constr type="h" for="ch" ptType="sibTrans" op="equ"/>
+      <dgm:constr type="primFontSz" for="des" forName="connectorText" op="equ" val="55"/>
+      <dgm:constr type="primFontSz" for="des" forName="connectorText" refType="primFontSz" refFor="ch" refPtType="node" op="lte" fact="0.8"/>
+    </dgm:constrLst>
+    <dgm:ruleLst/>
+    <dgm:forEach name="nodesForEach" axis="ch" ptType="node">
+      <dgm:layoutNode name="node">
+        <dgm:varLst>
+          <dgm:bulletEnabled val="1"/>
+        </dgm:varLst>
+        <dgm:alg type="tx"/>
+        <dgm:shape xmlns:r="http://schemas.openxmlformats.org/officeDocument/2006/relationships" type="roundRect" r:blip="">
+          <dgm:adjLst>
+            <dgm:adj idx="1" val="0.1"/>
+          </dgm:adjLst>
+        </dgm:shape>
+        <dgm:presOf axis="desOrSelf" ptType="node"/>
+        <dgm:constrLst>
+          <dgm:constr type="h" refType="w" fact="0.6"/>
+          <dgm:constr type="tMarg" refType="primFontSz" fact="0.3"/>
+          <dgm:constr type="bMarg" refType="primFontSz" fact="0.3"/>
+          <dgm:constr type="lMarg" refType="primFontSz" fact="0.3"/>
+          <dgm:constr type="rMarg" refType="primFontSz" fact="0.3"/>
+        </dgm:constrLst>
+        <dgm:ruleLst>
+          <dgm:rule type="primFontSz" val="18" fact="NaN" max="NaN"/>
+          <dgm:rule type="h" val="NaN" fact="1.5" max="NaN"/>
+          <dgm:rule type="primFontSz" val="5" fact="NaN" max="NaN"/>
+          <dgm:rule type="h" val="INF" fact="NaN" max="NaN"/>
+        </dgm:ruleLst>
+      </dgm:layoutNode>
+      <dgm:forEach name="sibTransForEach" axis="followSib" ptType="sibTrans" cnt="1">
+        <dgm:layoutNode name="sibTrans">
+          <dgm:alg type="conn">
+            <dgm:param type="begPts" val="auto"/>
+            <dgm:param type="endPts" val="auto"/>
+          </dgm:alg>
+          <dgm:shape xmlns:r="http://schemas.openxmlformats.org/officeDocument/2006/relationships" type="conn" r:blip="">
+            <dgm:adjLst/>
+          </dgm:shape>
+          <dgm:presOf axis="self"/>
+          <dgm:constrLst>
+            <dgm:constr type="h" refType="w" fact="0.62"/>
+            <dgm:constr type="connDist"/>
+            <dgm:constr type="begPad" refType="connDist" fact="0.25"/>
+            <dgm:constr type="endPad" refType="connDist" fact="0.22"/>
+          </dgm:constrLst>
+          <dgm:ruleLst/>
+          <dgm:layoutNode name="connectorText">
+            <dgm:alg type="tx">
+              <dgm:param type="autoTxRot" val="grav"/>
+            </dgm:alg>
+            <dgm:shape xmlns:r="http://schemas.openxmlformats.org/officeDocument/2006/relationships" type="conn" r:blip="" hideGeom="1">
+              <dgm:adjLst/>
+            </dgm:shape>
+            <dgm:presOf axis="self"/>
+            <dgm:constrLst>
+              <dgm:constr type="lMarg"/>
+              <dgm:constr type="rMarg"/>
+              <dgm:constr type="tMarg"/>
+              <dgm:constr type="bMarg"/>
+            </dgm:constrLst>
+            <dgm:ruleLst>
+              <dgm:rule type="primFontSz" val="5" fact="NaN" max="NaN"/>
+            </dgm:ruleLst>
+          </dgm:layoutNode>
+        </dgm:layoutNode>
+      </dgm:forEach>
+    </dgm:forEach>
+  </dgm:layoutNode>
+</dgm:layoutDef>
+</file>
+
+<file path=ppt/diagrams/layout6.xml><?xml version="1.0" encoding="utf-8"?>
+<dgm:layoutDef xmlns:dgm="http://schemas.openxmlformats.org/drawingml/2006/diagram" xmlns:a="http://schemas.openxmlformats.org/drawingml/2006/main" uniqueId="urn:microsoft.com/office/officeart/2005/8/layout/process1">
+  <dgm:title val=""/>
+  <dgm:desc val=""/>
+  <dgm:catLst>
+    <dgm:cat type="process" pri="1000"/>
+    <dgm:cat type="convert" pri="15000"/>
+  </dgm:catLst>
+  <dgm:sampData useDef="1">
+    <dgm:dataModel>
+      <dgm:ptLst/>
+      <dgm:bg/>
+      <dgm:whole/>
+    </dgm:dataModel>
+  </dgm:sampData>
+  <dgm:styleData>
+    <dgm:dataModel>
+      <dgm:ptLst>
+        <dgm:pt modelId="0" type="doc"/>
+        <dgm:pt modelId="1"/>
+        <dgm:pt modelId="2"/>
+      </dgm:ptLst>
+      <dgm:cxnLst>
+        <dgm:cxn modelId="3" srcId="0" destId="1" srcOrd="0" destOrd="0"/>
+        <dgm:cxn modelId="4" srcId="0" destId="2" srcOrd="1" destOrd="0"/>
+      </dgm:cxnLst>
+      <dgm:bg/>
+      <dgm:whole/>
+    </dgm:dataModel>
+  </dgm:styleData>
+  <dgm:clrData>
+    <dgm:dataModel>
+      <dgm:ptLst>
+        <dgm:pt modelId="0" type="doc"/>
+        <dgm:pt modelId="1"/>
+        <dgm:pt modelId="2"/>
+        <dgm:pt modelId="3"/>
+        <dgm:pt modelId="4"/>
+      </dgm:ptLst>
+      <dgm:cxnLst>
+        <dgm:cxn modelId="5" srcId="0" destId="1" srcOrd="0" destOrd="0"/>
+        <dgm:cxn modelId="6" srcId="0" destId="2" srcOrd="1" destOrd="0"/>
+        <dgm:cxn modelId="7" srcId="0" destId="3" srcOrd="2" destOrd="0"/>
+        <dgm:cxn modelId="8" srcId="0" destId="4" srcOrd="3" destOrd="0"/>
+      </dgm:cxnLst>
+      <dgm:bg/>
+      <dgm:whole/>
+    </dgm:dataModel>
+  </dgm:clrData>
+  <dgm:layoutNode name="Name0">
+    <dgm:varLst>
+      <dgm:dir/>
+      <dgm:resizeHandles val="exact"/>
+    </dgm:varLst>
+    <dgm:choose name="Name1">
+      <dgm:if name="Name2" func="var" arg="dir" op="equ" val="norm">
+        <dgm:alg type="lin"/>
+      </dgm:if>
+      <dgm:else name="Name3">
+        <dgm:alg type="lin">
+          <dgm:param type="linDir" val="fromR"/>
+        </dgm:alg>
+      </dgm:else>
+    </dgm:choose>
+    <dgm:shape xmlns:r="http://schemas.openxmlformats.org/officeDocument/2006/relationships" r:blip="">
+      <dgm:adjLst/>
+    </dgm:shape>
+    <dgm:presOf/>
+    <dgm:constrLst>
+      <dgm:constr type="w" for="ch" ptType="node" refType="w"/>
+      <dgm:constr type="h" for="ch" ptType="node" op="equ"/>
+      <dgm:constr type="primFontSz" for="ch" ptType="node" op="equ" val="65"/>
+      <dgm:constr type="w" for="ch" ptType="sibTrans" refType="w" refFor="ch" refPtType="node" op="equ" fact="0.4"/>
+      <dgm:constr type="h" for="ch" ptType="sibTrans" op="equ"/>
+      <dgm:constr type="primFontSz" for="des" forName="connectorText" op="equ" val="55"/>
+      <dgm:constr type="primFontSz" for="des" forName="connectorText" refType="primFontSz" refFor="ch" refPtType="node" op="lte" fact="0.8"/>
+    </dgm:constrLst>
+    <dgm:ruleLst/>
+    <dgm:forEach name="nodesForEach" axis="ch" ptType="node">
+      <dgm:layoutNode name="node">
+        <dgm:varLst>
+          <dgm:bulletEnabled val="1"/>
+        </dgm:varLst>
+        <dgm:alg type="tx"/>
+        <dgm:shape xmlns:r="http://schemas.openxmlformats.org/officeDocument/2006/relationships" type="roundRect" r:blip="">
+          <dgm:adjLst>
+            <dgm:adj idx="1" val="0.1"/>
+          </dgm:adjLst>
+        </dgm:shape>
+        <dgm:presOf axis="desOrSelf" ptType="node"/>
+        <dgm:constrLst>
+          <dgm:constr type="h" refType="w" fact="0.6"/>
+          <dgm:constr type="tMarg" refType="primFontSz" fact="0.3"/>
+          <dgm:constr type="bMarg" refType="primFontSz" fact="0.3"/>
+          <dgm:constr type="lMarg" refType="primFontSz" fact="0.3"/>
+          <dgm:constr type="rMarg" refType="primFontSz" fact="0.3"/>
+        </dgm:constrLst>
+        <dgm:ruleLst>
+          <dgm:rule type="primFontSz" val="18" fact="NaN" max="NaN"/>
+          <dgm:rule type="h" val="NaN" fact="1.5" max="NaN"/>
+          <dgm:rule type="primFontSz" val="5" fact="NaN" max="NaN"/>
+          <dgm:rule type="h" val="INF" fact="NaN" max="NaN"/>
+        </dgm:ruleLst>
+      </dgm:layoutNode>
+      <dgm:forEach name="sibTransForEach" axis="followSib" ptType="sibTrans" cnt="1">
+        <dgm:layoutNode name="sibTrans">
+          <dgm:alg type="conn">
+            <dgm:param type="begPts" val="auto"/>
+            <dgm:param type="endPts" val="auto"/>
+          </dgm:alg>
+          <dgm:shape xmlns:r="http://schemas.openxmlformats.org/officeDocument/2006/relationships" type="conn" r:blip="">
+            <dgm:adjLst/>
+          </dgm:shape>
+          <dgm:presOf axis="self"/>
+          <dgm:constrLst>
+            <dgm:constr type="h" refType="w" fact="0.62"/>
+            <dgm:constr type="connDist"/>
+            <dgm:constr type="begPad" refType="connDist" fact="0.25"/>
+            <dgm:constr type="endPad" refType="connDist" fact="0.22"/>
+          </dgm:constrLst>
+          <dgm:ruleLst/>
+          <dgm:layoutNode name="connectorText">
+            <dgm:alg type="tx">
+              <dgm:param type="autoTxRot" val="grav"/>
+            </dgm:alg>
+            <dgm:shape xmlns:r="http://schemas.openxmlformats.org/officeDocument/2006/relationships" type="conn" r:blip="" hideGeom="1">
+              <dgm:adjLst/>
+            </dgm:shape>
+            <dgm:presOf axis="self"/>
+            <dgm:constrLst>
+              <dgm:constr type="lMarg"/>
+              <dgm:constr type="rMarg"/>
+              <dgm:constr type="tMarg"/>
+              <dgm:constr type="bMarg"/>
+            </dgm:constrLst>
+            <dgm:ruleLst>
+              <dgm:rule type="primFontSz" val="5" fact="NaN" max="NaN"/>
+            </dgm:ruleLst>
+          </dgm:layoutNode>
+        </dgm:layoutNode>
+      </dgm:forEach>
+    </dgm:forEach>
+  </dgm:layoutNode>
+</dgm:layoutDef>
+</file>
+
 <file path=ppt/diagrams/quickStyle1.xml><?xml version="1.0" encoding="utf-8"?>
 <dgm:styleDef xmlns:dgm="http://schemas.openxmlformats.org/drawingml/2006/diagram" xmlns:a="http://schemas.openxmlformats.org/drawingml/2006/main" uniqueId="urn:microsoft.com/office/officeart/2005/8/quickstyle/simple1">
   <dgm:title val=""/>
@@ -10715,6 +12905,2074 @@
 </file>
 
 <file path=ppt/diagrams/quickStyle4.xml><?xml version="1.0" encoding="utf-8"?>
+<dgm:styleDef xmlns:dgm="http://schemas.openxmlformats.org/drawingml/2006/diagram" xmlns:a="http://schemas.openxmlformats.org/drawingml/2006/main" uniqueId="urn:microsoft.com/office/officeart/2005/8/quickstyle/simple1">
+  <dgm:title val=""/>
+  <dgm:desc val=""/>
+  <dgm:catLst>
+    <dgm:cat type="simple" pri="10100"/>
+  </dgm:catLst>
+  <dgm:scene3d>
+    <a:camera prst="orthographicFront"/>
+    <a:lightRig rig="threePt" dir="t"/>
+  </dgm:scene3d>
+  <dgm:styleLbl name="node0">
+    <dgm:scene3d>
+      <a:camera prst="orthographicFront"/>
+      <a:lightRig rig="threePt" dir="t"/>
+    </dgm:scene3d>
+    <dgm:sp3d/>
+    <dgm:txPr/>
+    <dgm:style>
+      <a:lnRef idx="2">
+        <a:scrgbClr r="0" g="0" b="0"/>
+      </a:lnRef>
+      <a:fillRef idx="1">
+        <a:scrgbClr r="0" g="0" b="0"/>
+      </a:fillRef>
+      <a:effectRef idx="0">
+        <a:scrgbClr r="0" g="0" b="0"/>
+      </a:effectRef>
+      <a:fontRef idx="minor">
+        <a:schemeClr val="lt1"/>
+      </a:fontRef>
+    </dgm:style>
+  </dgm:styleLbl>
+  <dgm:styleLbl name="lnNode1">
+    <dgm:scene3d>
+      <a:camera prst="orthographicFront"/>
+      <a:lightRig rig="threePt" dir="t"/>
+    </dgm:scene3d>
+    <dgm:sp3d/>
+    <dgm:txPr/>
+    <dgm:style>
+      <a:lnRef idx="2">
+        <a:scrgbClr r="0" g="0" b="0"/>
+      </a:lnRef>
+      <a:fillRef idx="1">
+        <a:scrgbClr r="0" g="0" b="0"/>
+      </a:fillRef>
+      <a:effectRef idx="0">
+        <a:scrgbClr r="0" g="0" b="0"/>
+      </a:effectRef>
+      <a:fontRef idx="minor">
+        <a:schemeClr val="lt1"/>
+      </a:fontRef>
+    </dgm:style>
+  </dgm:styleLbl>
+  <dgm:styleLbl name="vennNode1">
+    <dgm:scene3d>
+      <a:camera prst="orthographicFront"/>
+      <a:lightRig rig="threePt" dir="t"/>
+    </dgm:scene3d>
+    <dgm:sp3d/>
+    <dgm:txPr/>
+    <dgm:style>
+      <a:lnRef idx="2">
+        <a:scrgbClr r="0" g="0" b="0"/>
+      </a:lnRef>
+      <a:fillRef idx="1">
+        <a:scrgbClr r="0" g="0" b="0"/>
+      </a:fillRef>
+      <a:effectRef idx="0">
+        <a:scrgbClr r="0" g="0" b="0"/>
+      </a:effectRef>
+      <a:fontRef idx="minor">
+        <a:schemeClr val="tx1"/>
+      </a:fontRef>
+    </dgm:style>
+  </dgm:styleLbl>
+  <dgm:styleLbl name="alignNode1">
+    <dgm:scene3d>
+      <a:camera prst="orthographicFront"/>
+      <a:lightRig rig="threePt" dir="t"/>
+    </dgm:scene3d>
+    <dgm:sp3d/>
+    <dgm:txPr/>
+    <dgm:style>
+      <a:lnRef idx="2">
+        <a:scrgbClr r="0" g="0" b="0"/>
+      </a:lnRef>
+      <a:fillRef idx="1">
+        <a:scrgbClr r="0" g="0" b="0"/>
+      </a:fillRef>
+      <a:effectRef idx="0">
+        <a:scrgbClr r="0" g="0" b="0"/>
+      </a:effectRef>
+      <a:fontRef idx="minor">
+        <a:schemeClr val="lt1"/>
+      </a:fontRef>
+    </dgm:style>
+  </dgm:styleLbl>
+  <dgm:styleLbl name="node1">
+    <dgm:scene3d>
+      <a:camera prst="orthographicFront"/>
+      <a:lightRig rig="threePt" dir="t"/>
+    </dgm:scene3d>
+    <dgm:sp3d/>
+    <dgm:txPr/>
+    <dgm:style>
+      <a:lnRef idx="2">
+        <a:scrgbClr r="0" g="0" b="0"/>
+      </a:lnRef>
+      <a:fillRef idx="1">
+        <a:scrgbClr r="0" g="0" b="0"/>
+      </a:fillRef>
+      <a:effectRef idx="0">
+        <a:scrgbClr r="0" g="0" b="0"/>
+      </a:effectRef>
+      <a:fontRef idx="minor">
+        <a:schemeClr val="lt1"/>
+      </a:fontRef>
+    </dgm:style>
+  </dgm:styleLbl>
+  <dgm:styleLbl name="node2">
+    <dgm:scene3d>
+      <a:camera prst="orthographicFront"/>
+      <a:lightRig rig="threePt" dir="t"/>
+    </dgm:scene3d>
+    <dgm:sp3d/>
+    <dgm:txPr/>
+    <dgm:style>
+      <a:lnRef idx="2">
+        <a:scrgbClr r="0" g="0" b="0"/>
+      </a:lnRef>
+      <a:fillRef idx="1">
+        <a:scrgbClr r="0" g="0" b="0"/>
+      </a:fillRef>
+      <a:effectRef idx="0">
+        <a:scrgbClr r="0" g="0" b="0"/>
+      </a:effectRef>
+      <a:fontRef idx="minor">
+        <a:schemeClr val="lt1"/>
+      </a:fontRef>
+    </dgm:style>
+  </dgm:styleLbl>
+  <dgm:styleLbl name="node3">
+    <dgm:scene3d>
+      <a:camera prst="orthographicFront"/>
+      <a:lightRig rig="threePt" dir="t"/>
+    </dgm:scene3d>
+    <dgm:sp3d/>
+    <dgm:txPr/>
+    <dgm:style>
+      <a:lnRef idx="2">
+        <a:scrgbClr r="0" g="0" b="0"/>
+      </a:lnRef>
+      <a:fillRef idx="1">
+        <a:scrgbClr r="0" g="0" b="0"/>
+      </a:fillRef>
+      <a:effectRef idx="0">
+        <a:scrgbClr r="0" g="0" b="0"/>
+      </a:effectRef>
+      <a:fontRef idx="minor">
+        <a:schemeClr val="lt1"/>
+      </a:fontRef>
+    </dgm:style>
+  </dgm:styleLbl>
+  <dgm:styleLbl name="node4">
+    <dgm:scene3d>
+      <a:camera prst="orthographicFront"/>
+      <a:lightRig rig="threePt" dir="t"/>
+    </dgm:scene3d>
+    <dgm:sp3d/>
+    <dgm:txPr/>
+    <dgm:style>
+      <a:lnRef idx="2">
+        <a:scrgbClr r="0" g="0" b="0"/>
+      </a:lnRef>
+      <a:fillRef idx="1">
+        <a:scrgbClr r="0" g="0" b="0"/>
+      </a:fillRef>
+      <a:effectRef idx="0">
+        <a:scrgbClr r="0" g="0" b="0"/>
+      </a:effectRef>
+      <a:fontRef idx="minor">
+        <a:schemeClr val="lt1"/>
+      </a:fontRef>
+    </dgm:style>
+  </dgm:styleLbl>
+  <dgm:styleLbl name="fgImgPlace1">
+    <dgm:scene3d>
+      <a:camera prst="orthographicFront"/>
+      <a:lightRig rig="threePt" dir="t"/>
+    </dgm:scene3d>
+    <dgm:sp3d/>
+    <dgm:txPr/>
+    <dgm:style>
+      <a:lnRef idx="2">
+        <a:scrgbClr r="0" g="0" b="0"/>
+      </a:lnRef>
+      <a:fillRef idx="1">
+        <a:scrgbClr r="0" g="0" b="0"/>
+      </a:fillRef>
+      <a:effectRef idx="0">
+        <a:scrgbClr r="0" g="0" b="0"/>
+      </a:effectRef>
+      <a:fontRef idx="minor"/>
+    </dgm:style>
+  </dgm:styleLbl>
+  <dgm:styleLbl name="alignImgPlace1">
+    <dgm:scene3d>
+      <a:camera prst="orthographicFront"/>
+      <a:lightRig rig="threePt" dir="t"/>
+    </dgm:scene3d>
+    <dgm:sp3d/>
+    <dgm:txPr/>
+    <dgm:style>
+      <a:lnRef idx="2">
+        <a:scrgbClr r="0" g="0" b="0"/>
+      </a:lnRef>
+      <a:fillRef idx="1">
+        <a:scrgbClr r="0" g="0" b="0"/>
+      </a:fillRef>
+      <a:effectRef idx="0">
+        <a:scrgbClr r="0" g="0" b="0"/>
+      </a:effectRef>
+      <a:fontRef idx="minor"/>
+    </dgm:style>
+  </dgm:styleLbl>
+  <dgm:styleLbl name="bgImgPlace1">
+    <dgm:scene3d>
+      <a:camera prst="orthographicFront"/>
+      <a:lightRig rig="threePt" dir="t"/>
+    </dgm:scene3d>
+    <dgm:sp3d/>
+    <dgm:txPr/>
+    <dgm:style>
+      <a:lnRef idx="2">
+        <a:scrgbClr r="0" g="0" b="0"/>
+      </a:lnRef>
+      <a:fillRef idx="1">
+        <a:scrgbClr r="0" g="0" b="0"/>
+      </a:fillRef>
+      <a:effectRef idx="0">
+        <a:scrgbClr r="0" g="0" b="0"/>
+      </a:effectRef>
+      <a:fontRef idx="minor"/>
+    </dgm:style>
+  </dgm:styleLbl>
+  <dgm:styleLbl name="sibTrans2D1">
+    <dgm:scene3d>
+      <a:camera prst="orthographicFront"/>
+      <a:lightRig rig="threePt" dir="t"/>
+    </dgm:scene3d>
+    <dgm:sp3d/>
+    <dgm:txPr/>
+    <dgm:style>
+      <a:lnRef idx="0">
+        <a:scrgbClr r="0" g="0" b="0"/>
+      </a:lnRef>
+      <a:fillRef idx="1">
+        <a:scrgbClr r="0" g="0" b="0"/>
+      </a:fillRef>
+      <a:effectRef idx="0">
+        <a:scrgbClr r="0" g="0" b="0"/>
+      </a:effectRef>
+      <a:fontRef idx="minor">
+        <a:schemeClr val="lt1"/>
+      </a:fontRef>
+    </dgm:style>
+  </dgm:styleLbl>
+  <dgm:styleLbl name="fgSibTrans2D1">
+    <dgm:scene3d>
+      <a:camera prst="orthographicFront"/>
+      <a:lightRig rig="threePt" dir="t"/>
+    </dgm:scene3d>
+    <dgm:sp3d/>
+    <dgm:txPr/>
+    <dgm:style>
+      <a:lnRef idx="0">
+        <a:scrgbClr r="0" g="0" b="0"/>
+      </a:lnRef>
+      <a:fillRef idx="1">
+        <a:scrgbClr r="0" g="0" b="0"/>
+      </a:fillRef>
+      <a:effectRef idx="0">
+        <a:scrgbClr r="0" g="0" b="0"/>
+      </a:effectRef>
+      <a:fontRef idx="minor">
+        <a:schemeClr val="lt1"/>
+      </a:fontRef>
+    </dgm:style>
+  </dgm:styleLbl>
+  <dgm:styleLbl name="bgSibTrans2D1">
+    <dgm:scene3d>
+      <a:camera prst="orthographicFront"/>
+      <a:lightRig rig="threePt" dir="t"/>
+    </dgm:scene3d>
+    <dgm:sp3d/>
+    <dgm:txPr/>
+    <dgm:style>
+      <a:lnRef idx="0">
+        <a:scrgbClr r="0" g="0" b="0"/>
+      </a:lnRef>
+      <a:fillRef idx="1">
+        <a:scrgbClr r="0" g="0" b="0"/>
+      </a:fillRef>
+      <a:effectRef idx="0">
+        <a:scrgbClr r="0" g="0" b="0"/>
+      </a:effectRef>
+      <a:fontRef idx="minor">
+        <a:schemeClr val="lt1"/>
+      </a:fontRef>
+    </dgm:style>
+  </dgm:styleLbl>
+  <dgm:styleLbl name="sibTrans1D1">
+    <dgm:scene3d>
+      <a:camera prst="orthographicFront"/>
+      <a:lightRig rig="threePt" dir="t"/>
+    </dgm:scene3d>
+    <dgm:sp3d/>
+    <dgm:txPr/>
+    <dgm:style>
+      <a:lnRef idx="1">
+        <a:scrgbClr r="0" g="0" b="0"/>
+      </a:lnRef>
+      <a:fillRef idx="0">
+        <a:scrgbClr r="0" g="0" b="0"/>
+      </a:fillRef>
+      <a:effectRef idx="0">
+        <a:scrgbClr r="0" g="0" b="0"/>
+      </a:effectRef>
+      <a:fontRef idx="minor"/>
+    </dgm:style>
+  </dgm:styleLbl>
+  <dgm:styleLbl name="callout">
+    <dgm:scene3d>
+      <a:camera prst="orthographicFront"/>
+      <a:lightRig rig="threePt" dir="t"/>
+    </dgm:scene3d>
+    <dgm:sp3d/>
+    <dgm:txPr/>
+    <dgm:style>
+      <a:lnRef idx="2">
+        <a:scrgbClr r="0" g="0" b="0"/>
+      </a:lnRef>
+      <a:fillRef idx="1">
+        <a:scrgbClr r="0" g="0" b="0"/>
+      </a:fillRef>
+      <a:effectRef idx="0">
+        <a:scrgbClr r="0" g="0" b="0"/>
+      </a:effectRef>
+      <a:fontRef idx="minor"/>
+    </dgm:style>
+  </dgm:styleLbl>
+  <dgm:styleLbl name="asst0">
+    <dgm:scene3d>
+      <a:camera prst="orthographicFront"/>
+      <a:lightRig rig="threePt" dir="t"/>
+    </dgm:scene3d>
+    <dgm:sp3d/>
+    <dgm:txPr/>
+    <dgm:style>
+      <a:lnRef idx="2">
+        <a:scrgbClr r="0" g="0" b="0"/>
+      </a:lnRef>
+      <a:fillRef idx="1">
+        <a:scrgbClr r="0" g="0" b="0"/>
+      </a:fillRef>
+      <a:effectRef idx="0">
+        <a:scrgbClr r="0" g="0" b="0"/>
+      </a:effectRef>
+      <a:fontRef idx="minor">
+        <a:schemeClr val="lt1"/>
+      </a:fontRef>
+    </dgm:style>
+  </dgm:styleLbl>
+  <dgm:styleLbl name="asst1">
+    <dgm:scene3d>
+      <a:camera prst="orthographicFront"/>
+      <a:lightRig rig="threePt" dir="t"/>
+    </dgm:scene3d>
+    <dgm:sp3d/>
+    <dgm:txPr/>
+    <dgm:style>
+      <a:lnRef idx="2">
+        <a:scrgbClr r="0" g="0" b="0"/>
+      </a:lnRef>
+      <a:fillRef idx="1">
+        <a:scrgbClr r="0" g="0" b="0"/>
+      </a:fillRef>
+      <a:effectRef idx="0">
+        <a:scrgbClr r="0" g="0" b="0"/>
+      </a:effectRef>
+      <a:fontRef idx="minor">
+        <a:schemeClr val="lt1"/>
+      </a:fontRef>
+    </dgm:style>
+  </dgm:styleLbl>
+  <dgm:styleLbl name="asst2">
+    <dgm:scene3d>
+      <a:camera prst="orthographicFront"/>
+      <a:lightRig rig="threePt" dir="t"/>
+    </dgm:scene3d>
+    <dgm:sp3d/>
+    <dgm:txPr/>
+    <dgm:style>
+      <a:lnRef idx="2">
+        <a:scrgbClr r="0" g="0" b="0"/>
+      </a:lnRef>
+      <a:fillRef idx="1">
+        <a:scrgbClr r="0" g="0" b="0"/>
+      </a:fillRef>
+      <a:effectRef idx="0">
+        <a:scrgbClr r="0" g="0" b="0"/>
+      </a:effectRef>
+      <a:fontRef idx="minor">
+        <a:schemeClr val="lt1"/>
+      </a:fontRef>
+    </dgm:style>
+  </dgm:styleLbl>
+  <dgm:styleLbl name="asst3">
+    <dgm:scene3d>
+      <a:camera prst="orthographicFront"/>
+      <a:lightRig rig="threePt" dir="t"/>
+    </dgm:scene3d>
+    <dgm:sp3d/>
+    <dgm:txPr/>
+    <dgm:style>
+      <a:lnRef idx="2">
+        <a:scrgbClr r="0" g="0" b="0"/>
+      </a:lnRef>
+      <a:fillRef idx="1">
+        <a:scrgbClr r="0" g="0" b="0"/>
+      </a:fillRef>
+      <a:effectRef idx="0">
+        <a:scrgbClr r="0" g="0" b="0"/>
+      </a:effectRef>
+      <a:fontRef idx="minor">
+        <a:schemeClr val="lt1"/>
+      </a:fontRef>
+    </dgm:style>
+  </dgm:styleLbl>
+  <dgm:styleLbl name="asst4">
+    <dgm:scene3d>
+      <a:camera prst="orthographicFront"/>
+      <a:lightRig rig="threePt" dir="t"/>
+    </dgm:scene3d>
+    <dgm:sp3d/>
+    <dgm:txPr/>
+    <dgm:style>
+      <a:lnRef idx="2">
+        <a:scrgbClr r="0" g="0" b="0"/>
+      </a:lnRef>
+      <a:fillRef idx="1">
+        <a:scrgbClr r="0" g="0" b="0"/>
+      </a:fillRef>
+      <a:effectRef idx="0">
+        <a:scrgbClr r="0" g="0" b="0"/>
+      </a:effectRef>
+      <a:fontRef idx="minor">
+        <a:schemeClr val="lt1"/>
+      </a:fontRef>
+    </dgm:style>
+  </dgm:styleLbl>
+  <dgm:styleLbl name="parChTrans2D1">
+    <dgm:scene3d>
+      <a:camera prst="orthographicFront"/>
+      <a:lightRig rig="threePt" dir="t"/>
+    </dgm:scene3d>
+    <dgm:sp3d/>
+    <dgm:txPr/>
+    <dgm:style>
+      <a:lnRef idx="2">
+        <a:scrgbClr r="0" g="0" b="0"/>
+      </a:lnRef>
+      <a:fillRef idx="1">
+        <a:scrgbClr r="0" g="0" b="0"/>
+      </a:fillRef>
+      <a:effectRef idx="0">
+        <a:scrgbClr r="0" g="0" b="0"/>
+      </a:effectRef>
+      <a:fontRef idx="minor">
+        <a:schemeClr val="lt1"/>
+      </a:fontRef>
+    </dgm:style>
+  </dgm:styleLbl>
+  <dgm:styleLbl name="parChTrans2D2">
+    <dgm:scene3d>
+      <a:camera prst="orthographicFront"/>
+      <a:lightRig rig="threePt" dir="t"/>
+    </dgm:scene3d>
+    <dgm:sp3d/>
+    <dgm:txPr/>
+    <dgm:style>
+      <a:lnRef idx="2">
+        <a:scrgbClr r="0" g="0" b="0"/>
+      </a:lnRef>
+      <a:fillRef idx="1">
+        <a:scrgbClr r="0" g="0" b="0"/>
+      </a:fillRef>
+      <a:effectRef idx="0">
+        <a:scrgbClr r="0" g="0" b="0"/>
+      </a:effectRef>
+      <a:fontRef idx="minor">
+        <a:schemeClr val="lt1"/>
+      </a:fontRef>
+    </dgm:style>
+  </dgm:styleLbl>
+  <dgm:styleLbl name="parChTrans2D3">
+    <dgm:scene3d>
+      <a:camera prst="orthographicFront"/>
+      <a:lightRig rig="threePt" dir="t"/>
+    </dgm:scene3d>
+    <dgm:sp3d/>
+    <dgm:txPr/>
+    <dgm:style>
+      <a:lnRef idx="2">
+        <a:scrgbClr r="0" g="0" b="0"/>
+      </a:lnRef>
+      <a:fillRef idx="1">
+        <a:scrgbClr r="0" g="0" b="0"/>
+      </a:fillRef>
+      <a:effectRef idx="0">
+        <a:scrgbClr r="0" g="0" b="0"/>
+      </a:effectRef>
+      <a:fontRef idx="minor">
+        <a:schemeClr val="lt1"/>
+      </a:fontRef>
+    </dgm:style>
+  </dgm:styleLbl>
+  <dgm:styleLbl name="parChTrans2D4">
+    <dgm:scene3d>
+      <a:camera prst="orthographicFront"/>
+      <a:lightRig rig="threePt" dir="t"/>
+    </dgm:scene3d>
+    <dgm:sp3d/>
+    <dgm:txPr/>
+    <dgm:style>
+      <a:lnRef idx="2">
+        <a:scrgbClr r="0" g="0" b="0"/>
+      </a:lnRef>
+      <a:fillRef idx="1">
+        <a:scrgbClr r="0" g="0" b="0"/>
+      </a:fillRef>
+      <a:effectRef idx="0">
+        <a:scrgbClr r="0" g="0" b="0"/>
+      </a:effectRef>
+      <a:fontRef idx="minor">
+        <a:schemeClr val="lt1"/>
+      </a:fontRef>
+    </dgm:style>
+  </dgm:styleLbl>
+  <dgm:styleLbl name="parChTrans1D1">
+    <dgm:scene3d>
+      <a:camera prst="orthographicFront"/>
+      <a:lightRig rig="threePt" dir="t"/>
+    </dgm:scene3d>
+    <dgm:sp3d/>
+    <dgm:txPr/>
+    <dgm:style>
+      <a:lnRef idx="2">
+        <a:scrgbClr r="0" g="0" b="0"/>
+      </a:lnRef>
+      <a:fillRef idx="0">
+        <a:scrgbClr r="0" g="0" b="0"/>
+      </a:fillRef>
+      <a:effectRef idx="0">
+        <a:scrgbClr r="0" g="0" b="0"/>
+      </a:effectRef>
+      <a:fontRef idx="minor"/>
+    </dgm:style>
+  </dgm:styleLbl>
+  <dgm:styleLbl name="parChTrans1D2">
+    <dgm:scene3d>
+      <a:camera prst="orthographicFront"/>
+      <a:lightRig rig="threePt" dir="t"/>
+    </dgm:scene3d>
+    <dgm:sp3d/>
+    <dgm:txPr/>
+    <dgm:style>
+      <a:lnRef idx="2">
+        <a:scrgbClr r="0" g="0" b="0"/>
+      </a:lnRef>
+      <a:fillRef idx="0">
+        <a:scrgbClr r="0" g="0" b="0"/>
+      </a:fillRef>
+      <a:effectRef idx="0">
+        <a:scrgbClr r="0" g="0" b="0"/>
+      </a:effectRef>
+      <a:fontRef idx="minor"/>
+    </dgm:style>
+  </dgm:styleLbl>
+  <dgm:styleLbl name="parChTrans1D3">
+    <dgm:scene3d>
+      <a:camera prst="orthographicFront"/>
+      <a:lightRig rig="threePt" dir="t"/>
+    </dgm:scene3d>
+    <dgm:sp3d/>
+    <dgm:txPr/>
+    <dgm:style>
+      <a:lnRef idx="2">
+        <a:scrgbClr r="0" g="0" b="0"/>
+      </a:lnRef>
+      <a:fillRef idx="0">
+        <a:scrgbClr r="0" g="0" b="0"/>
+      </a:fillRef>
+      <a:effectRef idx="0">
+        <a:scrgbClr r="0" g="0" b="0"/>
+      </a:effectRef>
+      <a:fontRef idx="minor"/>
+    </dgm:style>
+  </dgm:styleLbl>
+  <dgm:styleLbl name="parChTrans1D4">
+    <dgm:scene3d>
+      <a:camera prst="orthographicFront"/>
+      <a:lightRig rig="threePt" dir="t"/>
+    </dgm:scene3d>
+    <dgm:sp3d/>
+    <dgm:txPr/>
+    <dgm:style>
+      <a:lnRef idx="2">
+        <a:scrgbClr r="0" g="0" b="0"/>
+      </a:lnRef>
+      <a:fillRef idx="0">
+        <a:scrgbClr r="0" g="0" b="0"/>
+      </a:fillRef>
+      <a:effectRef idx="0">
+        <a:scrgbClr r="0" g="0" b="0"/>
+      </a:effectRef>
+      <a:fontRef idx="minor"/>
+    </dgm:style>
+  </dgm:styleLbl>
+  <dgm:styleLbl name="fgAcc1">
+    <dgm:scene3d>
+      <a:camera prst="orthographicFront"/>
+      <a:lightRig rig="threePt" dir="t"/>
+    </dgm:scene3d>
+    <dgm:sp3d/>
+    <dgm:txPr/>
+    <dgm:style>
+      <a:lnRef idx="2">
+        <a:scrgbClr r="0" g="0" b="0"/>
+      </a:lnRef>
+      <a:fillRef idx="1">
+        <a:scrgbClr r="0" g="0" b="0"/>
+      </a:fillRef>
+      <a:effectRef idx="0">
+        <a:scrgbClr r="0" g="0" b="0"/>
+      </a:effectRef>
+      <a:fontRef idx="minor"/>
+    </dgm:style>
+  </dgm:styleLbl>
+  <dgm:styleLbl name="conFgAcc1">
+    <dgm:scene3d>
+      <a:camera prst="orthographicFront"/>
+      <a:lightRig rig="threePt" dir="t"/>
+    </dgm:scene3d>
+    <dgm:sp3d/>
+    <dgm:txPr/>
+    <dgm:style>
+      <a:lnRef idx="2">
+        <a:scrgbClr r="0" g="0" b="0"/>
+      </a:lnRef>
+      <a:fillRef idx="1">
+        <a:scrgbClr r="0" g="0" b="0"/>
+      </a:fillRef>
+      <a:effectRef idx="0">
+        <a:scrgbClr r="0" g="0" b="0"/>
+      </a:effectRef>
+      <a:fontRef idx="minor"/>
+    </dgm:style>
+  </dgm:styleLbl>
+  <dgm:styleLbl name="alignAcc1">
+    <dgm:scene3d>
+      <a:camera prst="orthographicFront"/>
+      <a:lightRig rig="threePt" dir="t"/>
+    </dgm:scene3d>
+    <dgm:sp3d/>
+    <dgm:txPr/>
+    <dgm:style>
+      <a:lnRef idx="2">
+        <a:scrgbClr r="0" g="0" b="0"/>
+      </a:lnRef>
+      <a:fillRef idx="1">
+        <a:scrgbClr r="0" g="0" b="0"/>
+      </a:fillRef>
+      <a:effectRef idx="0">
+        <a:scrgbClr r="0" g="0" b="0"/>
+      </a:effectRef>
+      <a:fontRef idx="minor"/>
+    </dgm:style>
+  </dgm:styleLbl>
+  <dgm:styleLbl name="trAlignAcc1">
+    <dgm:scene3d>
+      <a:camera prst="orthographicFront"/>
+      <a:lightRig rig="threePt" dir="t"/>
+    </dgm:scene3d>
+    <dgm:sp3d/>
+    <dgm:txPr/>
+    <dgm:style>
+      <a:lnRef idx="1">
+        <a:scrgbClr r="0" g="0" b="0"/>
+      </a:lnRef>
+      <a:fillRef idx="1">
+        <a:scrgbClr r="0" g="0" b="0"/>
+      </a:fillRef>
+      <a:effectRef idx="0">
+        <a:scrgbClr r="0" g="0" b="0"/>
+      </a:effectRef>
+      <a:fontRef idx="minor"/>
+    </dgm:style>
+  </dgm:styleLbl>
+  <dgm:styleLbl name="bgAcc1">
+    <dgm:scene3d>
+      <a:camera prst="orthographicFront"/>
+      <a:lightRig rig="threePt" dir="t"/>
+    </dgm:scene3d>
+    <dgm:sp3d/>
+    <dgm:txPr/>
+    <dgm:style>
+      <a:lnRef idx="2">
+        <a:scrgbClr r="0" g="0" b="0"/>
+      </a:lnRef>
+      <a:fillRef idx="1">
+        <a:scrgbClr r="0" g="0" b="0"/>
+      </a:fillRef>
+      <a:effectRef idx="0">
+        <a:scrgbClr r="0" g="0" b="0"/>
+      </a:effectRef>
+      <a:fontRef idx="minor"/>
+    </dgm:style>
+  </dgm:styleLbl>
+  <dgm:styleLbl name="solidFgAcc1">
+    <dgm:scene3d>
+      <a:camera prst="orthographicFront"/>
+      <a:lightRig rig="threePt" dir="t"/>
+    </dgm:scene3d>
+    <dgm:sp3d/>
+    <dgm:txPr/>
+    <dgm:style>
+      <a:lnRef idx="2">
+        <a:scrgbClr r="0" g="0" b="0"/>
+      </a:lnRef>
+      <a:fillRef idx="1">
+        <a:scrgbClr r="0" g="0" b="0"/>
+      </a:fillRef>
+      <a:effectRef idx="0">
+        <a:scrgbClr r="0" g="0" b="0"/>
+      </a:effectRef>
+      <a:fontRef idx="minor"/>
+    </dgm:style>
+  </dgm:styleLbl>
+  <dgm:styleLbl name="solidAlignAcc1">
+    <dgm:scene3d>
+      <a:camera prst="orthographicFront"/>
+      <a:lightRig rig="threePt" dir="t"/>
+    </dgm:scene3d>
+    <dgm:sp3d/>
+    <dgm:txPr/>
+    <dgm:style>
+      <a:lnRef idx="2">
+        <a:scrgbClr r="0" g="0" b="0"/>
+      </a:lnRef>
+      <a:fillRef idx="1">
+        <a:scrgbClr r="0" g="0" b="0"/>
+      </a:fillRef>
+      <a:effectRef idx="0">
+        <a:scrgbClr r="0" g="0" b="0"/>
+      </a:effectRef>
+      <a:fontRef idx="minor"/>
+    </dgm:style>
+  </dgm:styleLbl>
+  <dgm:styleLbl name="solidBgAcc1">
+    <dgm:scene3d>
+      <a:camera prst="orthographicFront"/>
+      <a:lightRig rig="threePt" dir="t"/>
+    </dgm:scene3d>
+    <dgm:sp3d/>
+    <dgm:txPr/>
+    <dgm:style>
+      <a:lnRef idx="2">
+        <a:scrgbClr r="0" g="0" b="0"/>
+      </a:lnRef>
+      <a:fillRef idx="1">
+        <a:scrgbClr r="0" g="0" b="0"/>
+      </a:fillRef>
+      <a:effectRef idx="0">
+        <a:scrgbClr r="0" g="0" b="0"/>
+      </a:effectRef>
+      <a:fontRef idx="minor"/>
+    </dgm:style>
+  </dgm:styleLbl>
+  <dgm:styleLbl name="fgAccFollowNode1">
+    <dgm:scene3d>
+      <a:camera prst="orthographicFront"/>
+      <a:lightRig rig="threePt" dir="t"/>
+    </dgm:scene3d>
+    <dgm:sp3d/>
+    <dgm:txPr/>
+    <dgm:style>
+      <a:lnRef idx="2">
+        <a:scrgbClr r="0" g="0" b="0"/>
+      </a:lnRef>
+      <a:fillRef idx="1">
+        <a:scrgbClr r="0" g="0" b="0"/>
+      </a:fillRef>
+      <a:effectRef idx="0">
+        <a:scrgbClr r="0" g="0" b="0"/>
+      </a:effectRef>
+      <a:fontRef idx="minor"/>
+    </dgm:style>
+  </dgm:styleLbl>
+  <dgm:styleLbl name="alignAccFollowNode1">
+    <dgm:scene3d>
+      <a:camera prst="orthographicFront"/>
+      <a:lightRig rig="threePt" dir="t"/>
+    </dgm:scene3d>
+    <dgm:sp3d/>
+    <dgm:txPr/>
+    <dgm:style>
+      <a:lnRef idx="2">
+        <a:scrgbClr r="0" g="0" b="0"/>
+      </a:lnRef>
+      <a:fillRef idx="1">
+        <a:scrgbClr r="0" g="0" b="0"/>
+      </a:fillRef>
+      <a:effectRef idx="0">
+        <a:scrgbClr r="0" g="0" b="0"/>
+      </a:effectRef>
+      <a:fontRef idx="minor"/>
+    </dgm:style>
+  </dgm:styleLbl>
+  <dgm:styleLbl name="bgAccFollowNode1">
+    <dgm:scene3d>
+      <a:camera prst="orthographicFront"/>
+      <a:lightRig rig="threePt" dir="t"/>
+    </dgm:scene3d>
+    <dgm:sp3d/>
+    <dgm:txPr/>
+    <dgm:style>
+      <a:lnRef idx="2">
+        <a:scrgbClr r="0" g="0" b="0"/>
+      </a:lnRef>
+      <a:fillRef idx="1">
+        <a:scrgbClr r="0" g="0" b="0"/>
+      </a:fillRef>
+      <a:effectRef idx="0">
+        <a:scrgbClr r="0" g="0" b="0"/>
+      </a:effectRef>
+      <a:fontRef idx="minor"/>
+    </dgm:style>
+  </dgm:styleLbl>
+  <dgm:styleLbl name="fgAcc0">
+    <dgm:scene3d>
+      <a:camera prst="orthographicFront"/>
+      <a:lightRig rig="threePt" dir="t"/>
+    </dgm:scene3d>
+    <dgm:sp3d/>
+    <dgm:txPr/>
+    <dgm:style>
+      <a:lnRef idx="2">
+        <a:scrgbClr r="0" g="0" b="0"/>
+      </a:lnRef>
+      <a:fillRef idx="1">
+        <a:scrgbClr r="0" g="0" b="0"/>
+      </a:fillRef>
+      <a:effectRef idx="0">
+        <a:scrgbClr r="0" g="0" b="0"/>
+      </a:effectRef>
+      <a:fontRef idx="minor"/>
+    </dgm:style>
+  </dgm:styleLbl>
+  <dgm:styleLbl name="fgAcc2">
+    <dgm:scene3d>
+      <a:camera prst="orthographicFront"/>
+      <a:lightRig rig="threePt" dir="t"/>
+    </dgm:scene3d>
+    <dgm:sp3d/>
+    <dgm:txPr/>
+    <dgm:style>
+      <a:lnRef idx="2">
+        <a:scrgbClr r="0" g="0" b="0"/>
+      </a:lnRef>
+      <a:fillRef idx="1">
+        <a:scrgbClr r="0" g="0" b="0"/>
+      </a:fillRef>
+      <a:effectRef idx="0">
+        <a:scrgbClr r="0" g="0" b="0"/>
+      </a:effectRef>
+      <a:fontRef idx="minor"/>
+    </dgm:style>
+  </dgm:styleLbl>
+  <dgm:styleLbl name="fgAcc3">
+    <dgm:scene3d>
+      <a:camera prst="orthographicFront"/>
+      <a:lightRig rig="threePt" dir="t"/>
+    </dgm:scene3d>
+    <dgm:sp3d/>
+    <dgm:txPr/>
+    <dgm:style>
+      <a:lnRef idx="2">
+        <a:scrgbClr r="0" g="0" b="0"/>
+      </a:lnRef>
+      <a:fillRef idx="1">
+        <a:scrgbClr r="0" g="0" b="0"/>
+      </a:fillRef>
+      <a:effectRef idx="0">
+        <a:scrgbClr r="0" g="0" b="0"/>
+      </a:effectRef>
+      <a:fontRef idx="minor"/>
+    </dgm:style>
+  </dgm:styleLbl>
+  <dgm:styleLbl name="fgAcc4">
+    <dgm:scene3d>
+      <a:camera prst="orthographicFront"/>
+      <a:lightRig rig="threePt" dir="t"/>
+    </dgm:scene3d>
+    <dgm:sp3d/>
+    <dgm:txPr/>
+    <dgm:style>
+      <a:lnRef idx="2">
+        <a:scrgbClr r="0" g="0" b="0"/>
+      </a:lnRef>
+      <a:fillRef idx="1">
+        <a:scrgbClr r="0" g="0" b="0"/>
+      </a:fillRef>
+      <a:effectRef idx="0">
+        <a:scrgbClr r="0" g="0" b="0"/>
+      </a:effectRef>
+      <a:fontRef idx="minor"/>
+    </dgm:style>
+  </dgm:styleLbl>
+  <dgm:styleLbl name="bgShp">
+    <dgm:scene3d>
+      <a:camera prst="orthographicFront"/>
+      <a:lightRig rig="threePt" dir="t"/>
+    </dgm:scene3d>
+    <dgm:sp3d/>
+    <dgm:txPr/>
+    <dgm:style>
+      <a:lnRef idx="0">
+        <a:scrgbClr r="0" g="0" b="0"/>
+      </a:lnRef>
+      <a:fillRef idx="1">
+        <a:scrgbClr r="0" g="0" b="0"/>
+      </a:fillRef>
+      <a:effectRef idx="0">
+        <a:scrgbClr r="0" g="0" b="0"/>
+      </a:effectRef>
+      <a:fontRef idx="minor"/>
+    </dgm:style>
+  </dgm:styleLbl>
+  <dgm:styleLbl name="dkBgShp">
+    <dgm:scene3d>
+      <a:camera prst="orthographicFront"/>
+      <a:lightRig rig="threePt" dir="t"/>
+    </dgm:scene3d>
+    <dgm:sp3d/>
+    <dgm:txPr/>
+    <dgm:style>
+      <a:lnRef idx="0">
+        <a:scrgbClr r="0" g="0" b="0"/>
+      </a:lnRef>
+      <a:fillRef idx="1">
+        <a:scrgbClr r="0" g="0" b="0"/>
+      </a:fillRef>
+      <a:effectRef idx="0">
+        <a:scrgbClr r="0" g="0" b="0"/>
+      </a:effectRef>
+      <a:fontRef idx="minor"/>
+    </dgm:style>
+  </dgm:styleLbl>
+  <dgm:styleLbl name="trBgShp">
+    <dgm:scene3d>
+      <a:camera prst="orthographicFront"/>
+      <a:lightRig rig="threePt" dir="t"/>
+    </dgm:scene3d>
+    <dgm:sp3d/>
+    <dgm:txPr/>
+    <dgm:style>
+      <a:lnRef idx="0">
+        <a:scrgbClr r="0" g="0" b="0"/>
+      </a:lnRef>
+      <a:fillRef idx="1">
+        <a:scrgbClr r="0" g="0" b="0"/>
+      </a:fillRef>
+      <a:effectRef idx="0">
+        <a:scrgbClr r="0" g="0" b="0"/>
+      </a:effectRef>
+      <a:fontRef idx="minor"/>
+    </dgm:style>
+  </dgm:styleLbl>
+  <dgm:styleLbl name="fgShp">
+    <dgm:scene3d>
+      <a:camera prst="orthographicFront"/>
+      <a:lightRig rig="threePt" dir="t"/>
+    </dgm:scene3d>
+    <dgm:sp3d/>
+    <dgm:txPr/>
+    <dgm:style>
+      <a:lnRef idx="2">
+        <a:scrgbClr r="0" g="0" b="0"/>
+      </a:lnRef>
+      <a:fillRef idx="1">
+        <a:scrgbClr r="0" g="0" b="0"/>
+      </a:fillRef>
+      <a:effectRef idx="0">
+        <a:scrgbClr r="0" g="0" b="0"/>
+      </a:effectRef>
+      <a:fontRef idx="minor"/>
+    </dgm:style>
+  </dgm:styleLbl>
+  <dgm:styleLbl name="revTx">
+    <dgm:scene3d>
+      <a:camera prst="orthographicFront"/>
+      <a:lightRig rig="threePt" dir="t"/>
+    </dgm:scene3d>
+    <dgm:sp3d/>
+    <dgm:txPr/>
+    <dgm:style>
+      <a:lnRef idx="0">
+        <a:scrgbClr r="0" g="0" b="0"/>
+      </a:lnRef>
+      <a:fillRef idx="0">
+        <a:scrgbClr r="0" g="0" b="0"/>
+      </a:fillRef>
+      <a:effectRef idx="0">
+        <a:scrgbClr r="0" g="0" b="0"/>
+      </a:effectRef>
+      <a:fontRef idx="minor"/>
+    </dgm:style>
+  </dgm:styleLbl>
+</dgm:styleDef>
+</file>
+
+<file path=ppt/diagrams/quickStyle5.xml><?xml version="1.0" encoding="utf-8"?>
+<dgm:styleDef xmlns:dgm="http://schemas.openxmlformats.org/drawingml/2006/diagram" xmlns:a="http://schemas.openxmlformats.org/drawingml/2006/main" uniqueId="urn:microsoft.com/office/officeart/2005/8/quickstyle/simple1">
+  <dgm:title val=""/>
+  <dgm:desc val=""/>
+  <dgm:catLst>
+    <dgm:cat type="simple" pri="10100"/>
+  </dgm:catLst>
+  <dgm:scene3d>
+    <a:camera prst="orthographicFront"/>
+    <a:lightRig rig="threePt" dir="t"/>
+  </dgm:scene3d>
+  <dgm:styleLbl name="node0">
+    <dgm:scene3d>
+      <a:camera prst="orthographicFront"/>
+      <a:lightRig rig="threePt" dir="t"/>
+    </dgm:scene3d>
+    <dgm:sp3d/>
+    <dgm:txPr/>
+    <dgm:style>
+      <a:lnRef idx="2">
+        <a:scrgbClr r="0" g="0" b="0"/>
+      </a:lnRef>
+      <a:fillRef idx="1">
+        <a:scrgbClr r="0" g="0" b="0"/>
+      </a:fillRef>
+      <a:effectRef idx="0">
+        <a:scrgbClr r="0" g="0" b="0"/>
+      </a:effectRef>
+      <a:fontRef idx="minor">
+        <a:schemeClr val="lt1"/>
+      </a:fontRef>
+    </dgm:style>
+  </dgm:styleLbl>
+  <dgm:styleLbl name="lnNode1">
+    <dgm:scene3d>
+      <a:camera prst="orthographicFront"/>
+      <a:lightRig rig="threePt" dir="t"/>
+    </dgm:scene3d>
+    <dgm:sp3d/>
+    <dgm:txPr/>
+    <dgm:style>
+      <a:lnRef idx="2">
+        <a:scrgbClr r="0" g="0" b="0"/>
+      </a:lnRef>
+      <a:fillRef idx="1">
+        <a:scrgbClr r="0" g="0" b="0"/>
+      </a:fillRef>
+      <a:effectRef idx="0">
+        <a:scrgbClr r="0" g="0" b="0"/>
+      </a:effectRef>
+      <a:fontRef idx="minor">
+        <a:schemeClr val="lt1"/>
+      </a:fontRef>
+    </dgm:style>
+  </dgm:styleLbl>
+  <dgm:styleLbl name="vennNode1">
+    <dgm:scene3d>
+      <a:camera prst="orthographicFront"/>
+      <a:lightRig rig="threePt" dir="t"/>
+    </dgm:scene3d>
+    <dgm:sp3d/>
+    <dgm:txPr/>
+    <dgm:style>
+      <a:lnRef idx="2">
+        <a:scrgbClr r="0" g="0" b="0"/>
+      </a:lnRef>
+      <a:fillRef idx="1">
+        <a:scrgbClr r="0" g="0" b="0"/>
+      </a:fillRef>
+      <a:effectRef idx="0">
+        <a:scrgbClr r="0" g="0" b="0"/>
+      </a:effectRef>
+      <a:fontRef idx="minor">
+        <a:schemeClr val="tx1"/>
+      </a:fontRef>
+    </dgm:style>
+  </dgm:styleLbl>
+  <dgm:styleLbl name="alignNode1">
+    <dgm:scene3d>
+      <a:camera prst="orthographicFront"/>
+      <a:lightRig rig="threePt" dir="t"/>
+    </dgm:scene3d>
+    <dgm:sp3d/>
+    <dgm:txPr/>
+    <dgm:style>
+      <a:lnRef idx="2">
+        <a:scrgbClr r="0" g="0" b="0"/>
+      </a:lnRef>
+      <a:fillRef idx="1">
+        <a:scrgbClr r="0" g="0" b="0"/>
+      </a:fillRef>
+      <a:effectRef idx="0">
+        <a:scrgbClr r="0" g="0" b="0"/>
+      </a:effectRef>
+      <a:fontRef idx="minor">
+        <a:schemeClr val="lt1"/>
+      </a:fontRef>
+    </dgm:style>
+  </dgm:styleLbl>
+  <dgm:styleLbl name="node1">
+    <dgm:scene3d>
+      <a:camera prst="orthographicFront"/>
+      <a:lightRig rig="threePt" dir="t"/>
+    </dgm:scene3d>
+    <dgm:sp3d/>
+    <dgm:txPr/>
+    <dgm:style>
+      <a:lnRef idx="2">
+        <a:scrgbClr r="0" g="0" b="0"/>
+      </a:lnRef>
+      <a:fillRef idx="1">
+        <a:scrgbClr r="0" g="0" b="0"/>
+      </a:fillRef>
+      <a:effectRef idx="0">
+        <a:scrgbClr r="0" g="0" b="0"/>
+      </a:effectRef>
+      <a:fontRef idx="minor">
+        <a:schemeClr val="lt1"/>
+      </a:fontRef>
+    </dgm:style>
+  </dgm:styleLbl>
+  <dgm:styleLbl name="node2">
+    <dgm:scene3d>
+      <a:camera prst="orthographicFront"/>
+      <a:lightRig rig="threePt" dir="t"/>
+    </dgm:scene3d>
+    <dgm:sp3d/>
+    <dgm:txPr/>
+    <dgm:style>
+      <a:lnRef idx="2">
+        <a:scrgbClr r="0" g="0" b="0"/>
+      </a:lnRef>
+      <a:fillRef idx="1">
+        <a:scrgbClr r="0" g="0" b="0"/>
+      </a:fillRef>
+      <a:effectRef idx="0">
+        <a:scrgbClr r="0" g="0" b="0"/>
+      </a:effectRef>
+      <a:fontRef idx="minor">
+        <a:schemeClr val="lt1"/>
+      </a:fontRef>
+    </dgm:style>
+  </dgm:styleLbl>
+  <dgm:styleLbl name="node3">
+    <dgm:scene3d>
+      <a:camera prst="orthographicFront"/>
+      <a:lightRig rig="threePt" dir="t"/>
+    </dgm:scene3d>
+    <dgm:sp3d/>
+    <dgm:txPr/>
+    <dgm:style>
+      <a:lnRef idx="2">
+        <a:scrgbClr r="0" g="0" b="0"/>
+      </a:lnRef>
+      <a:fillRef idx="1">
+        <a:scrgbClr r="0" g="0" b="0"/>
+      </a:fillRef>
+      <a:effectRef idx="0">
+        <a:scrgbClr r="0" g="0" b="0"/>
+      </a:effectRef>
+      <a:fontRef idx="minor">
+        <a:schemeClr val="lt1"/>
+      </a:fontRef>
+    </dgm:style>
+  </dgm:styleLbl>
+  <dgm:styleLbl name="node4">
+    <dgm:scene3d>
+      <a:camera prst="orthographicFront"/>
+      <a:lightRig rig="threePt" dir="t"/>
+    </dgm:scene3d>
+    <dgm:sp3d/>
+    <dgm:txPr/>
+    <dgm:style>
+      <a:lnRef idx="2">
+        <a:scrgbClr r="0" g="0" b="0"/>
+      </a:lnRef>
+      <a:fillRef idx="1">
+        <a:scrgbClr r="0" g="0" b="0"/>
+      </a:fillRef>
+      <a:effectRef idx="0">
+        <a:scrgbClr r="0" g="0" b="0"/>
+      </a:effectRef>
+      <a:fontRef idx="minor">
+        <a:schemeClr val="lt1"/>
+      </a:fontRef>
+    </dgm:style>
+  </dgm:styleLbl>
+  <dgm:styleLbl name="fgImgPlace1">
+    <dgm:scene3d>
+      <a:camera prst="orthographicFront"/>
+      <a:lightRig rig="threePt" dir="t"/>
+    </dgm:scene3d>
+    <dgm:sp3d/>
+    <dgm:txPr/>
+    <dgm:style>
+      <a:lnRef idx="2">
+        <a:scrgbClr r="0" g="0" b="0"/>
+      </a:lnRef>
+      <a:fillRef idx="1">
+        <a:scrgbClr r="0" g="0" b="0"/>
+      </a:fillRef>
+      <a:effectRef idx="0">
+        <a:scrgbClr r="0" g="0" b="0"/>
+      </a:effectRef>
+      <a:fontRef idx="minor"/>
+    </dgm:style>
+  </dgm:styleLbl>
+  <dgm:styleLbl name="alignImgPlace1">
+    <dgm:scene3d>
+      <a:camera prst="orthographicFront"/>
+      <a:lightRig rig="threePt" dir="t"/>
+    </dgm:scene3d>
+    <dgm:sp3d/>
+    <dgm:txPr/>
+    <dgm:style>
+      <a:lnRef idx="2">
+        <a:scrgbClr r="0" g="0" b="0"/>
+      </a:lnRef>
+      <a:fillRef idx="1">
+        <a:scrgbClr r="0" g="0" b="0"/>
+      </a:fillRef>
+      <a:effectRef idx="0">
+        <a:scrgbClr r="0" g="0" b="0"/>
+      </a:effectRef>
+      <a:fontRef idx="minor"/>
+    </dgm:style>
+  </dgm:styleLbl>
+  <dgm:styleLbl name="bgImgPlace1">
+    <dgm:scene3d>
+      <a:camera prst="orthographicFront"/>
+      <a:lightRig rig="threePt" dir="t"/>
+    </dgm:scene3d>
+    <dgm:sp3d/>
+    <dgm:txPr/>
+    <dgm:style>
+      <a:lnRef idx="2">
+        <a:scrgbClr r="0" g="0" b="0"/>
+      </a:lnRef>
+      <a:fillRef idx="1">
+        <a:scrgbClr r="0" g="0" b="0"/>
+      </a:fillRef>
+      <a:effectRef idx="0">
+        <a:scrgbClr r="0" g="0" b="0"/>
+      </a:effectRef>
+      <a:fontRef idx="minor"/>
+    </dgm:style>
+  </dgm:styleLbl>
+  <dgm:styleLbl name="sibTrans2D1">
+    <dgm:scene3d>
+      <a:camera prst="orthographicFront"/>
+      <a:lightRig rig="threePt" dir="t"/>
+    </dgm:scene3d>
+    <dgm:sp3d/>
+    <dgm:txPr/>
+    <dgm:style>
+      <a:lnRef idx="0">
+        <a:scrgbClr r="0" g="0" b="0"/>
+      </a:lnRef>
+      <a:fillRef idx="1">
+        <a:scrgbClr r="0" g="0" b="0"/>
+      </a:fillRef>
+      <a:effectRef idx="0">
+        <a:scrgbClr r="0" g="0" b="0"/>
+      </a:effectRef>
+      <a:fontRef idx="minor">
+        <a:schemeClr val="lt1"/>
+      </a:fontRef>
+    </dgm:style>
+  </dgm:styleLbl>
+  <dgm:styleLbl name="fgSibTrans2D1">
+    <dgm:scene3d>
+      <a:camera prst="orthographicFront"/>
+      <a:lightRig rig="threePt" dir="t"/>
+    </dgm:scene3d>
+    <dgm:sp3d/>
+    <dgm:txPr/>
+    <dgm:style>
+      <a:lnRef idx="0">
+        <a:scrgbClr r="0" g="0" b="0"/>
+      </a:lnRef>
+      <a:fillRef idx="1">
+        <a:scrgbClr r="0" g="0" b="0"/>
+      </a:fillRef>
+      <a:effectRef idx="0">
+        <a:scrgbClr r="0" g="0" b="0"/>
+      </a:effectRef>
+      <a:fontRef idx="minor">
+        <a:schemeClr val="lt1"/>
+      </a:fontRef>
+    </dgm:style>
+  </dgm:styleLbl>
+  <dgm:styleLbl name="bgSibTrans2D1">
+    <dgm:scene3d>
+      <a:camera prst="orthographicFront"/>
+      <a:lightRig rig="threePt" dir="t"/>
+    </dgm:scene3d>
+    <dgm:sp3d/>
+    <dgm:txPr/>
+    <dgm:style>
+      <a:lnRef idx="0">
+        <a:scrgbClr r="0" g="0" b="0"/>
+      </a:lnRef>
+      <a:fillRef idx="1">
+        <a:scrgbClr r="0" g="0" b="0"/>
+      </a:fillRef>
+      <a:effectRef idx="0">
+        <a:scrgbClr r="0" g="0" b="0"/>
+      </a:effectRef>
+      <a:fontRef idx="minor">
+        <a:schemeClr val="lt1"/>
+      </a:fontRef>
+    </dgm:style>
+  </dgm:styleLbl>
+  <dgm:styleLbl name="sibTrans1D1">
+    <dgm:scene3d>
+      <a:camera prst="orthographicFront"/>
+      <a:lightRig rig="threePt" dir="t"/>
+    </dgm:scene3d>
+    <dgm:sp3d/>
+    <dgm:txPr/>
+    <dgm:style>
+      <a:lnRef idx="1">
+        <a:scrgbClr r="0" g="0" b="0"/>
+      </a:lnRef>
+      <a:fillRef idx="0">
+        <a:scrgbClr r="0" g="0" b="0"/>
+      </a:fillRef>
+      <a:effectRef idx="0">
+        <a:scrgbClr r="0" g="0" b="0"/>
+      </a:effectRef>
+      <a:fontRef idx="minor"/>
+    </dgm:style>
+  </dgm:styleLbl>
+  <dgm:styleLbl name="callout">
+    <dgm:scene3d>
+      <a:camera prst="orthographicFront"/>
+      <a:lightRig rig="threePt" dir="t"/>
+    </dgm:scene3d>
+    <dgm:sp3d/>
+    <dgm:txPr/>
+    <dgm:style>
+      <a:lnRef idx="2">
+        <a:scrgbClr r="0" g="0" b="0"/>
+      </a:lnRef>
+      <a:fillRef idx="1">
+        <a:scrgbClr r="0" g="0" b="0"/>
+      </a:fillRef>
+      <a:effectRef idx="0">
+        <a:scrgbClr r="0" g="0" b="0"/>
+      </a:effectRef>
+      <a:fontRef idx="minor"/>
+    </dgm:style>
+  </dgm:styleLbl>
+  <dgm:styleLbl name="asst0">
+    <dgm:scene3d>
+      <a:camera prst="orthographicFront"/>
+      <a:lightRig rig="threePt" dir="t"/>
+    </dgm:scene3d>
+    <dgm:sp3d/>
+    <dgm:txPr/>
+    <dgm:style>
+      <a:lnRef idx="2">
+        <a:scrgbClr r="0" g="0" b="0"/>
+      </a:lnRef>
+      <a:fillRef idx="1">
+        <a:scrgbClr r="0" g="0" b="0"/>
+      </a:fillRef>
+      <a:effectRef idx="0">
+        <a:scrgbClr r="0" g="0" b="0"/>
+      </a:effectRef>
+      <a:fontRef idx="minor">
+        <a:schemeClr val="lt1"/>
+      </a:fontRef>
+    </dgm:style>
+  </dgm:styleLbl>
+  <dgm:styleLbl name="asst1">
+    <dgm:scene3d>
+      <a:camera prst="orthographicFront"/>
+      <a:lightRig rig="threePt" dir="t"/>
+    </dgm:scene3d>
+    <dgm:sp3d/>
+    <dgm:txPr/>
+    <dgm:style>
+      <a:lnRef idx="2">
+        <a:scrgbClr r="0" g="0" b="0"/>
+      </a:lnRef>
+      <a:fillRef idx="1">
+        <a:scrgbClr r="0" g="0" b="0"/>
+      </a:fillRef>
+      <a:effectRef idx="0">
+        <a:scrgbClr r="0" g="0" b="0"/>
+      </a:effectRef>
+      <a:fontRef idx="minor">
+        <a:schemeClr val="lt1"/>
+      </a:fontRef>
+    </dgm:style>
+  </dgm:styleLbl>
+  <dgm:styleLbl name="asst2">
+    <dgm:scene3d>
+      <a:camera prst="orthographicFront"/>
+      <a:lightRig rig="threePt" dir="t"/>
+    </dgm:scene3d>
+    <dgm:sp3d/>
+    <dgm:txPr/>
+    <dgm:style>
+      <a:lnRef idx="2">
+        <a:scrgbClr r="0" g="0" b="0"/>
+      </a:lnRef>
+      <a:fillRef idx="1">
+        <a:scrgbClr r="0" g="0" b="0"/>
+      </a:fillRef>
+      <a:effectRef idx="0">
+        <a:scrgbClr r="0" g="0" b="0"/>
+      </a:effectRef>
+      <a:fontRef idx="minor">
+        <a:schemeClr val="lt1"/>
+      </a:fontRef>
+    </dgm:style>
+  </dgm:styleLbl>
+  <dgm:styleLbl name="asst3">
+    <dgm:scene3d>
+      <a:camera prst="orthographicFront"/>
+      <a:lightRig rig="threePt" dir="t"/>
+    </dgm:scene3d>
+    <dgm:sp3d/>
+    <dgm:txPr/>
+    <dgm:style>
+      <a:lnRef idx="2">
+        <a:scrgbClr r="0" g="0" b="0"/>
+      </a:lnRef>
+      <a:fillRef idx="1">
+        <a:scrgbClr r="0" g="0" b="0"/>
+      </a:fillRef>
+      <a:effectRef idx="0">
+        <a:scrgbClr r="0" g="0" b="0"/>
+      </a:effectRef>
+      <a:fontRef idx="minor">
+        <a:schemeClr val="lt1"/>
+      </a:fontRef>
+    </dgm:style>
+  </dgm:styleLbl>
+  <dgm:styleLbl name="asst4">
+    <dgm:scene3d>
+      <a:camera prst="orthographicFront"/>
+      <a:lightRig rig="threePt" dir="t"/>
+    </dgm:scene3d>
+    <dgm:sp3d/>
+    <dgm:txPr/>
+    <dgm:style>
+      <a:lnRef idx="2">
+        <a:scrgbClr r="0" g="0" b="0"/>
+      </a:lnRef>
+      <a:fillRef idx="1">
+        <a:scrgbClr r="0" g="0" b="0"/>
+      </a:fillRef>
+      <a:effectRef idx="0">
+        <a:scrgbClr r="0" g="0" b="0"/>
+      </a:effectRef>
+      <a:fontRef idx="minor">
+        <a:schemeClr val="lt1"/>
+      </a:fontRef>
+    </dgm:style>
+  </dgm:styleLbl>
+  <dgm:styleLbl name="parChTrans2D1">
+    <dgm:scene3d>
+      <a:camera prst="orthographicFront"/>
+      <a:lightRig rig="threePt" dir="t"/>
+    </dgm:scene3d>
+    <dgm:sp3d/>
+    <dgm:txPr/>
+    <dgm:style>
+      <a:lnRef idx="2">
+        <a:scrgbClr r="0" g="0" b="0"/>
+      </a:lnRef>
+      <a:fillRef idx="1">
+        <a:scrgbClr r="0" g="0" b="0"/>
+      </a:fillRef>
+      <a:effectRef idx="0">
+        <a:scrgbClr r="0" g="0" b="0"/>
+      </a:effectRef>
+      <a:fontRef idx="minor">
+        <a:schemeClr val="lt1"/>
+      </a:fontRef>
+    </dgm:style>
+  </dgm:styleLbl>
+  <dgm:styleLbl name="parChTrans2D2">
+    <dgm:scene3d>
+      <a:camera prst="orthographicFront"/>
+      <a:lightRig rig="threePt" dir="t"/>
+    </dgm:scene3d>
+    <dgm:sp3d/>
+    <dgm:txPr/>
+    <dgm:style>
+      <a:lnRef idx="2">
+        <a:scrgbClr r="0" g="0" b="0"/>
+      </a:lnRef>
+      <a:fillRef idx="1">
+        <a:scrgbClr r="0" g="0" b="0"/>
+      </a:fillRef>
+      <a:effectRef idx="0">
+        <a:scrgbClr r="0" g="0" b="0"/>
+      </a:effectRef>
+      <a:fontRef idx="minor">
+        <a:schemeClr val="lt1"/>
+      </a:fontRef>
+    </dgm:style>
+  </dgm:styleLbl>
+  <dgm:styleLbl name="parChTrans2D3">
+    <dgm:scene3d>
+      <a:camera prst="orthographicFront"/>
+      <a:lightRig rig="threePt" dir="t"/>
+    </dgm:scene3d>
+    <dgm:sp3d/>
+    <dgm:txPr/>
+    <dgm:style>
+      <a:lnRef idx="2">
+        <a:scrgbClr r="0" g="0" b="0"/>
+      </a:lnRef>
+      <a:fillRef idx="1">
+        <a:scrgbClr r="0" g="0" b="0"/>
+      </a:fillRef>
+      <a:effectRef idx="0">
+        <a:scrgbClr r="0" g="0" b="0"/>
+      </a:effectRef>
+      <a:fontRef idx="minor">
+        <a:schemeClr val="lt1"/>
+      </a:fontRef>
+    </dgm:style>
+  </dgm:styleLbl>
+  <dgm:styleLbl name="parChTrans2D4">
+    <dgm:scene3d>
+      <a:camera prst="orthographicFront"/>
+      <a:lightRig rig="threePt" dir="t"/>
+    </dgm:scene3d>
+    <dgm:sp3d/>
+    <dgm:txPr/>
+    <dgm:style>
+      <a:lnRef idx="2">
+        <a:scrgbClr r="0" g="0" b="0"/>
+      </a:lnRef>
+      <a:fillRef idx="1">
+        <a:scrgbClr r="0" g="0" b="0"/>
+      </a:fillRef>
+      <a:effectRef idx="0">
+        <a:scrgbClr r="0" g="0" b="0"/>
+      </a:effectRef>
+      <a:fontRef idx="minor">
+        <a:schemeClr val="lt1"/>
+      </a:fontRef>
+    </dgm:style>
+  </dgm:styleLbl>
+  <dgm:styleLbl name="parChTrans1D1">
+    <dgm:scene3d>
+      <a:camera prst="orthographicFront"/>
+      <a:lightRig rig="threePt" dir="t"/>
+    </dgm:scene3d>
+    <dgm:sp3d/>
+    <dgm:txPr/>
+    <dgm:style>
+      <a:lnRef idx="2">
+        <a:scrgbClr r="0" g="0" b="0"/>
+      </a:lnRef>
+      <a:fillRef idx="0">
+        <a:scrgbClr r="0" g="0" b="0"/>
+      </a:fillRef>
+      <a:effectRef idx="0">
+        <a:scrgbClr r="0" g="0" b="0"/>
+      </a:effectRef>
+      <a:fontRef idx="minor"/>
+    </dgm:style>
+  </dgm:styleLbl>
+  <dgm:styleLbl name="parChTrans1D2">
+    <dgm:scene3d>
+      <a:camera prst="orthographicFront"/>
+      <a:lightRig rig="threePt" dir="t"/>
+    </dgm:scene3d>
+    <dgm:sp3d/>
+    <dgm:txPr/>
+    <dgm:style>
+      <a:lnRef idx="2">
+        <a:scrgbClr r="0" g="0" b="0"/>
+      </a:lnRef>
+      <a:fillRef idx="0">
+        <a:scrgbClr r="0" g="0" b="0"/>
+      </a:fillRef>
+      <a:effectRef idx="0">
+        <a:scrgbClr r="0" g="0" b="0"/>
+      </a:effectRef>
+      <a:fontRef idx="minor"/>
+    </dgm:style>
+  </dgm:styleLbl>
+  <dgm:styleLbl name="parChTrans1D3">
+    <dgm:scene3d>
+      <a:camera prst="orthographicFront"/>
+      <a:lightRig rig="threePt" dir="t"/>
+    </dgm:scene3d>
+    <dgm:sp3d/>
+    <dgm:txPr/>
+    <dgm:style>
+      <a:lnRef idx="2">
+        <a:scrgbClr r="0" g="0" b="0"/>
+      </a:lnRef>
+      <a:fillRef idx="0">
+        <a:scrgbClr r="0" g="0" b="0"/>
+      </a:fillRef>
+      <a:effectRef idx="0">
+        <a:scrgbClr r="0" g="0" b="0"/>
+      </a:effectRef>
+      <a:fontRef idx="minor"/>
+    </dgm:style>
+  </dgm:styleLbl>
+  <dgm:styleLbl name="parChTrans1D4">
+    <dgm:scene3d>
+      <a:camera prst="orthographicFront"/>
+      <a:lightRig rig="threePt" dir="t"/>
+    </dgm:scene3d>
+    <dgm:sp3d/>
+    <dgm:txPr/>
+    <dgm:style>
+      <a:lnRef idx="2">
+        <a:scrgbClr r="0" g="0" b="0"/>
+      </a:lnRef>
+      <a:fillRef idx="0">
+        <a:scrgbClr r="0" g="0" b="0"/>
+      </a:fillRef>
+      <a:effectRef idx="0">
+        <a:scrgbClr r="0" g="0" b="0"/>
+      </a:effectRef>
+      <a:fontRef idx="minor"/>
+    </dgm:style>
+  </dgm:styleLbl>
+  <dgm:styleLbl name="fgAcc1">
+    <dgm:scene3d>
+      <a:camera prst="orthographicFront"/>
+      <a:lightRig rig="threePt" dir="t"/>
+    </dgm:scene3d>
+    <dgm:sp3d/>
+    <dgm:txPr/>
+    <dgm:style>
+      <a:lnRef idx="2">
+        <a:scrgbClr r="0" g="0" b="0"/>
+      </a:lnRef>
+      <a:fillRef idx="1">
+        <a:scrgbClr r="0" g="0" b="0"/>
+      </a:fillRef>
+      <a:effectRef idx="0">
+        <a:scrgbClr r="0" g="0" b="0"/>
+      </a:effectRef>
+      <a:fontRef idx="minor"/>
+    </dgm:style>
+  </dgm:styleLbl>
+  <dgm:styleLbl name="conFgAcc1">
+    <dgm:scene3d>
+      <a:camera prst="orthographicFront"/>
+      <a:lightRig rig="threePt" dir="t"/>
+    </dgm:scene3d>
+    <dgm:sp3d/>
+    <dgm:txPr/>
+    <dgm:style>
+      <a:lnRef idx="2">
+        <a:scrgbClr r="0" g="0" b="0"/>
+      </a:lnRef>
+      <a:fillRef idx="1">
+        <a:scrgbClr r="0" g="0" b="0"/>
+      </a:fillRef>
+      <a:effectRef idx="0">
+        <a:scrgbClr r="0" g="0" b="0"/>
+      </a:effectRef>
+      <a:fontRef idx="minor"/>
+    </dgm:style>
+  </dgm:styleLbl>
+  <dgm:styleLbl name="alignAcc1">
+    <dgm:scene3d>
+      <a:camera prst="orthographicFront"/>
+      <a:lightRig rig="threePt" dir="t"/>
+    </dgm:scene3d>
+    <dgm:sp3d/>
+    <dgm:txPr/>
+    <dgm:style>
+      <a:lnRef idx="2">
+        <a:scrgbClr r="0" g="0" b="0"/>
+      </a:lnRef>
+      <a:fillRef idx="1">
+        <a:scrgbClr r="0" g="0" b="0"/>
+      </a:fillRef>
+      <a:effectRef idx="0">
+        <a:scrgbClr r="0" g="0" b="0"/>
+      </a:effectRef>
+      <a:fontRef idx="minor"/>
+    </dgm:style>
+  </dgm:styleLbl>
+  <dgm:styleLbl name="trAlignAcc1">
+    <dgm:scene3d>
+      <a:camera prst="orthographicFront"/>
+      <a:lightRig rig="threePt" dir="t"/>
+    </dgm:scene3d>
+    <dgm:sp3d/>
+    <dgm:txPr/>
+    <dgm:style>
+      <a:lnRef idx="1">
+        <a:scrgbClr r="0" g="0" b="0"/>
+      </a:lnRef>
+      <a:fillRef idx="1">
+        <a:scrgbClr r="0" g="0" b="0"/>
+      </a:fillRef>
+      <a:effectRef idx="0">
+        <a:scrgbClr r="0" g="0" b="0"/>
+      </a:effectRef>
+      <a:fontRef idx="minor"/>
+    </dgm:style>
+  </dgm:styleLbl>
+  <dgm:styleLbl name="bgAcc1">
+    <dgm:scene3d>
+      <a:camera prst="orthographicFront"/>
+      <a:lightRig rig="threePt" dir="t"/>
+    </dgm:scene3d>
+    <dgm:sp3d/>
+    <dgm:txPr/>
+    <dgm:style>
+      <a:lnRef idx="2">
+        <a:scrgbClr r="0" g="0" b="0"/>
+      </a:lnRef>
+      <a:fillRef idx="1">
+        <a:scrgbClr r="0" g="0" b="0"/>
+      </a:fillRef>
+      <a:effectRef idx="0">
+        <a:scrgbClr r="0" g="0" b="0"/>
+      </a:effectRef>
+      <a:fontRef idx="minor"/>
+    </dgm:style>
+  </dgm:styleLbl>
+  <dgm:styleLbl name="solidFgAcc1">
+    <dgm:scene3d>
+      <a:camera prst="orthographicFront"/>
+      <a:lightRig rig="threePt" dir="t"/>
+    </dgm:scene3d>
+    <dgm:sp3d/>
+    <dgm:txPr/>
+    <dgm:style>
+      <a:lnRef idx="2">
+        <a:scrgbClr r="0" g="0" b="0"/>
+      </a:lnRef>
+      <a:fillRef idx="1">
+        <a:scrgbClr r="0" g="0" b="0"/>
+      </a:fillRef>
+      <a:effectRef idx="0">
+        <a:scrgbClr r="0" g="0" b="0"/>
+      </a:effectRef>
+      <a:fontRef idx="minor"/>
+    </dgm:style>
+  </dgm:styleLbl>
+  <dgm:styleLbl name="solidAlignAcc1">
+    <dgm:scene3d>
+      <a:camera prst="orthographicFront"/>
+      <a:lightRig rig="threePt" dir="t"/>
+    </dgm:scene3d>
+    <dgm:sp3d/>
+    <dgm:txPr/>
+    <dgm:style>
+      <a:lnRef idx="2">
+        <a:scrgbClr r="0" g="0" b="0"/>
+      </a:lnRef>
+      <a:fillRef idx="1">
+        <a:scrgbClr r="0" g="0" b="0"/>
+      </a:fillRef>
+      <a:effectRef idx="0">
+        <a:scrgbClr r="0" g="0" b="0"/>
+      </a:effectRef>
+      <a:fontRef idx="minor"/>
+    </dgm:style>
+  </dgm:styleLbl>
+  <dgm:styleLbl name="solidBgAcc1">
+    <dgm:scene3d>
+      <a:camera prst="orthographicFront"/>
+      <a:lightRig rig="threePt" dir="t"/>
+    </dgm:scene3d>
+    <dgm:sp3d/>
+    <dgm:txPr/>
+    <dgm:style>
+      <a:lnRef idx="2">
+        <a:scrgbClr r="0" g="0" b="0"/>
+      </a:lnRef>
+      <a:fillRef idx="1">
+        <a:scrgbClr r="0" g="0" b="0"/>
+      </a:fillRef>
+      <a:effectRef idx="0">
+        <a:scrgbClr r="0" g="0" b="0"/>
+      </a:effectRef>
+      <a:fontRef idx="minor"/>
+    </dgm:style>
+  </dgm:styleLbl>
+  <dgm:styleLbl name="fgAccFollowNode1">
+    <dgm:scene3d>
+      <a:camera prst="orthographicFront"/>
+      <a:lightRig rig="threePt" dir="t"/>
+    </dgm:scene3d>
+    <dgm:sp3d/>
+    <dgm:txPr/>
+    <dgm:style>
+      <a:lnRef idx="2">
+        <a:scrgbClr r="0" g="0" b="0"/>
+      </a:lnRef>
+      <a:fillRef idx="1">
+        <a:scrgbClr r="0" g="0" b="0"/>
+      </a:fillRef>
+      <a:effectRef idx="0">
+        <a:scrgbClr r="0" g="0" b="0"/>
+      </a:effectRef>
+      <a:fontRef idx="minor"/>
+    </dgm:style>
+  </dgm:styleLbl>
+  <dgm:styleLbl name="alignAccFollowNode1">
+    <dgm:scene3d>
+      <a:camera prst="orthographicFront"/>
+      <a:lightRig rig="threePt" dir="t"/>
+    </dgm:scene3d>
+    <dgm:sp3d/>
+    <dgm:txPr/>
+    <dgm:style>
+      <a:lnRef idx="2">
+        <a:scrgbClr r="0" g="0" b="0"/>
+      </a:lnRef>
+      <a:fillRef idx="1">
+        <a:scrgbClr r="0" g="0" b="0"/>
+      </a:fillRef>
+      <a:effectRef idx="0">
+        <a:scrgbClr r="0" g="0" b="0"/>
+      </a:effectRef>
+      <a:fontRef idx="minor"/>
+    </dgm:style>
+  </dgm:styleLbl>
+  <dgm:styleLbl name="bgAccFollowNode1">
+    <dgm:scene3d>
+      <a:camera prst="orthographicFront"/>
+      <a:lightRig rig="threePt" dir="t"/>
+    </dgm:scene3d>
+    <dgm:sp3d/>
+    <dgm:txPr/>
+    <dgm:style>
+      <a:lnRef idx="2">
+        <a:scrgbClr r="0" g="0" b="0"/>
+      </a:lnRef>
+      <a:fillRef idx="1">
+        <a:scrgbClr r="0" g="0" b="0"/>
+      </a:fillRef>
+      <a:effectRef idx="0">
+        <a:scrgbClr r="0" g="0" b="0"/>
+      </a:effectRef>
+      <a:fontRef idx="minor"/>
+    </dgm:style>
+  </dgm:styleLbl>
+  <dgm:styleLbl name="fgAcc0">
+    <dgm:scene3d>
+      <a:camera prst="orthographicFront"/>
+      <a:lightRig rig="threePt" dir="t"/>
+    </dgm:scene3d>
+    <dgm:sp3d/>
+    <dgm:txPr/>
+    <dgm:style>
+      <a:lnRef idx="2">
+        <a:scrgbClr r="0" g="0" b="0"/>
+      </a:lnRef>
+      <a:fillRef idx="1">
+        <a:scrgbClr r="0" g="0" b="0"/>
+      </a:fillRef>
+      <a:effectRef idx="0">
+        <a:scrgbClr r="0" g="0" b="0"/>
+      </a:effectRef>
+      <a:fontRef idx="minor"/>
+    </dgm:style>
+  </dgm:styleLbl>
+  <dgm:styleLbl name="fgAcc2">
+    <dgm:scene3d>
+      <a:camera prst="orthographicFront"/>
+      <a:lightRig rig="threePt" dir="t"/>
+    </dgm:scene3d>
+    <dgm:sp3d/>
+    <dgm:txPr/>
+    <dgm:style>
+      <a:lnRef idx="2">
+        <a:scrgbClr r="0" g="0" b="0"/>
+      </a:lnRef>
+      <a:fillRef idx="1">
+        <a:scrgbClr r="0" g="0" b="0"/>
+      </a:fillRef>
+      <a:effectRef idx="0">
+        <a:scrgbClr r="0" g="0" b="0"/>
+      </a:effectRef>
+      <a:fontRef idx="minor"/>
+    </dgm:style>
+  </dgm:styleLbl>
+  <dgm:styleLbl name="fgAcc3">
+    <dgm:scene3d>
+      <a:camera prst="orthographicFront"/>
+      <a:lightRig rig="threePt" dir="t"/>
+    </dgm:scene3d>
+    <dgm:sp3d/>
+    <dgm:txPr/>
+    <dgm:style>
+      <a:lnRef idx="2">
+        <a:scrgbClr r="0" g="0" b="0"/>
+      </a:lnRef>
+      <a:fillRef idx="1">
+        <a:scrgbClr r="0" g="0" b="0"/>
+      </a:fillRef>
+      <a:effectRef idx="0">
+        <a:scrgbClr r="0" g="0" b="0"/>
+      </a:effectRef>
+      <a:fontRef idx="minor"/>
+    </dgm:style>
+  </dgm:styleLbl>
+  <dgm:styleLbl name="fgAcc4">
+    <dgm:scene3d>
+      <a:camera prst="orthographicFront"/>
+      <a:lightRig rig="threePt" dir="t"/>
+    </dgm:scene3d>
+    <dgm:sp3d/>
+    <dgm:txPr/>
+    <dgm:style>
+      <a:lnRef idx="2">
+        <a:scrgbClr r="0" g="0" b="0"/>
+      </a:lnRef>
+      <a:fillRef idx="1">
+        <a:scrgbClr r="0" g="0" b="0"/>
+      </a:fillRef>
+      <a:effectRef idx="0">
+        <a:scrgbClr r="0" g="0" b="0"/>
+      </a:effectRef>
+      <a:fontRef idx="minor"/>
+    </dgm:style>
+  </dgm:styleLbl>
+  <dgm:styleLbl name="bgShp">
+    <dgm:scene3d>
+      <a:camera prst="orthographicFront"/>
+      <a:lightRig rig="threePt" dir="t"/>
+    </dgm:scene3d>
+    <dgm:sp3d/>
+    <dgm:txPr/>
+    <dgm:style>
+      <a:lnRef idx="0">
+        <a:scrgbClr r="0" g="0" b="0"/>
+      </a:lnRef>
+      <a:fillRef idx="1">
+        <a:scrgbClr r="0" g="0" b="0"/>
+      </a:fillRef>
+      <a:effectRef idx="0">
+        <a:scrgbClr r="0" g="0" b="0"/>
+      </a:effectRef>
+      <a:fontRef idx="minor"/>
+    </dgm:style>
+  </dgm:styleLbl>
+  <dgm:styleLbl name="dkBgShp">
+    <dgm:scene3d>
+      <a:camera prst="orthographicFront"/>
+      <a:lightRig rig="threePt" dir="t"/>
+    </dgm:scene3d>
+    <dgm:sp3d/>
+    <dgm:txPr/>
+    <dgm:style>
+      <a:lnRef idx="0">
+        <a:scrgbClr r="0" g="0" b="0"/>
+      </a:lnRef>
+      <a:fillRef idx="1">
+        <a:scrgbClr r="0" g="0" b="0"/>
+      </a:fillRef>
+      <a:effectRef idx="0">
+        <a:scrgbClr r="0" g="0" b="0"/>
+      </a:effectRef>
+      <a:fontRef idx="minor"/>
+    </dgm:style>
+  </dgm:styleLbl>
+  <dgm:styleLbl name="trBgShp">
+    <dgm:scene3d>
+      <a:camera prst="orthographicFront"/>
+      <a:lightRig rig="threePt" dir="t"/>
+    </dgm:scene3d>
+    <dgm:sp3d/>
+    <dgm:txPr/>
+    <dgm:style>
+      <a:lnRef idx="0">
+        <a:scrgbClr r="0" g="0" b="0"/>
+      </a:lnRef>
+      <a:fillRef idx="1">
+        <a:scrgbClr r="0" g="0" b="0"/>
+      </a:fillRef>
+      <a:effectRef idx="0">
+        <a:scrgbClr r="0" g="0" b="0"/>
+      </a:effectRef>
+      <a:fontRef idx="minor"/>
+    </dgm:style>
+  </dgm:styleLbl>
+  <dgm:styleLbl name="fgShp">
+    <dgm:scene3d>
+      <a:camera prst="orthographicFront"/>
+      <a:lightRig rig="threePt" dir="t"/>
+    </dgm:scene3d>
+    <dgm:sp3d/>
+    <dgm:txPr/>
+    <dgm:style>
+      <a:lnRef idx="2">
+        <a:scrgbClr r="0" g="0" b="0"/>
+      </a:lnRef>
+      <a:fillRef idx="1">
+        <a:scrgbClr r="0" g="0" b="0"/>
+      </a:fillRef>
+      <a:effectRef idx="0">
+        <a:scrgbClr r="0" g="0" b="0"/>
+      </a:effectRef>
+      <a:fontRef idx="minor"/>
+    </dgm:style>
+  </dgm:styleLbl>
+  <dgm:styleLbl name="revTx">
+    <dgm:scene3d>
+      <a:camera prst="orthographicFront"/>
+      <a:lightRig rig="threePt" dir="t"/>
+    </dgm:scene3d>
+    <dgm:sp3d/>
+    <dgm:txPr/>
+    <dgm:style>
+      <a:lnRef idx="0">
+        <a:scrgbClr r="0" g="0" b="0"/>
+      </a:lnRef>
+      <a:fillRef idx="0">
+        <a:scrgbClr r="0" g="0" b="0"/>
+      </a:fillRef>
+      <a:effectRef idx="0">
+        <a:scrgbClr r="0" g="0" b="0"/>
+      </a:effectRef>
+      <a:fontRef idx="minor"/>
+    </dgm:style>
+  </dgm:styleLbl>
+</dgm:styleDef>
+</file>
+
+<file path=ppt/diagrams/quickStyle6.xml><?xml version="1.0" encoding="utf-8"?>
 <dgm:styleDef xmlns:dgm="http://schemas.openxmlformats.org/drawingml/2006/diagram" xmlns:a="http://schemas.openxmlformats.org/drawingml/2006/main" uniqueId="urn:microsoft.com/office/officeart/2005/8/quickstyle/simple1">
   <dgm:title val=""/>
   <dgm:desc val=""/>
@@ -18490,8 +22748,8 @@
         </p:nvSpPr>
         <p:spPr>
           <a:xfrm>
-            <a:off x="725863" y="3351255"/>
-            <a:ext cx="10492033" cy="2954655"/>
+            <a:off x="245095" y="3309603"/>
+            <a:ext cx="10492033" cy="3447098"/>
           </a:xfrm>
           <a:prstGeom prst="rect">
             <a:avLst/>
@@ -18517,15 +22775,15 @@
           </a:p>
           <a:p>
             <a:r>
-              <a:rPr lang="en-US" dirty="0"/>
+              <a:rPr lang="en-US" sz="2000" dirty="0"/>
               <a:t>Step 1: Create a </a:t>
             </a:r>
             <a:r>
-              <a:rPr lang="en-US" dirty="0" err="1"/>
+              <a:rPr lang="en-US" sz="2000" dirty="0" err="1"/>
               <a:t>json</a:t>
             </a:r>
             <a:r>
-              <a:rPr lang="en-US" dirty="0"/>
+              <a:rPr lang="en-US" sz="2000" dirty="0"/>
               <a:t> config</a:t>
             </a:r>
           </a:p>
@@ -18535,16 +22793,16 @@
               <a:buChar char="-"/>
             </a:pPr>
             <a:r>
-              <a:rPr lang="en-US" dirty="0"/>
+              <a:rPr lang="en-US" sz="2000" dirty="0"/>
               <a:t>Clone repository for </a:t>
             </a:r>
             <a:r>
-              <a:rPr lang="en-US" dirty="0">
+              <a:rPr lang="en-US" sz="2000" dirty="0">
                 <a:hlinkClick r:id="rId2"/>
               </a:rPr>
               <a:t>veda-disasters</a:t>
             </a:r>
-            <a:endParaRPr lang="en-US" dirty="0"/>
+            <a:endParaRPr lang="en-US" sz="2000" dirty="0"/>
           </a:p>
           <a:p>
             <a:pPr marL="285750" indent="-285750">
@@ -18552,15 +22810,15 @@
               <a:buChar char="-"/>
             </a:pPr>
             <a:r>
-              <a:rPr lang="en-US" dirty="0"/>
+              <a:rPr lang="en-US" sz="2000" dirty="0"/>
               <a:t>command:    cd </a:t>
             </a:r>
             <a:r>
-              <a:rPr lang="en-US" dirty="0" err="1"/>
+              <a:rPr lang="en-US" sz="2000" dirty="0" err="1"/>
               <a:t>veda</a:t>
             </a:r>
             <a:r>
-              <a:rPr lang="en-US" dirty="0"/>
+              <a:rPr lang="en-US" sz="2000" dirty="0"/>
               <a:t>-disasters</a:t>
             </a:r>
           </a:p>
@@ -18570,15 +22828,15 @@
               <a:buChar char="-"/>
             </a:pPr>
             <a:r>
-              <a:rPr lang="en-US" dirty="0"/>
+              <a:rPr lang="en-US" sz="2000" dirty="0"/>
               <a:t>Create a new branch off of </a:t>
             </a:r>
             <a:r>
-              <a:rPr lang="en-US" b="1" dirty="0"/>
+              <a:rPr lang="en-US" sz="2000" b="1" dirty="0"/>
               <a:t>ingestion-config</a:t>
             </a:r>
             <a:r>
-              <a:rPr lang="en-US" dirty="0"/>
+              <a:rPr lang="en-US" sz="2000" dirty="0"/>
               <a:t> branch ( git checkout –b &lt;your-name&gt; origin/ingestion-config )</a:t>
             </a:r>
           </a:p>
@@ -18588,7 +22846,7 @@
               <a:buChar char="-"/>
             </a:pPr>
             <a:r>
-              <a:rPr lang="en-US" dirty="0"/>
+              <a:rPr lang="en-US" sz="2000" dirty="0"/>
               <a:t>View template file in ingestion-data/dev/dataset-config</a:t>
             </a:r>
           </a:p>
@@ -18598,10 +22856,9 @@
               <a:buChar char="-"/>
             </a:pPr>
             <a:r>
-              <a:rPr lang="en-US"/>
-              <a:t>cp file for the </a:t>
-            </a:r>
-            <a:endParaRPr lang="en-US" dirty="0"/>
+              <a:rPr lang="en-US" sz="2000" dirty="0"/>
+              <a:t>Open your selected variable file</a:t>
+            </a:r>
           </a:p>
           <a:p>
             <a:endParaRPr lang="en-US" dirty="0"/>
@@ -18621,14 +22878,14 @@
           <p:nvPr>
             <p:extLst>
               <p:ext uri="{D42A27DB-BD31-4B8C-83A1-F6EECF244321}">
-                <p14:modId xmlns:p14="http://schemas.microsoft.com/office/powerpoint/2010/main" val="203775880"/>
+                <p14:modId xmlns:p14="http://schemas.microsoft.com/office/powerpoint/2010/main" val="1794098072"/>
               </p:ext>
             </p:extLst>
           </p:nvPr>
         </p:nvGraphicFramePr>
         <p:xfrm>
-          <a:off x="3971715" y="1229026"/>
-          <a:ext cx="4248569" cy="1854737"/>
+          <a:off x="644054" y="1229027"/>
+          <a:ext cx="3701704" cy="1438760"/>
         </p:xfrm>
         <a:graphic>
           <a:graphicData uri="http://schemas.openxmlformats.org/drawingml/2006/diagram">
@@ -18665,6 +22922,117 @@
           </a:p>
         </p:txBody>
       </p:sp>
+      <p:sp>
+        <p:nvSpPr>
+          <p:cNvPr id="6" name="TextBox 5">
+            <a:extLst>
+              <a:ext uri="{FF2B5EF4-FFF2-40B4-BE49-F238E27FC236}">
+                <a16:creationId xmlns:a16="http://schemas.microsoft.com/office/drawing/2014/main" id="{33FF9ADA-6563-D05F-E0C6-FC4A3A0CCA28}"/>
+              </a:ext>
+            </a:extLst>
+          </p:cNvPr>
+          <p:cNvSpPr txBox="1"/>
+          <p:nvPr/>
+        </p:nvSpPr>
+        <p:spPr>
+          <a:xfrm>
+            <a:off x="6438619" y="1044360"/>
+            <a:ext cx="5109328" cy="369332"/>
+          </a:xfrm>
+          <a:prstGeom prst="rect">
+            <a:avLst/>
+          </a:prstGeom>
+          <a:solidFill>
+            <a:schemeClr val="accent4">
+              <a:lumMod val="20000"/>
+              <a:lumOff val="80000"/>
+            </a:schemeClr>
+          </a:solidFill>
+        </p:spPr>
+        <p:txBody>
+          <a:bodyPr wrap="square" rtlCol="0">
+            <a:spAutoFit/>
+          </a:bodyPr>
+          <a:lstStyle/>
+          <a:p>
+            <a:r>
+              <a:rPr lang="en-US" dirty="0">
+                <a:hlinkClick r:id="rId8"/>
+              </a:rPr>
+              <a:t>Data Browser Disasters </a:t>
+            </a:r>
+            <a:r>
+              <a:rPr lang="en-US" dirty="0"/>
+              <a:t>– view data variables</a:t>
+            </a:r>
+          </a:p>
+        </p:txBody>
+      </p:sp>
+      <p:sp>
+        <p:nvSpPr>
+          <p:cNvPr id="7" name="TextBox 6">
+            <a:extLst>
+              <a:ext uri="{FF2B5EF4-FFF2-40B4-BE49-F238E27FC236}">
+                <a16:creationId xmlns:a16="http://schemas.microsoft.com/office/drawing/2014/main" id="{06560484-520F-A436-EFC7-A4E26AC6EF0B}"/>
+              </a:ext>
+            </a:extLst>
+          </p:cNvPr>
+          <p:cNvSpPr txBox="1"/>
+          <p:nvPr/>
+        </p:nvSpPr>
+        <p:spPr>
+          <a:xfrm>
+            <a:off x="8993283" y="1555277"/>
+            <a:ext cx="4637987" cy="1754326"/>
+          </a:xfrm>
+          <a:prstGeom prst="rect">
+            <a:avLst/>
+          </a:prstGeom>
+          <a:noFill/>
+        </p:spPr>
+        <p:txBody>
+          <a:bodyPr wrap="square" rtlCol="0">
+            <a:spAutoFit/>
+          </a:bodyPr>
+          <a:lstStyle/>
+          <a:p>
+            <a:r>
+              <a:rPr lang="en-US" dirty="0"/>
+              <a:t>Kyle – rsm0-10cm</a:t>
+            </a:r>
+          </a:p>
+          <a:p>
+            <a:r>
+              <a:rPr lang="en-US" dirty="0"/>
+              <a:t>Sam – rsm0-2m</a:t>
+            </a:r>
+          </a:p>
+          <a:p>
+            <a:r>
+              <a:rPr lang="en-US" dirty="0"/>
+              <a:t>Ethan – vsm0-100cm</a:t>
+            </a:r>
+          </a:p>
+          <a:p>
+            <a:r>
+              <a:rPr lang="en-US" dirty="0"/>
+              <a:t>Pooja – vsm0-10cm</a:t>
+            </a:r>
+          </a:p>
+          <a:p>
+            <a:r>
+              <a:rPr lang="en-US" dirty="0"/>
+              <a:t>Shwetha – vsm0-200cm</a:t>
+            </a:r>
+          </a:p>
+          <a:p>
+            <a:r>
+              <a:rPr lang="en-US" dirty="0"/>
+              <a:t>Neelam – vsm0-40cm</a:t>
+            </a:r>
+          </a:p>
+        </p:txBody>
+      </p:sp>
     </p:spTree>
     <p:extLst>
       <p:ext uri="{BB962C8B-B14F-4D97-AF65-F5344CB8AC3E}">
@@ -18679,6 +23047,701 @@
 </file>
 
 <file path=ppt/slides/slide21.xml><?xml version="1.0" encoding="utf-8"?>
+<p:sld xmlns:a="http://schemas.openxmlformats.org/drawingml/2006/main" xmlns:r="http://schemas.openxmlformats.org/officeDocument/2006/relationships" xmlns:p="http://schemas.openxmlformats.org/presentationml/2006/main">
+  <p:cSld>
+    <p:spTree>
+      <p:nvGrpSpPr>
+        <p:cNvPr id="1" name="">
+          <a:extLst>
+            <a:ext uri="{FF2B5EF4-FFF2-40B4-BE49-F238E27FC236}">
+              <a16:creationId xmlns:a16="http://schemas.microsoft.com/office/drawing/2014/main" id="{7556C623-BFF7-48C4-5B1D-CF206636C323}"/>
+            </a:ext>
+          </a:extLst>
+        </p:cNvPr>
+        <p:cNvGrpSpPr/>
+        <p:nvPr/>
+      </p:nvGrpSpPr>
+      <p:grpSpPr>
+        <a:xfrm>
+          <a:off x="0" y="0"/>
+          <a:ext cx="0" cy="0"/>
+          <a:chOff x="0" y="0"/>
+          <a:chExt cx="0" cy="0"/>
+        </a:xfrm>
+      </p:grpSpPr>
+      <p:sp>
+        <p:nvSpPr>
+          <p:cNvPr id="2" name="Title 1">
+            <a:extLst>
+              <a:ext uri="{FF2B5EF4-FFF2-40B4-BE49-F238E27FC236}">
+                <a16:creationId xmlns:a16="http://schemas.microsoft.com/office/drawing/2014/main" id="{2C9C97C3-56AE-A6CF-6436-8CB49F8A1D70}"/>
+              </a:ext>
+            </a:extLst>
+          </p:cNvPr>
+          <p:cNvSpPr>
+            <a:spLocks noGrp="1"/>
+          </p:cNvSpPr>
+          <p:nvPr>
+            <p:ph type="title"/>
+          </p:nvPr>
+        </p:nvSpPr>
+        <p:spPr>
+          <a:xfrm>
+            <a:off x="725863" y="1"/>
+            <a:ext cx="10897385" cy="961534"/>
+          </a:xfrm>
+          <a:solidFill>
+            <a:schemeClr val="accent5">
+              <a:lumMod val="40000"/>
+              <a:lumOff val="60000"/>
+            </a:schemeClr>
+          </a:solidFill>
+        </p:spPr>
+        <p:txBody>
+          <a:bodyPr vert="horz" lIns="91440" tIns="45720" rIns="91440" bIns="45720" rtlCol="0" anchor="ctr">
+            <a:normAutofit/>
+          </a:bodyPr>
+          <a:lstStyle/>
+          <a:p>
+            <a:r>
+              <a:rPr lang="en-US" dirty="0"/>
+              <a:t>Config Troubleshooting	</a:t>
+            </a:r>
+          </a:p>
+        </p:txBody>
+      </p:sp>
+      <p:sp>
+        <p:nvSpPr>
+          <p:cNvPr id="5" name="Slide Number Placeholder 4">
+            <a:extLst>
+              <a:ext uri="{FF2B5EF4-FFF2-40B4-BE49-F238E27FC236}">
+                <a16:creationId xmlns:a16="http://schemas.microsoft.com/office/drawing/2014/main" id="{ECBF60E9-9447-347B-9330-4A62AF626B23}"/>
+              </a:ext>
+            </a:extLst>
+          </p:cNvPr>
+          <p:cNvSpPr>
+            <a:spLocks noGrp="1"/>
+          </p:cNvSpPr>
+          <p:nvPr>
+            <p:ph type="sldNum" sz="quarter" idx="12"/>
+          </p:nvPr>
+        </p:nvSpPr>
+        <p:spPr/>
+        <p:txBody>
+          <a:bodyPr/>
+          <a:lstStyle/>
+          <a:p>
+            <a:fld id="{5D28F90B-7FA5-3745-B8A4-A3C1EAD30D95}" type="slidenum">
+              <a:rPr lang="en-US" smtClean="0"/>
+              <a:t>21</a:t>
+            </a:fld>
+            <a:endParaRPr lang="en-US"/>
+          </a:p>
+        </p:txBody>
+      </p:sp>
+      <p:sp>
+        <p:nvSpPr>
+          <p:cNvPr id="8" name="TextBox 7">
+            <a:extLst>
+              <a:ext uri="{FF2B5EF4-FFF2-40B4-BE49-F238E27FC236}">
+                <a16:creationId xmlns:a16="http://schemas.microsoft.com/office/drawing/2014/main" id="{36B30D7C-5AB7-227E-F6E6-5A843E9E7B77}"/>
+              </a:ext>
+            </a:extLst>
+          </p:cNvPr>
+          <p:cNvSpPr txBox="1"/>
+          <p:nvPr/>
+        </p:nvSpPr>
+        <p:spPr>
+          <a:xfrm>
+            <a:off x="831803" y="1432874"/>
+            <a:ext cx="6398555" cy="830997"/>
+          </a:xfrm>
+          <a:prstGeom prst="rect">
+            <a:avLst/>
+          </a:prstGeom>
+          <a:noFill/>
+        </p:spPr>
+        <p:txBody>
+          <a:bodyPr wrap="square" rtlCol="0">
+            <a:spAutoFit/>
+          </a:bodyPr>
+          <a:lstStyle/>
+          <a:p>
+            <a:pPr marL="342900" indent="-342900">
+              <a:buFont typeface="Arial" panose="020B0604020202020204" pitchFamily="34" charset="0"/>
+              <a:buChar char="•"/>
+            </a:pPr>
+            <a:r>
+              <a:rPr lang="en-US" sz="2400" dirty="0">
+                <a:hlinkClick r:id="rId2"/>
+              </a:rPr>
+              <a:t>Time intervals</a:t>
+            </a:r>
+            <a:endParaRPr lang="en-US" sz="2400" dirty="0"/>
+          </a:p>
+          <a:p>
+            <a:pPr marL="342900" indent="-342900">
+              <a:buFont typeface="Arial" panose="020B0604020202020204" pitchFamily="34" charset="0"/>
+              <a:buChar char="•"/>
+            </a:pPr>
+            <a:r>
+              <a:rPr lang="en-US" sz="2400" dirty="0">
+                <a:hlinkClick r:id="rId3"/>
+              </a:rPr>
+              <a:t>STAC Collection Conventions – VEDA </a:t>
+            </a:r>
+            <a:endParaRPr lang="en-US" sz="2400" dirty="0"/>
+          </a:p>
+        </p:txBody>
+      </p:sp>
+    </p:spTree>
+    <p:extLst>
+      <p:ext uri="{BB962C8B-B14F-4D97-AF65-F5344CB8AC3E}">
+        <p14:creationId xmlns:p14="http://schemas.microsoft.com/office/powerpoint/2010/main" val="2066769202"/>
+      </p:ext>
+    </p:extLst>
+  </p:cSld>
+  <p:clrMapOvr>
+    <a:masterClrMapping/>
+  </p:clrMapOvr>
+</p:sld>
+</file>
+
+<file path=ppt/slides/slide22.xml><?xml version="1.0" encoding="utf-8"?>
+<p:sld xmlns:a="http://schemas.openxmlformats.org/drawingml/2006/main" xmlns:r="http://schemas.openxmlformats.org/officeDocument/2006/relationships" xmlns:p="http://schemas.openxmlformats.org/presentationml/2006/main">
+  <p:cSld>
+    <p:spTree>
+      <p:nvGrpSpPr>
+        <p:cNvPr id="1" name="">
+          <a:extLst>
+            <a:ext uri="{FF2B5EF4-FFF2-40B4-BE49-F238E27FC236}">
+              <a16:creationId xmlns:a16="http://schemas.microsoft.com/office/drawing/2014/main" id="{BF3F3E55-0F12-9898-2277-E48ABCF4A52C}"/>
+            </a:ext>
+          </a:extLst>
+        </p:cNvPr>
+        <p:cNvGrpSpPr/>
+        <p:nvPr/>
+      </p:nvGrpSpPr>
+      <p:grpSpPr>
+        <a:xfrm>
+          <a:off x="0" y="0"/>
+          <a:ext cx="0" cy="0"/>
+          <a:chOff x="0" y="0"/>
+          <a:chExt cx="0" cy="0"/>
+        </a:xfrm>
+      </p:grpSpPr>
+      <p:sp>
+        <p:nvSpPr>
+          <p:cNvPr id="2" name="Title 1">
+            <a:extLst>
+              <a:ext uri="{FF2B5EF4-FFF2-40B4-BE49-F238E27FC236}">
+                <a16:creationId xmlns:a16="http://schemas.microsoft.com/office/drawing/2014/main" id="{CBE85455-8376-0A9A-85C5-AD8921E2AD67}"/>
+              </a:ext>
+            </a:extLst>
+          </p:cNvPr>
+          <p:cNvSpPr>
+            <a:spLocks noGrp="1"/>
+          </p:cNvSpPr>
+          <p:nvPr>
+            <p:ph type="title"/>
+          </p:nvPr>
+        </p:nvSpPr>
+        <p:spPr>
+          <a:xfrm>
+            <a:off x="725863" y="1"/>
+            <a:ext cx="10897385" cy="961534"/>
+          </a:xfrm>
+          <a:solidFill>
+            <a:schemeClr val="accent5">
+              <a:lumMod val="40000"/>
+              <a:lumOff val="60000"/>
+            </a:schemeClr>
+          </a:solidFill>
+        </p:spPr>
+        <p:txBody>
+          <a:bodyPr vert="horz" lIns="91440" tIns="45720" rIns="91440" bIns="45720" rtlCol="0" anchor="ctr">
+            <a:normAutofit/>
+          </a:bodyPr>
+          <a:lstStyle/>
+          <a:p>
+            <a:r>
+              <a:rPr lang="en-US" dirty="0"/>
+              <a:t>Time for Ingestion Practice	</a:t>
+            </a:r>
+          </a:p>
+        </p:txBody>
+      </p:sp>
+      <p:sp>
+        <p:nvSpPr>
+          <p:cNvPr id="3" name="TextBox 2">
+            <a:extLst>
+              <a:ext uri="{FF2B5EF4-FFF2-40B4-BE49-F238E27FC236}">
+                <a16:creationId xmlns:a16="http://schemas.microsoft.com/office/drawing/2014/main" id="{04CF670C-4A10-DEE2-431E-E1D20C4BB550}"/>
+              </a:ext>
+            </a:extLst>
+          </p:cNvPr>
+          <p:cNvSpPr txBox="1"/>
+          <p:nvPr/>
+        </p:nvSpPr>
+        <p:spPr>
+          <a:xfrm>
+            <a:off x="433631" y="1888637"/>
+            <a:ext cx="10492033" cy="4093428"/>
+          </a:xfrm>
+          <a:prstGeom prst="rect">
+            <a:avLst/>
+          </a:prstGeom>
+          <a:noFill/>
+        </p:spPr>
+        <p:txBody>
+          <a:bodyPr wrap="square" rtlCol="0">
+            <a:spAutoFit/>
+          </a:bodyPr>
+          <a:lstStyle/>
+          <a:p>
+            <a:r>
+              <a:rPr lang="en-US" sz="2400" b="1" u="sng" dirty="0"/>
+              <a:t>Goal is to submit the job through Ingest API and Airflow</a:t>
+            </a:r>
+          </a:p>
+          <a:p>
+            <a:endParaRPr lang="en-US" dirty="0"/>
+          </a:p>
+          <a:p>
+            <a:endParaRPr lang="en-US" dirty="0"/>
+          </a:p>
+          <a:p>
+            <a:r>
+              <a:rPr lang="en-US" sz="2000" dirty="0"/>
+              <a:t>Why Ingest API – to save the asset name (otherwise Airflow makes it COG_DEFAULT) which is not desirable.</a:t>
+            </a:r>
+          </a:p>
+          <a:p>
+            <a:endParaRPr lang="en-US" sz="2000" dirty="0"/>
+          </a:p>
+          <a:p>
+            <a:r>
+              <a:rPr lang="en-US" sz="2000" dirty="0"/>
+              <a:t>Step 1: Open </a:t>
+            </a:r>
+            <a:r>
+              <a:rPr lang="en-US" sz="2000" dirty="0">
+                <a:hlinkClick r:id="rId2"/>
+              </a:rPr>
+              <a:t>dev Ingest API</a:t>
+            </a:r>
+            <a:endParaRPr lang="en-US" sz="2000" dirty="0"/>
+          </a:p>
+          <a:p>
+            <a:r>
+              <a:rPr lang="en-US" sz="2000" dirty="0"/>
+              <a:t>Step 2: Authorize (sign in)</a:t>
+            </a:r>
+          </a:p>
+          <a:p>
+            <a:r>
+              <a:rPr lang="en-US" sz="2000" dirty="0"/>
+              <a:t>Step 3: We want to post a collection, find that </a:t>
+            </a:r>
+          </a:p>
+          <a:p>
+            <a:r>
+              <a:rPr lang="en-US" sz="2000" dirty="0"/>
+              <a:t>Step 4: Click “Try it out”</a:t>
+            </a:r>
+          </a:p>
+          <a:p>
+            <a:r>
+              <a:rPr lang="en-US" sz="2000" dirty="0"/>
+              <a:t>Step 5: Copy the information from </a:t>
+            </a:r>
+            <a:r>
+              <a:rPr lang="en-US" sz="2000" dirty="0" err="1"/>
+              <a:t>json</a:t>
+            </a:r>
+            <a:r>
+              <a:rPr lang="en-US" sz="2000" dirty="0"/>
+              <a:t> config (but remove the discovery items)</a:t>
+            </a:r>
+          </a:p>
+          <a:p>
+            <a:r>
+              <a:rPr lang="en-US" sz="2000" dirty="0"/>
+              <a:t>Step 6: Click Execute (verify that collection was posted with response 200)</a:t>
+            </a:r>
+          </a:p>
+          <a:p>
+            <a:r>
+              <a:rPr lang="en-US" sz="2000" dirty="0"/>
+              <a:t>Step 7: View in </a:t>
+            </a:r>
+            <a:r>
+              <a:rPr lang="en-US" sz="2000" dirty="0">
+                <a:hlinkClick r:id="rId3"/>
+              </a:rPr>
+              <a:t>STAC Browser </a:t>
+            </a:r>
+            <a:r>
+              <a:rPr lang="en-US" sz="2000" dirty="0"/>
+              <a:t>based on collection ID. Or view in </a:t>
+            </a:r>
+            <a:r>
+              <a:rPr lang="en-US" sz="2000" dirty="0">
+                <a:hlinkClick r:id="rId4"/>
+              </a:rPr>
+              <a:t>VEDA STAC catalogue</a:t>
+            </a:r>
+            <a:r>
+              <a:rPr lang="en-US" sz="2000" dirty="0"/>
+              <a:t>.</a:t>
+            </a:r>
+          </a:p>
+        </p:txBody>
+      </p:sp>
+      <p:graphicFrame>
+        <p:nvGraphicFramePr>
+          <p:cNvPr id="4" name="Diagram 3">
+            <a:extLst>
+              <a:ext uri="{FF2B5EF4-FFF2-40B4-BE49-F238E27FC236}">
+                <a16:creationId xmlns:a16="http://schemas.microsoft.com/office/drawing/2014/main" id="{693CD929-A3C8-AEF0-0625-38B7FEDD7E00}"/>
+              </a:ext>
+            </a:extLst>
+          </p:cNvPr>
+          <p:cNvGraphicFramePr/>
+          <p:nvPr>
+            <p:extLst>
+              <p:ext uri="{D42A27DB-BD31-4B8C-83A1-F6EECF244321}">
+                <p14:modId xmlns:p14="http://schemas.microsoft.com/office/powerpoint/2010/main" val="1201783464"/>
+              </p:ext>
+            </p:extLst>
+          </p:nvPr>
+        </p:nvGraphicFramePr>
+        <p:xfrm>
+          <a:off x="8131348" y="1276161"/>
+          <a:ext cx="3701704" cy="1438760"/>
+        </p:xfrm>
+        <a:graphic>
+          <a:graphicData uri="http://schemas.openxmlformats.org/drawingml/2006/diagram">
+            <dgm:relIds xmlns:dgm="http://schemas.openxmlformats.org/drawingml/2006/diagram" xmlns:r="http://schemas.openxmlformats.org/officeDocument/2006/relationships" r:dm="rId5" r:lo="rId6" r:qs="rId7" r:cs="rId8"/>
+          </a:graphicData>
+        </a:graphic>
+      </p:graphicFrame>
+      <p:sp>
+        <p:nvSpPr>
+          <p:cNvPr id="5" name="Slide Number Placeholder 4">
+            <a:extLst>
+              <a:ext uri="{FF2B5EF4-FFF2-40B4-BE49-F238E27FC236}">
+                <a16:creationId xmlns:a16="http://schemas.microsoft.com/office/drawing/2014/main" id="{6F5C8104-571E-9F86-3A41-0D7013E0864B}"/>
+              </a:ext>
+            </a:extLst>
+          </p:cNvPr>
+          <p:cNvSpPr>
+            <a:spLocks noGrp="1"/>
+          </p:cNvSpPr>
+          <p:nvPr>
+            <p:ph type="sldNum" sz="quarter" idx="12"/>
+          </p:nvPr>
+        </p:nvSpPr>
+        <p:spPr/>
+        <p:txBody>
+          <a:bodyPr/>
+          <a:lstStyle/>
+          <a:p>
+            <a:fld id="{5D28F90B-7FA5-3745-B8A4-A3C1EAD30D95}" type="slidenum">
+              <a:rPr lang="en-US" smtClean="0"/>
+              <a:t>22</a:t>
+            </a:fld>
+            <a:endParaRPr lang="en-US"/>
+          </a:p>
+        </p:txBody>
+      </p:sp>
+    </p:spTree>
+    <p:extLst>
+      <p:ext uri="{BB962C8B-B14F-4D97-AF65-F5344CB8AC3E}">
+        <p14:creationId xmlns:p14="http://schemas.microsoft.com/office/powerpoint/2010/main" val="2909427703"/>
+      </p:ext>
+    </p:extLst>
+  </p:cSld>
+  <p:clrMapOvr>
+    <a:masterClrMapping/>
+  </p:clrMapOvr>
+</p:sld>
+</file>
+
+<file path=ppt/slides/slide23.xml><?xml version="1.0" encoding="utf-8"?>
+<p:sld xmlns:a="http://schemas.openxmlformats.org/drawingml/2006/main" xmlns:r="http://schemas.openxmlformats.org/officeDocument/2006/relationships" xmlns:p="http://schemas.openxmlformats.org/presentationml/2006/main">
+  <p:cSld>
+    <p:spTree>
+      <p:nvGrpSpPr>
+        <p:cNvPr id="1" name="">
+          <a:extLst>
+            <a:ext uri="{FF2B5EF4-FFF2-40B4-BE49-F238E27FC236}">
+              <a16:creationId xmlns:a16="http://schemas.microsoft.com/office/drawing/2014/main" id="{E50E5299-EE87-1BF8-4897-85D6B0B670A5}"/>
+            </a:ext>
+          </a:extLst>
+        </p:cNvPr>
+        <p:cNvGrpSpPr/>
+        <p:nvPr/>
+      </p:nvGrpSpPr>
+      <p:grpSpPr>
+        <a:xfrm>
+          <a:off x="0" y="0"/>
+          <a:ext cx="0" cy="0"/>
+          <a:chOff x="0" y="0"/>
+          <a:chExt cx="0" cy="0"/>
+        </a:xfrm>
+      </p:grpSpPr>
+      <p:sp>
+        <p:nvSpPr>
+          <p:cNvPr id="2" name="Title 1">
+            <a:extLst>
+              <a:ext uri="{FF2B5EF4-FFF2-40B4-BE49-F238E27FC236}">
+                <a16:creationId xmlns:a16="http://schemas.microsoft.com/office/drawing/2014/main" id="{BF27CBE4-00A9-B235-79D8-698CBD521847}"/>
+              </a:ext>
+            </a:extLst>
+          </p:cNvPr>
+          <p:cNvSpPr>
+            <a:spLocks noGrp="1"/>
+          </p:cNvSpPr>
+          <p:nvPr>
+            <p:ph type="title"/>
+          </p:nvPr>
+        </p:nvSpPr>
+        <p:spPr>
+          <a:xfrm>
+            <a:off x="725863" y="1"/>
+            <a:ext cx="10897385" cy="961534"/>
+          </a:xfrm>
+          <a:solidFill>
+            <a:schemeClr val="accent5">
+              <a:lumMod val="40000"/>
+              <a:lumOff val="60000"/>
+            </a:schemeClr>
+          </a:solidFill>
+        </p:spPr>
+        <p:txBody>
+          <a:bodyPr vert="horz" lIns="91440" tIns="45720" rIns="91440" bIns="45720" rtlCol="0" anchor="ctr">
+            <a:normAutofit/>
+          </a:bodyPr>
+          <a:lstStyle/>
+          <a:p>
+            <a:r>
+              <a:rPr lang="en-US" dirty="0"/>
+              <a:t>Time for Ingestion Practice	</a:t>
+            </a:r>
+          </a:p>
+        </p:txBody>
+      </p:sp>
+      <p:sp>
+        <p:nvSpPr>
+          <p:cNvPr id="3" name="TextBox 2">
+            <a:extLst>
+              <a:ext uri="{FF2B5EF4-FFF2-40B4-BE49-F238E27FC236}">
+                <a16:creationId xmlns:a16="http://schemas.microsoft.com/office/drawing/2014/main" id="{741D5D5A-FF5A-7FDB-32D6-63A4480BC7B1}"/>
+              </a:ext>
+            </a:extLst>
+          </p:cNvPr>
+          <p:cNvSpPr txBox="1"/>
+          <p:nvPr/>
+        </p:nvSpPr>
+        <p:spPr>
+          <a:xfrm>
+            <a:off x="348791" y="1895343"/>
+            <a:ext cx="10492033" cy="4708981"/>
+          </a:xfrm>
+          <a:prstGeom prst="rect">
+            <a:avLst/>
+          </a:prstGeom>
+          <a:noFill/>
+        </p:spPr>
+        <p:txBody>
+          <a:bodyPr wrap="square" rtlCol="0">
+            <a:spAutoFit/>
+          </a:bodyPr>
+          <a:lstStyle/>
+          <a:p>
+            <a:r>
+              <a:rPr lang="en-US" sz="2400" b="1" u="sng" dirty="0"/>
+              <a:t>Goal is to create a collection in Ingest API</a:t>
+            </a:r>
+          </a:p>
+          <a:p>
+            <a:endParaRPr lang="en-US" dirty="0"/>
+          </a:p>
+          <a:p>
+            <a:endParaRPr lang="en-US" dirty="0"/>
+          </a:p>
+          <a:p>
+            <a:r>
+              <a:rPr lang="en-US" sz="2000" dirty="0"/>
+              <a:t>Why Airflow? It has the ability to discover items in the S3 bucket and add them to the collection that we created. </a:t>
+            </a:r>
+          </a:p>
+          <a:p>
+            <a:endParaRPr lang="en-US" sz="2000" dirty="0"/>
+          </a:p>
+          <a:p>
+            <a:r>
+              <a:rPr lang="en-US" sz="2000" dirty="0"/>
+              <a:t>Step 1: Open </a:t>
+            </a:r>
+            <a:r>
+              <a:rPr lang="en-US" sz="2000" dirty="0">
+                <a:hlinkClick r:id="rId2"/>
+              </a:rPr>
+              <a:t>Airflow dev </a:t>
+            </a:r>
+            <a:endParaRPr lang="en-US" sz="2000" dirty="0"/>
+          </a:p>
+          <a:p>
+            <a:r>
+              <a:rPr lang="en-US" sz="2000" dirty="0"/>
+              <a:t>Step 2: Login (if necessary)</a:t>
+            </a:r>
+          </a:p>
+          <a:p>
+            <a:r>
+              <a:rPr lang="en-US" sz="2000" dirty="0"/>
+              <a:t>Step 3: Find </a:t>
+            </a:r>
+            <a:r>
+              <a:rPr lang="en-US" sz="2000" dirty="0" err="1"/>
+              <a:t>veda_discover</a:t>
+            </a:r>
+            <a:r>
+              <a:rPr lang="en-US" sz="2000" dirty="0"/>
+              <a:t> pipeline</a:t>
+            </a:r>
+          </a:p>
+          <a:p>
+            <a:r>
+              <a:rPr lang="en-US" sz="2000" dirty="0"/>
+              <a:t>Step 4: Press Run/Play button in the top right corner (Trigger DAG)</a:t>
+            </a:r>
+          </a:p>
+          <a:p>
+            <a:r>
+              <a:rPr lang="en-US" sz="2000" dirty="0"/>
+              <a:t>Step 5: Scroll to the bottom and click (Generated Configuration JSON and Dagrun Options)</a:t>
+            </a:r>
+          </a:p>
+          <a:p>
+            <a:r>
+              <a:rPr lang="en-US" sz="2000" dirty="0"/>
+              <a:t>Step 6: Paste the dictionary from </a:t>
+            </a:r>
+            <a:r>
+              <a:rPr lang="en-US" sz="2000" dirty="0" err="1"/>
+              <a:t>json</a:t>
+            </a:r>
+            <a:r>
+              <a:rPr lang="en-US" sz="2000" dirty="0"/>
+              <a:t> config for </a:t>
+            </a:r>
+            <a:r>
+              <a:rPr lang="en-US" sz="2000" dirty="0" err="1"/>
+              <a:t>discovery_items</a:t>
+            </a:r>
+            <a:r>
+              <a:rPr lang="en-US" sz="2000" dirty="0"/>
+              <a:t> (but only the contents, don’t paste the actual words discovery items).</a:t>
+            </a:r>
+          </a:p>
+          <a:p>
+            <a:r>
+              <a:rPr lang="en-US" sz="2000" dirty="0"/>
+              <a:t>Step 7: Submit the jobs</a:t>
+            </a:r>
+          </a:p>
+          <a:p>
+            <a:r>
+              <a:rPr lang="en-US" sz="2000" dirty="0"/>
+              <a:t>Step 8: If completed, you can now view the items in the </a:t>
+            </a:r>
+            <a:r>
+              <a:rPr lang="en-US" sz="2000" dirty="0">
+                <a:hlinkClick r:id="rId3"/>
+              </a:rPr>
+              <a:t>STAC Catalogue</a:t>
+            </a:r>
+            <a:r>
+              <a:rPr lang="en-US" sz="2000" dirty="0"/>
+              <a:t>.</a:t>
+            </a:r>
+          </a:p>
+        </p:txBody>
+      </p:sp>
+      <p:graphicFrame>
+        <p:nvGraphicFramePr>
+          <p:cNvPr id="4" name="Diagram 3">
+            <a:extLst>
+              <a:ext uri="{FF2B5EF4-FFF2-40B4-BE49-F238E27FC236}">
+                <a16:creationId xmlns:a16="http://schemas.microsoft.com/office/drawing/2014/main" id="{BB02D34B-7CDF-E816-E7CC-98668E1DF6C7}"/>
+              </a:ext>
+            </a:extLst>
+          </p:cNvPr>
+          <p:cNvGraphicFramePr/>
+          <p:nvPr>
+            <p:extLst>
+              <p:ext uri="{D42A27DB-BD31-4B8C-83A1-F6EECF244321}">
+                <p14:modId xmlns:p14="http://schemas.microsoft.com/office/powerpoint/2010/main" val="2871044945"/>
+              </p:ext>
+            </p:extLst>
+          </p:nvPr>
+        </p:nvGraphicFramePr>
+        <p:xfrm>
+          <a:off x="7921544" y="1323295"/>
+          <a:ext cx="3701704" cy="1438760"/>
+        </p:xfrm>
+        <a:graphic>
+          <a:graphicData uri="http://schemas.openxmlformats.org/drawingml/2006/diagram">
+            <dgm:relIds xmlns:dgm="http://schemas.openxmlformats.org/drawingml/2006/diagram" xmlns:r="http://schemas.openxmlformats.org/officeDocument/2006/relationships" r:dm="rId4" r:lo="rId5" r:qs="rId6" r:cs="rId7"/>
+          </a:graphicData>
+        </a:graphic>
+      </p:graphicFrame>
+      <p:sp>
+        <p:nvSpPr>
+          <p:cNvPr id="5" name="Slide Number Placeholder 4">
+            <a:extLst>
+              <a:ext uri="{FF2B5EF4-FFF2-40B4-BE49-F238E27FC236}">
+                <a16:creationId xmlns:a16="http://schemas.microsoft.com/office/drawing/2014/main" id="{F0EA22CE-025C-9916-4CF1-877F809252F5}"/>
+              </a:ext>
+            </a:extLst>
+          </p:cNvPr>
+          <p:cNvSpPr>
+            <a:spLocks noGrp="1"/>
+          </p:cNvSpPr>
+          <p:nvPr>
+            <p:ph type="sldNum" sz="quarter" idx="12"/>
+          </p:nvPr>
+        </p:nvSpPr>
+        <p:spPr/>
+        <p:txBody>
+          <a:bodyPr/>
+          <a:lstStyle/>
+          <a:p>
+            <a:fld id="{5D28F90B-7FA5-3745-B8A4-A3C1EAD30D95}" type="slidenum">
+              <a:rPr lang="en-US" smtClean="0"/>
+              <a:t>23</a:t>
+            </a:fld>
+            <a:endParaRPr lang="en-US" dirty="0"/>
+          </a:p>
+        </p:txBody>
+      </p:sp>
+    </p:spTree>
+    <p:extLst>
+      <p:ext uri="{BB962C8B-B14F-4D97-AF65-F5344CB8AC3E}">
+        <p14:creationId xmlns:p14="http://schemas.microsoft.com/office/powerpoint/2010/main" val="3969670030"/>
+      </p:ext>
+    </p:extLst>
+  </p:cSld>
+  <p:clrMapOvr>
+    <a:masterClrMapping/>
+  </p:clrMapOvr>
+</p:sld>
+</file>
+
+<file path=ppt/slides/slide24.xml><?xml version="1.0" encoding="utf-8"?>
 <p:sld xmlns:a="http://schemas.openxmlformats.org/drawingml/2006/main" xmlns:r="http://schemas.openxmlformats.org/officeDocument/2006/relationships" xmlns:p="http://schemas.openxmlformats.org/presentationml/2006/main">
   <p:cSld>
     <p:spTree>
@@ -18737,7 +23800,7 @@
           <a:p>
             <a:r>
               <a:rPr lang="en-US" dirty="0"/>
-              <a:t>Troubleshooting Visualization Issues	</a:t>
+              <a:t>Visualization	</a:t>
             </a:r>
           </a:p>
         </p:txBody>
@@ -18757,7 +23820,7 @@
         <p:spPr>
           <a:xfrm>
             <a:off x="725863" y="1239651"/>
-            <a:ext cx="10492033" cy="4524315"/>
+            <a:ext cx="10492033" cy="2031325"/>
           </a:xfrm>
           <a:prstGeom prst="rect">
             <a:avLst/>
@@ -18776,15 +23839,38 @@
             </a:pPr>
             <a:r>
               <a:rPr lang="en-US" dirty="0"/>
-              <a:t>Our visualization software (</a:t>
+              <a:t>For most things, we need a rapid testing environment which means we need to build the application on a local host. Most VEDA repos have this information within the README (or linked to it).</a:t>
+            </a:r>
+          </a:p>
+          <a:p>
+            <a:pPr marL="742950" lvl="1" indent="-285750">
+              <a:buFont typeface="Arial" panose="020B0604020202020204" pitchFamily="34" charset="0"/>
+              <a:buChar char="•"/>
+            </a:pPr>
+            <a:r>
+              <a:rPr lang="en-US" dirty="0">
+                <a:hlinkClick r:id="rId2"/>
+              </a:rPr>
+              <a:t>Disaster local install</a:t>
+            </a:r>
+            <a:endParaRPr lang="en-US" dirty="0"/>
+          </a:p>
+          <a:p>
+            <a:pPr marL="742950" lvl="1" indent="-285750">
+              <a:buFont typeface="Arial" panose="020B0604020202020204" pitchFamily="34" charset="0"/>
+              <a:buChar char="•"/>
+            </a:pPr>
+            <a:r>
+              <a:rPr lang="en-US" dirty="0"/>
+              <a:t>Be sure that you are in the home directory of the repo (e.g., </a:t>
             </a:r>
             <a:r>
               <a:rPr lang="en-US" dirty="0" err="1"/>
-              <a:t>Titiler</a:t>
+              <a:t>veda</a:t>
             </a:r>
             <a:r>
               <a:rPr lang="en-US" dirty="0"/>
-              <a:t>), receives API requests and send back the different image tiles to render on screen.</a:t>
+              <a:t>-disasters)</a:t>
             </a:r>
           </a:p>
           <a:p>
@@ -18801,125 +23887,7 @@
             </a:pPr>
             <a:r>
               <a:rPr lang="en-US" dirty="0"/>
-              <a:t>To identify what is being returned, the </a:t>
-            </a:r>
-            <a:r>
-              <a:rPr lang="en-US" b="1" i="1" dirty="0"/>
-              <a:t>Inspect </a:t>
-            </a:r>
-            <a:r>
-              <a:rPr lang="en-US" dirty="0"/>
-              <a:t>button is crucial within the internet browser. </a:t>
-            </a:r>
-            <a:r>
-              <a:rPr lang="en-US" dirty="0">
-                <a:hlinkClick r:id="rId2"/>
-              </a:rPr>
-              <a:t>Example E&amp;A</a:t>
-            </a:r>
-            <a:endParaRPr lang="en-US" dirty="0"/>
-          </a:p>
-          <a:p>
-            <a:pPr marL="742950" lvl="1" indent="-285750">
-              <a:buFont typeface="Arial" panose="020B0604020202020204" pitchFamily="34" charset="0"/>
-              <a:buChar char="•"/>
-            </a:pPr>
-            <a:r>
-              <a:rPr lang="en-US" b="1" i="1" dirty="0"/>
-              <a:t>Right click in the browser</a:t>
-            </a:r>
-          </a:p>
-          <a:p>
-            <a:pPr marL="742950" lvl="1" indent="-285750">
-              <a:buFont typeface="Arial" panose="020B0604020202020204" pitchFamily="34" charset="0"/>
-              <a:buChar char="•"/>
-            </a:pPr>
-            <a:r>
-              <a:rPr lang="en-US" b="1" i="1" dirty="0"/>
-              <a:t>Select [ Inspect ]</a:t>
-            </a:r>
-          </a:p>
-          <a:p>
-            <a:pPr marL="742950" lvl="1" indent="-285750">
-              <a:buFont typeface="Arial" panose="020B0604020202020204" pitchFamily="34" charset="0"/>
-              <a:buChar char="•"/>
-            </a:pPr>
-            <a:r>
-              <a:rPr lang="en-US" b="1" i="1" dirty="0"/>
-              <a:t>Click [ Network ] tab</a:t>
-            </a:r>
-          </a:p>
-          <a:p>
-            <a:pPr lvl="1"/>
-            <a:endParaRPr lang="en-US" dirty="0"/>
-          </a:p>
-          <a:p>
-            <a:pPr marL="285750" indent="-285750">
-              <a:buFont typeface="Arial" panose="020B0604020202020204" pitchFamily="34" charset="0"/>
-              <a:buChar char="•"/>
-            </a:pPr>
-            <a:r>
-              <a:rPr lang="en-US" dirty="0"/>
-              <a:t>You should now see the different requests (sometimes you need to zoom in and out of the image)</a:t>
-            </a:r>
-          </a:p>
-          <a:p>
-            <a:pPr marL="285750" indent="-285750">
-              <a:buFont typeface="Arial" panose="020B0604020202020204" pitchFamily="34" charset="0"/>
-              <a:buChar char="•"/>
-            </a:pPr>
-            <a:endParaRPr lang="en-US" dirty="0"/>
-          </a:p>
-          <a:p>
-            <a:pPr marL="285750" indent="-285750">
-              <a:buFont typeface="Arial" panose="020B0604020202020204" pitchFamily="34" charset="0"/>
-              <a:buChar char="•"/>
-            </a:pPr>
-            <a:r>
-              <a:rPr lang="en-US" dirty="0"/>
-              <a:t>To see the STAC collection that is being called, in the filter search bar type </a:t>
-            </a:r>
-            <a:r>
-              <a:rPr lang="en-US" b="1" dirty="0" err="1"/>
-              <a:t>stac</a:t>
-            </a:r>
-            <a:endParaRPr lang="en-US" dirty="0"/>
-          </a:p>
-          <a:p>
-            <a:pPr marL="742950" lvl="1" indent="-285750">
-              <a:buFont typeface="Arial" panose="020B0604020202020204" pitchFamily="34" charset="0"/>
-              <a:buChar char="•"/>
-            </a:pPr>
-            <a:r>
-              <a:rPr lang="en-US" dirty="0"/>
-              <a:t>Refresh the page and you should see the STAC collection</a:t>
-            </a:r>
-          </a:p>
-          <a:p>
-            <a:pPr marL="742950" lvl="1" indent="-285750">
-              <a:buFont typeface="Arial" panose="020B0604020202020204" pitchFamily="34" charset="0"/>
-              <a:buChar char="•"/>
-            </a:pPr>
-            <a:r>
-              <a:rPr lang="en-US" dirty="0"/>
-              <a:t>Fun fact: You can double click on it and it will take you to the STAC collection!</a:t>
-            </a:r>
-          </a:p>
-          <a:p>
-            <a:pPr marL="742950" lvl="1" indent="-285750">
-              <a:buFont typeface="Arial" panose="020B0604020202020204" pitchFamily="34" charset="0"/>
-              <a:buChar char="•"/>
-            </a:pPr>
-            <a:endParaRPr lang="en-US" dirty="0"/>
-          </a:p>
-          <a:p>
-            <a:pPr marL="285750" indent="-285750">
-              <a:buFont typeface="Arial" panose="020B0604020202020204" pitchFamily="34" charset="0"/>
-              <a:buChar char="•"/>
-            </a:pPr>
-            <a:r>
-              <a:rPr lang="en-US" dirty="0"/>
-              <a:t>If no data is rendering after you created a .mdx file, then there is likely something wrong with the .mdx, this can sometimes be diagnosed in the Inspect bar in browser.</a:t>
+              <a:t>Follow the instructions and then you should be able to run the application locally. This will enable rapid checks to see if anything breaks.</a:t>
             </a:r>
           </a:p>
         </p:txBody>
@@ -18947,7 +23915,7 @@
           <a:p>
             <a:fld id="{5D28F90B-7FA5-3745-B8A4-A3C1EAD30D95}" type="slidenum">
               <a:rPr lang="en-US" smtClean="0"/>
-              <a:t>21</a:t>
+              <a:t>24</a:t>
             </a:fld>
             <a:endParaRPr lang="en-US"/>
           </a:p>
@@ -18957,6 +23925,319 @@
     <p:extLst>
       <p:ext uri="{BB962C8B-B14F-4D97-AF65-F5344CB8AC3E}">
         <p14:creationId xmlns:p14="http://schemas.microsoft.com/office/powerpoint/2010/main" val="4193327396"/>
+      </p:ext>
+    </p:extLst>
+  </p:cSld>
+  <p:clrMapOvr>
+    <a:masterClrMapping/>
+  </p:clrMapOvr>
+</p:sld>
+</file>
+
+<file path=ppt/slides/slide25.xml><?xml version="1.0" encoding="utf-8"?>
+<p:sld xmlns:a="http://schemas.openxmlformats.org/drawingml/2006/main" xmlns:r="http://schemas.openxmlformats.org/officeDocument/2006/relationships" xmlns:p="http://schemas.openxmlformats.org/presentationml/2006/main">
+  <p:cSld>
+    <p:spTree>
+      <p:nvGrpSpPr>
+        <p:cNvPr id="1" name="">
+          <a:extLst>
+            <a:ext uri="{FF2B5EF4-FFF2-40B4-BE49-F238E27FC236}">
+              <a16:creationId xmlns:a16="http://schemas.microsoft.com/office/drawing/2014/main" id="{EB7B50F3-AD51-5118-977D-441672290F9C}"/>
+            </a:ext>
+          </a:extLst>
+        </p:cNvPr>
+        <p:cNvGrpSpPr/>
+        <p:nvPr/>
+      </p:nvGrpSpPr>
+      <p:grpSpPr>
+        <a:xfrm>
+          <a:off x="0" y="0"/>
+          <a:ext cx="0" cy="0"/>
+          <a:chOff x="0" y="0"/>
+          <a:chExt cx="0" cy="0"/>
+        </a:xfrm>
+      </p:grpSpPr>
+      <p:sp>
+        <p:nvSpPr>
+          <p:cNvPr id="2" name="Title 1">
+            <a:extLst>
+              <a:ext uri="{FF2B5EF4-FFF2-40B4-BE49-F238E27FC236}">
+                <a16:creationId xmlns:a16="http://schemas.microsoft.com/office/drawing/2014/main" id="{D516277B-BCC0-A7B5-B496-B30520DB479E}"/>
+              </a:ext>
+            </a:extLst>
+          </p:cNvPr>
+          <p:cNvSpPr>
+            <a:spLocks noGrp="1"/>
+          </p:cNvSpPr>
+          <p:nvPr>
+            <p:ph type="title"/>
+          </p:nvPr>
+        </p:nvSpPr>
+        <p:spPr>
+          <a:xfrm>
+            <a:off x="725863" y="1"/>
+            <a:ext cx="10897385" cy="961534"/>
+          </a:xfrm>
+          <a:solidFill>
+            <a:schemeClr val="accent5">
+              <a:lumMod val="40000"/>
+              <a:lumOff val="60000"/>
+            </a:schemeClr>
+          </a:solidFill>
+        </p:spPr>
+        <p:txBody>
+          <a:bodyPr vert="horz" lIns="91440" tIns="45720" rIns="91440" bIns="45720" rtlCol="0" anchor="ctr">
+            <a:normAutofit/>
+          </a:bodyPr>
+          <a:lstStyle/>
+          <a:p>
+            <a:r>
+              <a:rPr lang="en-US" dirty="0"/>
+              <a:t>Troubleshooting Visualization Issues	</a:t>
+            </a:r>
+          </a:p>
+        </p:txBody>
+      </p:sp>
+      <p:sp>
+        <p:nvSpPr>
+          <p:cNvPr id="3" name="TextBox 2">
+            <a:extLst>
+              <a:ext uri="{FF2B5EF4-FFF2-40B4-BE49-F238E27FC236}">
+                <a16:creationId xmlns:a16="http://schemas.microsoft.com/office/drawing/2014/main" id="{24565752-D2F9-9B0B-0B1E-E803579C0422}"/>
+              </a:ext>
+            </a:extLst>
+          </p:cNvPr>
+          <p:cNvSpPr txBox="1"/>
+          <p:nvPr/>
+        </p:nvSpPr>
+        <p:spPr>
+          <a:xfrm>
+            <a:off x="725863" y="1239651"/>
+            <a:ext cx="10492033" cy="5355312"/>
+          </a:xfrm>
+          <a:prstGeom prst="rect">
+            <a:avLst/>
+          </a:prstGeom>
+          <a:noFill/>
+        </p:spPr>
+        <p:txBody>
+          <a:bodyPr wrap="square" rtlCol="0">
+            <a:spAutoFit/>
+          </a:bodyPr>
+          <a:lstStyle/>
+          <a:p>
+            <a:pPr marL="285750" indent="-285750">
+              <a:buFont typeface="Arial" panose="020B0604020202020204" pitchFamily="34" charset="0"/>
+              <a:buChar char="•"/>
+            </a:pPr>
+            <a:r>
+              <a:rPr lang="en-US" dirty="0"/>
+              <a:t>Our visualization software (</a:t>
+            </a:r>
+            <a:r>
+              <a:rPr lang="en-US" dirty="0" err="1"/>
+              <a:t>Titiler</a:t>
+            </a:r>
+            <a:r>
+              <a:rPr lang="en-US" dirty="0"/>
+              <a:t>), receives API requests and send back the different image tiles to render on screen.</a:t>
+            </a:r>
+          </a:p>
+          <a:p>
+            <a:pPr marL="285750" indent="-285750">
+              <a:buFont typeface="Arial" panose="020B0604020202020204" pitchFamily="34" charset="0"/>
+              <a:buChar char="•"/>
+            </a:pPr>
+            <a:endParaRPr lang="en-US" dirty="0"/>
+          </a:p>
+          <a:p>
+            <a:pPr marL="285750" indent="-285750">
+              <a:buFont typeface="Arial" panose="020B0604020202020204" pitchFamily="34" charset="0"/>
+              <a:buChar char="•"/>
+            </a:pPr>
+            <a:r>
+              <a:rPr lang="en-US" dirty="0"/>
+              <a:t>To identify what is being returned, the </a:t>
+            </a:r>
+            <a:r>
+              <a:rPr lang="en-US" b="1" i="1" dirty="0"/>
+              <a:t>Inspect </a:t>
+            </a:r>
+            <a:r>
+              <a:rPr lang="en-US" dirty="0"/>
+              <a:t>button is crucial within the internet browser. </a:t>
+            </a:r>
+            <a:r>
+              <a:rPr lang="en-US" dirty="0">
+                <a:hlinkClick r:id="rId2"/>
+              </a:rPr>
+              <a:t>Example E&amp;A</a:t>
+            </a:r>
+            <a:endParaRPr lang="en-US" dirty="0"/>
+          </a:p>
+          <a:p>
+            <a:pPr marL="742950" lvl="1" indent="-285750">
+              <a:buFont typeface="Arial" panose="020B0604020202020204" pitchFamily="34" charset="0"/>
+              <a:buChar char="•"/>
+            </a:pPr>
+            <a:r>
+              <a:rPr lang="en-US" b="1" i="1" dirty="0"/>
+              <a:t>Right click in the browser</a:t>
+            </a:r>
+          </a:p>
+          <a:p>
+            <a:pPr marL="742950" lvl="1" indent="-285750">
+              <a:buFont typeface="Arial" panose="020B0604020202020204" pitchFamily="34" charset="0"/>
+              <a:buChar char="•"/>
+            </a:pPr>
+            <a:r>
+              <a:rPr lang="en-US" b="1" i="1" dirty="0"/>
+              <a:t>Select [ Inspect ]</a:t>
+            </a:r>
+          </a:p>
+          <a:p>
+            <a:pPr marL="742950" lvl="1" indent="-285750">
+              <a:buFont typeface="Arial" panose="020B0604020202020204" pitchFamily="34" charset="0"/>
+              <a:buChar char="•"/>
+            </a:pPr>
+            <a:r>
+              <a:rPr lang="en-US" b="1" i="1" dirty="0"/>
+              <a:t>Click [ Network ] tab</a:t>
+            </a:r>
+          </a:p>
+          <a:p>
+            <a:pPr lvl="1"/>
+            <a:endParaRPr lang="en-US" dirty="0"/>
+          </a:p>
+          <a:p>
+            <a:pPr marL="285750" indent="-285750">
+              <a:buFont typeface="Arial" panose="020B0604020202020204" pitchFamily="34" charset="0"/>
+              <a:buChar char="•"/>
+            </a:pPr>
+            <a:r>
+              <a:rPr lang="en-US" dirty="0"/>
+              <a:t>You should now see the different requests (sometimes you need to zoom in and out of the image)</a:t>
+            </a:r>
+          </a:p>
+          <a:p>
+            <a:pPr marL="285750" indent="-285750">
+              <a:buFont typeface="Arial" panose="020B0604020202020204" pitchFamily="34" charset="0"/>
+              <a:buChar char="•"/>
+            </a:pPr>
+            <a:endParaRPr lang="en-US" dirty="0"/>
+          </a:p>
+          <a:p>
+            <a:pPr marL="285750" indent="-285750">
+              <a:buFont typeface="Arial" panose="020B0604020202020204" pitchFamily="34" charset="0"/>
+              <a:buChar char="•"/>
+            </a:pPr>
+            <a:r>
+              <a:rPr lang="en-US" dirty="0"/>
+              <a:t>To see the STAC collection that is being called, in the filter search bar type </a:t>
+            </a:r>
+            <a:r>
+              <a:rPr lang="en-US" b="1" dirty="0" err="1"/>
+              <a:t>stac</a:t>
+            </a:r>
+            <a:endParaRPr lang="en-US" dirty="0"/>
+          </a:p>
+          <a:p>
+            <a:pPr marL="742950" lvl="1" indent="-285750">
+              <a:buFont typeface="Arial" panose="020B0604020202020204" pitchFamily="34" charset="0"/>
+              <a:buChar char="•"/>
+            </a:pPr>
+            <a:r>
+              <a:rPr lang="en-US" dirty="0"/>
+              <a:t>Refresh the page and you should see the STAC collection</a:t>
+            </a:r>
+          </a:p>
+          <a:p>
+            <a:pPr marL="742950" lvl="1" indent="-285750">
+              <a:buFont typeface="Arial" panose="020B0604020202020204" pitchFamily="34" charset="0"/>
+              <a:buChar char="•"/>
+            </a:pPr>
+            <a:r>
+              <a:rPr lang="en-US" dirty="0"/>
+              <a:t>Fun fact: You can double click on it and it will take you to the STAC collection!</a:t>
+            </a:r>
+          </a:p>
+          <a:p>
+            <a:pPr marL="742950" lvl="1" indent="-285750">
+              <a:buFont typeface="Arial" panose="020B0604020202020204" pitchFamily="34" charset="0"/>
+              <a:buChar char="•"/>
+            </a:pPr>
+            <a:endParaRPr lang="en-US" dirty="0"/>
+          </a:p>
+          <a:p>
+            <a:pPr marL="285750" indent="-285750">
+              <a:buFont typeface="Arial" panose="020B0604020202020204" pitchFamily="34" charset="0"/>
+              <a:buChar char="•"/>
+            </a:pPr>
+            <a:r>
+              <a:rPr lang="en-US" dirty="0"/>
+              <a:t>If no data is rendering after you created a .mdx file, then there is likely something wrong with the .mdx, this can sometimes be diagnosed in the Inspect bar in browser.</a:t>
+            </a:r>
+          </a:p>
+          <a:p>
+            <a:pPr marL="285750" indent="-285750">
+              <a:buFont typeface="Arial" panose="020B0604020202020204" pitchFamily="34" charset="0"/>
+              <a:buChar char="•"/>
+            </a:pPr>
+            <a:endParaRPr lang="en-US" dirty="0"/>
+          </a:p>
+          <a:p>
+            <a:pPr marL="285750" indent="-285750">
+              <a:buFont typeface="Arial" panose="020B0604020202020204" pitchFamily="34" charset="0"/>
+              <a:buChar char="•"/>
+            </a:pPr>
+            <a:r>
+              <a:rPr lang="en-US" dirty="0"/>
+              <a:t>If you see the data visualized in your local development but not within the pull request (PR), then it is likely the environment STAC not being correct. (file </a:t>
+            </a:r>
+            <a:r>
+              <a:rPr lang="en-US" b="1" dirty="0"/>
+              <a:t>.env</a:t>
+            </a:r>
+            <a:r>
+              <a:rPr lang="en-US" dirty="0"/>
+              <a:t>)</a:t>
+            </a:r>
+          </a:p>
+        </p:txBody>
+      </p:sp>
+      <p:sp>
+        <p:nvSpPr>
+          <p:cNvPr id="5" name="Slide Number Placeholder 4">
+            <a:extLst>
+              <a:ext uri="{FF2B5EF4-FFF2-40B4-BE49-F238E27FC236}">
+                <a16:creationId xmlns:a16="http://schemas.microsoft.com/office/drawing/2014/main" id="{A47B2AD2-8E94-D578-4E4D-180EEBE5AA54}"/>
+              </a:ext>
+            </a:extLst>
+          </p:cNvPr>
+          <p:cNvSpPr>
+            <a:spLocks noGrp="1"/>
+          </p:cNvSpPr>
+          <p:nvPr>
+            <p:ph type="sldNum" sz="quarter" idx="12"/>
+          </p:nvPr>
+        </p:nvSpPr>
+        <p:spPr/>
+        <p:txBody>
+          <a:bodyPr/>
+          <a:lstStyle/>
+          <a:p>
+            <a:fld id="{5D28F90B-7FA5-3745-B8A4-A3C1EAD30D95}" type="slidenum">
+              <a:rPr lang="en-US" smtClean="0"/>
+              <a:t>25</a:t>
+            </a:fld>
+            <a:endParaRPr lang="en-US"/>
+          </a:p>
+        </p:txBody>
+      </p:sp>
+    </p:spTree>
+    <p:extLst>
+      <p:ext uri="{BB962C8B-B14F-4D97-AF65-F5344CB8AC3E}">
+        <p14:creationId xmlns:p14="http://schemas.microsoft.com/office/powerpoint/2010/main" val="2989630078"/>
       </p:ext>
     </p:extLst>
   </p:cSld>
